--- a/docs/user-guide/SO-CHU-NHIEM-SO-GIOI-THIEU.pptx
+++ b/docs/user-guide/SO-CHU-NHIEM-SO-GIOI-THIEU.pptx
@@ -5,21 +5,21 @@
     <p:sldMasterId id="2147483648" r:id="rId1"/>
   </p:sldMasterIdLst>
   <p:sldIdLst>
-    <p:sldId id="256" r:id="rId7"/>
-    <p:sldId id="257" r:id="rId8"/>
-    <p:sldId id="258" r:id="rId9"/>
-    <p:sldId id="259" r:id="rId10"/>
-    <p:sldId id="260" r:id="rId11"/>
-    <p:sldId id="261" r:id="rId12"/>
-    <p:sldId id="262" r:id="rId13"/>
-    <p:sldId id="263" r:id="rId14"/>
-    <p:sldId id="264" r:id="rId15"/>
-    <p:sldId id="265" r:id="rId16"/>
-    <p:sldId id="266" r:id="rId17"/>
-    <p:sldId id="267" r:id="rId18"/>
-    <p:sldId id="268" r:id="rId19"/>
+    <p:sldId id="256" r:id="rId2"/>
+    <p:sldId id="257" r:id="rId3"/>
+    <p:sldId id="258" r:id="rId4"/>
+    <p:sldId id="259" r:id="rId5"/>
+    <p:sldId id="260" r:id="rId6"/>
+    <p:sldId id="261" r:id="rId7"/>
+    <p:sldId id="262" r:id="rId8"/>
+    <p:sldId id="263" r:id="rId9"/>
+    <p:sldId id="264" r:id="rId10"/>
+    <p:sldId id="265" r:id="rId11"/>
+    <p:sldId id="266" r:id="rId12"/>
+    <p:sldId id="267" r:id="rId13"/>
+    <p:sldId id="268" r:id="rId14"/>
   </p:sldIdLst>
-  <p:sldSz cx="12191695" cy="6858000" type="screen4x3"/>
+  <p:sldSz cx="12192000" cy="6858000"/>
   <p:notesSz cx="6858000" cy="9144000"/>
   <p:defaultTextStyle>
     <a:defPPr>
@@ -116,6 +116,22 @@
       </a:defRPr>
     </a:lvl9pPr>
   </p:defaultTextStyle>
+  <p:extLst>
+    <p:ext uri="{EFAFB233-063F-42B5-8137-9DF3F51BA10A}">
+      <p15:sldGuideLst xmlns:p15="http://schemas.microsoft.com/office/powerpoint/2012/main">
+        <p15:guide id="1" orient="horz" pos="2160">
+          <p15:clr>
+            <a:srgbClr val="A4A3A4"/>
+          </p15:clr>
+        </p15:guide>
+        <p15:guide id="2" pos="2880">
+          <p15:clr>
+            <a:srgbClr val="A4A3A4"/>
+          </p15:clr>
+        </p15:guide>
+      </p15:sldGuideLst>
+    </p:ext>
+  </p:extLst>
 </p:presentation>
 </file>
 
@@ -157,10 +173,9 @@
           <a:lstStyle/>
           <a:p>
             <a:r>
-              <a:rPr lang="en-US" smtClean="0"/>
+              <a:rPr lang="en-US"/>
               <a:t>Click to edit Master title style</a:t>
             </a:r>
-            <a:endParaRPr lang="en-US"/>
           </a:p>
         </p:txBody>
       </p:sp>
@@ -276,10 +291,9 @@
           </a:lstStyle>
           <a:p>
             <a:r>
-              <a:rPr lang="en-US" smtClean="0"/>
+              <a:rPr lang="en-US"/>
               <a:t>Click to edit Master subtitle style</a:t>
             </a:r>
-            <a:endParaRPr lang="en-US"/>
           </a:p>
         </p:txBody>
       </p:sp>
@@ -300,7 +314,7 @@
           <a:p>
             <a:fld id="{5BCAD085-E8A6-8845-BD4E-CB4CCA059FC4}" type="datetimeFigureOut">
               <a:rPr lang="en-US" smtClean="0"/>
-              <a:t>1/27/13</a:t>
+              <a:t>9/21/26</a:t>
             </a:fld>
             <a:endParaRPr lang="en-US"/>
           </a:p>
@@ -394,10 +408,9 @@
           <a:lstStyle/>
           <a:p>
             <a:r>
-              <a:rPr lang="en-US" smtClean="0"/>
+              <a:rPr lang="en-US"/>
               <a:t>Click to edit Master title style</a:t>
             </a:r>
-            <a:endParaRPr lang="en-US"/>
           </a:p>
         </p:txBody>
       </p:sp>
@@ -418,38 +431,37 @@
           <a:p>
             <a:pPr lvl="0"/>
             <a:r>
-              <a:rPr lang="en-US" smtClean="0"/>
+              <a:rPr lang="en-US"/>
               <a:t>Click to edit Master text styles</a:t>
             </a:r>
           </a:p>
           <a:p>
             <a:pPr lvl="1"/>
             <a:r>
-              <a:rPr lang="en-US" smtClean="0"/>
+              <a:rPr lang="en-US"/>
               <a:t>Second level</a:t>
             </a:r>
           </a:p>
           <a:p>
             <a:pPr lvl="2"/>
             <a:r>
-              <a:rPr lang="en-US" smtClean="0"/>
+              <a:rPr lang="en-US"/>
               <a:t>Third level</a:t>
             </a:r>
           </a:p>
           <a:p>
             <a:pPr lvl="3"/>
             <a:r>
-              <a:rPr lang="en-US" smtClean="0"/>
+              <a:rPr lang="en-US"/>
               <a:t>Fourth level</a:t>
             </a:r>
           </a:p>
           <a:p>
             <a:pPr lvl="4"/>
             <a:r>
-              <a:rPr lang="en-US" smtClean="0"/>
+              <a:rPr lang="en-US"/>
               <a:t>Fifth level</a:t>
             </a:r>
-            <a:endParaRPr lang="en-US"/>
           </a:p>
         </p:txBody>
       </p:sp>
@@ -470,7 +482,7 @@
           <a:p>
             <a:fld id="{5BCAD085-E8A6-8845-BD4E-CB4CCA059FC4}" type="datetimeFigureOut">
               <a:rPr lang="en-US" smtClean="0"/>
-              <a:t>1/27/13</a:t>
+              <a:t>9/21/26</a:t>
             </a:fld>
             <a:endParaRPr lang="en-US"/>
           </a:p>
@@ -569,10 +581,9 @@
           <a:lstStyle/>
           <a:p>
             <a:r>
-              <a:rPr lang="en-US" smtClean="0"/>
+              <a:rPr lang="en-US"/>
               <a:t>Click to edit Master title style</a:t>
             </a:r>
-            <a:endParaRPr lang="en-US"/>
           </a:p>
         </p:txBody>
       </p:sp>
@@ -598,38 +609,37 @@
           <a:p>
             <a:pPr lvl="0"/>
             <a:r>
-              <a:rPr lang="en-US" smtClean="0"/>
+              <a:rPr lang="en-US"/>
               <a:t>Click to edit Master text styles</a:t>
             </a:r>
           </a:p>
           <a:p>
             <a:pPr lvl="1"/>
             <a:r>
-              <a:rPr lang="en-US" smtClean="0"/>
+              <a:rPr lang="en-US"/>
               <a:t>Second level</a:t>
             </a:r>
           </a:p>
           <a:p>
             <a:pPr lvl="2"/>
             <a:r>
-              <a:rPr lang="en-US" smtClean="0"/>
+              <a:rPr lang="en-US"/>
               <a:t>Third level</a:t>
             </a:r>
           </a:p>
           <a:p>
             <a:pPr lvl="3"/>
             <a:r>
-              <a:rPr lang="en-US" smtClean="0"/>
+              <a:rPr lang="en-US"/>
               <a:t>Fourth level</a:t>
             </a:r>
           </a:p>
           <a:p>
             <a:pPr lvl="4"/>
             <a:r>
-              <a:rPr lang="en-US" smtClean="0"/>
+              <a:rPr lang="en-US"/>
               <a:t>Fifth level</a:t>
             </a:r>
-            <a:endParaRPr lang="en-US"/>
           </a:p>
         </p:txBody>
       </p:sp>
@@ -650,7 +660,7 @@
           <a:p>
             <a:fld id="{5BCAD085-E8A6-8845-BD4E-CB4CCA059FC4}" type="datetimeFigureOut">
               <a:rPr lang="en-US" smtClean="0"/>
-              <a:t>1/27/13</a:t>
+              <a:t>9/21/26</a:t>
             </a:fld>
             <a:endParaRPr lang="en-US"/>
           </a:p>
@@ -744,10 +754,9 @@
           <a:lstStyle/>
           <a:p>
             <a:r>
-              <a:rPr lang="en-US" smtClean="0"/>
+              <a:rPr lang="en-US"/>
               <a:t>Click to edit Master title style</a:t>
             </a:r>
-            <a:endParaRPr lang="en-US"/>
           </a:p>
         </p:txBody>
       </p:sp>
@@ -768,38 +777,37 @@
           <a:p>
             <a:pPr lvl="0"/>
             <a:r>
-              <a:rPr lang="en-US" smtClean="0"/>
+              <a:rPr lang="en-US"/>
               <a:t>Click to edit Master text styles</a:t>
             </a:r>
           </a:p>
           <a:p>
             <a:pPr lvl="1"/>
             <a:r>
-              <a:rPr lang="en-US" smtClean="0"/>
+              <a:rPr lang="en-US"/>
               <a:t>Second level</a:t>
             </a:r>
           </a:p>
           <a:p>
             <a:pPr lvl="2"/>
             <a:r>
-              <a:rPr lang="en-US" smtClean="0"/>
+              <a:rPr lang="en-US"/>
               <a:t>Third level</a:t>
             </a:r>
           </a:p>
           <a:p>
             <a:pPr lvl="3"/>
             <a:r>
-              <a:rPr lang="en-US" smtClean="0"/>
+              <a:rPr lang="en-US"/>
               <a:t>Fourth level</a:t>
             </a:r>
           </a:p>
           <a:p>
             <a:pPr lvl="4"/>
             <a:r>
-              <a:rPr lang="en-US" smtClean="0"/>
+              <a:rPr lang="en-US"/>
               <a:t>Fifth level</a:t>
             </a:r>
-            <a:endParaRPr lang="en-US"/>
           </a:p>
         </p:txBody>
       </p:sp>
@@ -820,7 +828,7 @@
           <a:p>
             <a:fld id="{5BCAD085-E8A6-8845-BD4E-CB4CCA059FC4}" type="datetimeFigureOut">
               <a:rPr lang="en-US" smtClean="0"/>
-              <a:t>1/27/13</a:t>
+              <a:t>9/21/26</a:t>
             </a:fld>
             <a:endParaRPr lang="en-US"/>
           </a:p>
@@ -923,10 +931,9 @@
           </a:lstStyle>
           <a:p>
             <a:r>
-              <a:rPr lang="en-US" smtClean="0"/>
+              <a:rPr lang="en-US"/>
               <a:t>Click to edit Master title style</a:t>
             </a:r>
-            <a:endParaRPr lang="en-US"/>
           </a:p>
         </p:txBody>
       </p:sp>
@@ -1043,7 +1050,7 @@
           <a:p>
             <a:pPr lvl="0"/>
             <a:r>
-              <a:rPr lang="en-US" smtClean="0"/>
+              <a:rPr lang="en-US"/>
               <a:t>Click to edit Master text styles</a:t>
             </a:r>
           </a:p>
@@ -1066,7 +1073,7 @@
           <a:p>
             <a:fld id="{5BCAD085-E8A6-8845-BD4E-CB4CCA059FC4}" type="datetimeFigureOut">
               <a:rPr lang="en-US" smtClean="0"/>
-              <a:t>1/27/13</a:t>
+              <a:t>9/21/26</a:t>
             </a:fld>
             <a:endParaRPr lang="en-US"/>
           </a:p>
@@ -1160,10 +1167,9 @@
           <a:lstStyle/>
           <a:p>
             <a:r>
-              <a:rPr lang="en-US" smtClean="0"/>
+              <a:rPr lang="en-US"/>
               <a:t>Click to edit Master title style</a:t>
             </a:r>
-            <a:endParaRPr lang="en-US"/>
           </a:p>
         </p:txBody>
       </p:sp>
@@ -1217,38 +1223,37 @@
           <a:p>
             <a:pPr lvl="0"/>
             <a:r>
-              <a:rPr lang="en-US" smtClean="0"/>
+              <a:rPr lang="en-US"/>
               <a:t>Click to edit Master text styles</a:t>
             </a:r>
           </a:p>
           <a:p>
             <a:pPr lvl="1"/>
             <a:r>
-              <a:rPr lang="en-US" smtClean="0"/>
+              <a:rPr lang="en-US"/>
               <a:t>Second level</a:t>
             </a:r>
           </a:p>
           <a:p>
             <a:pPr lvl="2"/>
             <a:r>
-              <a:rPr lang="en-US" smtClean="0"/>
+              <a:rPr lang="en-US"/>
               <a:t>Third level</a:t>
             </a:r>
           </a:p>
           <a:p>
             <a:pPr lvl="3"/>
             <a:r>
-              <a:rPr lang="en-US" smtClean="0"/>
+              <a:rPr lang="en-US"/>
               <a:t>Fourth level</a:t>
             </a:r>
           </a:p>
           <a:p>
             <a:pPr lvl="4"/>
             <a:r>
-              <a:rPr lang="en-US" smtClean="0"/>
+              <a:rPr lang="en-US"/>
               <a:t>Fifth level</a:t>
             </a:r>
-            <a:endParaRPr lang="en-US"/>
           </a:p>
         </p:txBody>
       </p:sp>
@@ -1302,38 +1307,37 @@
           <a:p>
             <a:pPr lvl="0"/>
             <a:r>
-              <a:rPr lang="en-US" smtClean="0"/>
+              <a:rPr lang="en-US"/>
               <a:t>Click to edit Master text styles</a:t>
             </a:r>
           </a:p>
           <a:p>
             <a:pPr lvl="1"/>
             <a:r>
-              <a:rPr lang="en-US" smtClean="0"/>
+              <a:rPr lang="en-US"/>
               <a:t>Second level</a:t>
             </a:r>
           </a:p>
           <a:p>
             <a:pPr lvl="2"/>
             <a:r>
-              <a:rPr lang="en-US" smtClean="0"/>
+              <a:rPr lang="en-US"/>
               <a:t>Third level</a:t>
             </a:r>
           </a:p>
           <a:p>
             <a:pPr lvl="3"/>
             <a:r>
-              <a:rPr lang="en-US" smtClean="0"/>
+              <a:rPr lang="en-US"/>
               <a:t>Fourth level</a:t>
             </a:r>
           </a:p>
           <a:p>
             <a:pPr lvl="4"/>
             <a:r>
-              <a:rPr lang="en-US" smtClean="0"/>
+              <a:rPr lang="en-US"/>
               <a:t>Fifth level</a:t>
             </a:r>
-            <a:endParaRPr lang="en-US"/>
           </a:p>
         </p:txBody>
       </p:sp>
@@ -1354,7 +1358,7 @@
           <a:p>
             <a:fld id="{5BCAD085-E8A6-8845-BD4E-CB4CCA059FC4}" type="datetimeFigureOut">
               <a:rPr lang="en-US" smtClean="0"/>
-              <a:t>1/27/13</a:t>
+              <a:t>9/21/26</a:t>
             </a:fld>
             <a:endParaRPr lang="en-US"/>
           </a:p>
@@ -1452,10 +1456,9 @@
           </a:lstStyle>
           <a:p>
             <a:r>
-              <a:rPr lang="en-US" smtClean="0"/>
+              <a:rPr lang="en-US"/>
               <a:t>Click to edit Master title style</a:t>
             </a:r>
-            <a:endParaRPr lang="en-US"/>
           </a:p>
         </p:txBody>
       </p:sp>
@@ -1518,7 +1521,7 @@
           <a:p>
             <a:pPr lvl="0"/>
             <a:r>
-              <a:rPr lang="en-US" smtClean="0"/>
+              <a:rPr lang="en-US"/>
               <a:t>Click to edit Master text styles</a:t>
             </a:r>
           </a:p>
@@ -1574,38 +1577,37 @@
           <a:p>
             <a:pPr lvl="0"/>
             <a:r>
-              <a:rPr lang="en-US" smtClean="0"/>
+              <a:rPr lang="en-US"/>
               <a:t>Click to edit Master text styles</a:t>
             </a:r>
           </a:p>
           <a:p>
             <a:pPr lvl="1"/>
             <a:r>
-              <a:rPr lang="en-US" smtClean="0"/>
+              <a:rPr lang="en-US"/>
               <a:t>Second level</a:t>
             </a:r>
           </a:p>
           <a:p>
             <a:pPr lvl="2"/>
             <a:r>
-              <a:rPr lang="en-US" smtClean="0"/>
+              <a:rPr lang="en-US"/>
               <a:t>Third level</a:t>
             </a:r>
           </a:p>
           <a:p>
             <a:pPr lvl="3"/>
             <a:r>
-              <a:rPr lang="en-US" smtClean="0"/>
+              <a:rPr lang="en-US"/>
               <a:t>Fourth level</a:t>
             </a:r>
           </a:p>
           <a:p>
             <a:pPr lvl="4"/>
             <a:r>
-              <a:rPr lang="en-US" smtClean="0"/>
+              <a:rPr lang="en-US"/>
               <a:t>Fifth level</a:t>
             </a:r>
-            <a:endParaRPr lang="en-US"/>
           </a:p>
         </p:txBody>
       </p:sp>
@@ -1668,7 +1670,7 @@
           <a:p>
             <a:pPr lvl="0"/>
             <a:r>
-              <a:rPr lang="en-US" smtClean="0"/>
+              <a:rPr lang="en-US"/>
               <a:t>Click to edit Master text styles</a:t>
             </a:r>
           </a:p>
@@ -1724,38 +1726,37 @@
           <a:p>
             <a:pPr lvl="0"/>
             <a:r>
-              <a:rPr lang="en-US" smtClean="0"/>
+              <a:rPr lang="en-US"/>
               <a:t>Click to edit Master text styles</a:t>
             </a:r>
           </a:p>
           <a:p>
             <a:pPr lvl="1"/>
             <a:r>
-              <a:rPr lang="en-US" smtClean="0"/>
+              <a:rPr lang="en-US"/>
               <a:t>Second level</a:t>
             </a:r>
           </a:p>
           <a:p>
             <a:pPr lvl="2"/>
             <a:r>
-              <a:rPr lang="en-US" smtClean="0"/>
+              <a:rPr lang="en-US"/>
               <a:t>Third level</a:t>
             </a:r>
           </a:p>
           <a:p>
             <a:pPr lvl="3"/>
             <a:r>
-              <a:rPr lang="en-US" smtClean="0"/>
+              <a:rPr lang="en-US"/>
               <a:t>Fourth level</a:t>
             </a:r>
           </a:p>
           <a:p>
             <a:pPr lvl="4"/>
             <a:r>
-              <a:rPr lang="en-US" smtClean="0"/>
+              <a:rPr lang="en-US"/>
               <a:t>Fifth level</a:t>
             </a:r>
-            <a:endParaRPr lang="en-US"/>
           </a:p>
         </p:txBody>
       </p:sp>
@@ -1776,7 +1777,7 @@
           <a:p>
             <a:fld id="{5BCAD085-E8A6-8845-BD4E-CB4CCA059FC4}" type="datetimeFigureOut">
               <a:rPr lang="en-US" smtClean="0"/>
-              <a:t>1/27/13</a:t>
+              <a:t>9/21/26</a:t>
             </a:fld>
             <a:endParaRPr lang="en-US"/>
           </a:p>
@@ -1870,10 +1871,9 @@
           <a:lstStyle/>
           <a:p>
             <a:r>
-              <a:rPr lang="en-US" smtClean="0"/>
+              <a:rPr lang="en-US"/>
               <a:t>Click to edit Master title style</a:t>
             </a:r>
-            <a:endParaRPr lang="en-US"/>
           </a:p>
         </p:txBody>
       </p:sp>
@@ -1894,7 +1894,7 @@
           <a:p>
             <a:fld id="{5BCAD085-E8A6-8845-BD4E-CB4CCA059FC4}" type="datetimeFigureOut">
               <a:rPr lang="en-US" smtClean="0"/>
-              <a:t>1/27/13</a:t>
+              <a:t>9/21/26</a:t>
             </a:fld>
             <a:endParaRPr lang="en-US"/>
           </a:p>
@@ -1989,7 +1989,7 @@
           <a:p>
             <a:fld id="{5BCAD085-E8A6-8845-BD4E-CB4CCA059FC4}" type="datetimeFigureOut">
               <a:rPr lang="en-US" smtClean="0"/>
-              <a:t>1/27/13</a:t>
+              <a:t>9/21/26</a:t>
             </a:fld>
             <a:endParaRPr lang="en-US"/>
           </a:p>
@@ -2092,10 +2092,9 @@
           </a:lstStyle>
           <a:p>
             <a:r>
-              <a:rPr lang="en-US" smtClean="0"/>
+              <a:rPr lang="en-US"/>
               <a:t>Click to edit Master title style</a:t>
             </a:r>
-            <a:endParaRPr lang="en-US"/>
           </a:p>
         </p:txBody>
       </p:sp>
@@ -2149,38 +2148,37 @@
           <a:p>
             <a:pPr lvl="0"/>
             <a:r>
-              <a:rPr lang="en-US" smtClean="0"/>
+              <a:rPr lang="en-US"/>
               <a:t>Click to edit Master text styles</a:t>
             </a:r>
           </a:p>
           <a:p>
             <a:pPr lvl="1"/>
             <a:r>
-              <a:rPr lang="en-US" smtClean="0"/>
+              <a:rPr lang="en-US"/>
               <a:t>Second level</a:t>
             </a:r>
           </a:p>
           <a:p>
             <a:pPr lvl="2"/>
             <a:r>
-              <a:rPr lang="en-US" smtClean="0"/>
+              <a:rPr lang="en-US"/>
               <a:t>Third level</a:t>
             </a:r>
           </a:p>
           <a:p>
             <a:pPr lvl="3"/>
             <a:r>
-              <a:rPr lang="en-US" smtClean="0"/>
+              <a:rPr lang="en-US"/>
               <a:t>Fourth level</a:t>
             </a:r>
           </a:p>
           <a:p>
             <a:pPr lvl="4"/>
             <a:r>
-              <a:rPr lang="en-US" smtClean="0"/>
+              <a:rPr lang="en-US"/>
               <a:t>Fifth level</a:t>
             </a:r>
-            <a:endParaRPr lang="en-US"/>
           </a:p>
         </p:txBody>
       </p:sp>
@@ -2243,7 +2241,7 @@
           <a:p>
             <a:pPr lvl="0"/>
             <a:r>
-              <a:rPr lang="en-US" smtClean="0"/>
+              <a:rPr lang="en-US"/>
               <a:t>Click to edit Master text styles</a:t>
             </a:r>
           </a:p>
@@ -2266,7 +2264,7 @@
           <a:p>
             <a:fld id="{5BCAD085-E8A6-8845-BD4E-CB4CCA059FC4}" type="datetimeFigureOut">
               <a:rPr lang="en-US" smtClean="0"/>
-              <a:t>1/27/13</a:t>
+              <a:t>9/21/26</a:t>
             </a:fld>
             <a:endParaRPr lang="en-US"/>
           </a:p>
@@ -2369,10 +2367,9 @@
           </a:lstStyle>
           <a:p>
             <a:r>
-              <a:rPr lang="en-US" smtClean="0"/>
+              <a:rPr lang="en-US"/>
               <a:t>Click to edit Master title style</a:t>
             </a:r>
-            <a:endParaRPr lang="en-US"/>
           </a:p>
         </p:txBody>
       </p:sp>
@@ -2496,7 +2493,7 @@
           <a:p>
             <a:pPr lvl="0"/>
             <a:r>
-              <a:rPr lang="en-US" smtClean="0"/>
+              <a:rPr lang="en-US"/>
               <a:t>Click to edit Master text styles</a:t>
             </a:r>
           </a:p>
@@ -2519,7 +2516,7 @@
           <a:p>
             <a:fld id="{5BCAD085-E8A6-8845-BD4E-CB4CCA059FC4}" type="datetimeFigureOut">
               <a:rPr lang="en-US" smtClean="0"/>
-              <a:t>1/27/13</a:t>
+              <a:t>9/21/26</a:t>
             </a:fld>
             <a:endParaRPr lang="en-US"/>
           </a:p>
@@ -2628,10 +2625,9 @@
           <a:lstStyle/>
           <a:p>
             <a:r>
-              <a:rPr lang="en-US" smtClean="0"/>
+              <a:rPr lang="en-US"/>
               <a:t>Click to edit Master title style</a:t>
             </a:r>
-            <a:endParaRPr lang="en-US"/>
           </a:p>
         </p:txBody>
       </p:sp>
@@ -2662,38 +2658,37 @@
           <a:p>
             <a:pPr lvl="0"/>
             <a:r>
-              <a:rPr lang="en-US" smtClean="0"/>
+              <a:rPr lang="en-US"/>
               <a:t>Click to edit Master text styles</a:t>
             </a:r>
           </a:p>
           <a:p>
             <a:pPr lvl="1"/>
             <a:r>
-              <a:rPr lang="en-US" smtClean="0"/>
+              <a:rPr lang="en-US"/>
               <a:t>Second level</a:t>
             </a:r>
           </a:p>
           <a:p>
             <a:pPr lvl="2"/>
             <a:r>
-              <a:rPr lang="en-US" smtClean="0"/>
+              <a:rPr lang="en-US"/>
               <a:t>Third level</a:t>
             </a:r>
           </a:p>
           <a:p>
             <a:pPr lvl="3"/>
             <a:r>
-              <a:rPr lang="en-US" smtClean="0"/>
+              <a:rPr lang="en-US"/>
               <a:t>Fourth level</a:t>
             </a:r>
           </a:p>
           <a:p>
             <a:pPr lvl="4"/>
             <a:r>
-              <a:rPr lang="en-US" smtClean="0"/>
+              <a:rPr lang="en-US"/>
               <a:t>Fifth level</a:t>
             </a:r>
-            <a:endParaRPr lang="en-US"/>
           </a:p>
         </p:txBody>
       </p:sp>
@@ -2732,7 +2727,7 @@
           <a:p>
             <a:fld id="{5BCAD085-E8A6-8845-BD4E-CB4CCA059FC4}" type="datetimeFigureOut">
               <a:rPr lang="en-US" smtClean="0"/>
-              <a:t>1/27/13</a:t>
+              <a:t>9/21/26</a:t>
             </a:fld>
             <a:endParaRPr lang="en-US"/>
           </a:p>
@@ -3091,7 +3086,7 @@
 </file>
 
 <file path=ppt/slides/slide1.xml><?xml version="1.0" encoding="utf-8"?>
-<p:sld xmlns:a="http://schemas.openxmlformats.org/drawingml/2006/main" xmlns:p="http://schemas.openxmlformats.org/presentationml/2006/main" xmlns:r="http://schemas.openxmlformats.org/officeDocument/2006/relationships">
+<p:sld xmlns:a="http://schemas.openxmlformats.org/drawingml/2006/main" xmlns:r="http://schemas.openxmlformats.org/officeDocument/2006/relationships" xmlns:p="http://schemas.openxmlformats.org/presentationml/2006/main">
   <p:cSld>
     <p:spTree>
       <p:nvGrpSpPr>
@@ -3099,7 +3094,14 @@
         <p:cNvGrpSpPr/>
         <p:nvPr/>
       </p:nvGrpSpPr>
-      <p:grpSpPr/>
+      <p:grpSpPr>
+        <a:xfrm>
+          <a:off x="0" y="0"/>
+          <a:ext cx="0" cy="0"/>
+          <a:chOff x="0" y="0"/>
+          <a:chExt cx="0" cy="0"/>
+        </a:xfrm>
+      </p:grpSpPr>
       <p:sp>
         <p:nvSpPr>
           <p:cNvPr id="2" name="Rectangle 1"/>
@@ -3140,6 +3142,7 @@
           <a:lstStyle/>
           <a:p>
             <a:pPr algn="ctr"/>
+            <a:endParaRPr/>
           </a:p>
         </p:txBody>
       </p:sp>
@@ -3165,7 +3168,6 @@
           </a:bodyPr>
           <a:lstStyle/>
           <a:p>
-            <a:pPr/>
             <a:r>
               <a:rPr sz="4400" b="1">
                 <a:solidFill>
@@ -3176,7 +3178,6 @@
             </a:r>
           </a:p>
           <a:p>
-            <a:pPr/>
             <a:r>
               <a:rPr sz="2000" b="0">
                 <a:solidFill>
@@ -3210,7 +3211,6 @@
           </a:bodyPr>
           <a:lstStyle/>
           <a:p>
-            <a:pPr/>
             <a:r>
               <a:rPr sz="1400" b="0">
                 <a:solidFill>
@@ -3231,7 +3231,7 @@
 </file>
 
 <file path=ppt/slides/slide10.xml><?xml version="1.0" encoding="utf-8"?>
-<p:sld xmlns:a="http://schemas.openxmlformats.org/drawingml/2006/main" xmlns:p="http://schemas.openxmlformats.org/presentationml/2006/main" xmlns:r="http://schemas.openxmlformats.org/officeDocument/2006/relationships">
+<p:sld xmlns:a="http://schemas.openxmlformats.org/drawingml/2006/main" xmlns:r="http://schemas.openxmlformats.org/officeDocument/2006/relationships" xmlns:p="http://schemas.openxmlformats.org/presentationml/2006/main">
   <p:cSld>
     <p:spTree>
       <p:nvGrpSpPr>
@@ -3239,7 +3239,14 @@
         <p:cNvGrpSpPr/>
         <p:nvPr/>
       </p:nvGrpSpPr>
-      <p:grpSpPr/>
+      <p:grpSpPr>
+        <a:xfrm>
+          <a:off x="0" y="0"/>
+          <a:ext cx="0" cy="0"/>
+          <a:chOff x="0" y="0"/>
+          <a:chExt cx="0" cy="0"/>
+        </a:xfrm>
+      </p:grpSpPr>
       <p:sp>
         <p:nvSpPr>
           <p:cNvPr id="2" name="Rectangle 1"/>
@@ -3280,6 +3287,7 @@
           <a:lstStyle/>
           <a:p>
             <a:pPr algn="ctr"/>
+            <a:endParaRPr/>
           </a:p>
         </p:txBody>
       </p:sp>
@@ -3305,7 +3313,6 @@
           </a:bodyPr>
           <a:lstStyle/>
           <a:p>
-            <a:pPr/>
             <a:r>
               <a:rPr sz="2800" b="1">
                 <a:solidFill>
@@ -3339,7 +3346,6 @@
           </a:bodyPr>
           <a:lstStyle/>
           <a:p>
-            <a:pPr/>
             <a:r>
               <a:rPr sz="1500" b="0">
                 <a:solidFill>
@@ -3350,7 +3356,6 @@
             </a:r>
           </a:p>
           <a:p>
-            <a:pPr/>
             <a:r>
               <a:rPr sz="1500" b="0">
                 <a:solidFill>
@@ -3361,7 +3366,6 @@
             </a:r>
           </a:p>
           <a:p>
-            <a:pPr/>
             <a:r>
               <a:rPr sz="1500" b="0">
                 <a:solidFill>
@@ -3372,7 +3376,6 @@
             </a:r>
           </a:p>
           <a:p>
-            <a:pPr/>
             <a:r>
               <a:rPr sz="1500" b="0">
                 <a:solidFill>
@@ -3383,7 +3386,6 @@
             </a:r>
           </a:p>
           <a:p>
-            <a:pPr/>
             <a:r>
               <a:rPr sz="1500" b="0">
                 <a:solidFill>
@@ -3446,7 +3448,6 @@
           </a:bodyPr>
           <a:lstStyle/>
           <a:p>
-            <a:pPr/>
             <a:r>
               <a:rPr sz="1100" b="0">
                 <a:solidFill>
@@ -3467,7 +3468,7 @@
 </file>
 
 <file path=ppt/slides/slide11.xml><?xml version="1.0" encoding="utf-8"?>
-<p:sld xmlns:a="http://schemas.openxmlformats.org/drawingml/2006/main" xmlns:p="http://schemas.openxmlformats.org/presentationml/2006/main" xmlns:r="http://schemas.openxmlformats.org/officeDocument/2006/relationships">
+<p:sld xmlns:a="http://schemas.openxmlformats.org/drawingml/2006/main" xmlns:r="http://schemas.openxmlformats.org/officeDocument/2006/relationships" xmlns:p="http://schemas.openxmlformats.org/presentationml/2006/main">
   <p:cSld>
     <p:spTree>
       <p:nvGrpSpPr>
@@ -3475,7 +3476,14 @@
         <p:cNvGrpSpPr/>
         <p:nvPr/>
       </p:nvGrpSpPr>
-      <p:grpSpPr/>
+      <p:grpSpPr>
+        <a:xfrm>
+          <a:off x="0" y="0"/>
+          <a:ext cx="0" cy="0"/>
+          <a:chOff x="0" y="0"/>
+          <a:chExt cx="0" cy="0"/>
+        </a:xfrm>
+      </p:grpSpPr>
       <p:sp>
         <p:nvSpPr>
           <p:cNvPr id="2" name="Rectangle 1"/>
@@ -3516,6 +3524,7 @@
           <a:lstStyle/>
           <a:p>
             <a:pPr algn="ctr"/>
+            <a:endParaRPr/>
           </a:p>
         </p:txBody>
       </p:sp>
@@ -3541,7 +3550,6 @@
           </a:bodyPr>
           <a:lstStyle/>
           <a:p>
-            <a:pPr/>
             <a:r>
               <a:rPr sz="2800" b="1">
                 <a:solidFill>
@@ -3562,7 +3570,7 @@
         <p:spPr>
           <a:xfrm>
             <a:off x="548640" y="1234440"/>
-            <a:ext cx="5120640" cy="5303520"/>
+            <a:ext cx="5120640" cy="784830"/>
           </a:xfrm>
           <a:prstGeom prst="rect">
             <a:avLst/>
@@ -3575,48 +3583,507 @@
           </a:bodyPr>
           <a:lstStyle/>
           <a:p>
-            <a:pPr/>
-            <a:r>
-              <a:rPr sz="1500" b="0">
-                <a:solidFill>
-                  <a:srgbClr val="1F2937"/>
-                </a:solidFill>
-              </a:rPr>
-              <a:t>- Tuyến 1: LLM cấu hình qua env - Gemini / OpenAI / Anthropic, đổi provider bằng AI_PROVIDER + AI_MODEL</a:t>
-            </a:r>
-          </a:p>
-          <a:p>
-            <a:pPr/>
-            <a:r>
-              <a:rPr sz="1500" b="0">
-                <a:solidFill>
-                  <a:srgbClr val="1F2937"/>
-                </a:solidFill>
-              </a:rPr>
-              <a:t>- Tuyến 2: Devin async - hết quota LLM thì tạo session xử lý, callback trả kết quả</a:t>
-            </a:r>
-          </a:p>
-          <a:p>
-            <a:pPr/>
-            <a:r>
-              <a:rPr sz="1500" b="0">
-                <a:solidFill>
-                  <a:srgbClr val="1F2937"/>
-                </a:solidFill>
-              </a:rPr>
-              <a:t>- Tuyến 3: rule-based fallback - luôn có câu trả lời hữu ích kể cả khi mọi backend chết</a:t>
-            </a:r>
-          </a:p>
-          <a:p>
-            <a:pPr/>
-            <a:r>
-              <a:rPr sz="1500" b="0">
-                <a:solidFill>
-                  <a:srgbClr val="1F2937"/>
-                </a:solidFill>
-              </a:rPr>
-              <a:t>- Ứng dụng: báo cáo hồ sơ lớp, nhận xét giáo án, gợi ý cảnh báo, trợ lý điều hành, phân tích sổ đầu bài, biên bản sinh hoạt, báo cáo Sở</a:t>
-            </a:r>
+            <a:r>
+              <a:rPr sz="1500" b="0" dirty="0">
+                <a:solidFill>
+                  <a:srgbClr val="1F2937"/>
+                </a:solidFill>
+              </a:rPr>
+              <a:t>- </a:t>
+            </a:r>
+            <a:r>
+              <a:rPr sz="1500" b="0" dirty="0" err="1">
+                <a:solidFill>
+                  <a:srgbClr val="1F2937"/>
+                </a:solidFill>
+              </a:rPr>
+              <a:t>Ứng</a:t>
+            </a:r>
+            <a:r>
+              <a:rPr sz="1500" b="0" dirty="0">
+                <a:solidFill>
+                  <a:srgbClr val="1F2937"/>
+                </a:solidFill>
+              </a:rPr>
+              <a:t> </a:t>
+            </a:r>
+            <a:r>
+              <a:rPr sz="1500" b="0" dirty="0" err="1">
+                <a:solidFill>
+                  <a:srgbClr val="1F2937"/>
+                </a:solidFill>
+              </a:rPr>
+              <a:t>dụng</a:t>
+            </a:r>
+            <a:r>
+              <a:rPr sz="1500" b="0" dirty="0">
+                <a:solidFill>
+                  <a:srgbClr val="1F2937"/>
+                </a:solidFill>
+              </a:rPr>
+              <a:t>: </a:t>
+            </a:r>
+            <a:r>
+              <a:rPr sz="1500" b="0" dirty="0" err="1">
+                <a:solidFill>
+                  <a:srgbClr val="1F2937"/>
+                </a:solidFill>
+              </a:rPr>
+              <a:t>báo</a:t>
+            </a:r>
+            <a:r>
+              <a:rPr sz="1500" b="0" dirty="0">
+                <a:solidFill>
+                  <a:srgbClr val="1F2937"/>
+                </a:solidFill>
+              </a:rPr>
+              <a:t> </a:t>
+            </a:r>
+            <a:r>
+              <a:rPr sz="1500" b="0" dirty="0" err="1">
+                <a:solidFill>
+                  <a:srgbClr val="1F2937"/>
+                </a:solidFill>
+              </a:rPr>
+              <a:t>cáo</a:t>
+            </a:r>
+            <a:r>
+              <a:rPr sz="1500" b="0" dirty="0">
+                <a:solidFill>
+                  <a:srgbClr val="1F2937"/>
+                </a:solidFill>
+              </a:rPr>
+              <a:t> </a:t>
+            </a:r>
+            <a:r>
+              <a:rPr sz="1500" b="0" dirty="0" err="1">
+                <a:solidFill>
+                  <a:srgbClr val="1F2937"/>
+                </a:solidFill>
+              </a:rPr>
+              <a:t>hồ</a:t>
+            </a:r>
+            <a:r>
+              <a:rPr sz="1500" b="0" dirty="0">
+                <a:solidFill>
+                  <a:srgbClr val="1F2937"/>
+                </a:solidFill>
+              </a:rPr>
+              <a:t> </a:t>
+            </a:r>
+            <a:r>
+              <a:rPr sz="1500" b="0" dirty="0" err="1">
+                <a:solidFill>
+                  <a:srgbClr val="1F2937"/>
+                </a:solidFill>
+              </a:rPr>
+              <a:t>sơ</a:t>
+            </a:r>
+            <a:r>
+              <a:rPr sz="1500" b="0" dirty="0">
+                <a:solidFill>
+                  <a:srgbClr val="1F2937"/>
+                </a:solidFill>
+              </a:rPr>
+              <a:t> </a:t>
+            </a:r>
+            <a:r>
+              <a:rPr sz="1500" b="0" dirty="0" err="1">
+                <a:solidFill>
+                  <a:srgbClr val="1F2937"/>
+                </a:solidFill>
+              </a:rPr>
+              <a:t>lớp</a:t>
+            </a:r>
+            <a:r>
+              <a:rPr sz="1500" b="0" dirty="0">
+                <a:solidFill>
+                  <a:srgbClr val="1F2937"/>
+                </a:solidFill>
+              </a:rPr>
+              <a:t>, </a:t>
+            </a:r>
+            <a:r>
+              <a:rPr sz="1500" b="0" dirty="0" err="1">
+                <a:solidFill>
+                  <a:srgbClr val="1F2937"/>
+                </a:solidFill>
+              </a:rPr>
+              <a:t>nhận</a:t>
+            </a:r>
+            <a:r>
+              <a:rPr sz="1500" b="0" dirty="0">
+                <a:solidFill>
+                  <a:srgbClr val="1F2937"/>
+                </a:solidFill>
+              </a:rPr>
+              <a:t> </a:t>
+            </a:r>
+            <a:r>
+              <a:rPr sz="1500" b="0" dirty="0" err="1">
+                <a:solidFill>
+                  <a:srgbClr val="1F2937"/>
+                </a:solidFill>
+              </a:rPr>
+              <a:t>xét</a:t>
+            </a:r>
+            <a:r>
+              <a:rPr sz="1500" b="0" dirty="0">
+                <a:solidFill>
+                  <a:srgbClr val="1F2937"/>
+                </a:solidFill>
+              </a:rPr>
+              <a:t> </a:t>
+            </a:r>
+            <a:r>
+              <a:rPr sz="1500" b="0" dirty="0" err="1">
+                <a:solidFill>
+                  <a:srgbClr val="1F2937"/>
+                </a:solidFill>
+              </a:rPr>
+              <a:t>giáo</a:t>
+            </a:r>
+            <a:r>
+              <a:rPr sz="1500" b="0" dirty="0">
+                <a:solidFill>
+                  <a:srgbClr val="1F2937"/>
+                </a:solidFill>
+              </a:rPr>
+              <a:t> </a:t>
+            </a:r>
+            <a:r>
+              <a:rPr sz="1500" b="0" dirty="0" err="1">
+                <a:solidFill>
+                  <a:srgbClr val="1F2937"/>
+                </a:solidFill>
+              </a:rPr>
+              <a:t>án</a:t>
+            </a:r>
+            <a:r>
+              <a:rPr sz="1500" b="0" dirty="0">
+                <a:solidFill>
+                  <a:srgbClr val="1F2937"/>
+                </a:solidFill>
+              </a:rPr>
+              <a:t>, </a:t>
+            </a:r>
+            <a:r>
+              <a:rPr sz="1500" b="0" dirty="0" err="1">
+                <a:solidFill>
+                  <a:srgbClr val="1F2937"/>
+                </a:solidFill>
+              </a:rPr>
+              <a:t>gợi</a:t>
+            </a:r>
+            <a:r>
+              <a:rPr sz="1500" b="0" dirty="0">
+                <a:solidFill>
+                  <a:srgbClr val="1F2937"/>
+                </a:solidFill>
+              </a:rPr>
+              <a:t> </a:t>
+            </a:r>
+            <a:r>
+              <a:rPr sz="1500" b="0" dirty="0" err="1">
+                <a:solidFill>
+                  <a:srgbClr val="1F2937"/>
+                </a:solidFill>
+              </a:rPr>
+              <a:t>ý</a:t>
+            </a:r>
+            <a:r>
+              <a:rPr sz="1500" b="0" dirty="0">
+                <a:solidFill>
+                  <a:srgbClr val="1F2937"/>
+                </a:solidFill>
+              </a:rPr>
+              <a:t> </a:t>
+            </a:r>
+            <a:r>
+              <a:rPr sz="1500" b="0" dirty="0" err="1">
+                <a:solidFill>
+                  <a:srgbClr val="1F2937"/>
+                </a:solidFill>
+              </a:rPr>
+              <a:t>cảnh</a:t>
+            </a:r>
+            <a:r>
+              <a:rPr sz="1500" b="0" dirty="0">
+                <a:solidFill>
+                  <a:srgbClr val="1F2937"/>
+                </a:solidFill>
+              </a:rPr>
+              <a:t> </a:t>
+            </a:r>
+            <a:r>
+              <a:rPr sz="1500" b="0" dirty="0" err="1">
+                <a:solidFill>
+                  <a:srgbClr val="1F2937"/>
+                </a:solidFill>
+              </a:rPr>
+              <a:t>báo</a:t>
+            </a:r>
+            <a:r>
+              <a:rPr sz="1500" b="0" dirty="0">
+                <a:solidFill>
+                  <a:srgbClr val="1F2937"/>
+                </a:solidFill>
+              </a:rPr>
+              <a:t>, </a:t>
+            </a:r>
+            <a:r>
+              <a:rPr sz="1500" b="0" dirty="0" err="1">
+                <a:solidFill>
+                  <a:srgbClr val="1F2937"/>
+                </a:solidFill>
+              </a:rPr>
+              <a:t>trợ</a:t>
+            </a:r>
+            <a:r>
+              <a:rPr sz="1500" b="0" dirty="0">
+                <a:solidFill>
+                  <a:srgbClr val="1F2937"/>
+                </a:solidFill>
+              </a:rPr>
+              <a:t> </a:t>
+            </a:r>
+            <a:r>
+              <a:rPr sz="1500" b="0" dirty="0" err="1">
+                <a:solidFill>
+                  <a:srgbClr val="1F2937"/>
+                </a:solidFill>
+              </a:rPr>
+              <a:t>lý</a:t>
+            </a:r>
+            <a:r>
+              <a:rPr sz="1500" b="0" dirty="0">
+                <a:solidFill>
+                  <a:srgbClr val="1F2937"/>
+                </a:solidFill>
+              </a:rPr>
+              <a:t> </a:t>
+            </a:r>
+            <a:r>
+              <a:rPr sz="1500" b="0" dirty="0" err="1">
+                <a:solidFill>
+                  <a:srgbClr val="1F2937"/>
+                </a:solidFill>
+              </a:rPr>
+              <a:t>điều</a:t>
+            </a:r>
+            <a:r>
+              <a:rPr sz="1500" b="0" dirty="0">
+                <a:solidFill>
+                  <a:srgbClr val="1F2937"/>
+                </a:solidFill>
+              </a:rPr>
+              <a:t> </a:t>
+            </a:r>
+            <a:r>
+              <a:rPr sz="1500" b="0" dirty="0" err="1">
+                <a:solidFill>
+                  <a:srgbClr val="1F2937"/>
+                </a:solidFill>
+              </a:rPr>
+              <a:t>hành</a:t>
+            </a:r>
+            <a:r>
+              <a:rPr sz="1500" b="0" dirty="0">
+                <a:solidFill>
+                  <a:srgbClr val="1F2937"/>
+                </a:solidFill>
+              </a:rPr>
+              <a:t>, </a:t>
+            </a:r>
+            <a:r>
+              <a:rPr sz="1500" b="0" dirty="0" err="1">
+                <a:solidFill>
+                  <a:srgbClr val="1F2937"/>
+                </a:solidFill>
+              </a:rPr>
+              <a:t>phân</a:t>
+            </a:r>
+            <a:r>
+              <a:rPr sz="1500" b="0" dirty="0">
+                <a:solidFill>
+                  <a:srgbClr val="1F2937"/>
+                </a:solidFill>
+              </a:rPr>
+              <a:t> </a:t>
+            </a:r>
+            <a:r>
+              <a:rPr sz="1500" b="0" dirty="0" err="1">
+                <a:solidFill>
+                  <a:srgbClr val="1F2937"/>
+                </a:solidFill>
+              </a:rPr>
+              <a:t>tích</a:t>
+            </a:r>
+            <a:r>
+              <a:rPr sz="1500" b="0" dirty="0">
+                <a:solidFill>
+                  <a:srgbClr val="1F2937"/>
+                </a:solidFill>
+              </a:rPr>
+              <a:t> </a:t>
+            </a:r>
+            <a:r>
+              <a:rPr sz="1500" b="0" dirty="0" err="1">
+                <a:solidFill>
+                  <a:srgbClr val="1F2937"/>
+                </a:solidFill>
+              </a:rPr>
+              <a:t>sổ</a:t>
+            </a:r>
+            <a:r>
+              <a:rPr sz="1500" b="0" dirty="0">
+                <a:solidFill>
+                  <a:srgbClr val="1F2937"/>
+                </a:solidFill>
+              </a:rPr>
+              <a:t> </a:t>
+            </a:r>
+            <a:r>
+              <a:rPr sz="1500" b="0" dirty="0" err="1">
+                <a:solidFill>
+                  <a:srgbClr val="1F2937"/>
+                </a:solidFill>
+              </a:rPr>
+              <a:t>đầu</a:t>
+            </a:r>
+            <a:r>
+              <a:rPr sz="1500" b="0" dirty="0">
+                <a:solidFill>
+                  <a:srgbClr val="1F2937"/>
+                </a:solidFill>
+              </a:rPr>
+              <a:t> </a:t>
+            </a:r>
+            <a:r>
+              <a:rPr sz="1500" b="0" dirty="0" err="1">
+                <a:solidFill>
+                  <a:srgbClr val="1F2937"/>
+                </a:solidFill>
+              </a:rPr>
+              <a:t>bài</a:t>
+            </a:r>
+            <a:r>
+              <a:rPr sz="1500" b="0" dirty="0">
+                <a:solidFill>
+                  <a:srgbClr val="1F2937"/>
+                </a:solidFill>
+              </a:rPr>
+              <a:t>, </a:t>
+            </a:r>
+            <a:r>
+              <a:rPr sz="1500" b="0" dirty="0" err="1">
+                <a:solidFill>
+                  <a:srgbClr val="1F2937"/>
+                </a:solidFill>
+              </a:rPr>
+              <a:t>biên</a:t>
+            </a:r>
+            <a:r>
+              <a:rPr sz="1500" b="0" dirty="0">
+                <a:solidFill>
+                  <a:srgbClr val="1F2937"/>
+                </a:solidFill>
+              </a:rPr>
+              <a:t> </a:t>
+            </a:r>
+            <a:r>
+              <a:rPr sz="1500" b="0" dirty="0" err="1">
+                <a:solidFill>
+                  <a:srgbClr val="1F2937"/>
+                </a:solidFill>
+              </a:rPr>
+              <a:t>bản</a:t>
+            </a:r>
+            <a:r>
+              <a:rPr sz="1500" b="0" dirty="0">
+                <a:solidFill>
+                  <a:srgbClr val="1F2937"/>
+                </a:solidFill>
+              </a:rPr>
+              <a:t> </a:t>
+            </a:r>
+            <a:r>
+              <a:rPr sz="1500" b="0" dirty="0" err="1">
+                <a:solidFill>
+                  <a:srgbClr val="1F2937"/>
+                </a:solidFill>
+              </a:rPr>
+              <a:t>sinh</a:t>
+            </a:r>
+            <a:r>
+              <a:rPr sz="1500" b="0" dirty="0">
+                <a:solidFill>
+                  <a:srgbClr val="1F2937"/>
+                </a:solidFill>
+              </a:rPr>
+              <a:t> </a:t>
+            </a:r>
+            <a:r>
+              <a:rPr sz="1500" b="0" dirty="0" err="1">
+                <a:solidFill>
+                  <a:srgbClr val="1F2937"/>
+                </a:solidFill>
+              </a:rPr>
+              <a:t>hoạt</a:t>
+            </a:r>
+            <a:r>
+              <a:rPr sz="1500" b="0" dirty="0">
+                <a:solidFill>
+                  <a:srgbClr val="1F2937"/>
+                </a:solidFill>
+              </a:rPr>
+              <a:t>, </a:t>
+            </a:r>
+            <a:r>
+              <a:rPr sz="1500" b="0" dirty="0" err="1">
+                <a:solidFill>
+                  <a:srgbClr val="1F2937"/>
+                </a:solidFill>
+              </a:rPr>
+              <a:t>báo</a:t>
+            </a:r>
+            <a:r>
+              <a:rPr sz="1500" b="0" dirty="0">
+                <a:solidFill>
+                  <a:srgbClr val="1F2937"/>
+                </a:solidFill>
+              </a:rPr>
+              <a:t> </a:t>
+            </a:r>
+            <a:r>
+              <a:rPr sz="1500" b="0" dirty="0" err="1">
+                <a:solidFill>
+                  <a:srgbClr val="1F2937"/>
+                </a:solidFill>
+              </a:rPr>
+              <a:t>cáo</a:t>
+            </a:r>
+            <a:r>
+              <a:rPr sz="1500" b="0" dirty="0">
+                <a:solidFill>
+                  <a:srgbClr val="1F2937"/>
+                </a:solidFill>
+              </a:rPr>
+              <a:t> </a:t>
+            </a:r>
+            <a:r>
+              <a:rPr sz="1500" b="0" dirty="0" err="1">
+                <a:solidFill>
+                  <a:srgbClr val="1F2937"/>
+                </a:solidFill>
+              </a:rPr>
+              <a:t>Sở</a:t>
+            </a:r>
+            <a:endParaRPr sz="1500" b="0" dirty="0">
+              <a:solidFill>
+                <a:srgbClr val="1F2937"/>
+              </a:solidFill>
+            </a:endParaRPr>
           </a:p>
         </p:txBody>
       </p:sp>
@@ -3671,7 +4138,6 @@
           </a:bodyPr>
           <a:lstStyle/>
           <a:p>
-            <a:pPr/>
             <a:r>
               <a:rPr sz="1100" b="0">
                 <a:solidFill>
@@ -3692,7 +4158,7 @@
 </file>
 
 <file path=ppt/slides/slide12.xml><?xml version="1.0" encoding="utf-8"?>
-<p:sld xmlns:a="http://schemas.openxmlformats.org/drawingml/2006/main" xmlns:p="http://schemas.openxmlformats.org/presentationml/2006/main" xmlns:r="http://schemas.openxmlformats.org/officeDocument/2006/relationships">
+<p:sld xmlns:a="http://schemas.openxmlformats.org/drawingml/2006/main" xmlns:r="http://schemas.openxmlformats.org/officeDocument/2006/relationships" xmlns:p="http://schemas.openxmlformats.org/presentationml/2006/main">
   <p:cSld>
     <p:spTree>
       <p:nvGrpSpPr>
@@ -3700,7 +4166,14 @@
         <p:cNvGrpSpPr/>
         <p:nvPr/>
       </p:nvGrpSpPr>
-      <p:grpSpPr/>
+      <p:grpSpPr>
+        <a:xfrm>
+          <a:off x="0" y="0"/>
+          <a:ext cx="0" cy="0"/>
+          <a:chOff x="0" y="0"/>
+          <a:chExt cx="0" cy="0"/>
+        </a:xfrm>
+      </p:grpSpPr>
       <p:sp>
         <p:nvSpPr>
           <p:cNvPr id="2" name="Rectangle 1"/>
@@ -3741,6 +4214,7 @@
           <a:lstStyle/>
           <a:p>
             <a:pPr algn="ctr"/>
+            <a:endParaRPr/>
           </a:p>
         </p:txBody>
       </p:sp>
@@ -3766,7 +4240,6 @@
           </a:bodyPr>
           <a:lstStyle/>
           <a:p>
-            <a:pPr/>
             <a:r>
               <a:rPr sz="2800" b="1">
                 <a:solidFill>
@@ -3787,7 +4260,7 @@
         <p:spPr>
           <a:xfrm>
             <a:off x="548640" y="1234440"/>
-            <a:ext cx="5120640" cy="5303520"/>
+            <a:ext cx="5120640" cy="1246495"/>
           </a:xfrm>
           <a:prstGeom prst="rect">
             <a:avLst/>
@@ -3800,58 +4273,584 @@
           </a:bodyPr>
           <a:lstStyle/>
           <a:p>
-            <a:pPr/>
-            <a:r>
-              <a:rPr sz="1500" b="0">
-                <a:solidFill>
-                  <a:srgbClr val="1F2937"/>
-                </a:solidFill>
-              </a:rPr>
-              <a:t>- Xuất sổ chủ nhiệm, báo cáo Sở/Phòng (CSV/Excel), sổ cá nhân GV</a:t>
-            </a:r>
-          </a:p>
-          <a:p>
-            <a:pPr/>
-            <a:r>
-              <a:rPr sz="1500" b="0">
-                <a:solidFill>
-                  <a:srgbClr val="1F2937"/>
-                </a:solidFill>
-              </a:rPr>
-              <a:t>- RBAC ở 3 tầng: UI - route guard - Postgres RLS theo trường/quan hệ</a:t>
-            </a:r>
-          </a:p>
-          <a:p>
-            <a:pPr/>
-            <a:r>
-              <a:rPr sz="1500" b="0">
-                <a:solidFill>
-                  <a:srgbClr val="1F2937"/>
-                </a:solidFill>
-              </a:rPr>
-              <a:t>- Audit log mọi hành động quan trọng, trang xem cho BGH</a:t>
-            </a:r>
-          </a:p>
-          <a:p>
-            <a:pPr/>
-            <a:r>
-              <a:rPr sz="1500" b="0">
-                <a:solidFill>
-                  <a:srgbClr val="1F2937"/>
-                </a:solidFill>
-              </a:rPr>
-              <a:t>- Notification in-app cho mọi hành động ảnh hưởng người khác</a:t>
-            </a:r>
-          </a:p>
-          <a:p>
-            <a:pPr/>
-            <a:r>
-              <a:rPr sz="1500" b="0">
-                <a:solidFill>
-                  <a:srgbClr val="1F2937"/>
-                </a:solidFill>
-              </a:rPr>
-              <a:t>- Responsive mobile, sắp xếp tên theo quy tắc Việt Nam</a:t>
+            <a:r>
+              <a:rPr sz="1500" b="0" dirty="0">
+                <a:solidFill>
+                  <a:srgbClr val="1F2937"/>
+                </a:solidFill>
+              </a:rPr>
+              <a:t>- </a:t>
+            </a:r>
+            <a:r>
+              <a:rPr sz="1500" b="0" dirty="0" err="1">
+                <a:solidFill>
+                  <a:srgbClr val="1F2937"/>
+                </a:solidFill>
+              </a:rPr>
+              <a:t>Xuất</a:t>
+            </a:r>
+            <a:r>
+              <a:rPr sz="1500" b="0" dirty="0">
+                <a:solidFill>
+                  <a:srgbClr val="1F2937"/>
+                </a:solidFill>
+              </a:rPr>
+              <a:t> </a:t>
+            </a:r>
+            <a:r>
+              <a:rPr sz="1500" b="0" dirty="0" err="1">
+                <a:solidFill>
+                  <a:srgbClr val="1F2937"/>
+                </a:solidFill>
+              </a:rPr>
+              <a:t>sổ</a:t>
+            </a:r>
+            <a:r>
+              <a:rPr sz="1500" b="0" dirty="0">
+                <a:solidFill>
+                  <a:srgbClr val="1F2937"/>
+                </a:solidFill>
+              </a:rPr>
+              <a:t> </a:t>
+            </a:r>
+            <a:r>
+              <a:rPr sz="1500" b="0" dirty="0" err="1">
+                <a:solidFill>
+                  <a:srgbClr val="1F2937"/>
+                </a:solidFill>
+              </a:rPr>
+              <a:t>chủ</a:t>
+            </a:r>
+            <a:r>
+              <a:rPr sz="1500" b="0" dirty="0">
+                <a:solidFill>
+                  <a:srgbClr val="1F2937"/>
+                </a:solidFill>
+              </a:rPr>
+              <a:t> </a:t>
+            </a:r>
+            <a:r>
+              <a:rPr sz="1500" b="0" dirty="0" err="1">
+                <a:solidFill>
+                  <a:srgbClr val="1F2937"/>
+                </a:solidFill>
+              </a:rPr>
+              <a:t>nhiệm</a:t>
+            </a:r>
+            <a:r>
+              <a:rPr sz="1500" b="0" dirty="0">
+                <a:solidFill>
+                  <a:srgbClr val="1F2937"/>
+                </a:solidFill>
+              </a:rPr>
+              <a:t>, </a:t>
+            </a:r>
+            <a:r>
+              <a:rPr sz="1500" b="0" dirty="0" err="1">
+                <a:solidFill>
+                  <a:srgbClr val="1F2937"/>
+                </a:solidFill>
+              </a:rPr>
+              <a:t>báo</a:t>
+            </a:r>
+            <a:r>
+              <a:rPr sz="1500" b="0" dirty="0">
+                <a:solidFill>
+                  <a:srgbClr val="1F2937"/>
+                </a:solidFill>
+              </a:rPr>
+              <a:t> </a:t>
+            </a:r>
+            <a:r>
+              <a:rPr sz="1500" b="0" dirty="0" err="1">
+                <a:solidFill>
+                  <a:srgbClr val="1F2937"/>
+                </a:solidFill>
+              </a:rPr>
+              <a:t>cáo</a:t>
+            </a:r>
+            <a:r>
+              <a:rPr sz="1500" b="0" dirty="0">
+                <a:solidFill>
+                  <a:srgbClr val="1F2937"/>
+                </a:solidFill>
+              </a:rPr>
+              <a:t> </a:t>
+            </a:r>
+            <a:r>
+              <a:rPr sz="1500" b="0" dirty="0" err="1">
+                <a:solidFill>
+                  <a:srgbClr val="1F2937"/>
+                </a:solidFill>
+              </a:rPr>
+              <a:t>Sở</a:t>
+            </a:r>
+            <a:r>
+              <a:rPr sz="1500" b="0" dirty="0">
+                <a:solidFill>
+                  <a:srgbClr val="1F2937"/>
+                </a:solidFill>
+              </a:rPr>
+              <a:t>/</a:t>
+            </a:r>
+            <a:r>
+              <a:rPr sz="1500" b="0" dirty="0" err="1">
+                <a:solidFill>
+                  <a:srgbClr val="1F2937"/>
+                </a:solidFill>
+              </a:rPr>
+              <a:t>Phòng</a:t>
+            </a:r>
+            <a:r>
+              <a:rPr sz="1500" b="0" dirty="0">
+                <a:solidFill>
+                  <a:srgbClr val="1F2937"/>
+                </a:solidFill>
+              </a:rPr>
+              <a:t> (CSV/Excel), </a:t>
+            </a:r>
+            <a:r>
+              <a:rPr sz="1500" b="0" dirty="0" err="1">
+                <a:solidFill>
+                  <a:srgbClr val="1F2937"/>
+                </a:solidFill>
+              </a:rPr>
+              <a:t>sổ</a:t>
+            </a:r>
+            <a:r>
+              <a:rPr sz="1500" b="0" dirty="0">
+                <a:solidFill>
+                  <a:srgbClr val="1F2937"/>
+                </a:solidFill>
+              </a:rPr>
+              <a:t> </a:t>
+            </a:r>
+            <a:r>
+              <a:rPr sz="1500" b="0" dirty="0" err="1">
+                <a:solidFill>
+                  <a:srgbClr val="1F2937"/>
+                </a:solidFill>
+              </a:rPr>
+              <a:t>cá</a:t>
+            </a:r>
+            <a:r>
+              <a:rPr sz="1500" b="0" dirty="0">
+                <a:solidFill>
+                  <a:srgbClr val="1F2937"/>
+                </a:solidFill>
+              </a:rPr>
+              <a:t> </a:t>
+            </a:r>
+            <a:r>
+              <a:rPr sz="1500" b="0" dirty="0" err="1">
+                <a:solidFill>
+                  <a:srgbClr val="1F2937"/>
+                </a:solidFill>
+              </a:rPr>
+              <a:t>nhân</a:t>
+            </a:r>
+            <a:r>
+              <a:rPr sz="1500" b="0" dirty="0">
+                <a:solidFill>
+                  <a:srgbClr val="1F2937"/>
+                </a:solidFill>
+              </a:rPr>
+              <a:t> GV</a:t>
+            </a:r>
+          </a:p>
+          <a:p>
+            <a:r>
+              <a:rPr sz="1500" b="0" dirty="0">
+                <a:solidFill>
+                  <a:srgbClr val="1F2937"/>
+                </a:solidFill>
+              </a:rPr>
+              <a:t>- Audit log </a:t>
+            </a:r>
+            <a:r>
+              <a:rPr sz="1500" b="0" dirty="0" err="1">
+                <a:solidFill>
+                  <a:srgbClr val="1F2937"/>
+                </a:solidFill>
+              </a:rPr>
+              <a:t>mọi</a:t>
+            </a:r>
+            <a:r>
+              <a:rPr sz="1500" b="0" dirty="0">
+                <a:solidFill>
+                  <a:srgbClr val="1F2937"/>
+                </a:solidFill>
+              </a:rPr>
+              <a:t> </a:t>
+            </a:r>
+            <a:r>
+              <a:rPr sz="1500" b="0" dirty="0" err="1">
+                <a:solidFill>
+                  <a:srgbClr val="1F2937"/>
+                </a:solidFill>
+              </a:rPr>
+              <a:t>hành</a:t>
+            </a:r>
+            <a:r>
+              <a:rPr sz="1500" b="0" dirty="0">
+                <a:solidFill>
+                  <a:srgbClr val="1F2937"/>
+                </a:solidFill>
+              </a:rPr>
+              <a:t> </a:t>
+            </a:r>
+            <a:r>
+              <a:rPr sz="1500" b="0" dirty="0" err="1">
+                <a:solidFill>
+                  <a:srgbClr val="1F2937"/>
+                </a:solidFill>
+              </a:rPr>
+              <a:t>động</a:t>
+            </a:r>
+            <a:r>
+              <a:rPr sz="1500" b="0" dirty="0">
+                <a:solidFill>
+                  <a:srgbClr val="1F2937"/>
+                </a:solidFill>
+              </a:rPr>
+              <a:t> </a:t>
+            </a:r>
+            <a:r>
+              <a:rPr sz="1500" b="0" dirty="0" err="1">
+                <a:solidFill>
+                  <a:srgbClr val="1F2937"/>
+                </a:solidFill>
+              </a:rPr>
+              <a:t>quan</a:t>
+            </a:r>
+            <a:r>
+              <a:rPr sz="1500" b="0" dirty="0">
+                <a:solidFill>
+                  <a:srgbClr val="1F2937"/>
+                </a:solidFill>
+              </a:rPr>
+              <a:t> </a:t>
+            </a:r>
+            <a:r>
+              <a:rPr sz="1500" b="0" dirty="0" err="1">
+                <a:solidFill>
+                  <a:srgbClr val="1F2937"/>
+                </a:solidFill>
+              </a:rPr>
+              <a:t>trọng</a:t>
+            </a:r>
+            <a:r>
+              <a:rPr sz="1500" b="0" dirty="0">
+                <a:solidFill>
+                  <a:srgbClr val="1F2937"/>
+                </a:solidFill>
+              </a:rPr>
+              <a:t>, </a:t>
+            </a:r>
+            <a:r>
+              <a:rPr sz="1500" b="0" dirty="0" err="1">
+                <a:solidFill>
+                  <a:srgbClr val="1F2937"/>
+                </a:solidFill>
+              </a:rPr>
+              <a:t>trang</a:t>
+            </a:r>
+            <a:r>
+              <a:rPr sz="1500" b="0" dirty="0">
+                <a:solidFill>
+                  <a:srgbClr val="1F2937"/>
+                </a:solidFill>
+              </a:rPr>
+              <a:t> </a:t>
+            </a:r>
+            <a:r>
+              <a:rPr sz="1500" b="0" dirty="0" err="1">
+                <a:solidFill>
+                  <a:srgbClr val="1F2937"/>
+                </a:solidFill>
+              </a:rPr>
+              <a:t>xem</a:t>
+            </a:r>
+            <a:r>
+              <a:rPr sz="1500" b="0" dirty="0">
+                <a:solidFill>
+                  <a:srgbClr val="1F2937"/>
+                </a:solidFill>
+              </a:rPr>
+              <a:t> </a:t>
+            </a:r>
+            <a:r>
+              <a:rPr sz="1500" b="0" dirty="0" err="1">
+                <a:solidFill>
+                  <a:srgbClr val="1F2937"/>
+                </a:solidFill>
+              </a:rPr>
+              <a:t>cho</a:t>
+            </a:r>
+            <a:r>
+              <a:rPr sz="1500" b="0" dirty="0">
+                <a:solidFill>
+                  <a:srgbClr val="1F2937"/>
+                </a:solidFill>
+              </a:rPr>
+              <a:t> BGH</a:t>
+            </a:r>
+          </a:p>
+          <a:p>
+            <a:r>
+              <a:rPr sz="1500" b="0" dirty="0">
+                <a:solidFill>
+                  <a:srgbClr val="1F2937"/>
+                </a:solidFill>
+              </a:rPr>
+              <a:t>- Notification in-app </a:t>
+            </a:r>
+            <a:r>
+              <a:rPr sz="1500" b="0" dirty="0" err="1">
+                <a:solidFill>
+                  <a:srgbClr val="1F2937"/>
+                </a:solidFill>
+              </a:rPr>
+              <a:t>cho</a:t>
+            </a:r>
+            <a:r>
+              <a:rPr sz="1500" b="0" dirty="0">
+                <a:solidFill>
+                  <a:srgbClr val="1F2937"/>
+                </a:solidFill>
+              </a:rPr>
+              <a:t> </a:t>
+            </a:r>
+            <a:r>
+              <a:rPr sz="1500" b="0" dirty="0" err="1">
+                <a:solidFill>
+                  <a:srgbClr val="1F2937"/>
+                </a:solidFill>
+              </a:rPr>
+              <a:t>mọi</a:t>
+            </a:r>
+            <a:r>
+              <a:rPr sz="1500" b="0" dirty="0">
+                <a:solidFill>
+                  <a:srgbClr val="1F2937"/>
+                </a:solidFill>
+              </a:rPr>
+              <a:t> </a:t>
+            </a:r>
+            <a:r>
+              <a:rPr sz="1500" b="0" dirty="0" err="1">
+                <a:solidFill>
+                  <a:srgbClr val="1F2937"/>
+                </a:solidFill>
+              </a:rPr>
+              <a:t>hành</a:t>
+            </a:r>
+            <a:r>
+              <a:rPr sz="1500" b="0" dirty="0">
+                <a:solidFill>
+                  <a:srgbClr val="1F2937"/>
+                </a:solidFill>
+              </a:rPr>
+              <a:t> </a:t>
+            </a:r>
+            <a:r>
+              <a:rPr sz="1500" b="0" dirty="0" err="1">
+                <a:solidFill>
+                  <a:srgbClr val="1F2937"/>
+                </a:solidFill>
+              </a:rPr>
+              <a:t>động</a:t>
+            </a:r>
+            <a:r>
+              <a:rPr sz="1500" b="0" dirty="0">
+                <a:solidFill>
+                  <a:srgbClr val="1F2937"/>
+                </a:solidFill>
+              </a:rPr>
+              <a:t> </a:t>
+            </a:r>
+            <a:r>
+              <a:rPr sz="1500" b="0" dirty="0" err="1">
+                <a:solidFill>
+                  <a:srgbClr val="1F2937"/>
+                </a:solidFill>
+              </a:rPr>
+              <a:t>ảnh</a:t>
+            </a:r>
+            <a:r>
+              <a:rPr sz="1500" b="0" dirty="0">
+                <a:solidFill>
+                  <a:srgbClr val="1F2937"/>
+                </a:solidFill>
+              </a:rPr>
+              <a:t> </a:t>
+            </a:r>
+            <a:r>
+              <a:rPr sz="1500" b="0" dirty="0" err="1">
+                <a:solidFill>
+                  <a:srgbClr val="1F2937"/>
+                </a:solidFill>
+              </a:rPr>
+              <a:t>hưởng</a:t>
+            </a:r>
+            <a:r>
+              <a:rPr sz="1500" b="0" dirty="0">
+                <a:solidFill>
+                  <a:srgbClr val="1F2937"/>
+                </a:solidFill>
+              </a:rPr>
+              <a:t> </a:t>
+            </a:r>
+            <a:r>
+              <a:rPr sz="1500" b="0" dirty="0" err="1">
+                <a:solidFill>
+                  <a:srgbClr val="1F2937"/>
+                </a:solidFill>
+              </a:rPr>
+              <a:t>người</a:t>
+            </a:r>
+            <a:r>
+              <a:rPr sz="1500" b="0" dirty="0">
+                <a:solidFill>
+                  <a:srgbClr val="1F2937"/>
+                </a:solidFill>
+              </a:rPr>
+              <a:t> </a:t>
+            </a:r>
+            <a:r>
+              <a:rPr sz="1500" b="0" dirty="0" err="1">
+                <a:solidFill>
+                  <a:srgbClr val="1F2937"/>
+                </a:solidFill>
+              </a:rPr>
+              <a:t>khác</a:t>
+            </a:r>
+            <a:endParaRPr sz="1500" b="0" dirty="0">
+              <a:solidFill>
+                <a:srgbClr val="1F2937"/>
+              </a:solidFill>
+            </a:endParaRPr>
+          </a:p>
+          <a:p>
+            <a:r>
+              <a:rPr sz="1500" b="0" dirty="0">
+                <a:solidFill>
+                  <a:srgbClr val="1F2937"/>
+                </a:solidFill>
+              </a:rPr>
+              <a:t>- Responsive mobile, </a:t>
+            </a:r>
+            <a:r>
+              <a:rPr sz="1500" b="0" dirty="0" err="1">
+                <a:solidFill>
+                  <a:srgbClr val="1F2937"/>
+                </a:solidFill>
+              </a:rPr>
+              <a:t>sắp</a:t>
+            </a:r>
+            <a:r>
+              <a:rPr sz="1500" b="0" dirty="0">
+                <a:solidFill>
+                  <a:srgbClr val="1F2937"/>
+                </a:solidFill>
+              </a:rPr>
+              <a:t> </a:t>
+            </a:r>
+            <a:r>
+              <a:rPr sz="1500" b="0" dirty="0" err="1">
+                <a:solidFill>
+                  <a:srgbClr val="1F2937"/>
+                </a:solidFill>
+              </a:rPr>
+              <a:t>xếp</a:t>
+            </a:r>
+            <a:r>
+              <a:rPr sz="1500" b="0" dirty="0">
+                <a:solidFill>
+                  <a:srgbClr val="1F2937"/>
+                </a:solidFill>
+              </a:rPr>
+              <a:t> </a:t>
+            </a:r>
+            <a:r>
+              <a:rPr sz="1500" b="0" dirty="0" err="1">
+                <a:solidFill>
+                  <a:srgbClr val="1F2937"/>
+                </a:solidFill>
+              </a:rPr>
+              <a:t>tên</a:t>
+            </a:r>
+            <a:r>
+              <a:rPr sz="1500" b="0" dirty="0">
+                <a:solidFill>
+                  <a:srgbClr val="1F2937"/>
+                </a:solidFill>
+              </a:rPr>
+              <a:t> </a:t>
+            </a:r>
+            <a:r>
+              <a:rPr sz="1500" b="0" dirty="0" err="1">
+                <a:solidFill>
+                  <a:srgbClr val="1F2937"/>
+                </a:solidFill>
+              </a:rPr>
+              <a:t>theo</a:t>
+            </a:r>
+            <a:r>
+              <a:rPr sz="1500" b="0" dirty="0">
+                <a:solidFill>
+                  <a:srgbClr val="1F2937"/>
+                </a:solidFill>
+              </a:rPr>
+              <a:t> </a:t>
+            </a:r>
+            <a:r>
+              <a:rPr sz="1500" b="0" dirty="0" err="1">
+                <a:solidFill>
+                  <a:srgbClr val="1F2937"/>
+                </a:solidFill>
+              </a:rPr>
+              <a:t>quy</a:t>
+            </a:r>
+            <a:r>
+              <a:rPr sz="1500" b="0" dirty="0">
+                <a:solidFill>
+                  <a:srgbClr val="1F2937"/>
+                </a:solidFill>
+              </a:rPr>
+              <a:t> </a:t>
+            </a:r>
+            <a:r>
+              <a:rPr sz="1500" b="0" dirty="0" err="1">
+                <a:solidFill>
+                  <a:srgbClr val="1F2937"/>
+                </a:solidFill>
+              </a:rPr>
+              <a:t>tắc</a:t>
+            </a:r>
+            <a:r>
+              <a:rPr sz="1500" b="0" dirty="0">
+                <a:solidFill>
+                  <a:srgbClr val="1F2937"/>
+                </a:solidFill>
+              </a:rPr>
+              <a:t> </a:t>
+            </a:r>
+            <a:r>
+              <a:rPr sz="1500" b="0" dirty="0" err="1">
+                <a:solidFill>
+                  <a:srgbClr val="1F2937"/>
+                </a:solidFill>
+              </a:rPr>
+              <a:t>Việt</a:t>
+            </a:r>
+            <a:r>
+              <a:rPr sz="1500" b="0" dirty="0">
+                <a:solidFill>
+                  <a:srgbClr val="1F2937"/>
+                </a:solidFill>
+              </a:rPr>
+              <a:t> Nam</a:t>
             </a:r>
           </a:p>
         </p:txBody>
@@ -3907,7 +4906,6 @@
           </a:bodyPr>
           <a:lstStyle/>
           <a:p>
-            <a:pPr/>
             <a:r>
               <a:rPr sz="1100" b="0">
                 <a:solidFill>
@@ -3928,7 +4926,7 @@
 </file>
 
 <file path=ppt/slides/slide13.xml><?xml version="1.0" encoding="utf-8"?>
-<p:sld xmlns:a="http://schemas.openxmlformats.org/drawingml/2006/main" xmlns:p="http://schemas.openxmlformats.org/presentationml/2006/main" xmlns:r="http://schemas.openxmlformats.org/officeDocument/2006/relationships">
+<p:sld xmlns:a="http://schemas.openxmlformats.org/drawingml/2006/main" xmlns:r="http://schemas.openxmlformats.org/officeDocument/2006/relationships" xmlns:p="http://schemas.openxmlformats.org/presentationml/2006/main">
   <p:cSld>
     <p:spTree>
       <p:nvGrpSpPr>
@@ -3936,7 +4934,14 @@
         <p:cNvGrpSpPr/>
         <p:nvPr/>
       </p:nvGrpSpPr>
-      <p:grpSpPr/>
+      <p:grpSpPr>
+        <a:xfrm>
+          <a:off x="0" y="0"/>
+          <a:ext cx="0" cy="0"/>
+          <a:chOff x="0" y="0"/>
+          <a:chExt cx="0" cy="0"/>
+        </a:xfrm>
+      </p:grpSpPr>
       <p:sp>
         <p:nvSpPr>
           <p:cNvPr id="2" name="Rectangle 1"/>
@@ -3977,6 +4982,7 @@
           <a:lstStyle/>
           <a:p>
             <a:pPr algn="ctr"/>
+            <a:endParaRPr/>
           </a:p>
         </p:txBody>
       </p:sp>
@@ -4002,7 +5008,6 @@
           </a:bodyPr>
           <a:lstStyle/>
           <a:p>
-            <a:pPr/>
             <a:r>
               <a:rPr sz="3600" b="1">
                 <a:solidFill>
@@ -4013,7 +5018,6 @@
             </a:r>
           </a:p>
           <a:p>
-            <a:pPr/>
             <a:r>
               <a:rPr sz="2000" b="0">
                 <a:solidFill>
@@ -4024,7 +5028,6 @@
             </a:r>
           </a:p>
           <a:p>
-            <a:pPr/>
             <a:r>
               <a:rPr sz="1600" b="0">
                 <a:solidFill>
@@ -4035,7 +5038,6 @@
             </a:r>
           </a:p>
           <a:p>
-            <a:pPr/>
             <a:r>
               <a:rPr sz="1400" b="0">
                 <a:solidFill>
@@ -4056,7 +5058,7 @@
 </file>
 
 <file path=ppt/slides/slide2.xml><?xml version="1.0" encoding="utf-8"?>
-<p:sld xmlns:a="http://schemas.openxmlformats.org/drawingml/2006/main" xmlns:p="http://schemas.openxmlformats.org/presentationml/2006/main" xmlns:r="http://schemas.openxmlformats.org/officeDocument/2006/relationships">
+<p:sld xmlns:a="http://schemas.openxmlformats.org/drawingml/2006/main" xmlns:r="http://schemas.openxmlformats.org/officeDocument/2006/relationships" xmlns:p="http://schemas.openxmlformats.org/presentationml/2006/main">
   <p:cSld>
     <p:spTree>
       <p:nvGrpSpPr>
@@ -4064,7 +5066,14 @@
         <p:cNvGrpSpPr/>
         <p:nvPr/>
       </p:nvGrpSpPr>
-      <p:grpSpPr/>
+      <p:grpSpPr>
+        <a:xfrm>
+          <a:off x="0" y="0"/>
+          <a:ext cx="0" cy="0"/>
+          <a:chOff x="0" y="0"/>
+          <a:chExt cx="0" cy="0"/>
+        </a:xfrm>
+      </p:grpSpPr>
       <p:sp>
         <p:nvSpPr>
           <p:cNvPr id="2" name="Rectangle 1"/>
@@ -4105,6 +5114,7 @@
           <a:lstStyle/>
           <a:p>
             <a:pPr algn="ctr"/>
+            <a:endParaRPr/>
           </a:p>
         </p:txBody>
       </p:sp>
@@ -4130,7 +5140,6 @@
           </a:bodyPr>
           <a:lstStyle/>
           <a:p>
-            <a:pPr/>
             <a:r>
               <a:rPr sz="2800" b="1">
                 <a:solidFill>
@@ -4164,7 +5173,6 @@
           </a:bodyPr>
           <a:lstStyle/>
           <a:p>
-            <a:pPr/>
             <a:r>
               <a:rPr sz="1500" b="0">
                 <a:solidFill>
@@ -4175,7 +5183,6 @@
             </a:r>
           </a:p>
           <a:p>
-            <a:pPr/>
             <a:r>
               <a:rPr sz="1500" b="0">
                 <a:solidFill>
@@ -4186,7 +5193,6 @@
             </a:r>
           </a:p>
           <a:p>
-            <a:pPr/>
             <a:r>
               <a:rPr sz="1500" b="0">
                 <a:solidFill>
@@ -4197,7 +5203,6 @@
             </a:r>
           </a:p>
           <a:p>
-            <a:pPr/>
             <a:r>
               <a:rPr sz="1500" b="0">
                 <a:solidFill>
@@ -4208,7 +5213,6 @@
             </a:r>
           </a:p>
           <a:p>
-            <a:pPr/>
             <a:r>
               <a:rPr sz="1500" b="0">
                 <a:solidFill>
@@ -4219,7 +5223,6 @@
             </a:r>
           </a:p>
           <a:p>
-            <a:pPr/>
             <a:r>
               <a:rPr sz="1500" b="0">
                 <a:solidFill>
@@ -4282,7 +5285,6 @@
           </a:bodyPr>
           <a:lstStyle/>
           <a:p>
-            <a:pPr/>
             <a:r>
               <a:rPr sz="1100" b="0">
                 <a:solidFill>
@@ -4303,7 +5305,7 @@
 </file>
 
 <file path=ppt/slides/slide3.xml><?xml version="1.0" encoding="utf-8"?>
-<p:sld xmlns:a="http://schemas.openxmlformats.org/drawingml/2006/main" xmlns:p="http://schemas.openxmlformats.org/presentationml/2006/main" xmlns:r="http://schemas.openxmlformats.org/officeDocument/2006/relationships">
+<p:sld xmlns:a="http://schemas.openxmlformats.org/drawingml/2006/main" xmlns:r="http://schemas.openxmlformats.org/officeDocument/2006/relationships" xmlns:p="http://schemas.openxmlformats.org/presentationml/2006/main">
   <p:cSld>
     <p:spTree>
       <p:nvGrpSpPr>
@@ -4311,7 +5313,14 @@
         <p:cNvGrpSpPr/>
         <p:nvPr/>
       </p:nvGrpSpPr>
-      <p:grpSpPr/>
+      <p:grpSpPr>
+        <a:xfrm>
+          <a:off x="0" y="0"/>
+          <a:ext cx="0" cy="0"/>
+          <a:chOff x="0" y="0"/>
+          <a:chExt cx="0" cy="0"/>
+        </a:xfrm>
+      </p:grpSpPr>
       <p:sp>
         <p:nvSpPr>
           <p:cNvPr id="2" name="TextBox 1"/>
@@ -4334,7 +5343,6 @@
           </a:bodyPr>
           <a:lstStyle/>
           <a:p>
-            <a:pPr/>
             <a:r>
               <a:rPr sz="2800" b="1">
                 <a:solidFill>
@@ -4365,10 +5373,34 @@
                 <a:tableStyleId>{5C22544A-7EE6-4342-B048-85BDC9FD1C3A}</a:tableStyleId>
               </a:tblPr>
               <a:tblGrid>
-                <a:gridCol w="2773603"/>
-                <a:gridCol w="2773603"/>
-                <a:gridCol w="2773603"/>
-                <a:gridCol w="2773606"/>
+                <a:gridCol w="2773603">
+                  <a:extLst>
+                    <a:ext uri="{9D8B030D-6E8A-4147-A177-3AD203B41FA5}">
+                      <a16:colId xmlns:a16="http://schemas.microsoft.com/office/drawing/2014/main" val="20000"/>
+                    </a:ext>
+                  </a:extLst>
+                </a:gridCol>
+                <a:gridCol w="2773603">
+                  <a:extLst>
+                    <a:ext uri="{9D8B030D-6E8A-4147-A177-3AD203B41FA5}">
+                      <a16:colId xmlns:a16="http://schemas.microsoft.com/office/drawing/2014/main" val="20001"/>
+                    </a:ext>
+                  </a:extLst>
+                </a:gridCol>
+                <a:gridCol w="2773603">
+                  <a:extLst>
+                    <a:ext uri="{9D8B030D-6E8A-4147-A177-3AD203B41FA5}">
+                      <a16:colId xmlns:a16="http://schemas.microsoft.com/office/drawing/2014/main" val="20002"/>
+                    </a:ext>
+                  </a:extLst>
+                </a:gridCol>
+                <a:gridCol w="2773606">
+                  <a:extLst>
+                    <a:ext uri="{9D8B030D-6E8A-4147-A177-3AD203B41FA5}">
+                      <a16:colId xmlns:a16="http://schemas.microsoft.com/office/drawing/2014/main" val="20003"/>
+                    </a:ext>
+                  </a:extLst>
+                </a:gridCol>
               </a:tblGrid>
               <a:tr h="950976">
                 <a:tc>
@@ -4423,6 +5455,11 @@
                   </a:txBody>
                   <a:tcPr/>
                 </a:tc>
+                <a:extLst>
+                  <a:ext uri="{0D108BD9-81ED-4DB2-BD59-A6C34878D82A}">
+                    <a16:rowId xmlns:a16="http://schemas.microsoft.com/office/drawing/2014/main" val="10000"/>
+                  </a:ext>
+                </a:extLst>
               </a:tr>
               <a:tr h="950976">
                 <a:tc>
@@ -4477,6 +5514,11 @@
                   </a:txBody>
                   <a:tcPr/>
                 </a:tc>
+                <a:extLst>
+                  <a:ext uri="{0D108BD9-81ED-4DB2-BD59-A6C34878D82A}">
+                    <a16:rowId xmlns:a16="http://schemas.microsoft.com/office/drawing/2014/main" val="10001"/>
+                  </a:ext>
+                </a:extLst>
               </a:tr>
               <a:tr h="950976">
                 <a:tc>
@@ -4531,6 +5573,11 @@
                   </a:txBody>
                   <a:tcPr/>
                 </a:tc>
+                <a:extLst>
+                  <a:ext uri="{0D108BD9-81ED-4DB2-BD59-A6C34878D82A}">
+                    <a16:rowId xmlns:a16="http://schemas.microsoft.com/office/drawing/2014/main" val="10002"/>
+                  </a:ext>
+                </a:extLst>
               </a:tr>
               <a:tr h="950976">
                 <a:tc>
@@ -4585,6 +5632,11 @@
                   </a:txBody>
                   <a:tcPr/>
                 </a:tc>
+                <a:extLst>
+                  <a:ext uri="{0D108BD9-81ED-4DB2-BD59-A6C34878D82A}">
+                    <a16:rowId xmlns:a16="http://schemas.microsoft.com/office/drawing/2014/main" val="10003"/>
+                  </a:ext>
+                </a:extLst>
               </a:tr>
               <a:tr h="950976">
                 <a:tc>
@@ -4639,6 +5691,11 @@
                   </a:txBody>
                   <a:tcPr/>
                 </a:tc>
+                <a:extLst>
+                  <a:ext uri="{0D108BD9-81ED-4DB2-BD59-A6C34878D82A}">
+                    <a16:rowId xmlns:a16="http://schemas.microsoft.com/office/drawing/2014/main" val="10004"/>
+                  </a:ext>
+                </a:extLst>
               </a:tr>
             </a:tbl>
           </a:graphicData>
@@ -4653,7 +5710,7 @@
 </file>
 
 <file path=ppt/slides/slide4.xml><?xml version="1.0" encoding="utf-8"?>
-<p:sld xmlns:a="http://schemas.openxmlformats.org/drawingml/2006/main" xmlns:p="http://schemas.openxmlformats.org/presentationml/2006/main" xmlns:r="http://schemas.openxmlformats.org/officeDocument/2006/relationships">
+<p:sld xmlns:a="http://schemas.openxmlformats.org/drawingml/2006/main" xmlns:r="http://schemas.openxmlformats.org/officeDocument/2006/relationships" xmlns:p="http://schemas.openxmlformats.org/presentationml/2006/main">
   <p:cSld>
     <p:spTree>
       <p:nvGrpSpPr>
@@ -4661,7 +5718,14 @@
         <p:cNvGrpSpPr/>
         <p:nvPr/>
       </p:nvGrpSpPr>
-      <p:grpSpPr/>
+      <p:grpSpPr>
+        <a:xfrm>
+          <a:off x="0" y="0"/>
+          <a:ext cx="0" cy="0"/>
+          <a:chOff x="0" y="0"/>
+          <a:chExt cx="0" cy="0"/>
+        </a:xfrm>
+      </p:grpSpPr>
       <p:sp>
         <p:nvSpPr>
           <p:cNvPr id="2" name="Rectangle 1"/>
@@ -4702,6 +5766,7 @@
           <a:lstStyle/>
           <a:p>
             <a:pPr algn="ctr"/>
+            <a:endParaRPr/>
           </a:p>
         </p:txBody>
       </p:sp>
@@ -4727,7 +5792,6 @@
           </a:bodyPr>
           <a:lstStyle/>
           <a:p>
-            <a:pPr/>
             <a:r>
               <a:rPr sz="2800" b="1">
                 <a:solidFill>
@@ -4748,7 +5812,7 @@
         <p:spPr>
           <a:xfrm>
             <a:off x="548640" y="1234440"/>
-            <a:ext cx="5120640" cy="5303520"/>
+            <a:ext cx="5120640" cy="1708160"/>
           </a:xfrm>
           <a:prstGeom prst="rect">
             <a:avLst/>
@@ -4761,70 +5825,916 @@
           </a:bodyPr>
           <a:lstStyle/>
           <a:p>
-            <a:pPr/>
-            <a:r>
-              <a:rPr sz="1500" b="0">
-                <a:solidFill>
-                  <a:srgbClr val="1F2937"/>
-                </a:solidFill>
-              </a:rPr>
-              <a:t>- 4 trạng thái/em: Có mặt, Vắng CP, Vắng KP, Đi muộn + thao tác nhanh</a:t>
-            </a:r>
-          </a:p>
-          <a:p>
-            <a:pPr/>
-            <a:r>
-              <a:rPr sz="1500" b="0">
-                <a:solidFill>
-                  <a:srgbClr val="1F2937"/>
-                </a:solidFill>
-              </a:rPr>
-              <a:t>- Chọn ngày bất kỳ để xem lại / sửa điểm danh ngày cũ</a:t>
-            </a:r>
-          </a:p>
-          <a:p>
-            <a:pPr/>
-            <a:r>
-              <a:rPr sz="1500" b="0">
-                <a:solidFill>
-                  <a:srgbClr val="1F2937"/>
-                </a:solidFill>
-              </a:rPr>
-              <a:t>- Sổ vắng-muộn và lịch sử theo khoảng ngày (from - to)</a:t>
-            </a:r>
-          </a:p>
-          <a:p>
-            <a:pPr/>
-            <a:r>
-              <a:rPr sz="1500" b="0">
-                <a:solidFill>
-                  <a:srgbClr val="1F2937"/>
-                </a:solidFill>
-              </a:rPr>
-              <a:t>- Ma trận HS x ngày phát hiện vắng liên tục</a:t>
-            </a:r>
-          </a:p>
-          <a:p>
-            <a:pPr/>
-            <a:r>
-              <a:rPr sz="1500" b="0">
-                <a:solidFill>
-                  <a:srgbClr val="1F2937"/>
-                </a:solidFill>
-              </a:rPr>
-              <a:t>- Thông báo phụ huynh tự động (email + in-app)</a:t>
-            </a:r>
-          </a:p>
-          <a:p>
-            <a:pPr/>
-            <a:r>
-              <a:rPr sz="1500" b="0">
-                <a:solidFill>
-                  <a:srgbClr val="1F2937"/>
-                </a:solidFill>
-              </a:rPr>
-              <a:t>- Đồng bộ 2 chiều với sổ đầu bài tiết học</a:t>
-            </a:r>
+            <a:r>
+              <a:rPr sz="1500" b="0" dirty="0">
+                <a:solidFill>
+                  <a:srgbClr val="1F2937"/>
+                </a:solidFill>
+              </a:rPr>
+              <a:t>- 4 </a:t>
+            </a:r>
+            <a:r>
+              <a:rPr sz="1500" b="0" dirty="0" err="1">
+                <a:solidFill>
+                  <a:srgbClr val="1F2937"/>
+                </a:solidFill>
+              </a:rPr>
+              <a:t>trạng</a:t>
+            </a:r>
+            <a:r>
+              <a:rPr sz="1500" b="0" dirty="0">
+                <a:solidFill>
+                  <a:srgbClr val="1F2937"/>
+                </a:solidFill>
+              </a:rPr>
+              <a:t> </a:t>
+            </a:r>
+            <a:r>
+              <a:rPr sz="1500" b="0" dirty="0" err="1">
+                <a:solidFill>
+                  <a:srgbClr val="1F2937"/>
+                </a:solidFill>
+              </a:rPr>
+              <a:t>thái</a:t>
+            </a:r>
+            <a:r>
+              <a:rPr sz="1500" b="0" dirty="0">
+                <a:solidFill>
+                  <a:srgbClr val="1F2937"/>
+                </a:solidFill>
+              </a:rPr>
+              <a:t>/</a:t>
+            </a:r>
+            <a:r>
+              <a:rPr lang="en-US" sz="1500" b="0" dirty="0">
+                <a:solidFill>
+                  <a:srgbClr val="1F2937"/>
+                </a:solidFill>
+              </a:rPr>
+              <a:t>HS</a:t>
+            </a:r>
+            <a:r>
+              <a:rPr sz="1500" b="0" dirty="0">
+                <a:solidFill>
+                  <a:srgbClr val="1F2937"/>
+                </a:solidFill>
+              </a:rPr>
+              <a:t>: </a:t>
+            </a:r>
+            <a:r>
+              <a:rPr sz="1500" b="0" dirty="0" err="1">
+                <a:solidFill>
+                  <a:srgbClr val="1F2937"/>
+                </a:solidFill>
+              </a:rPr>
+              <a:t>Có</a:t>
+            </a:r>
+            <a:r>
+              <a:rPr sz="1500" b="0" dirty="0">
+                <a:solidFill>
+                  <a:srgbClr val="1F2937"/>
+                </a:solidFill>
+              </a:rPr>
+              <a:t> </a:t>
+            </a:r>
+            <a:r>
+              <a:rPr sz="1500" b="0" dirty="0" err="1">
+                <a:solidFill>
+                  <a:srgbClr val="1F2937"/>
+                </a:solidFill>
+              </a:rPr>
+              <a:t>mặt</a:t>
+            </a:r>
+            <a:r>
+              <a:rPr sz="1500" b="0" dirty="0">
+                <a:solidFill>
+                  <a:srgbClr val="1F2937"/>
+                </a:solidFill>
+              </a:rPr>
+              <a:t>, </a:t>
+            </a:r>
+            <a:r>
+              <a:rPr sz="1500" b="0" dirty="0" err="1">
+                <a:solidFill>
+                  <a:srgbClr val="1F2937"/>
+                </a:solidFill>
+              </a:rPr>
+              <a:t>Vắng</a:t>
+            </a:r>
+            <a:r>
+              <a:rPr sz="1500" b="0" dirty="0">
+                <a:solidFill>
+                  <a:srgbClr val="1F2937"/>
+                </a:solidFill>
+              </a:rPr>
+              <a:t> CP, </a:t>
+            </a:r>
+            <a:r>
+              <a:rPr sz="1500" b="0" dirty="0" err="1">
+                <a:solidFill>
+                  <a:srgbClr val="1F2937"/>
+                </a:solidFill>
+              </a:rPr>
+              <a:t>Vắng</a:t>
+            </a:r>
+            <a:r>
+              <a:rPr sz="1500" b="0" dirty="0">
+                <a:solidFill>
+                  <a:srgbClr val="1F2937"/>
+                </a:solidFill>
+              </a:rPr>
+              <a:t> KP, </a:t>
+            </a:r>
+            <a:r>
+              <a:rPr sz="1500" b="0" dirty="0" err="1">
+                <a:solidFill>
+                  <a:srgbClr val="1F2937"/>
+                </a:solidFill>
+              </a:rPr>
+              <a:t>Đi</a:t>
+            </a:r>
+            <a:r>
+              <a:rPr sz="1500" b="0" dirty="0">
+                <a:solidFill>
+                  <a:srgbClr val="1F2937"/>
+                </a:solidFill>
+              </a:rPr>
+              <a:t> </a:t>
+            </a:r>
+            <a:r>
+              <a:rPr sz="1500" b="0" dirty="0" err="1">
+                <a:solidFill>
+                  <a:srgbClr val="1F2937"/>
+                </a:solidFill>
+              </a:rPr>
+              <a:t>muộn</a:t>
+            </a:r>
+            <a:r>
+              <a:rPr sz="1500" b="0" dirty="0">
+                <a:solidFill>
+                  <a:srgbClr val="1F2937"/>
+                </a:solidFill>
+              </a:rPr>
+              <a:t> + </a:t>
+            </a:r>
+            <a:r>
+              <a:rPr sz="1500" b="0" dirty="0" err="1">
+                <a:solidFill>
+                  <a:srgbClr val="1F2937"/>
+                </a:solidFill>
+              </a:rPr>
+              <a:t>thao</a:t>
+            </a:r>
+            <a:r>
+              <a:rPr sz="1500" b="0" dirty="0">
+                <a:solidFill>
+                  <a:srgbClr val="1F2937"/>
+                </a:solidFill>
+              </a:rPr>
+              <a:t> </a:t>
+            </a:r>
+            <a:r>
+              <a:rPr sz="1500" b="0" dirty="0" err="1">
+                <a:solidFill>
+                  <a:srgbClr val="1F2937"/>
+                </a:solidFill>
+              </a:rPr>
+              <a:t>tác</a:t>
+            </a:r>
+            <a:r>
+              <a:rPr sz="1500" b="0" dirty="0">
+                <a:solidFill>
+                  <a:srgbClr val="1F2937"/>
+                </a:solidFill>
+              </a:rPr>
+              <a:t> </a:t>
+            </a:r>
+            <a:r>
+              <a:rPr sz="1500" b="0" dirty="0" err="1">
+                <a:solidFill>
+                  <a:srgbClr val="1F2937"/>
+                </a:solidFill>
+              </a:rPr>
+              <a:t>nhanh</a:t>
+            </a:r>
+            <a:endParaRPr sz="1500" b="0" dirty="0">
+              <a:solidFill>
+                <a:srgbClr val="1F2937"/>
+              </a:solidFill>
+            </a:endParaRPr>
+          </a:p>
+          <a:p>
+            <a:r>
+              <a:rPr sz="1500" b="0" dirty="0">
+                <a:solidFill>
+                  <a:srgbClr val="1F2937"/>
+                </a:solidFill>
+              </a:rPr>
+              <a:t>- </a:t>
+            </a:r>
+            <a:r>
+              <a:rPr sz="1500" b="0" dirty="0" err="1">
+                <a:solidFill>
+                  <a:srgbClr val="1F2937"/>
+                </a:solidFill>
+              </a:rPr>
+              <a:t>Chọn</a:t>
+            </a:r>
+            <a:r>
+              <a:rPr sz="1500" b="0" dirty="0">
+                <a:solidFill>
+                  <a:srgbClr val="1F2937"/>
+                </a:solidFill>
+              </a:rPr>
+              <a:t> </a:t>
+            </a:r>
+            <a:r>
+              <a:rPr sz="1500" b="0" dirty="0" err="1">
+                <a:solidFill>
+                  <a:srgbClr val="1F2937"/>
+                </a:solidFill>
+              </a:rPr>
+              <a:t>ngày</a:t>
+            </a:r>
+            <a:r>
+              <a:rPr sz="1500" b="0" dirty="0">
+                <a:solidFill>
+                  <a:srgbClr val="1F2937"/>
+                </a:solidFill>
+              </a:rPr>
+              <a:t> </a:t>
+            </a:r>
+            <a:r>
+              <a:rPr sz="1500" b="0" dirty="0" err="1">
+                <a:solidFill>
+                  <a:srgbClr val="1F2937"/>
+                </a:solidFill>
+              </a:rPr>
+              <a:t>bất</a:t>
+            </a:r>
+            <a:r>
+              <a:rPr sz="1500" b="0" dirty="0">
+                <a:solidFill>
+                  <a:srgbClr val="1F2937"/>
+                </a:solidFill>
+              </a:rPr>
+              <a:t> </a:t>
+            </a:r>
+            <a:r>
+              <a:rPr sz="1500" b="0" dirty="0" err="1">
+                <a:solidFill>
+                  <a:srgbClr val="1F2937"/>
+                </a:solidFill>
+              </a:rPr>
+              <a:t>kỳ</a:t>
+            </a:r>
+            <a:r>
+              <a:rPr sz="1500" b="0" dirty="0">
+                <a:solidFill>
+                  <a:srgbClr val="1F2937"/>
+                </a:solidFill>
+              </a:rPr>
+              <a:t> </a:t>
+            </a:r>
+            <a:r>
+              <a:rPr sz="1500" b="0" dirty="0" err="1">
+                <a:solidFill>
+                  <a:srgbClr val="1F2937"/>
+                </a:solidFill>
+              </a:rPr>
+              <a:t>để</a:t>
+            </a:r>
+            <a:r>
+              <a:rPr sz="1500" b="0" dirty="0">
+                <a:solidFill>
+                  <a:srgbClr val="1F2937"/>
+                </a:solidFill>
+              </a:rPr>
+              <a:t> </a:t>
+            </a:r>
+            <a:r>
+              <a:rPr sz="1500" b="0" dirty="0" err="1">
+                <a:solidFill>
+                  <a:srgbClr val="1F2937"/>
+                </a:solidFill>
+              </a:rPr>
+              <a:t>xem</a:t>
+            </a:r>
+            <a:r>
+              <a:rPr sz="1500" b="0" dirty="0">
+                <a:solidFill>
+                  <a:srgbClr val="1F2937"/>
+                </a:solidFill>
+              </a:rPr>
+              <a:t> </a:t>
+            </a:r>
+            <a:r>
+              <a:rPr sz="1500" b="0" dirty="0" err="1">
+                <a:solidFill>
+                  <a:srgbClr val="1F2937"/>
+                </a:solidFill>
+              </a:rPr>
+              <a:t>lại</a:t>
+            </a:r>
+            <a:r>
+              <a:rPr sz="1500" b="0" dirty="0">
+                <a:solidFill>
+                  <a:srgbClr val="1F2937"/>
+                </a:solidFill>
+              </a:rPr>
+              <a:t> / </a:t>
+            </a:r>
+            <a:r>
+              <a:rPr sz="1500" b="0" dirty="0" err="1">
+                <a:solidFill>
+                  <a:srgbClr val="1F2937"/>
+                </a:solidFill>
+              </a:rPr>
+              <a:t>sửa</a:t>
+            </a:r>
+            <a:r>
+              <a:rPr sz="1500" b="0" dirty="0">
+                <a:solidFill>
+                  <a:srgbClr val="1F2937"/>
+                </a:solidFill>
+              </a:rPr>
+              <a:t> </a:t>
+            </a:r>
+            <a:r>
+              <a:rPr sz="1500" b="0" dirty="0" err="1">
+                <a:solidFill>
+                  <a:srgbClr val="1F2937"/>
+                </a:solidFill>
+              </a:rPr>
+              <a:t>điểm</a:t>
+            </a:r>
+            <a:r>
+              <a:rPr sz="1500" b="0" dirty="0">
+                <a:solidFill>
+                  <a:srgbClr val="1F2937"/>
+                </a:solidFill>
+              </a:rPr>
+              <a:t> </a:t>
+            </a:r>
+            <a:r>
+              <a:rPr sz="1500" b="0" dirty="0" err="1">
+                <a:solidFill>
+                  <a:srgbClr val="1F2937"/>
+                </a:solidFill>
+              </a:rPr>
+              <a:t>danh</a:t>
+            </a:r>
+            <a:r>
+              <a:rPr sz="1500" b="0" dirty="0">
+                <a:solidFill>
+                  <a:srgbClr val="1F2937"/>
+                </a:solidFill>
+              </a:rPr>
+              <a:t> </a:t>
+            </a:r>
+            <a:r>
+              <a:rPr sz="1500" b="0" dirty="0" err="1">
+                <a:solidFill>
+                  <a:srgbClr val="1F2937"/>
+                </a:solidFill>
+              </a:rPr>
+              <a:t>ngày</a:t>
+            </a:r>
+            <a:r>
+              <a:rPr sz="1500" b="0" dirty="0">
+                <a:solidFill>
+                  <a:srgbClr val="1F2937"/>
+                </a:solidFill>
+              </a:rPr>
+              <a:t> </a:t>
+            </a:r>
+            <a:r>
+              <a:rPr sz="1500" b="0" dirty="0" err="1">
+                <a:solidFill>
+                  <a:srgbClr val="1F2937"/>
+                </a:solidFill>
+              </a:rPr>
+              <a:t>cũ</a:t>
+            </a:r>
+            <a:endParaRPr sz="1500" b="0" dirty="0">
+              <a:solidFill>
+                <a:srgbClr val="1F2937"/>
+              </a:solidFill>
+            </a:endParaRPr>
+          </a:p>
+          <a:p>
+            <a:r>
+              <a:rPr sz="1500" b="0" dirty="0">
+                <a:solidFill>
+                  <a:srgbClr val="1F2937"/>
+                </a:solidFill>
+              </a:rPr>
+              <a:t>- </a:t>
+            </a:r>
+            <a:r>
+              <a:rPr sz="1500" b="0" dirty="0" err="1">
+                <a:solidFill>
+                  <a:srgbClr val="1F2937"/>
+                </a:solidFill>
+              </a:rPr>
+              <a:t>Sổ</a:t>
+            </a:r>
+            <a:r>
+              <a:rPr sz="1500" b="0" dirty="0">
+                <a:solidFill>
+                  <a:srgbClr val="1F2937"/>
+                </a:solidFill>
+              </a:rPr>
+              <a:t> </a:t>
+            </a:r>
+            <a:r>
+              <a:rPr sz="1500" b="0" dirty="0" err="1">
+                <a:solidFill>
+                  <a:srgbClr val="1F2937"/>
+                </a:solidFill>
+              </a:rPr>
+              <a:t>vắng-muộn</a:t>
+            </a:r>
+            <a:r>
+              <a:rPr sz="1500" b="0" dirty="0">
+                <a:solidFill>
+                  <a:srgbClr val="1F2937"/>
+                </a:solidFill>
+              </a:rPr>
+              <a:t> </a:t>
+            </a:r>
+            <a:r>
+              <a:rPr sz="1500" b="0" dirty="0" err="1">
+                <a:solidFill>
+                  <a:srgbClr val="1F2937"/>
+                </a:solidFill>
+              </a:rPr>
+              <a:t>và</a:t>
+            </a:r>
+            <a:r>
+              <a:rPr sz="1500" b="0" dirty="0">
+                <a:solidFill>
+                  <a:srgbClr val="1F2937"/>
+                </a:solidFill>
+              </a:rPr>
+              <a:t> </a:t>
+            </a:r>
+            <a:r>
+              <a:rPr sz="1500" b="0" dirty="0" err="1">
+                <a:solidFill>
+                  <a:srgbClr val="1F2937"/>
+                </a:solidFill>
+              </a:rPr>
+              <a:t>lịch</a:t>
+            </a:r>
+            <a:r>
+              <a:rPr sz="1500" b="0" dirty="0">
+                <a:solidFill>
+                  <a:srgbClr val="1F2937"/>
+                </a:solidFill>
+              </a:rPr>
+              <a:t> </a:t>
+            </a:r>
+            <a:r>
+              <a:rPr sz="1500" b="0" dirty="0" err="1">
+                <a:solidFill>
+                  <a:srgbClr val="1F2937"/>
+                </a:solidFill>
+              </a:rPr>
+              <a:t>sử</a:t>
+            </a:r>
+            <a:r>
+              <a:rPr sz="1500" b="0" dirty="0">
+                <a:solidFill>
+                  <a:srgbClr val="1F2937"/>
+                </a:solidFill>
+              </a:rPr>
+              <a:t> </a:t>
+            </a:r>
+            <a:r>
+              <a:rPr sz="1500" b="0" dirty="0" err="1">
+                <a:solidFill>
+                  <a:srgbClr val="1F2937"/>
+                </a:solidFill>
+              </a:rPr>
+              <a:t>theo</a:t>
+            </a:r>
+            <a:r>
+              <a:rPr sz="1500" b="0" dirty="0">
+                <a:solidFill>
+                  <a:srgbClr val="1F2937"/>
+                </a:solidFill>
+              </a:rPr>
+              <a:t> </a:t>
+            </a:r>
+            <a:r>
+              <a:rPr sz="1500" b="0" dirty="0" err="1">
+                <a:solidFill>
+                  <a:srgbClr val="1F2937"/>
+                </a:solidFill>
+              </a:rPr>
+              <a:t>khoảng</a:t>
+            </a:r>
+            <a:r>
+              <a:rPr sz="1500" b="0" dirty="0">
+                <a:solidFill>
+                  <a:srgbClr val="1F2937"/>
+                </a:solidFill>
+              </a:rPr>
+              <a:t> </a:t>
+            </a:r>
+            <a:r>
+              <a:rPr sz="1500" b="0" dirty="0" err="1">
+                <a:solidFill>
+                  <a:srgbClr val="1F2937"/>
+                </a:solidFill>
+              </a:rPr>
+              <a:t>ngày</a:t>
+            </a:r>
+            <a:r>
+              <a:rPr sz="1500" b="0" dirty="0">
+                <a:solidFill>
+                  <a:srgbClr val="1F2937"/>
+                </a:solidFill>
+              </a:rPr>
+              <a:t> (from - to)</a:t>
+            </a:r>
+          </a:p>
+          <a:p>
+            <a:r>
+              <a:rPr sz="1500" b="0" dirty="0">
+                <a:solidFill>
+                  <a:srgbClr val="1F2937"/>
+                </a:solidFill>
+              </a:rPr>
+              <a:t>- Ma </a:t>
+            </a:r>
+            <a:r>
+              <a:rPr sz="1500" b="0" dirty="0" err="1">
+                <a:solidFill>
+                  <a:srgbClr val="1F2937"/>
+                </a:solidFill>
+              </a:rPr>
+              <a:t>trận</a:t>
+            </a:r>
+            <a:r>
+              <a:rPr sz="1500" b="0" dirty="0">
+                <a:solidFill>
+                  <a:srgbClr val="1F2937"/>
+                </a:solidFill>
+              </a:rPr>
+              <a:t> HS x </a:t>
+            </a:r>
+            <a:r>
+              <a:rPr sz="1500" b="0" dirty="0" err="1">
+                <a:solidFill>
+                  <a:srgbClr val="1F2937"/>
+                </a:solidFill>
+              </a:rPr>
+              <a:t>ngày</a:t>
+            </a:r>
+            <a:r>
+              <a:rPr sz="1500" b="0" dirty="0">
+                <a:solidFill>
+                  <a:srgbClr val="1F2937"/>
+                </a:solidFill>
+              </a:rPr>
+              <a:t> </a:t>
+            </a:r>
+            <a:r>
+              <a:rPr sz="1500" b="0" dirty="0" err="1">
+                <a:solidFill>
+                  <a:srgbClr val="1F2937"/>
+                </a:solidFill>
+              </a:rPr>
+              <a:t>phát</a:t>
+            </a:r>
+            <a:r>
+              <a:rPr sz="1500" b="0" dirty="0">
+                <a:solidFill>
+                  <a:srgbClr val="1F2937"/>
+                </a:solidFill>
+              </a:rPr>
+              <a:t> </a:t>
+            </a:r>
+            <a:r>
+              <a:rPr sz="1500" b="0" dirty="0" err="1">
+                <a:solidFill>
+                  <a:srgbClr val="1F2937"/>
+                </a:solidFill>
+              </a:rPr>
+              <a:t>hiện</a:t>
+            </a:r>
+            <a:r>
+              <a:rPr sz="1500" b="0" dirty="0">
+                <a:solidFill>
+                  <a:srgbClr val="1F2937"/>
+                </a:solidFill>
+              </a:rPr>
+              <a:t> </a:t>
+            </a:r>
+            <a:r>
+              <a:rPr sz="1500" b="0" dirty="0" err="1">
+                <a:solidFill>
+                  <a:srgbClr val="1F2937"/>
+                </a:solidFill>
+              </a:rPr>
+              <a:t>vắng</a:t>
+            </a:r>
+            <a:r>
+              <a:rPr sz="1500" b="0" dirty="0">
+                <a:solidFill>
+                  <a:srgbClr val="1F2937"/>
+                </a:solidFill>
+              </a:rPr>
+              <a:t> </a:t>
+            </a:r>
+            <a:r>
+              <a:rPr sz="1500" b="0" dirty="0" err="1">
+                <a:solidFill>
+                  <a:srgbClr val="1F2937"/>
+                </a:solidFill>
+              </a:rPr>
+              <a:t>liên</a:t>
+            </a:r>
+            <a:r>
+              <a:rPr sz="1500" b="0" dirty="0">
+                <a:solidFill>
+                  <a:srgbClr val="1F2937"/>
+                </a:solidFill>
+              </a:rPr>
+              <a:t> </a:t>
+            </a:r>
+            <a:r>
+              <a:rPr sz="1500" b="0" dirty="0" err="1">
+                <a:solidFill>
+                  <a:srgbClr val="1F2937"/>
+                </a:solidFill>
+              </a:rPr>
+              <a:t>tục</a:t>
+            </a:r>
+            <a:endParaRPr sz="1500" b="0" dirty="0">
+              <a:solidFill>
+                <a:srgbClr val="1F2937"/>
+              </a:solidFill>
+            </a:endParaRPr>
+          </a:p>
+          <a:p>
+            <a:r>
+              <a:rPr sz="1500" b="0" dirty="0">
+                <a:solidFill>
+                  <a:srgbClr val="1F2937"/>
+                </a:solidFill>
+              </a:rPr>
+              <a:t>- </a:t>
+            </a:r>
+            <a:r>
+              <a:rPr sz="1500" b="0" dirty="0" err="1">
+                <a:solidFill>
+                  <a:srgbClr val="1F2937"/>
+                </a:solidFill>
+              </a:rPr>
+              <a:t>Thông</a:t>
+            </a:r>
+            <a:r>
+              <a:rPr sz="1500" b="0" dirty="0">
+                <a:solidFill>
+                  <a:srgbClr val="1F2937"/>
+                </a:solidFill>
+              </a:rPr>
+              <a:t> </a:t>
+            </a:r>
+            <a:r>
+              <a:rPr sz="1500" b="0" dirty="0" err="1">
+                <a:solidFill>
+                  <a:srgbClr val="1F2937"/>
+                </a:solidFill>
+              </a:rPr>
+              <a:t>báo</a:t>
+            </a:r>
+            <a:r>
+              <a:rPr sz="1500" b="0" dirty="0">
+                <a:solidFill>
+                  <a:srgbClr val="1F2937"/>
+                </a:solidFill>
+              </a:rPr>
+              <a:t> </a:t>
+            </a:r>
+            <a:r>
+              <a:rPr sz="1500" b="0" dirty="0" err="1">
+                <a:solidFill>
+                  <a:srgbClr val="1F2937"/>
+                </a:solidFill>
+              </a:rPr>
+              <a:t>phụ</a:t>
+            </a:r>
+            <a:r>
+              <a:rPr sz="1500" b="0" dirty="0">
+                <a:solidFill>
+                  <a:srgbClr val="1F2937"/>
+                </a:solidFill>
+              </a:rPr>
+              <a:t> </a:t>
+            </a:r>
+            <a:r>
+              <a:rPr sz="1500" b="0" dirty="0" err="1">
+                <a:solidFill>
+                  <a:srgbClr val="1F2937"/>
+                </a:solidFill>
+              </a:rPr>
+              <a:t>huynh</a:t>
+            </a:r>
+            <a:r>
+              <a:rPr sz="1500" b="0" dirty="0">
+                <a:solidFill>
+                  <a:srgbClr val="1F2937"/>
+                </a:solidFill>
+              </a:rPr>
+              <a:t> </a:t>
+            </a:r>
+            <a:r>
+              <a:rPr sz="1500" b="0" dirty="0" err="1">
+                <a:solidFill>
+                  <a:srgbClr val="1F2937"/>
+                </a:solidFill>
+              </a:rPr>
+              <a:t>tự</a:t>
+            </a:r>
+            <a:r>
+              <a:rPr sz="1500" b="0" dirty="0">
+                <a:solidFill>
+                  <a:srgbClr val="1F2937"/>
+                </a:solidFill>
+              </a:rPr>
+              <a:t> </a:t>
+            </a:r>
+            <a:r>
+              <a:rPr sz="1500" b="0" dirty="0" err="1">
+                <a:solidFill>
+                  <a:srgbClr val="1F2937"/>
+                </a:solidFill>
+              </a:rPr>
+              <a:t>động</a:t>
+            </a:r>
+            <a:r>
+              <a:rPr sz="1500" b="0" dirty="0">
+                <a:solidFill>
+                  <a:srgbClr val="1F2937"/>
+                </a:solidFill>
+              </a:rPr>
+              <a:t> (email + in-app)</a:t>
+            </a:r>
+          </a:p>
+          <a:p>
+            <a:r>
+              <a:rPr sz="1500" b="0" dirty="0">
+                <a:solidFill>
+                  <a:srgbClr val="1F2937"/>
+                </a:solidFill>
+              </a:rPr>
+              <a:t>- </a:t>
+            </a:r>
+            <a:r>
+              <a:rPr sz="1500" b="0" dirty="0" err="1">
+                <a:solidFill>
+                  <a:srgbClr val="1F2937"/>
+                </a:solidFill>
+              </a:rPr>
+              <a:t>Đồng</a:t>
+            </a:r>
+            <a:r>
+              <a:rPr sz="1500" b="0" dirty="0">
+                <a:solidFill>
+                  <a:srgbClr val="1F2937"/>
+                </a:solidFill>
+              </a:rPr>
+              <a:t> </a:t>
+            </a:r>
+            <a:r>
+              <a:rPr sz="1500" b="0" dirty="0" err="1">
+                <a:solidFill>
+                  <a:srgbClr val="1F2937"/>
+                </a:solidFill>
+              </a:rPr>
+              <a:t>bộ</a:t>
+            </a:r>
+            <a:r>
+              <a:rPr sz="1500" b="0" dirty="0">
+                <a:solidFill>
+                  <a:srgbClr val="1F2937"/>
+                </a:solidFill>
+              </a:rPr>
+              <a:t> 2 </a:t>
+            </a:r>
+            <a:r>
+              <a:rPr sz="1500" b="0" dirty="0" err="1">
+                <a:solidFill>
+                  <a:srgbClr val="1F2937"/>
+                </a:solidFill>
+              </a:rPr>
+              <a:t>chiều</a:t>
+            </a:r>
+            <a:r>
+              <a:rPr sz="1500" b="0" dirty="0">
+                <a:solidFill>
+                  <a:srgbClr val="1F2937"/>
+                </a:solidFill>
+              </a:rPr>
+              <a:t> </a:t>
+            </a:r>
+            <a:r>
+              <a:rPr sz="1500" b="0" dirty="0" err="1">
+                <a:solidFill>
+                  <a:srgbClr val="1F2937"/>
+                </a:solidFill>
+              </a:rPr>
+              <a:t>với</a:t>
+            </a:r>
+            <a:r>
+              <a:rPr sz="1500" b="0" dirty="0">
+                <a:solidFill>
+                  <a:srgbClr val="1F2937"/>
+                </a:solidFill>
+              </a:rPr>
+              <a:t> </a:t>
+            </a:r>
+            <a:r>
+              <a:rPr sz="1500" b="0" dirty="0" err="1">
+                <a:solidFill>
+                  <a:srgbClr val="1F2937"/>
+                </a:solidFill>
+              </a:rPr>
+              <a:t>sổ</a:t>
+            </a:r>
+            <a:r>
+              <a:rPr sz="1500" b="0" dirty="0">
+                <a:solidFill>
+                  <a:srgbClr val="1F2937"/>
+                </a:solidFill>
+              </a:rPr>
+              <a:t> </a:t>
+            </a:r>
+            <a:r>
+              <a:rPr sz="1500" b="0" dirty="0" err="1">
+                <a:solidFill>
+                  <a:srgbClr val="1F2937"/>
+                </a:solidFill>
+              </a:rPr>
+              <a:t>đầu</a:t>
+            </a:r>
+            <a:r>
+              <a:rPr sz="1500" b="0" dirty="0">
+                <a:solidFill>
+                  <a:srgbClr val="1F2937"/>
+                </a:solidFill>
+              </a:rPr>
+              <a:t> </a:t>
+            </a:r>
+            <a:r>
+              <a:rPr sz="1500" b="0" dirty="0" err="1">
+                <a:solidFill>
+                  <a:srgbClr val="1F2937"/>
+                </a:solidFill>
+              </a:rPr>
+              <a:t>bài</a:t>
+            </a:r>
+            <a:r>
+              <a:rPr sz="1500" b="0" dirty="0">
+                <a:solidFill>
+                  <a:srgbClr val="1F2937"/>
+                </a:solidFill>
+              </a:rPr>
+              <a:t> </a:t>
+            </a:r>
+            <a:r>
+              <a:rPr sz="1500" b="0" dirty="0" err="1">
+                <a:solidFill>
+                  <a:srgbClr val="1F2937"/>
+                </a:solidFill>
+              </a:rPr>
+              <a:t>tiết</a:t>
+            </a:r>
+            <a:r>
+              <a:rPr sz="1500" b="0" dirty="0">
+                <a:solidFill>
+                  <a:srgbClr val="1F2937"/>
+                </a:solidFill>
+              </a:rPr>
+              <a:t> </a:t>
+            </a:r>
+            <a:r>
+              <a:rPr sz="1500" b="0" dirty="0" err="1">
+                <a:solidFill>
+                  <a:srgbClr val="1F2937"/>
+                </a:solidFill>
+              </a:rPr>
+              <a:t>học</a:t>
+            </a:r>
+            <a:endParaRPr sz="1500" b="0" dirty="0">
+              <a:solidFill>
+                <a:srgbClr val="1F2937"/>
+              </a:solidFill>
+            </a:endParaRPr>
           </a:p>
         </p:txBody>
       </p:sp>
@@ -4879,7 +6789,6 @@
           </a:bodyPr>
           <a:lstStyle/>
           <a:p>
-            <a:pPr/>
             <a:r>
               <a:rPr sz="1100" b="0">
                 <a:solidFill>
@@ -4900,7 +6809,7 @@
 </file>
 
 <file path=ppt/slides/slide5.xml><?xml version="1.0" encoding="utf-8"?>
-<p:sld xmlns:a="http://schemas.openxmlformats.org/drawingml/2006/main" xmlns:p="http://schemas.openxmlformats.org/presentationml/2006/main" xmlns:r="http://schemas.openxmlformats.org/officeDocument/2006/relationships">
+<p:sld xmlns:a="http://schemas.openxmlformats.org/drawingml/2006/main" xmlns:r="http://schemas.openxmlformats.org/officeDocument/2006/relationships" xmlns:p="http://schemas.openxmlformats.org/presentationml/2006/main">
   <p:cSld>
     <p:spTree>
       <p:nvGrpSpPr>
@@ -4908,7 +6817,14 @@
         <p:cNvGrpSpPr/>
         <p:nvPr/>
       </p:nvGrpSpPr>
-      <p:grpSpPr/>
+      <p:grpSpPr>
+        <a:xfrm>
+          <a:off x="0" y="0"/>
+          <a:ext cx="0" cy="0"/>
+          <a:chOff x="0" y="0"/>
+          <a:chExt cx="0" cy="0"/>
+        </a:xfrm>
+      </p:grpSpPr>
       <p:sp>
         <p:nvSpPr>
           <p:cNvPr id="2" name="Rectangle 1"/>
@@ -4949,6 +6865,7 @@
           <a:lstStyle/>
           <a:p>
             <a:pPr algn="ctr"/>
+            <a:endParaRPr/>
           </a:p>
         </p:txBody>
       </p:sp>
@@ -4974,7 +6891,6 @@
           </a:bodyPr>
           <a:lstStyle/>
           <a:p>
-            <a:pPr/>
             <a:r>
               <a:rPr sz="2800" b="1">
                 <a:solidFill>
@@ -5008,7 +6924,6 @@
           </a:bodyPr>
           <a:lstStyle/>
           <a:p>
-            <a:pPr/>
             <a:r>
               <a:rPr sz="1500" b="0">
                 <a:solidFill>
@@ -5019,7 +6934,6 @@
             </a:r>
           </a:p>
           <a:p>
-            <a:pPr/>
             <a:r>
               <a:rPr sz="1500" b="0">
                 <a:solidFill>
@@ -5030,7 +6944,6 @@
             </a:r>
           </a:p>
           <a:p>
-            <a:pPr/>
             <a:r>
               <a:rPr sz="1500" b="0">
                 <a:solidFill>
@@ -5041,7 +6954,6 @@
             </a:r>
           </a:p>
           <a:p>
-            <a:pPr/>
             <a:r>
               <a:rPr sz="1500" b="0">
                 <a:solidFill>
@@ -5052,7 +6964,6 @@
             </a:r>
           </a:p>
           <a:p>
-            <a:pPr/>
             <a:r>
               <a:rPr sz="1500" b="0">
                 <a:solidFill>
@@ -5115,7 +7026,6 @@
           </a:bodyPr>
           <a:lstStyle/>
           <a:p>
-            <a:pPr/>
             <a:r>
               <a:rPr sz="1100" b="0">
                 <a:solidFill>
@@ -5136,7 +7046,7 @@
 </file>
 
 <file path=ppt/slides/slide6.xml><?xml version="1.0" encoding="utf-8"?>
-<p:sld xmlns:a="http://schemas.openxmlformats.org/drawingml/2006/main" xmlns:p="http://schemas.openxmlformats.org/presentationml/2006/main" xmlns:r="http://schemas.openxmlformats.org/officeDocument/2006/relationships">
+<p:sld xmlns:a="http://schemas.openxmlformats.org/drawingml/2006/main" xmlns:r="http://schemas.openxmlformats.org/officeDocument/2006/relationships" xmlns:p="http://schemas.openxmlformats.org/presentationml/2006/main">
   <p:cSld>
     <p:spTree>
       <p:nvGrpSpPr>
@@ -5144,7 +7054,14 @@
         <p:cNvGrpSpPr/>
         <p:nvPr/>
       </p:nvGrpSpPr>
-      <p:grpSpPr/>
+      <p:grpSpPr>
+        <a:xfrm>
+          <a:off x="0" y="0"/>
+          <a:ext cx="0" cy="0"/>
+          <a:chOff x="0" y="0"/>
+          <a:chExt cx="0" cy="0"/>
+        </a:xfrm>
+      </p:grpSpPr>
       <p:sp>
         <p:nvSpPr>
           <p:cNvPr id="2" name="Rectangle 1"/>
@@ -5185,6 +7102,7 @@
           <a:lstStyle/>
           <a:p>
             <a:pPr algn="ctr"/>
+            <a:endParaRPr/>
           </a:p>
         </p:txBody>
       </p:sp>
@@ -5210,7 +7128,6 @@
           </a:bodyPr>
           <a:lstStyle/>
           <a:p>
-            <a:pPr/>
             <a:r>
               <a:rPr sz="2800" b="1">
                 <a:solidFill>
@@ -5244,7 +7161,6 @@
           </a:bodyPr>
           <a:lstStyle/>
           <a:p>
-            <a:pPr/>
             <a:r>
               <a:rPr sz="1500" b="0">
                 <a:solidFill>
@@ -5255,7 +7171,6 @@
             </a:r>
           </a:p>
           <a:p>
-            <a:pPr/>
             <a:r>
               <a:rPr sz="1500" b="0">
                 <a:solidFill>
@@ -5266,7 +7181,6 @@
             </a:r>
           </a:p>
           <a:p>
-            <a:pPr/>
             <a:r>
               <a:rPr sz="1500" b="0">
                 <a:solidFill>
@@ -5277,7 +7191,6 @@
             </a:r>
           </a:p>
           <a:p>
-            <a:pPr/>
             <a:r>
               <a:rPr sz="1500" b="0">
                 <a:solidFill>
@@ -5288,7 +7201,6 @@
             </a:r>
           </a:p>
           <a:p>
-            <a:pPr/>
             <a:r>
               <a:rPr sz="1500" b="0">
                 <a:solidFill>
@@ -5299,7 +7211,6 @@
             </a:r>
           </a:p>
           <a:p>
-            <a:pPr/>
             <a:r>
               <a:rPr sz="1500" b="0">
                 <a:solidFill>
@@ -5362,7 +7273,6 @@
           </a:bodyPr>
           <a:lstStyle/>
           <a:p>
-            <a:pPr/>
             <a:r>
               <a:rPr sz="1100" b="0">
                 <a:solidFill>
@@ -5383,7 +7293,7 @@
 </file>
 
 <file path=ppt/slides/slide7.xml><?xml version="1.0" encoding="utf-8"?>
-<p:sld xmlns:a="http://schemas.openxmlformats.org/drawingml/2006/main" xmlns:p="http://schemas.openxmlformats.org/presentationml/2006/main" xmlns:r="http://schemas.openxmlformats.org/officeDocument/2006/relationships">
+<p:sld xmlns:a="http://schemas.openxmlformats.org/drawingml/2006/main" xmlns:r="http://schemas.openxmlformats.org/officeDocument/2006/relationships" xmlns:p="http://schemas.openxmlformats.org/presentationml/2006/main">
   <p:cSld>
     <p:spTree>
       <p:nvGrpSpPr>
@@ -5391,7 +7301,14 @@
         <p:cNvGrpSpPr/>
         <p:nvPr/>
       </p:nvGrpSpPr>
-      <p:grpSpPr/>
+      <p:grpSpPr>
+        <a:xfrm>
+          <a:off x="0" y="0"/>
+          <a:ext cx="0" cy="0"/>
+          <a:chOff x="0" y="0"/>
+          <a:chExt cx="0" cy="0"/>
+        </a:xfrm>
+      </p:grpSpPr>
       <p:sp>
         <p:nvSpPr>
           <p:cNvPr id="2" name="Rectangle 1"/>
@@ -5432,6 +7349,7 @@
           <a:lstStyle/>
           <a:p>
             <a:pPr algn="ctr"/>
+            <a:endParaRPr/>
           </a:p>
         </p:txBody>
       </p:sp>
@@ -5457,7 +7375,6 @@
           </a:bodyPr>
           <a:lstStyle/>
           <a:p>
-            <a:pPr/>
             <a:r>
               <a:rPr sz="2800" b="1">
                 <a:solidFill>
@@ -5491,7 +7408,6 @@
           </a:bodyPr>
           <a:lstStyle/>
           <a:p>
-            <a:pPr/>
             <a:r>
               <a:rPr sz="1500" b="0">
                 <a:solidFill>
@@ -5502,7 +7418,6 @@
             </a:r>
           </a:p>
           <a:p>
-            <a:pPr/>
             <a:r>
               <a:rPr sz="1500" b="0">
                 <a:solidFill>
@@ -5513,7 +7428,6 @@
             </a:r>
           </a:p>
           <a:p>
-            <a:pPr/>
             <a:r>
               <a:rPr sz="1500" b="0">
                 <a:solidFill>
@@ -5524,7 +7438,6 @@
             </a:r>
           </a:p>
           <a:p>
-            <a:pPr/>
             <a:r>
               <a:rPr sz="1500" b="0">
                 <a:solidFill>
@@ -5535,7 +7448,6 @@
             </a:r>
           </a:p>
           <a:p>
-            <a:pPr/>
             <a:r>
               <a:rPr sz="1500" b="0">
                 <a:solidFill>
@@ -5598,7 +7510,6 @@
           </a:bodyPr>
           <a:lstStyle/>
           <a:p>
-            <a:pPr/>
             <a:r>
               <a:rPr sz="1100" b="0">
                 <a:solidFill>
@@ -5619,7 +7530,7 @@
 </file>
 
 <file path=ppt/slides/slide8.xml><?xml version="1.0" encoding="utf-8"?>
-<p:sld xmlns:a="http://schemas.openxmlformats.org/drawingml/2006/main" xmlns:p="http://schemas.openxmlformats.org/presentationml/2006/main" xmlns:r="http://schemas.openxmlformats.org/officeDocument/2006/relationships">
+<p:sld xmlns:a="http://schemas.openxmlformats.org/drawingml/2006/main" xmlns:r="http://schemas.openxmlformats.org/officeDocument/2006/relationships" xmlns:p="http://schemas.openxmlformats.org/presentationml/2006/main">
   <p:cSld>
     <p:spTree>
       <p:nvGrpSpPr>
@@ -5627,7 +7538,14 @@
         <p:cNvGrpSpPr/>
         <p:nvPr/>
       </p:nvGrpSpPr>
-      <p:grpSpPr/>
+      <p:grpSpPr>
+        <a:xfrm>
+          <a:off x="0" y="0"/>
+          <a:ext cx="0" cy="0"/>
+          <a:chOff x="0" y="0"/>
+          <a:chExt cx="0" cy="0"/>
+        </a:xfrm>
+      </p:grpSpPr>
       <p:sp>
         <p:nvSpPr>
           <p:cNvPr id="2" name="Rectangle 1"/>
@@ -5668,6 +7586,7 @@
           <a:lstStyle/>
           <a:p>
             <a:pPr algn="ctr"/>
+            <a:endParaRPr/>
           </a:p>
         </p:txBody>
       </p:sp>
@@ -5693,7 +7612,6 @@
           </a:bodyPr>
           <a:lstStyle/>
           <a:p>
-            <a:pPr/>
             <a:r>
               <a:rPr sz="2800" b="1">
                 <a:solidFill>
@@ -5727,7 +7645,6 @@
           </a:bodyPr>
           <a:lstStyle/>
           <a:p>
-            <a:pPr/>
             <a:r>
               <a:rPr sz="1500" b="0">
                 <a:solidFill>
@@ -5738,7 +7655,6 @@
             </a:r>
           </a:p>
           <a:p>
-            <a:pPr/>
             <a:r>
               <a:rPr sz="1500" b="0">
                 <a:solidFill>
@@ -5749,7 +7665,6 @@
             </a:r>
           </a:p>
           <a:p>
-            <a:pPr/>
             <a:r>
               <a:rPr sz="1500" b="0">
                 <a:solidFill>
@@ -5760,7 +7675,6 @@
             </a:r>
           </a:p>
           <a:p>
-            <a:pPr/>
             <a:r>
               <a:rPr sz="1500" b="0">
                 <a:solidFill>
@@ -5771,7 +7685,6 @@
             </a:r>
           </a:p>
           <a:p>
-            <a:pPr/>
             <a:r>
               <a:rPr sz="1500" b="0">
                 <a:solidFill>
@@ -5834,7 +7747,6 @@
           </a:bodyPr>
           <a:lstStyle/>
           <a:p>
-            <a:pPr/>
             <a:r>
               <a:rPr sz="1100" b="0">
                 <a:solidFill>
@@ -5855,7 +7767,7 @@
 </file>
 
 <file path=ppt/slides/slide9.xml><?xml version="1.0" encoding="utf-8"?>
-<p:sld xmlns:a="http://schemas.openxmlformats.org/drawingml/2006/main" xmlns:p="http://schemas.openxmlformats.org/presentationml/2006/main" xmlns:r="http://schemas.openxmlformats.org/officeDocument/2006/relationships">
+<p:sld xmlns:a="http://schemas.openxmlformats.org/drawingml/2006/main" xmlns:r="http://schemas.openxmlformats.org/officeDocument/2006/relationships" xmlns:p="http://schemas.openxmlformats.org/presentationml/2006/main">
   <p:cSld>
     <p:spTree>
       <p:nvGrpSpPr>
@@ -5863,7 +7775,14 @@
         <p:cNvGrpSpPr/>
         <p:nvPr/>
       </p:nvGrpSpPr>
-      <p:grpSpPr/>
+      <p:grpSpPr>
+        <a:xfrm>
+          <a:off x="0" y="0"/>
+          <a:ext cx="0" cy="0"/>
+          <a:chOff x="0" y="0"/>
+          <a:chExt cx="0" cy="0"/>
+        </a:xfrm>
+      </p:grpSpPr>
       <p:sp>
         <p:nvSpPr>
           <p:cNvPr id="2" name="Rectangle 1"/>
@@ -5904,6 +7823,7 @@
           <a:lstStyle/>
           <a:p>
             <a:pPr algn="ctr"/>
+            <a:endParaRPr/>
           </a:p>
         </p:txBody>
       </p:sp>
@@ -5929,7 +7849,6 @@
           </a:bodyPr>
           <a:lstStyle/>
           <a:p>
-            <a:pPr/>
             <a:r>
               <a:rPr sz="2800" b="1">
                 <a:solidFill>
@@ -5963,7 +7882,6 @@
           </a:bodyPr>
           <a:lstStyle/>
           <a:p>
-            <a:pPr/>
             <a:r>
               <a:rPr sz="1500" b="0">
                 <a:solidFill>
@@ -5974,7 +7892,6 @@
             </a:r>
           </a:p>
           <a:p>
-            <a:pPr/>
             <a:r>
               <a:rPr sz="1500" b="0">
                 <a:solidFill>
@@ -5985,7 +7902,6 @@
             </a:r>
           </a:p>
           <a:p>
-            <a:pPr/>
             <a:r>
               <a:rPr sz="1500" b="0">
                 <a:solidFill>
@@ -5996,7 +7912,6 @@
             </a:r>
           </a:p>
           <a:p>
-            <a:pPr/>
             <a:r>
               <a:rPr sz="1500" b="0">
                 <a:solidFill>
@@ -6007,7 +7922,6 @@
             </a:r>
           </a:p>
           <a:p>
-            <a:pPr/>
             <a:r>
               <a:rPr sz="1500" b="0">
                 <a:solidFill>
@@ -6070,7 +7984,6 @@
           </a:bodyPr>
           <a:lstStyle/>
           <a:p>
-            <a:pPr/>
             <a:r>
               <a:rPr sz="1100" b="0">
                 <a:solidFill>

--- a/docs/user-guide/SO-CHU-NHIEM-SO-GIOI-THIEU.pptx
+++ b/docs/user-guide/SO-CHU-NHIEM-SO-GIOI-THIEU.pptx
@@ -5,21 +5,21 @@
     <p:sldMasterId id="2147483648" r:id="rId1"/>
   </p:sldMasterIdLst>
   <p:sldIdLst>
-    <p:sldId id="256" r:id="rId2"/>
-    <p:sldId id="257" r:id="rId3"/>
-    <p:sldId id="258" r:id="rId4"/>
-    <p:sldId id="259" r:id="rId5"/>
-    <p:sldId id="260" r:id="rId6"/>
-    <p:sldId id="261" r:id="rId7"/>
-    <p:sldId id="262" r:id="rId8"/>
-    <p:sldId id="263" r:id="rId9"/>
-    <p:sldId id="264" r:id="rId10"/>
-    <p:sldId id="265" r:id="rId11"/>
-    <p:sldId id="266" r:id="rId12"/>
-    <p:sldId id="267" r:id="rId13"/>
-    <p:sldId id="268" r:id="rId14"/>
+    <p:sldId id="256" r:id="rId7"/>
+    <p:sldId id="257" r:id="rId8"/>
+    <p:sldId id="258" r:id="rId9"/>
+    <p:sldId id="259" r:id="rId10"/>
+    <p:sldId id="260" r:id="rId11"/>
+    <p:sldId id="261" r:id="rId12"/>
+    <p:sldId id="262" r:id="rId13"/>
+    <p:sldId id="263" r:id="rId14"/>
+    <p:sldId id="264" r:id="rId15"/>
+    <p:sldId id="265" r:id="rId16"/>
+    <p:sldId id="266" r:id="rId17"/>
+    <p:sldId id="267" r:id="rId18"/>
+    <p:sldId id="268" r:id="rId19"/>
   </p:sldIdLst>
-  <p:sldSz cx="12192000" cy="6858000"/>
+  <p:sldSz cx="12191695" cy="6858000" type="screen4x3"/>
   <p:notesSz cx="6858000" cy="9144000"/>
   <p:defaultTextStyle>
     <a:defPPr>
@@ -116,22 +116,6 @@
       </a:defRPr>
     </a:lvl9pPr>
   </p:defaultTextStyle>
-  <p:extLst>
-    <p:ext uri="{EFAFB233-063F-42B5-8137-9DF3F51BA10A}">
-      <p15:sldGuideLst xmlns:p15="http://schemas.microsoft.com/office/powerpoint/2012/main">
-        <p15:guide id="1" orient="horz" pos="2160">
-          <p15:clr>
-            <a:srgbClr val="A4A3A4"/>
-          </p15:clr>
-        </p15:guide>
-        <p15:guide id="2" pos="2880">
-          <p15:clr>
-            <a:srgbClr val="A4A3A4"/>
-          </p15:clr>
-        </p15:guide>
-      </p15:sldGuideLst>
-    </p:ext>
-  </p:extLst>
 </p:presentation>
 </file>
 
@@ -173,9 +157,10 @@
           <a:lstStyle/>
           <a:p>
             <a:r>
-              <a:rPr lang="en-US"/>
+              <a:rPr lang="en-US" smtClean="0"/>
               <a:t>Click to edit Master title style</a:t>
             </a:r>
+            <a:endParaRPr lang="en-US"/>
           </a:p>
         </p:txBody>
       </p:sp>
@@ -291,9 +276,10 @@
           </a:lstStyle>
           <a:p>
             <a:r>
-              <a:rPr lang="en-US"/>
+              <a:rPr lang="en-US" smtClean="0"/>
               <a:t>Click to edit Master subtitle style</a:t>
             </a:r>
+            <a:endParaRPr lang="en-US"/>
           </a:p>
         </p:txBody>
       </p:sp>
@@ -314,7 +300,7 @@
           <a:p>
             <a:fld id="{5BCAD085-E8A6-8845-BD4E-CB4CCA059FC4}" type="datetimeFigureOut">
               <a:rPr lang="en-US" smtClean="0"/>
-              <a:t>9/21/26</a:t>
+              <a:t>1/27/13</a:t>
             </a:fld>
             <a:endParaRPr lang="en-US"/>
           </a:p>
@@ -408,9 +394,10 @@
           <a:lstStyle/>
           <a:p>
             <a:r>
-              <a:rPr lang="en-US"/>
+              <a:rPr lang="en-US" smtClean="0"/>
               <a:t>Click to edit Master title style</a:t>
             </a:r>
+            <a:endParaRPr lang="en-US"/>
           </a:p>
         </p:txBody>
       </p:sp>
@@ -431,37 +418,38 @@
           <a:p>
             <a:pPr lvl="0"/>
             <a:r>
-              <a:rPr lang="en-US"/>
+              <a:rPr lang="en-US" smtClean="0"/>
               <a:t>Click to edit Master text styles</a:t>
             </a:r>
           </a:p>
           <a:p>
             <a:pPr lvl="1"/>
             <a:r>
-              <a:rPr lang="en-US"/>
+              <a:rPr lang="en-US" smtClean="0"/>
               <a:t>Second level</a:t>
             </a:r>
           </a:p>
           <a:p>
             <a:pPr lvl="2"/>
             <a:r>
-              <a:rPr lang="en-US"/>
+              <a:rPr lang="en-US" smtClean="0"/>
               <a:t>Third level</a:t>
             </a:r>
           </a:p>
           <a:p>
             <a:pPr lvl="3"/>
             <a:r>
-              <a:rPr lang="en-US"/>
+              <a:rPr lang="en-US" smtClean="0"/>
               <a:t>Fourth level</a:t>
             </a:r>
           </a:p>
           <a:p>
             <a:pPr lvl="4"/>
             <a:r>
-              <a:rPr lang="en-US"/>
+              <a:rPr lang="en-US" smtClean="0"/>
               <a:t>Fifth level</a:t>
             </a:r>
+            <a:endParaRPr lang="en-US"/>
           </a:p>
         </p:txBody>
       </p:sp>
@@ -482,7 +470,7 @@
           <a:p>
             <a:fld id="{5BCAD085-E8A6-8845-BD4E-CB4CCA059FC4}" type="datetimeFigureOut">
               <a:rPr lang="en-US" smtClean="0"/>
-              <a:t>9/21/26</a:t>
+              <a:t>1/27/13</a:t>
             </a:fld>
             <a:endParaRPr lang="en-US"/>
           </a:p>
@@ -581,9 +569,10 @@
           <a:lstStyle/>
           <a:p>
             <a:r>
-              <a:rPr lang="en-US"/>
+              <a:rPr lang="en-US" smtClean="0"/>
               <a:t>Click to edit Master title style</a:t>
             </a:r>
+            <a:endParaRPr lang="en-US"/>
           </a:p>
         </p:txBody>
       </p:sp>
@@ -609,37 +598,38 @@
           <a:p>
             <a:pPr lvl="0"/>
             <a:r>
-              <a:rPr lang="en-US"/>
+              <a:rPr lang="en-US" smtClean="0"/>
               <a:t>Click to edit Master text styles</a:t>
             </a:r>
           </a:p>
           <a:p>
             <a:pPr lvl="1"/>
             <a:r>
-              <a:rPr lang="en-US"/>
+              <a:rPr lang="en-US" smtClean="0"/>
               <a:t>Second level</a:t>
             </a:r>
           </a:p>
           <a:p>
             <a:pPr lvl="2"/>
             <a:r>
-              <a:rPr lang="en-US"/>
+              <a:rPr lang="en-US" smtClean="0"/>
               <a:t>Third level</a:t>
             </a:r>
           </a:p>
           <a:p>
             <a:pPr lvl="3"/>
             <a:r>
-              <a:rPr lang="en-US"/>
+              <a:rPr lang="en-US" smtClean="0"/>
               <a:t>Fourth level</a:t>
             </a:r>
           </a:p>
           <a:p>
             <a:pPr lvl="4"/>
             <a:r>
-              <a:rPr lang="en-US"/>
+              <a:rPr lang="en-US" smtClean="0"/>
               <a:t>Fifth level</a:t>
             </a:r>
+            <a:endParaRPr lang="en-US"/>
           </a:p>
         </p:txBody>
       </p:sp>
@@ -660,7 +650,7 @@
           <a:p>
             <a:fld id="{5BCAD085-E8A6-8845-BD4E-CB4CCA059FC4}" type="datetimeFigureOut">
               <a:rPr lang="en-US" smtClean="0"/>
-              <a:t>9/21/26</a:t>
+              <a:t>1/27/13</a:t>
             </a:fld>
             <a:endParaRPr lang="en-US"/>
           </a:p>
@@ -754,9 +744,10 @@
           <a:lstStyle/>
           <a:p>
             <a:r>
-              <a:rPr lang="en-US"/>
+              <a:rPr lang="en-US" smtClean="0"/>
               <a:t>Click to edit Master title style</a:t>
             </a:r>
+            <a:endParaRPr lang="en-US"/>
           </a:p>
         </p:txBody>
       </p:sp>
@@ -777,37 +768,38 @@
           <a:p>
             <a:pPr lvl="0"/>
             <a:r>
-              <a:rPr lang="en-US"/>
+              <a:rPr lang="en-US" smtClean="0"/>
               <a:t>Click to edit Master text styles</a:t>
             </a:r>
           </a:p>
           <a:p>
             <a:pPr lvl="1"/>
             <a:r>
-              <a:rPr lang="en-US"/>
+              <a:rPr lang="en-US" smtClean="0"/>
               <a:t>Second level</a:t>
             </a:r>
           </a:p>
           <a:p>
             <a:pPr lvl="2"/>
             <a:r>
-              <a:rPr lang="en-US"/>
+              <a:rPr lang="en-US" smtClean="0"/>
               <a:t>Third level</a:t>
             </a:r>
           </a:p>
           <a:p>
             <a:pPr lvl="3"/>
             <a:r>
-              <a:rPr lang="en-US"/>
+              <a:rPr lang="en-US" smtClean="0"/>
               <a:t>Fourth level</a:t>
             </a:r>
           </a:p>
           <a:p>
             <a:pPr lvl="4"/>
             <a:r>
-              <a:rPr lang="en-US"/>
+              <a:rPr lang="en-US" smtClean="0"/>
               <a:t>Fifth level</a:t>
             </a:r>
+            <a:endParaRPr lang="en-US"/>
           </a:p>
         </p:txBody>
       </p:sp>
@@ -828,7 +820,7 @@
           <a:p>
             <a:fld id="{5BCAD085-E8A6-8845-BD4E-CB4CCA059FC4}" type="datetimeFigureOut">
               <a:rPr lang="en-US" smtClean="0"/>
-              <a:t>9/21/26</a:t>
+              <a:t>1/27/13</a:t>
             </a:fld>
             <a:endParaRPr lang="en-US"/>
           </a:p>
@@ -931,9 +923,10 @@
           </a:lstStyle>
           <a:p>
             <a:r>
-              <a:rPr lang="en-US"/>
+              <a:rPr lang="en-US" smtClean="0"/>
               <a:t>Click to edit Master title style</a:t>
             </a:r>
+            <a:endParaRPr lang="en-US"/>
           </a:p>
         </p:txBody>
       </p:sp>
@@ -1050,7 +1043,7 @@
           <a:p>
             <a:pPr lvl="0"/>
             <a:r>
-              <a:rPr lang="en-US"/>
+              <a:rPr lang="en-US" smtClean="0"/>
               <a:t>Click to edit Master text styles</a:t>
             </a:r>
           </a:p>
@@ -1073,7 +1066,7 @@
           <a:p>
             <a:fld id="{5BCAD085-E8A6-8845-BD4E-CB4CCA059FC4}" type="datetimeFigureOut">
               <a:rPr lang="en-US" smtClean="0"/>
-              <a:t>9/21/26</a:t>
+              <a:t>1/27/13</a:t>
             </a:fld>
             <a:endParaRPr lang="en-US"/>
           </a:p>
@@ -1167,9 +1160,10 @@
           <a:lstStyle/>
           <a:p>
             <a:r>
-              <a:rPr lang="en-US"/>
+              <a:rPr lang="en-US" smtClean="0"/>
               <a:t>Click to edit Master title style</a:t>
             </a:r>
+            <a:endParaRPr lang="en-US"/>
           </a:p>
         </p:txBody>
       </p:sp>
@@ -1223,37 +1217,38 @@
           <a:p>
             <a:pPr lvl="0"/>
             <a:r>
-              <a:rPr lang="en-US"/>
+              <a:rPr lang="en-US" smtClean="0"/>
               <a:t>Click to edit Master text styles</a:t>
             </a:r>
           </a:p>
           <a:p>
             <a:pPr lvl="1"/>
             <a:r>
-              <a:rPr lang="en-US"/>
+              <a:rPr lang="en-US" smtClean="0"/>
               <a:t>Second level</a:t>
             </a:r>
           </a:p>
           <a:p>
             <a:pPr lvl="2"/>
             <a:r>
-              <a:rPr lang="en-US"/>
+              <a:rPr lang="en-US" smtClean="0"/>
               <a:t>Third level</a:t>
             </a:r>
           </a:p>
           <a:p>
             <a:pPr lvl="3"/>
             <a:r>
-              <a:rPr lang="en-US"/>
+              <a:rPr lang="en-US" smtClean="0"/>
               <a:t>Fourth level</a:t>
             </a:r>
           </a:p>
           <a:p>
             <a:pPr lvl="4"/>
             <a:r>
-              <a:rPr lang="en-US"/>
+              <a:rPr lang="en-US" smtClean="0"/>
               <a:t>Fifth level</a:t>
             </a:r>
+            <a:endParaRPr lang="en-US"/>
           </a:p>
         </p:txBody>
       </p:sp>
@@ -1307,37 +1302,38 @@
           <a:p>
             <a:pPr lvl="0"/>
             <a:r>
-              <a:rPr lang="en-US"/>
+              <a:rPr lang="en-US" smtClean="0"/>
               <a:t>Click to edit Master text styles</a:t>
             </a:r>
           </a:p>
           <a:p>
             <a:pPr lvl="1"/>
             <a:r>
-              <a:rPr lang="en-US"/>
+              <a:rPr lang="en-US" smtClean="0"/>
               <a:t>Second level</a:t>
             </a:r>
           </a:p>
           <a:p>
             <a:pPr lvl="2"/>
             <a:r>
-              <a:rPr lang="en-US"/>
+              <a:rPr lang="en-US" smtClean="0"/>
               <a:t>Third level</a:t>
             </a:r>
           </a:p>
           <a:p>
             <a:pPr lvl="3"/>
             <a:r>
-              <a:rPr lang="en-US"/>
+              <a:rPr lang="en-US" smtClean="0"/>
               <a:t>Fourth level</a:t>
             </a:r>
           </a:p>
           <a:p>
             <a:pPr lvl="4"/>
             <a:r>
-              <a:rPr lang="en-US"/>
+              <a:rPr lang="en-US" smtClean="0"/>
               <a:t>Fifth level</a:t>
             </a:r>
+            <a:endParaRPr lang="en-US"/>
           </a:p>
         </p:txBody>
       </p:sp>
@@ -1358,7 +1354,7 @@
           <a:p>
             <a:fld id="{5BCAD085-E8A6-8845-BD4E-CB4CCA059FC4}" type="datetimeFigureOut">
               <a:rPr lang="en-US" smtClean="0"/>
-              <a:t>9/21/26</a:t>
+              <a:t>1/27/13</a:t>
             </a:fld>
             <a:endParaRPr lang="en-US"/>
           </a:p>
@@ -1456,9 +1452,10 @@
           </a:lstStyle>
           <a:p>
             <a:r>
-              <a:rPr lang="en-US"/>
+              <a:rPr lang="en-US" smtClean="0"/>
               <a:t>Click to edit Master title style</a:t>
             </a:r>
+            <a:endParaRPr lang="en-US"/>
           </a:p>
         </p:txBody>
       </p:sp>
@@ -1521,7 +1518,7 @@
           <a:p>
             <a:pPr lvl="0"/>
             <a:r>
-              <a:rPr lang="en-US"/>
+              <a:rPr lang="en-US" smtClean="0"/>
               <a:t>Click to edit Master text styles</a:t>
             </a:r>
           </a:p>
@@ -1577,37 +1574,38 @@
           <a:p>
             <a:pPr lvl="0"/>
             <a:r>
-              <a:rPr lang="en-US"/>
+              <a:rPr lang="en-US" smtClean="0"/>
               <a:t>Click to edit Master text styles</a:t>
             </a:r>
           </a:p>
           <a:p>
             <a:pPr lvl="1"/>
             <a:r>
-              <a:rPr lang="en-US"/>
+              <a:rPr lang="en-US" smtClean="0"/>
               <a:t>Second level</a:t>
             </a:r>
           </a:p>
           <a:p>
             <a:pPr lvl="2"/>
             <a:r>
-              <a:rPr lang="en-US"/>
+              <a:rPr lang="en-US" smtClean="0"/>
               <a:t>Third level</a:t>
             </a:r>
           </a:p>
           <a:p>
             <a:pPr lvl="3"/>
             <a:r>
-              <a:rPr lang="en-US"/>
+              <a:rPr lang="en-US" smtClean="0"/>
               <a:t>Fourth level</a:t>
             </a:r>
           </a:p>
           <a:p>
             <a:pPr lvl="4"/>
             <a:r>
-              <a:rPr lang="en-US"/>
+              <a:rPr lang="en-US" smtClean="0"/>
               <a:t>Fifth level</a:t>
             </a:r>
+            <a:endParaRPr lang="en-US"/>
           </a:p>
         </p:txBody>
       </p:sp>
@@ -1670,7 +1668,7 @@
           <a:p>
             <a:pPr lvl="0"/>
             <a:r>
-              <a:rPr lang="en-US"/>
+              <a:rPr lang="en-US" smtClean="0"/>
               <a:t>Click to edit Master text styles</a:t>
             </a:r>
           </a:p>
@@ -1726,37 +1724,38 @@
           <a:p>
             <a:pPr lvl="0"/>
             <a:r>
-              <a:rPr lang="en-US"/>
+              <a:rPr lang="en-US" smtClean="0"/>
               <a:t>Click to edit Master text styles</a:t>
             </a:r>
           </a:p>
           <a:p>
             <a:pPr lvl="1"/>
             <a:r>
-              <a:rPr lang="en-US"/>
+              <a:rPr lang="en-US" smtClean="0"/>
               <a:t>Second level</a:t>
             </a:r>
           </a:p>
           <a:p>
             <a:pPr lvl="2"/>
             <a:r>
-              <a:rPr lang="en-US"/>
+              <a:rPr lang="en-US" smtClean="0"/>
               <a:t>Third level</a:t>
             </a:r>
           </a:p>
           <a:p>
             <a:pPr lvl="3"/>
             <a:r>
-              <a:rPr lang="en-US"/>
+              <a:rPr lang="en-US" smtClean="0"/>
               <a:t>Fourth level</a:t>
             </a:r>
           </a:p>
           <a:p>
             <a:pPr lvl="4"/>
             <a:r>
-              <a:rPr lang="en-US"/>
+              <a:rPr lang="en-US" smtClean="0"/>
               <a:t>Fifth level</a:t>
             </a:r>
+            <a:endParaRPr lang="en-US"/>
           </a:p>
         </p:txBody>
       </p:sp>
@@ -1777,7 +1776,7 @@
           <a:p>
             <a:fld id="{5BCAD085-E8A6-8845-BD4E-CB4CCA059FC4}" type="datetimeFigureOut">
               <a:rPr lang="en-US" smtClean="0"/>
-              <a:t>9/21/26</a:t>
+              <a:t>1/27/13</a:t>
             </a:fld>
             <a:endParaRPr lang="en-US"/>
           </a:p>
@@ -1871,9 +1870,10 @@
           <a:lstStyle/>
           <a:p>
             <a:r>
-              <a:rPr lang="en-US"/>
+              <a:rPr lang="en-US" smtClean="0"/>
               <a:t>Click to edit Master title style</a:t>
             </a:r>
+            <a:endParaRPr lang="en-US"/>
           </a:p>
         </p:txBody>
       </p:sp>
@@ -1894,7 +1894,7 @@
           <a:p>
             <a:fld id="{5BCAD085-E8A6-8845-BD4E-CB4CCA059FC4}" type="datetimeFigureOut">
               <a:rPr lang="en-US" smtClean="0"/>
-              <a:t>9/21/26</a:t>
+              <a:t>1/27/13</a:t>
             </a:fld>
             <a:endParaRPr lang="en-US"/>
           </a:p>
@@ -1989,7 +1989,7 @@
           <a:p>
             <a:fld id="{5BCAD085-E8A6-8845-BD4E-CB4CCA059FC4}" type="datetimeFigureOut">
               <a:rPr lang="en-US" smtClean="0"/>
-              <a:t>9/21/26</a:t>
+              <a:t>1/27/13</a:t>
             </a:fld>
             <a:endParaRPr lang="en-US"/>
           </a:p>
@@ -2092,9 +2092,10 @@
           </a:lstStyle>
           <a:p>
             <a:r>
-              <a:rPr lang="en-US"/>
+              <a:rPr lang="en-US" smtClean="0"/>
               <a:t>Click to edit Master title style</a:t>
             </a:r>
+            <a:endParaRPr lang="en-US"/>
           </a:p>
         </p:txBody>
       </p:sp>
@@ -2148,37 +2149,38 @@
           <a:p>
             <a:pPr lvl="0"/>
             <a:r>
-              <a:rPr lang="en-US"/>
+              <a:rPr lang="en-US" smtClean="0"/>
               <a:t>Click to edit Master text styles</a:t>
             </a:r>
           </a:p>
           <a:p>
             <a:pPr lvl="1"/>
             <a:r>
-              <a:rPr lang="en-US"/>
+              <a:rPr lang="en-US" smtClean="0"/>
               <a:t>Second level</a:t>
             </a:r>
           </a:p>
           <a:p>
             <a:pPr lvl="2"/>
             <a:r>
-              <a:rPr lang="en-US"/>
+              <a:rPr lang="en-US" smtClean="0"/>
               <a:t>Third level</a:t>
             </a:r>
           </a:p>
           <a:p>
             <a:pPr lvl="3"/>
             <a:r>
-              <a:rPr lang="en-US"/>
+              <a:rPr lang="en-US" smtClean="0"/>
               <a:t>Fourth level</a:t>
             </a:r>
           </a:p>
           <a:p>
             <a:pPr lvl="4"/>
             <a:r>
-              <a:rPr lang="en-US"/>
+              <a:rPr lang="en-US" smtClean="0"/>
               <a:t>Fifth level</a:t>
             </a:r>
+            <a:endParaRPr lang="en-US"/>
           </a:p>
         </p:txBody>
       </p:sp>
@@ -2241,7 +2243,7 @@
           <a:p>
             <a:pPr lvl="0"/>
             <a:r>
-              <a:rPr lang="en-US"/>
+              <a:rPr lang="en-US" smtClean="0"/>
               <a:t>Click to edit Master text styles</a:t>
             </a:r>
           </a:p>
@@ -2264,7 +2266,7 @@
           <a:p>
             <a:fld id="{5BCAD085-E8A6-8845-BD4E-CB4CCA059FC4}" type="datetimeFigureOut">
               <a:rPr lang="en-US" smtClean="0"/>
-              <a:t>9/21/26</a:t>
+              <a:t>1/27/13</a:t>
             </a:fld>
             <a:endParaRPr lang="en-US"/>
           </a:p>
@@ -2367,9 +2369,10 @@
           </a:lstStyle>
           <a:p>
             <a:r>
-              <a:rPr lang="en-US"/>
+              <a:rPr lang="en-US" smtClean="0"/>
               <a:t>Click to edit Master title style</a:t>
             </a:r>
+            <a:endParaRPr lang="en-US"/>
           </a:p>
         </p:txBody>
       </p:sp>
@@ -2493,7 +2496,7 @@
           <a:p>
             <a:pPr lvl="0"/>
             <a:r>
-              <a:rPr lang="en-US"/>
+              <a:rPr lang="en-US" smtClean="0"/>
               <a:t>Click to edit Master text styles</a:t>
             </a:r>
           </a:p>
@@ -2516,7 +2519,7 @@
           <a:p>
             <a:fld id="{5BCAD085-E8A6-8845-BD4E-CB4CCA059FC4}" type="datetimeFigureOut">
               <a:rPr lang="en-US" smtClean="0"/>
-              <a:t>9/21/26</a:t>
+              <a:t>1/27/13</a:t>
             </a:fld>
             <a:endParaRPr lang="en-US"/>
           </a:p>
@@ -2625,9 +2628,10 @@
           <a:lstStyle/>
           <a:p>
             <a:r>
-              <a:rPr lang="en-US"/>
+              <a:rPr lang="en-US" smtClean="0"/>
               <a:t>Click to edit Master title style</a:t>
             </a:r>
+            <a:endParaRPr lang="en-US"/>
           </a:p>
         </p:txBody>
       </p:sp>
@@ -2658,37 +2662,38 @@
           <a:p>
             <a:pPr lvl="0"/>
             <a:r>
-              <a:rPr lang="en-US"/>
+              <a:rPr lang="en-US" smtClean="0"/>
               <a:t>Click to edit Master text styles</a:t>
             </a:r>
           </a:p>
           <a:p>
             <a:pPr lvl="1"/>
             <a:r>
-              <a:rPr lang="en-US"/>
+              <a:rPr lang="en-US" smtClean="0"/>
               <a:t>Second level</a:t>
             </a:r>
           </a:p>
           <a:p>
             <a:pPr lvl="2"/>
             <a:r>
-              <a:rPr lang="en-US"/>
+              <a:rPr lang="en-US" smtClean="0"/>
               <a:t>Third level</a:t>
             </a:r>
           </a:p>
           <a:p>
             <a:pPr lvl="3"/>
             <a:r>
-              <a:rPr lang="en-US"/>
+              <a:rPr lang="en-US" smtClean="0"/>
               <a:t>Fourth level</a:t>
             </a:r>
           </a:p>
           <a:p>
             <a:pPr lvl="4"/>
             <a:r>
-              <a:rPr lang="en-US"/>
+              <a:rPr lang="en-US" smtClean="0"/>
               <a:t>Fifth level</a:t>
             </a:r>
+            <a:endParaRPr lang="en-US"/>
           </a:p>
         </p:txBody>
       </p:sp>
@@ -2727,7 +2732,7 @@
           <a:p>
             <a:fld id="{5BCAD085-E8A6-8845-BD4E-CB4CCA059FC4}" type="datetimeFigureOut">
               <a:rPr lang="en-US" smtClean="0"/>
-              <a:t>9/21/26</a:t>
+              <a:t>1/27/13</a:t>
             </a:fld>
             <a:endParaRPr lang="en-US"/>
           </a:p>
@@ -3086,7 +3091,7 @@
 </file>
 
 <file path=ppt/slides/slide1.xml><?xml version="1.0" encoding="utf-8"?>
-<p:sld xmlns:a="http://schemas.openxmlformats.org/drawingml/2006/main" xmlns:r="http://schemas.openxmlformats.org/officeDocument/2006/relationships" xmlns:p="http://schemas.openxmlformats.org/presentationml/2006/main">
+<p:sld xmlns:a="http://schemas.openxmlformats.org/drawingml/2006/main" xmlns:p="http://schemas.openxmlformats.org/presentationml/2006/main" xmlns:r="http://schemas.openxmlformats.org/officeDocument/2006/relationships">
   <p:cSld>
     <p:spTree>
       <p:nvGrpSpPr>
@@ -3094,14 +3099,7 @@
         <p:cNvGrpSpPr/>
         <p:nvPr/>
       </p:nvGrpSpPr>
-      <p:grpSpPr>
-        <a:xfrm>
-          <a:off x="0" y="0"/>
-          <a:ext cx="0" cy="0"/>
-          <a:chOff x="0" y="0"/>
-          <a:chExt cx="0" cy="0"/>
-        </a:xfrm>
-      </p:grpSpPr>
+      <p:grpSpPr/>
       <p:sp>
         <p:nvSpPr>
           <p:cNvPr id="2" name="Rectangle 1"/>
@@ -3142,7 +3140,6 @@
           <a:lstStyle/>
           <a:p>
             <a:pPr algn="ctr"/>
-            <a:endParaRPr/>
           </a:p>
         </p:txBody>
       </p:sp>
@@ -3168,6 +3165,7 @@
           </a:bodyPr>
           <a:lstStyle/>
           <a:p>
+            <a:pPr/>
             <a:r>
               <a:rPr sz="4400" b="1">
                 <a:solidFill>
@@ -3178,6 +3176,7 @@
             </a:r>
           </a:p>
           <a:p>
+            <a:pPr/>
             <a:r>
               <a:rPr sz="2000" b="0">
                 <a:solidFill>
@@ -3211,6 +3210,7 @@
           </a:bodyPr>
           <a:lstStyle/>
           <a:p>
+            <a:pPr/>
             <a:r>
               <a:rPr sz="1400" b="0">
                 <a:solidFill>
@@ -3231,7 +3231,7 @@
 </file>
 
 <file path=ppt/slides/slide10.xml><?xml version="1.0" encoding="utf-8"?>
-<p:sld xmlns:a="http://schemas.openxmlformats.org/drawingml/2006/main" xmlns:r="http://schemas.openxmlformats.org/officeDocument/2006/relationships" xmlns:p="http://schemas.openxmlformats.org/presentationml/2006/main">
+<p:sld xmlns:a="http://schemas.openxmlformats.org/drawingml/2006/main" xmlns:p="http://schemas.openxmlformats.org/presentationml/2006/main" xmlns:r="http://schemas.openxmlformats.org/officeDocument/2006/relationships">
   <p:cSld>
     <p:spTree>
       <p:nvGrpSpPr>
@@ -3239,14 +3239,7 @@
         <p:cNvGrpSpPr/>
         <p:nvPr/>
       </p:nvGrpSpPr>
-      <p:grpSpPr>
-        <a:xfrm>
-          <a:off x="0" y="0"/>
-          <a:ext cx="0" cy="0"/>
-          <a:chOff x="0" y="0"/>
-          <a:chExt cx="0" cy="0"/>
-        </a:xfrm>
-      </p:grpSpPr>
+      <p:grpSpPr/>
       <p:sp>
         <p:nvSpPr>
           <p:cNvPr id="2" name="Rectangle 1"/>
@@ -3287,7 +3280,6 @@
           <a:lstStyle/>
           <a:p>
             <a:pPr algn="ctr"/>
-            <a:endParaRPr/>
           </a:p>
         </p:txBody>
       </p:sp>
@@ -3313,6 +3305,7 @@
           </a:bodyPr>
           <a:lstStyle/>
           <a:p>
+            <a:pPr/>
             <a:r>
               <a:rPr sz="2800" b="1">
                 <a:solidFill>
@@ -3346,36 +3339,51 @@
           </a:bodyPr>
           <a:lstStyle/>
           <a:p>
+            <a:pPr/>
             <a:r>
               <a:rPr sz="1500" b="0">
                 <a:solidFill>
                   <a:srgbClr val="1F2937"/>
                 </a:solidFill>
               </a:rPr>
-              <a:t>- Phụ huynh: thông báo lớp, nhắn tin 2 chiều với GVCN</a:t>
-            </a:r>
-          </a:p>
-          <a:p>
+              <a:t>- Phụ huynh nhiều con: bộ chọn con trên đầu portal, dữ liệu tách theo từng em</a:t>
+            </a:r>
+          </a:p>
+          <a:p>
+            <a:pPr/>
             <a:r>
               <a:rPr sz="1500" b="0">
                 <a:solidFill>
                   <a:srgbClr val="1F2937"/>
                 </a:solidFill>
               </a:rPr>
+              <a:t>- Nhắn tin 2 chiều với GVCN: soạn mới + trả lời, thấy cả tin đã gửi</a:t>
+            </a:r>
+          </a:p>
+          <a:p>
+            <a:pPr/>
+            <a:r>
+              <a:rPr sz="1500" b="0">
+                <a:solidFill>
+                  <a:srgbClr val="1F2937"/>
+                </a:solidFill>
+              </a:rPr>
               <a:t>- Đặt lịch hẹn trực tuyến - GVCN xác nhận</a:t>
             </a:r>
           </a:p>
           <a:p>
+            <a:pPr/>
             <a:r>
               <a:rPr sz="1500" b="0">
                 <a:solidFill>
                   <a:srgbClr val="1F2937"/>
                 </a:solidFill>
               </a:rPr>
-              <a:t>- Đăng ký hoạt động giáo dục cho con</a:t>
-            </a:r>
-          </a:p>
-          <a:p>
+              <a:t>- Đăng ký / báo vắng hoạt động giáo dục cho con</a:t>
+            </a:r>
+          </a:p>
+          <a:p>
+            <a:pPr/>
             <a:r>
               <a:rPr sz="1500" b="0">
                 <a:solidFill>
@@ -3386,13 +3394,14 @@
             </a:r>
           </a:p>
           <a:p>
+            <a:pPr/>
             <a:r>
               <a:rPr sz="1500" b="0">
                 <a:solidFill>
                   <a:srgbClr val="1F2937"/>
                 </a:solidFill>
               </a:rPr>
-              <a:t>- Portal riêng, không cần quyền vào hệ thống nội bộ</a:t>
+              <a:t>- Mọi thao tác kiểm tra quyền sở hữu con ở server - không ghi được hồ sơ em khác</a:t>
             </a:r>
           </a:p>
         </p:txBody>
@@ -3448,6 +3457,7 @@
           </a:bodyPr>
           <a:lstStyle/>
           <a:p>
+            <a:pPr/>
             <a:r>
               <a:rPr sz="1100" b="0">
                 <a:solidFill>
@@ -3468,7 +3478,7 @@
 </file>
 
 <file path=ppt/slides/slide11.xml><?xml version="1.0" encoding="utf-8"?>
-<p:sld xmlns:a="http://schemas.openxmlformats.org/drawingml/2006/main" xmlns:r="http://schemas.openxmlformats.org/officeDocument/2006/relationships" xmlns:p="http://schemas.openxmlformats.org/presentationml/2006/main">
+<p:sld xmlns:a="http://schemas.openxmlformats.org/drawingml/2006/main" xmlns:p="http://schemas.openxmlformats.org/presentationml/2006/main" xmlns:r="http://schemas.openxmlformats.org/officeDocument/2006/relationships">
   <p:cSld>
     <p:spTree>
       <p:nvGrpSpPr>
@@ -3476,14 +3486,7 @@
         <p:cNvGrpSpPr/>
         <p:nvPr/>
       </p:nvGrpSpPr>
-      <p:grpSpPr>
-        <a:xfrm>
-          <a:off x="0" y="0"/>
-          <a:ext cx="0" cy="0"/>
-          <a:chOff x="0" y="0"/>
-          <a:chExt cx="0" cy="0"/>
-        </a:xfrm>
-      </p:grpSpPr>
+      <p:grpSpPr/>
       <p:sp>
         <p:nvSpPr>
           <p:cNvPr id="2" name="Rectangle 1"/>
@@ -3524,7 +3527,6 @@
           <a:lstStyle/>
           <a:p>
             <a:pPr algn="ctr"/>
-            <a:endParaRPr/>
           </a:p>
         </p:txBody>
       </p:sp>
@@ -3550,6 +3552,7 @@
           </a:bodyPr>
           <a:lstStyle/>
           <a:p>
+            <a:pPr/>
             <a:r>
               <a:rPr sz="2800" b="1">
                 <a:solidFill>
@@ -3570,7 +3573,7 @@
         <p:spPr>
           <a:xfrm>
             <a:off x="548640" y="1234440"/>
-            <a:ext cx="5120640" cy="784830"/>
+            <a:ext cx="5120640" cy="5303520"/>
           </a:xfrm>
           <a:prstGeom prst="rect">
             <a:avLst/>
@@ -3583,507 +3586,48 @@
           </a:bodyPr>
           <a:lstStyle/>
           <a:p>
-            <a:r>
-              <a:rPr sz="1500" b="0" dirty="0">
+            <a:pPr/>
+            <a:r>
+              <a:rPr sz="1500" b="0">
                 <a:solidFill>
                   <a:srgbClr val="1F2937"/>
                 </a:solidFill>
               </a:rPr>
-              <a:t>- </a:t>
-            </a:r>
-            <a:r>
-              <a:rPr sz="1500" b="0" dirty="0" err="1">
+              <a:t>- Tuyến 1: LLM cấu hình qua env - Gemini / OpenAI / Anthropic, đổi provider bằng AI_PROVIDER + AI_MODEL</a:t>
+            </a:r>
+          </a:p>
+          <a:p>
+            <a:pPr/>
+            <a:r>
+              <a:rPr sz="1500" b="0">
                 <a:solidFill>
                   <a:srgbClr val="1F2937"/>
                 </a:solidFill>
               </a:rPr>
-              <a:t>Ứng</a:t>
-            </a:r>
-            <a:r>
-              <a:rPr sz="1500" b="0" dirty="0">
+              <a:t>- Tuyến 2: Devin async - hết quota LLM thì tạo session xử lý, callback trả kết quả</a:t>
+            </a:r>
+          </a:p>
+          <a:p>
+            <a:pPr/>
+            <a:r>
+              <a:rPr sz="1500" b="0">
                 <a:solidFill>
                   <a:srgbClr val="1F2937"/>
                 </a:solidFill>
               </a:rPr>
-              <a:t> </a:t>
-            </a:r>
-            <a:r>
-              <a:rPr sz="1500" b="0" dirty="0" err="1">
+              <a:t>- Tuyến 3: rule-based fallback - luôn có câu trả lời hữu ích kể cả khi mọi backend chết</a:t>
+            </a:r>
+          </a:p>
+          <a:p>
+            <a:pPr/>
+            <a:r>
+              <a:rPr sz="1500" b="0">
                 <a:solidFill>
                   <a:srgbClr val="1F2937"/>
                 </a:solidFill>
               </a:rPr>
-              <a:t>dụng</a:t>
-            </a:r>
-            <a:r>
-              <a:rPr sz="1500" b="0" dirty="0">
-                <a:solidFill>
-                  <a:srgbClr val="1F2937"/>
-                </a:solidFill>
-              </a:rPr>
-              <a:t>: </a:t>
-            </a:r>
-            <a:r>
-              <a:rPr sz="1500" b="0" dirty="0" err="1">
-                <a:solidFill>
-                  <a:srgbClr val="1F2937"/>
-                </a:solidFill>
-              </a:rPr>
-              <a:t>báo</a:t>
-            </a:r>
-            <a:r>
-              <a:rPr sz="1500" b="0" dirty="0">
-                <a:solidFill>
-                  <a:srgbClr val="1F2937"/>
-                </a:solidFill>
-              </a:rPr>
-              <a:t> </a:t>
-            </a:r>
-            <a:r>
-              <a:rPr sz="1500" b="0" dirty="0" err="1">
-                <a:solidFill>
-                  <a:srgbClr val="1F2937"/>
-                </a:solidFill>
-              </a:rPr>
-              <a:t>cáo</a:t>
-            </a:r>
-            <a:r>
-              <a:rPr sz="1500" b="0" dirty="0">
-                <a:solidFill>
-                  <a:srgbClr val="1F2937"/>
-                </a:solidFill>
-              </a:rPr>
-              <a:t> </a:t>
-            </a:r>
-            <a:r>
-              <a:rPr sz="1500" b="0" dirty="0" err="1">
-                <a:solidFill>
-                  <a:srgbClr val="1F2937"/>
-                </a:solidFill>
-              </a:rPr>
-              <a:t>hồ</a:t>
-            </a:r>
-            <a:r>
-              <a:rPr sz="1500" b="0" dirty="0">
-                <a:solidFill>
-                  <a:srgbClr val="1F2937"/>
-                </a:solidFill>
-              </a:rPr>
-              <a:t> </a:t>
-            </a:r>
-            <a:r>
-              <a:rPr sz="1500" b="0" dirty="0" err="1">
-                <a:solidFill>
-                  <a:srgbClr val="1F2937"/>
-                </a:solidFill>
-              </a:rPr>
-              <a:t>sơ</a:t>
-            </a:r>
-            <a:r>
-              <a:rPr sz="1500" b="0" dirty="0">
-                <a:solidFill>
-                  <a:srgbClr val="1F2937"/>
-                </a:solidFill>
-              </a:rPr>
-              <a:t> </a:t>
-            </a:r>
-            <a:r>
-              <a:rPr sz="1500" b="0" dirty="0" err="1">
-                <a:solidFill>
-                  <a:srgbClr val="1F2937"/>
-                </a:solidFill>
-              </a:rPr>
-              <a:t>lớp</a:t>
-            </a:r>
-            <a:r>
-              <a:rPr sz="1500" b="0" dirty="0">
-                <a:solidFill>
-                  <a:srgbClr val="1F2937"/>
-                </a:solidFill>
-              </a:rPr>
-              <a:t>, </a:t>
-            </a:r>
-            <a:r>
-              <a:rPr sz="1500" b="0" dirty="0" err="1">
-                <a:solidFill>
-                  <a:srgbClr val="1F2937"/>
-                </a:solidFill>
-              </a:rPr>
-              <a:t>nhận</a:t>
-            </a:r>
-            <a:r>
-              <a:rPr sz="1500" b="0" dirty="0">
-                <a:solidFill>
-                  <a:srgbClr val="1F2937"/>
-                </a:solidFill>
-              </a:rPr>
-              <a:t> </a:t>
-            </a:r>
-            <a:r>
-              <a:rPr sz="1500" b="0" dirty="0" err="1">
-                <a:solidFill>
-                  <a:srgbClr val="1F2937"/>
-                </a:solidFill>
-              </a:rPr>
-              <a:t>xét</a:t>
-            </a:r>
-            <a:r>
-              <a:rPr sz="1500" b="0" dirty="0">
-                <a:solidFill>
-                  <a:srgbClr val="1F2937"/>
-                </a:solidFill>
-              </a:rPr>
-              <a:t> </a:t>
-            </a:r>
-            <a:r>
-              <a:rPr sz="1500" b="0" dirty="0" err="1">
-                <a:solidFill>
-                  <a:srgbClr val="1F2937"/>
-                </a:solidFill>
-              </a:rPr>
-              <a:t>giáo</a:t>
-            </a:r>
-            <a:r>
-              <a:rPr sz="1500" b="0" dirty="0">
-                <a:solidFill>
-                  <a:srgbClr val="1F2937"/>
-                </a:solidFill>
-              </a:rPr>
-              <a:t> </a:t>
-            </a:r>
-            <a:r>
-              <a:rPr sz="1500" b="0" dirty="0" err="1">
-                <a:solidFill>
-                  <a:srgbClr val="1F2937"/>
-                </a:solidFill>
-              </a:rPr>
-              <a:t>án</a:t>
-            </a:r>
-            <a:r>
-              <a:rPr sz="1500" b="0" dirty="0">
-                <a:solidFill>
-                  <a:srgbClr val="1F2937"/>
-                </a:solidFill>
-              </a:rPr>
-              <a:t>, </a:t>
-            </a:r>
-            <a:r>
-              <a:rPr sz="1500" b="0" dirty="0" err="1">
-                <a:solidFill>
-                  <a:srgbClr val="1F2937"/>
-                </a:solidFill>
-              </a:rPr>
-              <a:t>gợi</a:t>
-            </a:r>
-            <a:r>
-              <a:rPr sz="1500" b="0" dirty="0">
-                <a:solidFill>
-                  <a:srgbClr val="1F2937"/>
-                </a:solidFill>
-              </a:rPr>
-              <a:t> </a:t>
-            </a:r>
-            <a:r>
-              <a:rPr sz="1500" b="0" dirty="0" err="1">
-                <a:solidFill>
-                  <a:srgbClr val="1F2937"/>
-                </a:solidFill>
-              </a:rPr>
-              <a:t>ý</a:t>
-            </a:r>
-            <a:r>
-              <a:rPr sz="1500" b="0" dirty="0">
-                <a:solidFill>
-                  <a:srgbClr val="1F2937"/>
-                </a:solidFill>
-              </a:rPr>
-              <a:t> </a:t>
-            </a:r>
-            <a:r>
-              <a:rPr sz="1500" b="0" dirty="0" err="1">
-                <a:solidFill>
-                  <a:srgbClr val="1F2937"/>
-                </a:solidFill>
-              </a:rPr>
-              <a:t>cảnh</a:t>
-            </a:r>
-            <a:r>
-              <a:rPr sz="1500" b="0" dirty="0">
-                <a:solidFill>
-                  <a:srgbClr val="1F2937"/>
-                </a:solidFill>
-              </a:rPr>
-              <a:t> </a:t>
-            </a:r>
-            <a:r>
-              <a:rPr sz="1500" b="0" dirty="0" err="1">
-                <a:solidFill>
-                  <a:srgbClr val="1F2937"/>
-                </a:solidFill>
-              </a:rPr>
-              <a:t>báo</a:t>
-            </a:r>
-            <a:r>
-              <a:rPr sz="1500" b="0" dirty="0">
-                <a:solidFill>
-                  <a:srgbClr val="1F2937"/>
-                </a:solidFill>
-              </a:rPr>
-              <a:t>, </a:t>
-            </a:r>
-            <a:r>
-              <a:rPr sz="1500" b="0" dirty="0" err="1">
-                <a:solidFill>
-                  <a:srgbClr val="1F2937"/>
-                </a:solidFill>
-              </a:rPr>
-              <a:t>trợ</a:t>
-            </a:r>
-            <a:r>
-              <a:rPr sz="1500" b="0" dirty="0">
-                <a:solidFill>
-                  <a:srgbClr val="1F2937"/>
-                </a:solidFill>
-              </a:rPr>
-              <a:t> </a:t>
-            </a:r>
-            <a:r>
-              <a:rPr sz="1500" b="0" dirty="0" err="1">
-                <a:solidFill>
-                  <a:srgbClr val="1F2937"/>
-                </a:solidFill>
-              </a:rPr>
-              <a:t>lý</a:t>
-            </a:r>
-            <a:r>
-              <a:rPr sz="1500" b="0" dirty="0">
-                <a:solidFill>
-                  <a:srgbClr val="1F2937"/>
-                </a:solidFill>
-              </a:rPr>
-              <a:t> </a:t>
-            </a:r>
-            <a:r>
-              <a:rPr sz="1500" b="0" dirty="0" err="1">
-                <a:solidFill>
-                  <a:srgbClr val="1F2937"/>
-                </a:solidFill>
-              </a:rPr>
-              <a:t>điều</a:t>
-            </a:r>
-            <a:r>
-              <a:rPr sz="1500" b="0" dirty="0">
-                <a:solidFill>
-                  <a:srgbClr val="1F2937"/>
-                </a:solidFill>
-              </a:rPr>
-              <a:t> </a:t>
-            </a:r>
-            <a:r>
-              <a:rPr sz="1500" b="0" dirty="0" err="1">
-                <a:solidFill>
-                  <a:srgbClr val="1F2937"/>
-                </a:solidFill>
-              </a:rPr>
-              <a:t>hành</a:t>
-            </a:r>
-            <a:r>
-              <a:rPr sz="1500" b="0" dirty="0">
-                <a:solidFill>
-                  <a:srgbClr val="1F2937"/>
-                </a:solidFill>
-              </a:rPr>
-              <a:t>, </a:t>
-            </a:r>
-            <a:r>
-              <a:rPr sz="1500" b="0" dirty="0" err="1">
-                <a:solidFill>
-                  <a:srgbClr val="1F2937"/>
-                </a:solidFill>
-              </a:rPr>
-              <a:t>phân</a:t>
-            </a:r>
-            <a:r>
-              <a:rPr sz="1500" b="0" dirty="0">
-                <a:solidFill>
-                  <a:srgbClr val="1F2937"/>
-                </a:solidFill>
-              </a:rPr>
-              <a:t> </a:t>
-            </a:r>
-            <a:r>
-              <a:rPr sz="1500" b="0" dirty="0" err="1">
-                <a:solidFill>
-                  <a:srgbClr val="1F2937"/>
-                </a:solidFill>
-              </a:rPr>
-              <a:t>tích</a:t>
-            </a:r>
-            <a:r>
-              <a:rPr sz="1500" b="0" dirty="0">
-                <a:solidFill>
-                  <a:srgbClr val="1F2937"/>
-                </a:solidFill>
-              </a:rPr>
-              <a:t> </a:t>
-            </a:r>
-            <a:r>
-              <a:rPr sz="1500" b="0" dirty="0" err="1">
-                <a:solidFill>
-                  <a:srgbClr val="1F2937"/>
-                </a:solidFill>
-              </a:rPr>
-              <a:t>sổ</a:t>
-            </a:r>
-            <a:r>
-              <a:rPr sz="1500" b="0" dirty="0">
-                <a:solidFill>
-                  <a:srgbClr val="1F2937"/>
-                </a:solidFill>
-              </a:rPr>
-              <a:t> </a:t>
-            </a:r>
-            <a:r>
-              <a:rPr sz="1500" b="0" dirty="0" err="1">
-                <a:solidFill>
-                  <a:srgbClr val="1F2937"/>
-                </a:solidFill>
-              </a:rPr>
-              <a:t>đầu</a:t>
-            </a:r>
-            <a:r>
-              <a:rPr sz="1500" b="0" dirty="0">
-                <a:solidFill>
-                  <a:srgbClr val="1F2937"/>
-                </a:solidFill>
-              </a:rPr>
-              <a:t> </a:t>
-            </a:r>
-            <a:r>
-              <a:rPr sz="1500" b="0" dirty="0" err="1">
-                <a:solidFill>
-                  <a:srgbClr val="1F2937"/>
-                </a:solidFill>
-              </a:rPr>
-              <a:t>bài</a:t>
-            </a:r>
-            <a:r>
-              <a:rPr sz="1500" b="0" dirty="0">
-                <a:solidFill>
-                  <a:srgbClr val="1F2937"/>
-                </a:solidFill>
-              </a:rPr>
-              <a:t>, </a:t>
-            </a:r>
-            <a:r>
-              <a:rPr sz="1500" b="0" dirty="0" err="1">
-                <a:solidFill>
-                  <a:srgbClr val="1F2937"/>
-                </a:solidFill>
-              </a:rPr>
-              <a:t>biên</a:t>
-            </a:r>
-            <a:r>
-              <a:rPr sz="1500" b="0" dirty="0">
-                <a:solidFill>
-                  <a:srgbClr val="1F2937"/>
-                </a:solidFill>
-              </a:rPr>
-              <a:t> </a:t>
-            </a:r>
-            <a:r>
-              <a:rPr sz="1500" b="0" dirty="0" err="1">
-                <a:solidFill>
-                  <a:srgbClr val="1F2937"/>
-                </a:solidFill>
-              </a:rPr>
-              <a:t>bản</a:t>
-            </a:r>
-            <a:r>
-              <a:rPr sz="1500" b="0" dirty="0">
-                <a:solidFill>
-                  <a:srgbClr val="1F2937"/>
-                </a:solidFill>
-              </a:rPr>
-              <a:t> </a:t>
-            </a:r>
-            <a:r>
-              <a:rPr sz="1500" b="0" dirty="0" err="1">
-                <a:solidFill>
-                  <a:srgbClr val="1F2937"/>
-                </a:solidFill>
-              </a:rPr>
-              <a:t>sinh</a:t>
-            </a:r>
-            <a:r>
-              <a:rPr sz="1500" b="0" dirty="0">
-                <a:solidFill>
-                  <a:srgbClr val="1F2937"/>
-                </a:solidFill>
-              </a:rPr>
-              <a:t> </a:t>
-            </a:r>
-            <a:r>
-              <a:rPr sz="1500" b="0" dirty="0" err="1">
-                <a:solidFill>
-                  <a:srgbClr val="1F2937"/>
-                </a:solidFill>
-              </a:rPr>
-              <a:t>hoạt</a:t>
-            </a:r>
-            <a:r>
-              <a:rPr sz="1500" b="0" dirty="0">
-                <a:solidFill>
-                  <a:srgbClr val="1F2937"/>
-                </a:solidFill>
-              </a:rPr>
-              <a:t>, </a:t>
-            </a:r>
-            <a:r>
-              <a:rPr sz="1500" b="0" dirty="0" err="1">
-                <a:solidFill>
-                  <a:srgbClr val="1F2937"/>
-                </a:solidFill>
-              </a:rPr>
-              <a:t>báo</a:t>
-            </a:r>
-            <a:r>
-              <a:rPr sz="1500" b="0" dirty="0">
-                <a:solidFill>
-                  <a:srgbClr val="1F2937"/>
-                </a:solidFill>
-              </a:rPr>
-              <a:t> </a:t>
-            </a:r>
-            <a:r>
-              <a:rPr sz="1500" b="0" dirty="0" err="1">
-                <a:solidFill>
-                  <a:srgbClr val="1F2937"/>
-                </a:solidFill>
-              </a:rPr>
-              <a:t>cáo</a:t>
-            </a:r>
-            <a:r>
-              <a:rPr sz="1500" b="0" dirty="0">
-                <a:solidFill>
-                  <a:srgbClr val="1F2937"/>
-                </a:solidFill>
-              </a:rPr>
-              <a:t> </a:t>
-            </a:r>
-            <a:r>
-              <a:rPr sz="1500" b="0" dirty="0" err="1">
-                <a:solidFill>
-                  <a:srgbClr val="1F2937"/>
-                </a:solidFill>
-              </a:rPr>
-              <a:t>Sở</a:t>
-            </a:r>
-            <a:endParaRPr sz="1500" b="0" dirty="0">
-              <a:solidFill>
-                <a:srgbClr val="1F2937"/>
-              </a:solidFill>
-            </a:endParaRPr>
+              <a:t>- Ứng dụng: báo cáo hồ sơ lớp, nhận xét giáo án, gợi ý cảnh báo, trợ lý điều hành, phân tích sổ đầu bài, biên bản sinh hoạt, báo cáo Sở</a:t>
+            </a:r>
           </a:p>
         </p:txBody>
       </p:sp>
@@ -4138,6 +3682,7 @@
           </a:bodyPr>
           <a:lstStyle/>
           <a:p>
+            <a:pPr/>
             <a:r>
               <a:rPr sz="1100" b="0">
                 <a:solidFill>
@@ -4158,7 +3703,7 @@
 </file>
 
 <file path=ppt/slides/slide12.xml><?xml version="1.0" encoding="utf-8"?>
-<p:sld xmlns:a="http://schemas.openxmlformats.org/drawingml/2006/main" xmlns:r="http://schemas.openxmlformats.org/officeDocument/2006/relationships" xmlns:p="http://schemas.openxmlformats.org/presentationml/2006/main">
+<p:sld xmlns:a="http://schemas.openxmlformats.org/drawingml/2006/main" xmlns:p="http://schemas.openxmlformats.org/presentationml/2006/main" xmlns:r="http://schemas.openxmlformats.org/officeDocument/2006/relationships">
   <p:cSld>
     <p:spTree>
       <p:nvGrpSpPr>
@@ -4166,14 +3711,7 @@
         <p:cNvGrpSpPr/>
         <p:nvPr/>
       </p:nvGrpSpPr>
-      <p:grpSpPr>
-        <a:xfrm>
-          <a:off x="0" y="0"/>
-          <a:ext cx="0" cy="0"/>
-          <a:chOff x="0" y="0"/>
-          <a:chExt cx="0" cy="0"/>
-        </a:xfrm>
-      </p:grpSpPr>
+      <p:grpSpPr/>
       <p:sp>
         <p:nvSpPr>
           <p:cNvPr id="2" name="Rectangle 1"/>
@@ -4214,7 +3752,6 @@
           <a:lstStyle/>
           <a:p>
             <a:pPr algn="ctr"/>
-            <a:endParaRPr/>
           </a:p>
         </p:txBody>
       </p:sp>
@@ -4240,6 +3777,7 @@
           </a:bodyPr>
           <a:lstStyle/>
           <a:p>
+            <a:pPr/>
             <a:r>
               <a:rPr sz="2800" b="1">
                 <a:solidFill>
@@ -4260,7 +3798,7 @@
         <p:spPr>
           <a:xfrm>
             <a:off x="548640" y="1234440"/>
-            <a:ext cx="5120640" cy="1246495"/>
+            <a:ext cx="5120640" cy="5303520"/>
           </a:xfrm>
           <a:prstGeom prst="rect">
             <a:avLst/>
@@ -4273,584 +3811,58 @@
           </a:bodyPr>
           <a:lstStyle/>
           <a:p>
-            <a:r>
-              <a:rPr sz="1500" b="0" dirty="0">
+            <a:pPr/>
+            <a:r>
+              <a:rPr sz="1500" b="0">
                 <a:solidFill>
                   <a:srgbClr val="1F2937"/>
                 </a:solidFill>
               </a:rPr>
-              <a:t>- </a:t>
-            </a:r>
-            <a:r>
-              <a:rPr sz="1500" b="0" dirty="0" err="1">
+              <a:t>- Xuất sổ chủ nhiệm, báo cáo Sở/Phòng (CSV/Excel), sổ cá nhân GV</a:t>
+            </a:r>
+          </a:p>
+          <a:p>
+            <a:pPr/>
+            <a:r>
+              <a:rPr sz="1500" b="0">
                 <a:solidFill>
                   <a:srgbClr val="1F2937"/>
                 </a:solidFill>
               </a:rPr>
-              <a:t>Xuất</a:t>
-            </a:r>
-            <a:r>
-              <a:rPr sz="1500" b="0" dirty="0">
+              <a:t>- RBAC 3 tầng: UI - route guard - Postgres RLS theo vai trò + quan hệ (lớp CN, tiết dạy, con mình)</a:t>
+            </a:r>
+          </a:p>
+          <a:p>
+            <a:pPr/>
+            <a:r>
+              <a:rPr sz="1500" b="0">
                 <a:solidFill>
                   <a:srgbClr val="1F2937"/>
                 </a:solidFill>
               </a:rPr>
-              <a:t> </a:t>
-            </a:r>
-            <a:r>
-              <a:rPr sz="1500" b="0" dirty="0" err="1">
+              <a:t>- Audit log mọi hành động quan trọng, trang xem cho BGH</a:t>
+            </a:r>
+          </a:p>
+          <a:p>
+            <a:pPr/>
+            <a:r>
+              <a:rPr sz="1500" b="0">
                 <a:solidFill>
                   <a:srgbClr val="1F2937"/>
                 </a:solidFill>
               </a:rPr>
-              <a:t>sổ</a:t>
-            </a:r>
-            <a:r>
-              <a:rPr sz="1500" b="0" dirty="0">
+              <a:t>- Trang Thông báo chung cho mọi vai trò - chuông trên topbar, đánh dấu đã đọc, link nhảy tới màn hình liên quan</a:t>
+            </a:r>
+          </a:p>
+          <a:p>
+            <a:pPr/>
+            <a:r>
+              <a:rPr sz="1500" b="0">
                 <a:solidFill>
                   <a:srgbClr val="1F2937"/>
                 </a:solidFill>
               </a:rPr>
-              <a:t> </a:t>
-            </a:r>
-            <a:r>
-              <a:rPr sz="1500" b="0" dirty="0" err="1">
-                <a:solidFill>
-                  <a:srgbClr val="1F2937"/>
-                </a:solidFill>
-              </a:rPr>
-              <a:t>chủ</a:t>
-            </a:r>
-            <a:r>
-              <a:rPr sz="1500" b="0" dirty="0">
-                <a:solidFill>
-                  <a:srgbClr val="1F2937"/>
-                </a:solidFill>
-              </a:rPr>
-              <a:t> </a:t>
-            </a:r>
-            <a:r>
-              <a:rPr sz="1500" b="0" dirty="0" err="1">
-                <a:solidFill>
-                  <a:srgbClr val="1F2937"/>
-                </a:solidFill>
-              </a:rPr>
-              <a:t>nhiệm</a:t>
-            </a:r>
-            <a:r>
-              <a:rPr sz="1500" b="0" dirty="0">
-                <a:solidFill>
-                  <a:srgbClr val="1F2937"/>
-                </a:solidFill>
-              </a:rPr>
-              <a:t>, </a:t>
-            </a:r>
-            <a:r>
-              <a:rPr sz="1500" b="0" dirty="0" err="1">
-                <a:solidFill>
-                  <a:srgbClr val="1F2937"/>
-                </a:solidFill>
-              </a:rPr>
-              <a:t>báo</a:t>
-            </a:r>
-            <a:r>
-              <a:rPr sz="1500" b="0" dirty="0">
-                <a:solidFill>
-                  <a:srgbClr val="1F2937"/>
-                </a:solidFill>
-              </a:rPr>
-              <a:t> </a:t>
-            </a:r>
-            <a:r>
-              <a:rPr sz="1500" b="0" dirty="0" err="1">
-                <a:solidFill>
-                  <a:srgbClr val="1F2937"/>
-                </a:solidFill>
-              </a:rPr>
-              <a:t>cáo</a:t>
-            </a:r>
-            <a:r>
-              <a:rPr sz="1500" b="0" dirty="0">
-                <a:solidFill>
-                  <a:srgbClr val="1F2937"/>
-                </a:solidFill>
-              </a:rPr>
-              <a:t> </a:t>
-            </a:r>
-            <a:r>
-              <a:rPr sz="1500" b="0" dirty="0" err="1">
-                <a:solidFill>
-                  <a:srgbClr val="1F2937"/>
-                </a:solidFill>
-              </a:rPr>
-              <a:t>Sở</a:t>
-            </a:r>
-            <a:r>
-              <a:rPr sz="1500" b="0" dirty="0">
-                <a:solidFill>
-                  <a:srgbClr val="1F2937"/>
-                </a:solidFill>
-              </a:rPr>
-              <a:t>/</a:t>
-            </a:r>
-            <a:r>
-              <a:rPr sz="1500" b="0" dirty="0" err="1">
-                <a:solidFill>
-                  <a:srgbClr val="1F2937"/>
-                </a:solidFill>
-              </a:rPr>
-              <a:t>Phòng</a:t>
-            </a:r>
-            <a:r>
-              <a:rPr sz="1500" b="0" dirty="0">
-                <a:solidFill>
-                  <a:srgbClr val="1F2937"/>
-                </a:solidFill>
-              </a:rPr>
-              <a:t> (CSV/Excel), </a:t>
-            </a:r>
-            <a:r>
-              <a:rPr sz="1500" b="0" dirty="0" err="1">
-                <a:solidFill>
-                  <a:srgbClr val="1F2937"/>
-                </a:solidFill>
-              </a:rPr>
-              <a:t>sổ</a:t>
-            </a:r>
-            <a:r>
-              <a:rPr sz="1500" b="0" dirty="0">
-                <a:solidFill>
-                  <a:srgbClr val="1F2937"/>
-                </a:solidFill>
-              </a:rPr>
-              <a:t> </a:t>
-            </a:r>
-            <a:r>
-              <a:rPr sz="1500" b="0" dirty="0" err="1">
-                <a:solidFill>
-                  <a:srgbClr val="1F2937"/>
-                </a:solidFill>
-              </a:rPr>
-              <a:t>cá</a:t>
-            </a:r>
-            <a:r>
-              <a:rPr sz="1500" b="0" dirty="0">
-                <a:solidFill>
-                  <a:srgbClr val="1F2937"/>
-                </a:solidFill>
-              </a:rPr>
-              <a:t> </a:t>
-            </a:r>
-            <a:r>
-              <a:rPr sz="1500" b="0" dirty="0" err="1">
-                <a:solidFill>
-                  <a:srgbClr val="1F2937"/>
-                </a:solidFill>
-              </a:rPr>
-              <a:t>nhân</a:t>
-            </a:r>
-            <a:r>
-              <a:rPr sz="1500" b="0" dirty="0">
-                <a:solidFill>
-                  <a:srgbClr val="1F2937"/>
-                </a:solidFill>
-              </a:rPr>
-              <a:t> GV</a:t>
-            </a:r>
-          </a:p>
-          <a:p>
-            <a:r>
-              <a:rPr sz="1500" b="0" dirty="0">
-                <a:solidFill>
-                  <a:srgbClr val="1F2937"/>
-                </a:solidFill>
-              </a:rPr>
-              <a:t>- Audit log </a:t>
-            </a:r>
-            <a:r>
-              <a:rPr sz="1500" b="0" dirty="0" err="1">
-                <a:solidFill>
-                  <a:srgbClr val="1F2937"/>
-                </a:solidFill>
-              </a:rPr>
-              <a:t>mọi</a:t>
-            </a:r>
-            <a:r>
-              <a:rPr sz="1500" b="0" dirty="0">
-                <a:solidFill>
-                  <a:srgbClr val="1F2937"/>
-                </a:solidFill>
-              </a:rPr>
-              <a:t> </a:t>
-            </a:r>
-            <a:r>
-              <a:rPr sz="1500" b="0" dirty="0" err="1">
-                <a:solidFill>
-                  <a:srgbClr val="1F2937"/>
-                </a:solidFill>
-              </a:rPr>
-              <a:t>hành</a:t>
-            </a:r>
-            <a:r>
-              <a:rPr sz="1500" b="0" dirty="0">
-                <a:solidFill>
-                  <a:srgbClr val="1F2937"/>
-                </a:solidFill>
-              </a:rPr>
-              <a:t> </a:t>
-            </a:r>
-            <a:r>
-              <a:rPr sz="1500" b="0" dirty="0" err="1">
-                <a:solidFill>
-                  <a:srgbClr val="1F2937"/>
-                </a:solidFill>
-              </a:rPr>
-              <a:t>động</a:t>
-            </a:r>
-            <a:r>
-              <a:rPr sz="1500" b="0" dirty="0">
-                <a:solidFill>
-                  <a:srgbClr val="1F2937"/>
-                </a:solidFill>
-              </a:rPr>
-              <a:t> </a:t>
-            </a:r>
-            <a:r>
-              <a:rPr sz="1500" b="0" dirty="0" err="1">
-                <a:solidFill>
-                  <a:srgbClr val="1F2937"/>
-                </a:solidFill>
-              </a:rPr>
-              <a:t>quan</a:t>
-            </a:r>
-            <a:r>
-              <a:rPr sz="1500" b="0" dirty="0">
-                <a:solidFill>
-                  <a:srgbClr val="1F2937"/>
-                </a:solidFill>
-              </a:rPr>
-              <a:t> </a:t>
-            </a:r>
-            <a:r>
-              <a:rPr sz="1500" b="0" dirty="0" err="1">
-                <a:solidFill>
-                  <a:srgbClr val="1F2937"/>
-                </a:solidFill>
-              </a:rPr>
-              <a:t>trọng</a:t>
-            </a:r>
-            <a:r>
-              <a:rPr sz="1500" b="0" dirty="0">
-                <a:solidFill>
-                  <a:srgbClr val="1F2937"/>
-                </a:solidFill>
-              </a:rPr>
-              <a:t>, </a:t>
-            </a:r>
-            <a:r>
-              <a:rPr sz="1500" b="0" dirty="0" err="1">
-                <a:solidFill>
-                  <a:srgbClr val="1F2937"/>
-                </a:solidFill>
-              </a:rPr>
-              <a:t>trang</a:t>
-            </a:r>
-            <a:r>
-              <a:rPr sz="1500" b="0" dirty="0">
-                <a:solidFill>
-                  <a:srgbClr val="1F2937"/>
-                </a:solidFill>
-              </a:rPr>
-              <a:t> </a:t>
-            </a:r>
-            <a:r>
-              <a:rPr sz="1500" b="0" dirty="0" err="1">
-                <a:solidFill>
-                  <a:srgbClr val="1F2937"/>
-                </a:solidFill>
-              </a:rPr>
-              <a:t>xem</a:t>
-            </a:r>
-            <a:r>
-              <a:rPr sz="1500" b="0" dirty="0">
-                <a:solidFill>
-                  <a:srgbClr val="1F2937"/>
-                </a:solidFill>
-              </a:rPr>
-              <a:t> </a:t>
-            </a:r>
-            <a:r>
-              <a:rPr sz="1500" b="0" dirty="0" err="1">
-                <a:solidFill>
-                  <a:srgbClr val="1F2937"/>
-                </a:solidFill>
-              </a:rPr>
-              <a:t>cho</a:t>
-            </a:r>
-            <a:r>
-              <a:rPr sz="1500" b="0" dirty="0">
-                <a:solidFill>
-                  <a:srgbClr val="1F2937"/>
-                </a:solidFill>
-              </a:rPr>
-              <a:t> BGH</a:t>
-            </a:r>
-          </a:p>
-          <a:p>
-            <a:r>
-              <a:rPr sz="1500" b="0" dirty="0">
-                <a:solidFill>
-                  <a:srgbClr val="1F2937"/>
-                </a:solidFill>
-              </a:rPr>
-              <a:t>- Notification in-app </a:t>
-            </a:r>
-            <a:r>
-              <a:rPr sz="1500" b="0" dirty="0" err="1">
-                <a:solidFill>
-                  <a:srgbClr val="1F2937"/>
-                </a:solidFill>
-              </a:rPr>
-              <a:t>cho</a:t>
-            </a:r>
-            <a:r>
-              <a:rPr sz="1500" b="0" dirty="0">
-                <a:solidFill>
-                  <a:srgbClr val="1F2937"/>
-                </a:solidFill>
-              </a:rPr>
-              <a:t> </a:t>
-            </a:r>
-            <a:r>
-              <a:rPr sz="1500" b="0" dirty="0" err="1">
-                <a:solidFill>
-                  <a:srgbClr val="1F2937"/>
-                </a:solidFill>
-              </a:rPr>
-              <a:t>mọi</a:t>
-            </a:r>
-            <a:r>
-              <a:rPr sz="1500" b="0" dirty="0">
-                <a:solidFill>
-                  <a:srgbClr val="1F2937"/>
-                </a:solidFill>
-              </a:rPr>
-              <a:t> </a:t>
-            </a:r>
-            <a:r>
-              <a:rPr sz="1500" b="0" dirty="0" err="1">
-                <a:solidFill>
-                  <a:srgbClr val="1F2937"/>
-                </a:solidFill>
-              </a:rPr>
-              <a:t>hành</a:t>
-            </a:r>
-            <a:r>
-              <a:rPr sz="1500" b="0" dirty="0">
-                <a:solidFill>
-                  <a:srgbClr val="1F2937"/>
-                </a:solidFill>
-              </a:rPr>
-              <a:t> </a:t>
-            </a:r>
-            <a:r>
-              <a:rPr sz="1500" b="0" dirty="0" err="1">
-                <a:solidFill>
-                  <a:srgbClr val="1F2937"/>
-                </a:solidFill>
-              </a:rPr>
-              <a:t>động</a:t>
-            </a:r>
-            <a:r>
-              <a:rPr sz="1500" b="0" dirty="0">
-                <a:solidFill>
-                  <a:srgbClr val="1F2937"/>
-                </a:solidFill>
-              </a:rPr>
-              <a:t> </a:t>
-            </a:r>
-            <a:r>
-              <a:rPr sz="1500" b="0" dirty="0" err="1">
-                <a:solidFill>
-                  <a:srgbClr val="1F2937"/>
-                </a:solidFill>
-              </a:rPr>
-              <a:t>ảnh</a:t>
-            </a:r>
-            <a:r>
-              <a:rPr sz="1500" b="0" dirty="0">
-                <a:solidFill>
-                  <a:srgbClr val="1F2937"/>
-                </a:solidFill>
-              </a:rPr>
-              <a:t> </a:t>
-            </a:r>
-            <a:r>
-              <a:rPr sz="1500" b="0" dirty="0" err="1">
-                <a:solidFill>
-                  <a:srgbClr val="1F2937"/>
-                </a:solidFill>
-              </a:rPr>
-              <a:t>hưởng</a:t>
-            </a:r>
-            <a:r>
-              <a:rPr sz="1500" b="0" dirty="0">
-                <a:solidFill>
-                  <a:srgbClr val="1F2937"/>
-                </a:solidFill>
-              </a:rPr>
-              <a:t> </a:t>
-            </a:r>
-            <a:r>
-              <a:rPr sz="1500" b="0" dirty="0" err="1">
-                <a:solidFill>
-                  <a:srgbClr val="1F2937"/>
-                </a:solidFill>
-              </a:rPr>
-              <a:t>người</a:t>
-            </a:r>
-            <a:r>
-              <a:rPr sz="1500" b="0" dirty="0">
-                <a:solidFill>
-                  <a:srgbClr val="1F2937"/>
-                </a:solidFill>
-              </a:rPr>
-              <a:t> </a:t>
-            </a:r>
-            <a:r>
-              <a:rPr sz="1500" b="0" dirty="0" err="1">
-                <a:solidFill>
-                  <a:srgbClr val="1F2937"/>
-                </a:solidFill>
-              </a:rPr>
-              <a:t>khác</a:t>
-            </a:r>
-            <a:endParaRPr sz="1500" b="0" dirty="0">
-              <a:solidFill>
-                <a:srgbClr val="1F2937"/>
-              </a:solidFill>
-            </a:endParaRPr>
-          </a:p>
-          <a:p>
-            <a:r>
-              <a:rPr sz="1500" b="0" dirty="0">
-                <a:solidFill>
-                  <a:srgbClr val="1F2937"/>
-                </a:solidFill>
-              </a:rPr>
-              <a:t>- Responsive mobile, </a:t>
-            </a:r>
-            <a:r>
-              <a:rPr sz="1500" b="0" dirty="0" err="1">
-                <a:solidFill>
-                  <a:srgbClr val="1F2937"/>
-                </a:solidFill>
-              </a:rPr>
-              <a:t>sắp</a:t>
-            </a:r>
-            <a:r>
-              <a:rPr sz="1500" b="0" dirty="0">
-                <a:solidFill>
-                  <a:srgbClr val="1F2937"/>
-                </a:solidFill>
-              </a:rPr>
-              <a:t> </a:t>
-            </a:r>
-            <a:r>
-              <a:rPr sz="1500" b="0" dirty="0" err="1">
-                <a:solidFill>
-                  <a:srgbClr val="1F2937"/>
-                </a:solidFill>
-              </a:rPr>
-              <a:t>xếp</a:t>
-            </a:r>
-            <a:r>
-              <a:rPr sz="1500" b="0" dirty="0">
-                <a:solidFill>
-                  <a:srgbClr val="1F2937"/>
-                </a:solidFill>
-              </a:rPr>
-              <a:t> </a:t>
-            </a:r>
-            <a:r>
-              <a:rPr sz="1500" b="0" dirty="0" err="1">
-                <a:solidFill>
-                  <a:srgbClr val="1F2937"/>
-                </a:solidFill>
-              </a:rPr>
-              <a:t>tên</a:t>
-            </a:r>
-            <a:r>
-              <a:rPr sz="1500" b="0" dirty="0">
-                <a:solidFill>
-                  <a:srgbClr val="1F2937"/>
-                </a:solidFill>
-              </a:rPr>
-              <a:t> </a:t>
-            </a:r>
-            <a:r>
-              <a:rPr sz="1500" b="0" dirty="0" err="1">
-                <a:solidFill>
-                  <a:srgbClr val="1F2937"/>
-                </a:solidFill>
-              </a:rPr>
-              <a:t>theo</a:t>
-            </a:r>
-            <a:r>
-              <a:rPr sz="1500" b="0" dirty="0">
-                <a:solidFill>
-                  <a:srgbClr val="1F2937"/>
-                </a:solidFill>
-              </a:rPr>
-              <a:t> </a:t>
-            </a:r>
-            <a:r>
-              <a:rPr sz="1500" b="0" dirty="0" err="1">
-                <a:solidFill>
-                  <a:srgbClr val="1F2937"/>
-                </a:solidFill>
-              </a:rPr>
-              <a:t>quy</a:t>
-            </a:r>
-            <a:r>
-              <a:rPr sz="1500" b="0" dirty="0">
-                <a:solidFill>
-                  <a:srgbClr val="1F2937"/>
-                </a:solidFill>
-              </a:rPr>
-              <a:t> </a:t>
-            </a:r>
-            <a:r>
-              <a:rPr sz="1500" b="0" dirty="0" err="1">
-                <a:solidFill>
-                  <a:srgbClr val="1F2937"/>
-                </a:solidFill>
-              </a:rPr>
-              <a:t>tắc</a:t>
-            </a:r>
-            <a:r>
-              <a:rPr sz="1500" b="0" dirty="0">
-                <a:solidFill>
-                  <a:srgbClr val="1F2937"/>
-                </a:solidFill>
-              </a:rPr>
-              <a:t> </a:t>
-            </a:r>
-            <a:r>
-              <a:rPr sz="1500" b="0" dirty="0" err="1">
-                <a:solidFill>
-                  <a:srgbClr val="1F2937"/>
-                </a:solidFill>
-              </a:rPr>
-              <a:t>Việt</a:t>
-            </a:r>
-            <a:r>
-              <a:rPr sz="1500" b="0" dirty="0">
-                <a:solidFill>
-                  <a:srgbClr val="1F2937"/>
-                </a:solidFill>
-              </a:rPr>
-              <a:t> Nam</a:t>
+              <a:t>- Responsive mobile, sắp xếp tên theo quy tắc Việt Nam</a:t>
             </a:r>
           </a:p>
         </p:txBody>
@@ -4906,6 +3918,7 @@
           </a:bodyPr>
           <a:lstStyle/>
           <a:p>
+            <a:pPr/>
             <a:r>
               <a:rPr sz="1100" b="0">
                 <a:solidFill>
@@ -4926,7 +3939,7 @@
 </file>
 
 <file path=ppt/slides/slide13.xml><?xml version="1.0" encoding="utf-8"?>
-<p:sld xmlns:a="http://schemas.openxmlformats.org/drawingml/2006/main" xmlns:r="http://schemas.openxmlformats.org/officeDocument/2006/relationships" xmlns:p="http://schemas.openxmlformats.org/presentationml/2006/main">
+<p:sld xmlns:a="http://schemas.openxmlformats.org/drawingml/2006/main" xmlns:p="http://schemas.openxmlformats.org/presentationml/2006/main" xmlns:r="http://schemas.openxmlformats.org/officeDocument/2006/relationships">
   <p:cSld>
     <p:spTree>
       <p:nvGrpSpPr>
@@ -4934,14 +3947,7 @@
         <p:cNvGrpSpPr/>
         <p:nvPr/>
       </p:nvGrpSpPr>
-      <p:grpSpPr>
-        <a:xfrm>
-          <a:off x="0" y="0"/>
-          <a:ext cx="0" cy="0"/>
-          <a:chOff x="0" y="0"/>
-          <a:chExt cx="0" cy="0"/>
-        </a:xfrm>
-      </p:grpSpPr>
+      <p:grpSpPr/>
       <p:sp>
         <p:nvSpPr>
           <p:cNvPr id="2" name="Rectangle 1"/>
@@ -4982,7 +3988,6 @@
           <a:lstStyle/>
           <a:p>
             <a:pPr algn="ctr"/>
-            <a:endParaRPr/>
           </a:p>
         </p:txBody>
       </p:sp>
@@ -5008,6 +4013,7 @@
           </a:bodyPr>
           <a:lstStyle/>
           <a:p>
+            <a:pPr/>
             <a:r>
               <a:rPr sz="3600" b="1">
                 <a:solidFill>
@@ -5018,6 +4024,7 @@
             </a:r>
           </a:p>
           <a:p>
+            <a:pPr/>
             <a:r>
               <a:rPr sz="2000" b="0">
                 <a:solidFill>
@@ -5028,6 +4035,7 @@
             </a:r>
           </a:p>
           <a:p>
+            <a:pPr/>
             <a:r>
               <a:rPr sz="1600" b="0">
                 <a:solidFill>
@@ -5038,6 +4046,7 @@
             </a:r>
           </a:p>
           <a:p>
+            <a:pPr/>
             <a:r>
               <a:rPr sz="1400" b="0">
                 <a:solidFill>
@@ -5058,7 +4067,7 @@
 </file>
 
 <file path=ppt/slides/slide2.xml><?xml version="1.0" encoding="utf-8"?>
-<p:sld xmlns:a="http://schemas.openxmlformats.org/drawingml/2006/main" xmlns:r="http://schemas.openxmlformats.org/officeDocument/2006/relationships" xmlns:p="http://schemas.openxmlformats.org/presentationml/2006/main">
+<p:sld xmlns:a="http://schemas.openxmlformats.org/drawingml/2006/main" xmlns:p="http://schemas.openxmlformats.org/presentationml/2006/main" xmlns:r="http://schemas.openxmlformats.org/officeDocument/2006/relationships">
   <p:cSld>
     <p:spTree>
       <p:nvGrpSpPr>
@@ -5066,14 +4075,7 @@
         <p:cNvGrpSpPr/>
         <p:nvPr/>
       </p:nvGrpSpPr>
-      <p:grpSpPr>
-        <a:xfrm>
-          <a:off x="0" y="0"/>
-          <a:ext cx="0" cy="0"/>
-          <a:chOff x="0" y="0"/>
-          <a:chExt cx="0" cy="0"/>
-        </a:xfrm>
-      </p:grpSpPr>
+      <p:grpSpPr/>
       <p:sp>
         <p:nvSpPr>
           <p:cNvPr id="2" name="Rectangle 1"/>
@@ -5114,7 +4116,6 @@
           <a:lstStyle/>
           <a:p>
             <a:pPr algn="ctr"/>
-            <a:endParaRPr/>
           </a:p>
         </p:txBody>
       </p:sp>
@@ -5140,6 +4141,7 @@
           </a:bodyPr>
           <a:lstStyle/>
           <a:p>
+            <a:pPr/>
             <a:r>
               <a:rPr sz="2800" b="1">
                 <a:solidFill>
@@ -5173,6 +4175,7 @@
           </a:bodyPr>
           <a:lstStyle/>
           <a:p>
+            <a:pPr/>
             <a:r>
               <a:rPr sz="1500" b="0">
                 <a:solidFill>
@@ -5183,6 +4186,7 @@
             </a:r>
           </a:p>
           <a:p>
+            <a:pPr/>
             <a:r>
               <a:rPr sz="1500" b="0">
                 <a:solidFill>
@@ -5193,6 +4197,7 @@
             </a:r>
           </a:p>
           <a:p>
+            <a:pPr/>
             <a:r>
               <a:rPr sz="1500" b="0">
                 <a:solidFill>
@@ -5203,6 +4208,7 @@
             </a:r>
           </a:p>
           <a:p>
+            <a:pPr/>
             <a:r>
               <a:rPr sz="1500" b="0">
                 <a:solidFill>
@@ -5213,6 +4219,7 @@
             </a:r>
           </a:p>
           <a:p>
+            <a:pPr/>
             <a:r>
               <a:rPr sz="1500" b="0">
                 <a:solidFill>
@@ -5223,6 +4230,7 @@
             </a:r>
           </a:p>
           <a:p>
+            <a:pPr/>
             <a:r>
               <a:rPr sz="1500" b="0">
                 <a:solidFill>
@@ -5285,6 +4293,7 @@
           </a:bodyPr>
           <a:lstStyle/>
           <a:p>
+            <a:pPr/>
             <a:r>
               <a:rPr sz="1100" b="0">
                 <a:solidFill>
@@ -5305,7 +4314,7 @@
 </file>
 
 <file path=ppt/slides/slide3.xml><?xml version="1.0" encoding="utf-8"?>
-<p:sld xmlns:a="http://schemas.openxmlformats.org/drawingml/2006/main" xmlns:r="http://schemas.openxmlformats.org/officeDocument/2006/relationships" xmlns:p="http://schemas.openxmlformats.org/presentationml/2006/main">
+<p:sld xmlns:a="http://schemas.openxmlformats.org/drawingml/2006/main" xmlns:p="http://schemas.openxmlformats.org/presentationml/2006/main" xmlns:r="http://schemas.openxmlformats.org/officeDocument/2006/relationships">
   <p:cSld>
     <p:spTree>
       <p:nvGrpSpPr>
@@ -5313,14 +4322,7 @@
         <p:cNvGrpSpPr/>
         <p:nvPr/>
       </p:nvGrpSpPr>
-      <p:grpSpPr>
-        <a:xfrm>
-          <a:off x="0" y="0"/>
-          <a:ext cx="0" cy="0"/>
-          <a:chOff x="0" y="0"/>
-          <a:chExt cx="0" cy="0"/>
-        </a:xfrm>
-      </p:grpSpPr>
+      <p:grpSpPr/>
       <p:sp>
         <p:nvSpPr>
           <p:cNvPr id="2" name="TextBox 1"/>
@@ -5343,6 +4345,7 @@
           </a:bodyPr>
           <a:lstStyle/>
           <a:p>
+            <a:pPr/>
             <a:r>
               <a:rPr sz="2800" b="1">
                 <a:solidFill>
@@ -5373,34 +4376,10 @@
                 <a:tableStyleId>{5C22544A-7EE6-4342-B048-85BDC9FD1C3A}</a:tableStyleId>
               </a:tblPr>
               <a:tblGrid>
-                <a:gridCol w="2773603">
-                  <a:extLst>
-                    <a:ext uri="{9D8B030D-6E8A-4147-A177-3AD203B41FA5}">
-                      <a16:colId xmlns:a16="http://schemas.microsoft.com/office/drawing/2014/main" val="20000"/>
-                    </a:ext>
-                  </a:extLst>
-                </a:gridCol>
-                <a:gridCol w="2773603">
-                  <a:extLst>
-                    <a:ext uri="{9D8B030D-6E8A-4147-A177-3AD203B41FA5}">
-                      <a16:colId xmlns:a16="http://schemas.microsoft.com/office/drawing/2014/main" val="20001"/>
-                    </a:ext>
-                  </a:extLst>
-                </a:gridCol>
-                <a:gridCol w="2773603">
-                  <a:extLst>
-                    <a:ext uri="{9D8B030D-6E8A-4147-A177-3AD203B41FA5}">
-                      <a16:colId xmlns:a16="http://schemas.microsoft.com/office/drawing/2014/main" val="20002"/>
-                    </a:ext>
-                  </a:extLst>
-                </a:gridCol>
-                <a:gridCol w="2773606">
-                  <a:extLst>
-                    <a:ext uri="{9D8B030D-6E8A-4147-A177-3AD203B41FA5}">
-                      <a16:colId xmlns:a16="http://schemas.microsoft.com/office/drawing/2014/main" val="20003"/>
-                    </a:ext>
-                  </a:extLst>
-                </a:gridCol>
+                <a:gridCol w="2773603"/>
+                <a:gridCol w="2773603"/>
+                <a:gridCol w="2773603"/>
+                <a:gridCol w="2773606"/>
               </a:tblGrid>
               <a:tr h="950976">
                 <a:tc>
@@ -5449,17 +4428,12 @@
                     <a:p>
                       <a:r>
                         <a:rPr sz="1400"/>
-                        <a:t>Điểm các lớp dạy, giáo án</a:t>
+                        <a:t>Điểm/sổ đầu bài đúng lớp-môn được phân công</a:t>
                       </a:r>
                     </a:p>
                   </a:txBody>
                   <a:tcPr/>
                 </a:tc>
-                <a:extLst>
-                  <a:ext uri="{0D108BD9-81ED-4DB2-BD59-A6C34878D82A}">
-                    <a16:rowId xmlns:a16="http://schemas.microsoft.com/office/drawing/2014/main" val="10000"/>
-                  </a:ext>
-                </a:extLst>
               </a:tr>
               <a:tr h="950976">
                 <a:tc>
@@ -5508,17 +4482,12 @@
                     <a:p>
                       <a:r>
                         <a:rPr sz="1400"/>
-                        <a:t>Toàn trường: duyệt, TKB, radar, AI</a:t>
+                        <a:t>Toàn trường: ký sổ, phân công, duyệt, radar</a:t>
                       </a:r>
                     </a:p>
                   </a:txBody>
                   <a:tcPr/>
                 </a:tc>
-                <a:extLst>
-                  <a:ext uri="{0D108BD9-81ED-4DB2-BD59-A6C34878D82A}">
-                    <a16:rowId xmlns:a16="http://schemas.microsoft.com/office/drawing/2014/main" val="10001"/>
-                  </a:ext>
-                </a:extLst>
               </a:tr>
               <a:tr h="950976">
                 <a:tc>
@@ -5541,7 +4510,7 @@
                     <a:p>
                       <a:r>
                         <a:rPr sz="1400"/>
-                        <a:t>Như BGH, giới hạn campus</a:t>
+                        <a:t>Vận hành trường - không ký sổ/phân công</a:t>
                       </a:r>
                     </a:p>
                   </a:txBody>
@@ -5567,17 +4536,12 @@
                     <a:p>
                       <a:r>
                         <a:rPr sz="1400"/>
-                        <a:t>Nhân sự, TT15 cơ sở vật chất</a:t>
+                        <a:t>Nhân sự, CSVC, NQ37 - không xem hồ sơ HS</a:t>
                       </a:r>
                     </a:p>
                   </a:txBody>
                   <a:tcPr/>
                 </a:tc>
-                <a:extLst>
-                  <a:ext uri="{0D108BD9-81ED-4DB2-BD59-A6C34878D82A}">
-                    <a16:rowId xmlns:a16="http://schemas.microsoft.com/office/drawing/2014/main" val="10002"/>
-                  </a:ext>
-                </a:extLst>
               </a:tr>
               <a:tr h="950976">
                 <a:tc>
@@ -5632,11 +4596,6 @@
                   </a:txBody>
                   <a:tcPr/>
                 </a:tc>
-                <a:extLst>
-                  <a:ext uri="{0D108BD9-81ED-4DB2-BD59-A6C34878D82A}">
-                    <a16:rowId xmlns:a16="http://schemas.microsoft.com/office/drawing/2014/main" val="10003"/>
-                  </a:ext>
-                </a:extLst>
               </a:tr>
               <a:tr h="950976">
                 <a:tc>
@@ -5659,7 +4618,7 @@
                     <a:p>
                       <a:r>
                         <a:rPr sz="1400"/>
-                        <a:t>Con mình: tin nhắn, lịch hẹn, đăng ký</a:t>
+                        <a:t>Con mình (nhiều con): tin nhắn, lịch hẹn, đăng ký</a:t>
                       </a:r>
                     </a:p>
                   </a:txBody>
@@ -5691,11 +4650,6 @@
                   </a:txBody>
                   <a:tcPr/>
                 </a:tc>
-                <a:extLst>
-                  <a:ext uri="{0D108BD9-81ED-4DB2-BD59-A6C34878D82A}">
-                    <a16:rowId xmlns:a16="http://schemas.microsoft.com/office/drawing/2014/main" val="10004"/>
-                  </a:ext>
-                </a:extLst>
               </a:tr>
             </a:tbl>
           </a:graphicData>
@@ -5710,7 +4664,7 @@
 </file>
 
 <file path=ppt/slides/slide4.xml><?xml version="1.0" encoding="utf-8"?>
-<p:sld xmlns:a="http://schemas.openxmlformats.org/drawingml/2006/main" xmlns:r="http://schemas.openxmlformats.org/officeDocument/2006/relationships" xmlns:p="http://schemas.openxmlformats.org/presentationml/2006/main">
+<p:sld xmlns:a="http://schemas.openxmlformats.org/drawingml/2006/main" xmlns:p="http://schemas.openxmlformats.org/presentationml/2006/main" xmlns:r="http://schemas.openxmlformats.org/officeDocument/2006/relationships">
   <p:cSld>
     <p:spTree>
       <p:nvGrpSpPr>
@@ -5718,14 +4672,7 @@
         <p:cNvGrpSpPr/>
         <p:nvPr/>
       </p:nvGrpSpPr>
-      <p:grpSpPr>
-        <a:xfrm>
-          <a:off x="0" y="0"/>
-          <a:ext cx="0" cy="0"/>
-          <a:chOff x="0" y="0"/>
-          <a:chExt cx="0" cy="0"/>
-        </a:xfrm>
-      </p:grpSpPr>
+      <p:grpSpPr/>
       <p:sp>
         <p:nvSpPr>
           <p:cNvPr id="2" name="Rectangle 1"/>
@@ -5766,7 +4713,6 @@
           <a:lstStyle/>
           <a:p>
             <a:pPr algn="ctr"/>
-            <a:endParaRPr/>
           </a:p>
         </p:txBody>
       </p:sp>
@@ -5792,6 +4738,7 @@
           </a:bodyPr>
           <a:lstStyle/>
           <a:p>
+            <a:pPr/>
             <a:r>
               <a:rPr sz="2800" b="1">
                 <a:solidFill>
@@ -5812,7 +4759,7 @@
         <p:spPr>
           <a:xfrm>
             <a:off x="548640" y="1234440"/>
-            <a:ext cx="5120640" cy="1708160"/>
+            <a:ext cx="5120640" cy="5303520"/>
           </a:xfrm>
           <a:prstGeom prst="rect">
             <a:avLst/>
@@ -5825,916 +4772,70 @@
           </a:bodyPr>
           <a:lstStyle/>
           <a:p>
-            <a:r>
-              <a:rPr sz="1500" b="0" dirty="0">
+            <a:pPr/>
+            <a:r>
+              <a:rPr sz="1500" b="0">
                 <a:solidFill>
                   <a:srgbClr val="1F2937"/>
                 </a:solidFill>
               </a:rPr>
-              <a:t>- 4 </a:t>
-            </a:r>
-            <a:r>
-              <a:rPr sz="1500" b="0" dirty="0" err="1">
+              <a:t>- 4 trạng thái/em: Có mặt, Vắng CP, Vắng KP, Đi muộn + ghi chú lý do ngay trên dòng</a:t>
+            </a:r>
+          </a:p>
+          <a:p>
+            <a:pPr/>
+            <a:r>
+              <a:rPr sz="1500" b="0">
                 <a:solidFill>
                   <a:srgbClr val="1F2937"/>
                 </a:solidFill>
               </a:rPr>
-              <a:t>trạng</a:t>
-            </a:r>
-            <a:r>
-              <a:rPr sz="1500" b="0" dirty="0">
+              <a:t>- Chọn ngày bất kỳ để xem lại / sửa điểm danh ngày cũ</a:t>
+            </a:r>
+          </a:p>
+          <a:p>
+            <a:pPr/>
+            <a:r>
+              <a:rPr sz="1500" b="0">
                 <a:solidFill>
                   <a:srgbClr val="1F2937"/>
                 </a:solidFill>
               </a:rPr>
-              <a:t> </a:t>
-            </a:r>
-            <a:r>
-              <a:rPr sz="1500" b="0" dirty="0" err="1">
+              <a:t>- Sổ vắng-muộn và lịch sử theo khoảng ngày (from - to)</a:t>
+            </a:r>
+          </a:p>
+          <a:p>
+            <a:pPr/>
+            <a:r>
+              <a:rPr sz="1500" b="0">
                 <a:solidFill>
                   <a:srgbClr val="1F2937"/>
                 </a:solidFill>
               </a:rPr>
-              <a:t>thái</a:t>
-            </a:r>
-            <a:r>
-              <a:rPr sz="1500" b="0" dirty="0">
+              <a:t>- Ma trận HS x ngày phát hiện vắng liên tục</a:t>
+            </a:r>
+          </a:p>
+          <a:p>
+            <a:pPr/>
+            <a:r>
+              <a:rPr sz="1500" b="0">
                 <a:solidFill>
                   <a:srgbClr val="1F2937"/>
                 </a:solidFill>
               </a:rPr>
-              <a:t>/</a:t>
-            </a:r>
-            <a:r>
-              <a:rPr lang="en-US" sz="1500" b="0" dirty="0">
+              <a:t>- Thông báo phụ huynh tự động (email + in-app)</a:t>
+            </a:r>
+          </a:p>
+          <a:p>
+            <a:pPr/>
+            <a:r>
+              <a:rPr sz="1500" b="0">
                 <a:solidFill>
                   <a:srgbClr val="1F2937"/>
                 </a:solidFill>
               </a:rPr>
-              <a:t>HS</a:t>
-            </a:r>
-            <a:r>
-              <a:rPr sz="1500" b="0" dirty="0">
-                <a:solidFill>
-                  <a:srgbClr val="1F2937"/>
-                </a:solidFill>
-              </a:rPr>
-              <a:t>: </a:t>
-            </a:r>
-            <a:r>
-              <a:rPr sz="1500" b="0" dirty="0" err="1">
-                <a:solidFill>
-                  <a:srgbClr val="1F2937"/>
-                </a:solidFill>
-              </a:rPr>
-              <a:t>Có</a:t>
-            </a:r>
-            <a:r>
-              <a:rPr sz="1500" b="0" dirty="0">
-                <a:solidFill>
-                  <a:srgbClr val="1F2937"/>
-                </a:solidFill>
-              </a:rPr>
-              <a:t> </a:t>
-            </a:r>
-            <a:r>
-              <a:rPr sz="1500" b="0" dirty="0" err="1">
-                <a:solidFill>
-                  <a:srgbClr val="1F2937"/>
-                </a:solidFill>
-              </a:rPr>
-              <a:t>mặt</a:t>
-            </a:r>
-            <a:r>
-              <a:rPr sz="1500" b="0" dirty="0">
-                <a:solidFill>
-                  <a:srgbClr val="1F2937"/>
-                </a:solidFill>
-              </a:rPr>
-              <a:t>, </a:t>
-            </a:r>
-            <a:r>
-              <a:rPr sz="1500" b="0" dirty="0" err="1">
-                <a:solidFill>
-                  <a:srgbClr val="1F2937"/>
-                </a:solidFill>
-              </a:rPr>
-              <a:t>Vắng</a:t>
-            </a:r>
-            <a:r>
-              <a:rPr sz="1500" b="0" dirty="0">
-                <a:solidFill>
-                  <a:srgbClr val="1F2937"/>
-                </a:solidFill>
-              </a:rPr>
-              <a:t> CP, </a:t>
-            </a:r>
-            <a:r>
-              <a:rPr sz="1500" b="0" dirty="0" err="1">
-                <a:solidFill>
-                  <a:srgbClr val="1F2937"/>
-                </a:solidFill>
-              </a:rPr>
-              <a:t>Vắng</a:t>
-            </a:r>
-            <a:r>
-              <a:rPr sz="1500" b="0" dirty="0">
-                <a:solidFill>
-                  <a:srgbClr val="1F2937"/>
-                </a:solidFill>
-              </a:rPr>
-              <a:t> KP, </a:t>
-            </a:r>
-            <a:r>
-              <a:rPr sz="1500" b="0" dirty="0" err="1">
-                <a:solidFill>
-                  <a:srgbClr val="1F2937"/>
-                </a:solidFill>
-              </a:rPr>
-              <a:t>Đi</a:t>
-            </a:r>
-            <a:r>
-              <a:rPr sz="1500" b="0" dirty="0">
-                <a:solidFill>
-                  <a:srgbClr val="1F2937"/>
-                </a:solidFill>
-              </a:rPr>
-              <a:t> </a:t>
-            </a:r>
-            <a:r>
-              <a:rPr sz="1500" b="0" dirty="0" err="1">
-                <a:solidFill>
-                  <a:srgbClr val="1F2937"/>
-                </a:solidFill>
-              </a:rPr>
-              <a:t>muộn</a:t>
-            </a:r>
-            <a:r>
-              <a:rPr sz="1500" b="0" dirty="0">
-                <a:solidFill>
-                  <a:srgbClr val="1F2937"/>
-                </a:solidFill>
-              </a:rPr>
-              <a:t> + </a:t>
-            </a:r>
-            <a:r>
-              <a:rPr sz="1500" b="0" dirty="0" err="1">
-                <a:solidFill>
-                  <a:srgbClr val="1F2937"/>
-                </a:solidFill>
-              </a:rPr>
-              <a:t>thao</a:t>
-            </a:r>
-            <a:r>
-              <a:rPr sz="1500" b="0" dirty="0">
-                <a:solidFill>
-                  <a:srgbClr val="1F2937"/>
-                </a:solidFill>
-              </a:rPr>
-              <a:t> </a:t>
-            </a:r>
-            <a:r>
-              <a:rPr sz="1500" b="0" dirty="0" err="1">
-                <a:solidFill>
-                  <a:srgbClr val="1F2937"/>
-                </a:solidFill>
-              </a:rPr>
-              <a:t>tác</a:t>
-            </a:r>
-            <a:r>
-              <a:rPr sz="1500" b="0" dirty="0">
-                <a:solidFill>
-                  <a:srgbClr val="1F2937"/>
-                </a:solidFill>
-              </a:rPr>
-              <a:t> </a:t>
-            </a:r>
-            <a:r>
-              <a:rPr sz="1500" b="0" dirty="0" err="1">
-                <a:solidFill>
-                  <a:srgbClr val="1F2937"/>
-                </a:solidFill>
-              </a:rPr>
-              <a:t>nhanh</a:t>
-            </a:r>
-            <a:endParaRPr sz="1500" b="0" dirty="0">
-              <a:solidFill>
-                <a:srgbClr val="1F2937"/>
-              </a:solidFill>
-            </a:endParaRPr>
-          </a:p>
-          <a:p>
-            <a:r>
-              <a:rPr sz="1500" b="0" dirty="0">
-                <a:solidFill>
-                  <a:srgbClr val="1F2937"/>
-                </a:solidFill>
-              </a:rPr>
-              <a:t>- </a:t>
-            </a:r>
-            <a:r>
-              <a:rPr sz="1500" b="0" dirty="0" err="1">
-                <a:solidFill>
-                  <a:srgbClr val="1F2937"/>
-                </a:solidFill>
-              </a:rPr>
-              <a:t>Chọn</a:t>
-            </a:r>
-            <a:r>
-              <a:rPr sz="1500" b="0" dirty="0">
-                <a:solidFill>
-                  <a:srgbClr val="1F2937"/>
-                </a:solidFill>
-              </a:rPr>
-              <a:t> </a:t>
-            </a:r>
-            <a:r>
-              <a:rPr sz="1500" b="0" dirty="0" err="1">
-                <a:solidFill>
-                  <a:srgbClr val="1F2937"/>
-                </a:solidFill>
-              </a:rPr>
-              <a:t>ngày</a:t>
-            </a:r>
-            <a:r>
-              <a:rPr sz="1500" b="0" dirty="0">
-                <a:solidFill>
-                  <a:srgbClr val="1F2937"/>
-                </a:solidFill>
-              </a:rPr>
-              <a:t> </a:t>
-            </a:r>
-            <a:r>
-              <a:rPr sz="1500" b="0" dirty="0" err="1">
-                <a:solidFill>
-                  <a:srgbClr val="1F2937"/>
-                </a:solidFill>
-              </a:rPr>
-              <a:t>bất</a:t>
-            </a:r>
-            <a:r>
-              <a:rPr sz="1500" b="0" dirty="0">
-                <a:solidFill>
-                  <a:srgbClr val="1F2937"/>
-                </a:solidFill>
-              </a:rPr>
-              <a:t> </a:t>
-            </a:r>
-            <a:r>
-              <a:rPr sz="1500" b="0" dirty="0" err="1">
-                <a:solidFill>
-                  <a:srgbClr val="1F2937"/>
-                </a:solidFill>
-              </a:rPr>
-              <a:t>kỳ</a:t>
-            </a:r>
-            <a:r>
-              <a:rPr sz="1500" b="0" dirty="0">
-                <a:solidFill>
-                  <a:srgbClr val="1F2937"/>
-                </a:solidFill>
-              </a:rPr>
-              <a:t> </a:t>
-            </a:r>
-            <a:r>
-              <a:rPr sz="1500" b="0" dirty="0" err="1">
-                <a:solidFill>
-                  <a:srgbClr val="1F2937"/>
-                </a:solidFill>
-              </a:rPr>
-              <a:t>để</a:t>
-            </a:r>
-            <a:r>
-              <a:rPr sz="1500" b="0" dirty="0">
-                <a:solidFill>
-                  <a:srgbClr val="1F2937"/>
-                </a:solidFill>
-              </a:rPr>
-              <a:t> </a:t>
-            </a:r>
-            <a:r>
-              <a:rPr sz="1500" b="0" dirty="0" err="1">
-                <a:solidFill>
-                  <a:srgbClr val="1F2937"/>
-                </a:solidFill>
-              </a:rPr>
-              <a:t>xem</a:t>
-            </a:r>
-            <a:r>
-              <a:rPr sz="1500" b="0" dirty="0">
-                <a:solidFill>
-                  <a:srgbClr val="1F2937"/>
-                </a:solidFill>
-              </a:rPr>
-              <a:t> </a:t>
-            </a:r>
-            <a:r>
-              <a:rPr sz="1500" b="0" dirty="0" err="1">
-                <a:solidFill>
-                  <a:srgbClr val="1F2937"/>
-                </a:solidFill>
-              </a:rPr>
-              <a:t>lại</a:t>
-            </a:r>
-            <a:r>
-              <a:rPr sz="1500" b="0" dirty="0">
-                <a:solidFill>
-                  <a:srgbClr val="1F2937"/>
-                </a:solidFill>
-              </a:rPr>
-              <a:t> / </a:t>
-            </a:r>
-            <a:r>
-              <a:rPr sz="1500" b="0" dirty="0" err="1">
-                <a:solidFill>
-                  <a:srgbClr val="1F2937"/>
-                </a:solidFill>
-              </a:rPr>
-              <a:t>sửa</a:t>
-            </a:r>
-            <a:r>
-              <a:rPr sz="1500" b="0" dirty="0">
-                <a:solidFill>
-                  <a:srgbClr val="1F2937"/>
-                </a:solidFill>
-              </a:rPr>
-              <a:t> </a:t>
-            </a:r>
-            <a:r>
-              <a:rPr sz="1500" b="0" dirty="0" err="1">
-                <a:solidFill>
-                  <a:srgbClr val="1F2937"/>
-                </a:solidFill>
-              </a:rPr>
-              <a:t>điểm</a:t>
-            </a:r>
-            <a:r>
-              <a:rPr sz="1500" b="0" dirty="0">
-                <a:solidFill>
-                  <a:srgbClr val="1F2937"/>
-                </a:solidFill>
-              </a:rPr>
-              <a:t> </a:t>
-            </a:r>
-            <a:r>
-              <a:rPr sz="1500" b="0" dirty="0" err="1">
-                <a:solidFill>
-                  <a:srgbClr val="1F2937"/>
-                </a:solidFill>
-              </a:rPr>
-              <a:t>danh</a:t>
-            </a:r>
-            <a:r>
-              <a:rPr sz="1500" b="0" dirty="0">
-                <a:solidFill>
-                  <a:srgbClr val="1F2937"/>
-                </a:solidFill>
-              </a:rPr>
-              <a:t> </a:t>
-            </a:r>
-            <a:r>
-              <a:rPr sz="1500" b="0" dirty="0" err="1">
-                <a:solidFill>
-                  <a:srgbClr val="1F2937"/>
-                </a:solidFill>
-              </a:rPr>
-              <a:t>ngày</a:t>
-            </a:r>
-            <a:r>
-              <a:rPr sz="1500" b="0" dirty="0">
-                <a:solidFill>
-                  <a:srgbClr val="1F2937"/>
-                </a:solidFill>
-              </a:rPr>
-              <a:t> </a:t>
-            </a:r>
-            <a:r>
-              <a:rPr sz="1500" b="0" dirty="0" err="1">
-                <a:solidFill>
-                  <a:srgbClr val="1F2937"/>
-                </a:solidFill>
-              </a:rPr>
-              <a:t>cũ</a:t>
-            </a:r>
-            <a:endParaRPr sz="1500" b="0" dirty="0">
-              <a:solidFill>
-                <a:srgbClr val="1F2937"/>
-              </a:solidFill>
-            </a:endParaRPr>
-          </a:p>
-          <a:p>
-            <a:r>
-              <a:rPr sz="1500" b="0" dirty="0">
-                <a:solidFill>
-                  <a:srgbClr val="1F2937"/>
-                </a:solidFill>
-              </a:rPr>
-              <a:t>- </a:t>
-            </a:r>
-            <a:r>
-              <a:rPr sz="1500" b="0" dirty="0" err="1">
-                <a:solidFill>
-                  <a:srgbClr val="1F2937"/>
-                </a:solidFill>
-              </a:rPr>
-              <a:t>Sổ</a:t>
-            </a:r>
-            <a:r>
-              <a:rPr sz="1500" b="0" dirty="0">
-                <a:solidFill>
-                  <a:srgbClr val="1F2937"/>
-                </a:solidFill>
-              </a:rPr>
-              <a:t> </a:t>
-            </a:r>
-            <a:r>
-              <a:rPr sz="1500" b="0" dirty="0" err="1">
-                <a:solidFill>
-                  <a:srgbClr val="1F2937"/>
-                </a:solidFill>
-              </a:rPr>
-              <a:t>vắng-muộn</a:t>
-            </a:r>
-            <a:r>
-              <a:rPr sz="1500" b="0" dirty="0">
-                <a:solidFill>
-                  <a:srgbClr val="1F2937"/>
-                </a:solidFill>
-              </a:rPr>
-              <a:t> </a:t>
-            </a:r>
-            <a:r>
-              <a:rPr sz="1500" b="0" dirty="0" err="1">
-                <a:solidFill>
-                  <a:srgbClr val="1F2937"/>
-                </a:solidFill>
-              </a:rPr>
-              <a:t>và</a:t>
-            </a:r>
-            <a:r>
-              <a:rPr sz="1500" b="0" dirty="0">
-                <a:solidFill>
-                  <a:srgbClr val="1F2937"/>
-                </a:solidFill>
-              </a:rPr>
-              <a:t> </a:t>
-            </a:r>
-            <a:r>
-              <a:rPr sz="1500" b="0" dirty="0" err="1">
-                <a:solidFill>
-                  <a:srgbClr val="1F2937"/>
-                </a:solidFill>
-              </a:rPr>
-              <a:t>lịch</a:t>
-            </a:r>
-            <a:r>
-              <a:rPr sz="1500" b="0" dirty="0">
-                <a:solidFill>
-                  <a:srgbClr val="1F2937"/>
-                </a:solidFill>
-              </a:rPr>
-              <a:t> </a:t>
-            </a:r>
-            <a:r>
-              <a:rPr sz="1500" b="0" dirty="0" err="1">
-                <a:solidFill>
-                  <a:srgbClr val="1F2937"/>
-                </a:solidFill>
-              </a:rPr>
-              <a:t>sử</a:t>
-            </a:r>
-            <a:r>
-              <a:rPr sz="1500" b="0" dirty="0">
-                <a:solidFill>
-                  <a:srgbClr val="1F2937"/>
-                </a:solidFill>
-              </a:rPr>
-              <a:t> </a:t>
-            </a:r>
-            <a:r>
-              <a:rPr sz="1500" b="0" dirty="0" err="1">
-                <a:solidFill>
-                  <a:srgbClr val="1F2937"/>
-                </a:solidFill>
-              </a:rPr>
-              <a:t>theo</a:t>
-            </a:r>
-            <a:r>
-              <a:rPr sz="1500" b="0" dirty="0">
-                <a:solidFill>
-                  <a:srgbClr val="1F2937"/>
-                </a:solidFill>
-              </a:rPr>
-              <a:t> </a:t>
-            </a:r>
-            <a:r>
-              <a:rPr sz="1500" b="0" dirty="0" err="1">
-                <a:solidFill>
-                  <a:srgbClr val="1F2937"/>
-                </a:solidFill>
-              </a:rPr>
-              <a:t>khoảng</a:t>
-            </a:r>
-            <a:r>
-              <a:rPr sz="1500" b="0" dirty="0">
-                <a:solidFill>
-                  <a:srgbClr val="1F2937"/>
-                </a:solidFill>
-              </a:rPr>
-              <a:t> </a:t>
-            </a:r>
-            <a:r>
-              <a:rPr sz="1500" b="0" dirty="0" err="1">
-                <a:solidFill>
-                  <a:srgbClr val="1F2937"/>
-                </a:solidFill>
-              </a:rPr>
-              <a:t>ngày</a:t>
-            </a:r>
-            <a:r>
-              <a:rPr sz="1500" b="0" dirty="0">
-                <a:solidFill>
-                  <a:srgbClr val="1F2937"/>
-                </a:solidFill>
-              </a:rPr>
-              <a:t> (from - to)</a:t>
-            </a:r>
-          </a:p>
-          <a:p>
-            <a:r>
-              <a:rPr sz="1500" b="0" dirty="0">
-                <a:solidFill>
-                  <a:srgbClr val="1F2937"/>
-                </a:solidFill>
-              </a:rPr>
-              <a:t>- Ma </a:t>
-            </a:r>
-            <a:r>
-              <a:rPr sz="1500" b="0" dirty="0" err="1">
-                <a:solidFill>
-                  <a:srgbClr val="1F2937"/>
-                </a:solidFill>
-              </a:rPr>
-              <a:t>trận</a:t>
-            </a:r>
-            <a:r>
-              <a:rPr sz="1500" b="0" dirty="0">
-                <a:solidFill>
-                  <a:srgbClr val="1F2937"/>
-                </a:solidFill>
-              </a:rPr>
-              <a:t> HS x </a:t>
-            </a:r>
-            <a:r>
-              <a:rPr sz="1500" b="0" dirty="0" err="1">
-                <a:solidFill>
-                  <a:srgbClr val="1F2937"/>
-                </a:solidFill>
-              </a:rPr>
-              <a:t>ngày</a:t>
-            </a:r>
-            <a:r>
-              <a:rPr sz="1500" b="0" dirty="0">
-                <a:solidFill>
-                  <a:srgbClr val="1F2937"/>
-                </a:solidFill>
-              </a:rPr>
-              <a:t> </a:t>
-            </a:r>
-            <a:r>
-              <a:rPr sz="1500" b="0" dirty="0" err="1">
-                <a:solidFill>
-                  <a:srgbClr val="1F2937"/>
-                </a:solidFill>
-              </a:rPr>
-              <a:t>phát</a:t>
-            </a:r>
-            <a:r>
-              <a:rPr sz="1500" b="0" dirty="0">
-                <a:solidFill>
-                  <a:srgbClr val="1F2937"/>
-                </a:solidFill>
-              </a:rPr>
-              <a:t> </a:t>
-            </a:r>
-            <a:r>
-              <a:rPr sz="1500" b="0" dirty="0" err="1">
-                <a:solidFill>
-                  <a:srgbClr val="1F2937"/>
-                </a:solidFill>
-              </a:rPr>
-              <a:t>hiện</a:t>
-            </a:r>
-            <a:r>
-              <a:rPr sz="1500" b="0" dirty="0">
-                <a:solidFill>
-                  <a:srgbClr val="1F2937"/>
-                </a:solidFill>
-              </a:rPr>
-              <a:t> </a:t>
-            </a:r>
-            <a:r>
-              <a:rPr sz="1500" b="0" dirty="0" err="1">
-                <a:solidFill>
-                  <a:srgbClr val="1F2937"/>
-                </a:solidFill>
-              </a:rPr>
-              <a:t>vắng</a:t>
-            </a:r>
-            <a:r>
-              <a:rPr sz="1500" b="0" dirty="0">
-                <a:solidFill>
-                  <a:srgbClr val="1F2937"/>
-                </a:solidFill>
-              </a:rPr>
-              <a:t> </a:t>
-            </a:r>
-            <a:r>
-              <a:rPr sz="1500" b="0" dirty="0" err="1">
-                <a:solidFill>
-                  <a:srgbClr val="1F2937"/>
-                </a:solidFill>
-              </a:rPr>
-              <a:t>liên</a:t>
-            </a:r>
-            <a:r>
-              <a:rPr sz="1500" b="0" dirty="0">
-                <a:solidFill>
-                  <a:srgbClr val="1F2937"/>
-                </a:solidFill>
-              </a:rPr>
-              <a:t> </a:t>
-            </a:r>
-            <a:r>
-              <a:rPr sz="1500" b="0" dirty="0" err="1">
-                <a:solidFill>
-                  <a:srgbClr val="1F2937"/>
-                </a:solidFill>
-              </a:rPr>
-              <a:t>tục</a:t>
-            </a:r>
-            <a:endParaRPr sz="1500" b="0" dirty="0">
-              <a:solidFill>
-                <a:srgbClr val="1F2937"/>
-              </a:solidFill>
-            </a:endParaRPr>
-          </a:p>
-          <a:p>
-            <a:r>
-              <a:rPr sz="1500" b="0" dirty="0">
-                <a:solidFill>
-                  <a:srgbClr val="1F2937"/>
-                </a:solidFill>
-              </a:rPr>
-              <a:t>- </a:t>
-            </a:r>
-            <a:r>
-              <a:rPr sz="1500" b="0" dirty="0" err="1">
-                <a:solidFill>
-                  <a:srgbClr val="1F2937"/>
-                </a:solidFill>
-              </a:rPr>
-              <a:t>Thông</a:t>
-            </a:r>
-            <a:r>
-              <a:rPr sz="1500" b="0" dirty="0">
-                <a:solidFill>
-                  <a:srgbClr val="1F2937"/>
-                </a:solidFill>
-              </a:rPr>
-              <a:t> </a:t>
-            </a:r>
-            <a:r>
-              <a:rPr sz="1500" b="0" dirty="0" err="1">
-                <a:solidFill>
-                  <a:srgbClr val="1F2937"/>
-                </a:solidFill>
-              </a:rPr>
-              <a:t>báo</a:t>
-            </a:r>
-            <a:r>
-              <a:rPr sz="1500" b="0" dirty="0">
-                <a:solidFill>
-                  <a:srgbClr val="1F2937"/>
-                </a:solidFill>
-              </a:rPr>
-              <a:t> </a:t>
-            </a:r>
-            <a:r>
-              <a:rPr sz="1500" b="0" dirty="0" err="1">
-                <a:solidFill>
-                  <a:srgbClr val="1F2937"/>
-                </a:solidFill>
-              </a:rPr>
-              <a:t>phụ</a:t>
-            </a:r>
-            <a:r>
-              <a:rPr sz="1500" b="0" dirty="0">
-                <a:solidFill>
-                  <a:srgbClr val="1F2937"/>
-                </a:solidFill>
-              </a:rPr>
-              <a:t> </a:t>
-            </a:r>
-            <a:r>
-              <a:rPr sz="1500" b="0" dirty="0" err="1">
-                <a:solidFill>
-                  <a:srgbClr val="1F2937"/>
-                </a:solidFill>
-              </a:rPr>
-              <a:t>huynh</a:t>
-            </a:r>
-            <a:r>
-              <a:rPr sz="1500" b="0" dirty="0">
-                <a:solidFill>
-                  <a:srgbClr val="1F2937"/>
-                </a:solidFill>
-              </a:rPr>
-              <a:t> </a:t>
-            </a:r>
-            <a:r>
-              <a:rPr sz="1500" b="0" dirty="0" err="1">
-                <a:solidFill>
-                  <a:srgbClr val="1F2937"/>
-                </a:solidFill>
-              </a:rPr>
-              <a:t>tự</a:t>
-            </a:r>
-            <a:r>
-              <a:rPr sz="1500" b="0" dirty="0">
-                <a:solidFill>
-                  <a:srgbClr val="1F2937"/>
-                </a:solidFill>
-              </a:rPr>
-              <a:t> </a:t>
-            </a:r>
-            <a:r>
-              <a:rPr sz="1500" b="0" dirty="0" err="1">
-                <a:solidFill>
-                  <a:srgbClr val="1F2937"/>
-                </a:solidFill>
-              </a:rPr>
-              <a:t>động</a:t>
-            </a:r>
-            <a:r>
-              <a:rPr sz="1500" b="0" dirty="0">
-                <a:solidFill>
-                  <a:srgbClr val="1F2937"/>
-                </a:solidFill>
-              </a:rPr>
-              <a:t> (email + in-app)</a:t>
-            </a:r>
-          </a:p>
-          <a:p>
-            <a:r>
-              <a:rPr sz="1500" b="0" dirty="0">
-                <a:solidFill>
-                  <a:srgbClr val="1F2937"/>
-                </a:solidFill>
-              </a:rPr>
-              <a:t>- </a:t>
-            </a:r>
-            <a:r>
-              <a:rPr sz="1500" b="0" dirty="0" err="1">
-                <a:solidFill>
-                  <a:srgbClr val="1F2937"/>
-                </a:solidFill>
-              </a:rPr>
-              <a:t>Đồng</a:t>
-            </a:r>
-            <a:r>
-              <a:rPr sz="1500" b="0" dirty="0">
-                <a:solidFill>
-                  <a:srgbClr val="1F2937"/>
-                </a:solidFill>
-              </a:rPr>
-              <a:t> </a:t>
-            </a:r>
-            <a:r>
-              <a:rPr sz="1500" b="0" dirty="0" err="1">
-                <a:solidFill>
-                  <a:srgbClr val="1F2937"/>
-                </a:solidFill>
-              </a:rPr>
-              <a:t>bộ</a:t>
-            </a:r>
-            <a:r>
-              <a:rPr sz="1500" b="0" dirty="0">
-                <a:solidFill>
-                  <a:srgbClr val="1F2937"/>
-                </a:solidFill>
-              </a:rPr>
-              <a:t> 2 </a:t>
-            </a:r>
-            <a:r>
-              <a:rPr sz="1500" b="0" dirty="0" err="1">
-                <a:solidFill>
-                  <a:srgbClr val="1F2937"/>
-                </a:solidFill>
-              </a:rPr>
-              <a:t>chiều</a:t>
-            </a:r>
-            <a:r>
-              <a:rPr sz="1500" b="0" dirty="0">
-                <a:solidFill>
-                  <a:srgbClr val="1F2937"/>
-                </a:solidFill>
-              </a:rPr>
-              <a:t> </a:t>
-            </a:r>
-            <a:r>
-              <a:rPr sz="1500" b="0" dirty="0" err="1">
-                <a:solidFill>
-                  <a:srgbClr val="1F2937"/>
-                </a:solidFill>
-              </a:rPr>
-              <a:t>với</a:t>
-            </a:r>
-            <a:r>
-              <a:rPr sz="1500" b="0" dirty="0">
-                <a:solidFill>
-                  <a:srgbClr val="1F2937"/>
-                </a:solidFill>
-              </a:rPr>
-              <a:t> </a:t>
-            </a:r>
-            <a:r>
-              <a:rPr sz="1500" b="0" dirty="0" err="1">
-                <a:solidFill>
-                  <a:srgbClr val="1F2937"/>
-                </a:solidFill>
-              </a:rPr>
-              <a:t>sổ</a:t>
-            </a:r>
-            <a:r>
-              <a:rPr sz="1500" b="0" dirty="0">
-                <a:solidFill>
-                  <a:srgbClr val="1F2937"/>
-                </a:solidFill>
-              </a:rPr>
-              <a:t> </a:t>
-            </a:r>
-            <a:r>
-              <a:rPr sz="1500" b="0" dirty="0" err="1">
-                <a:solidFill>
-                  <a:srgbClr val="1F2937"/>
-                </a:solidFill>
-              </a:rPr>
-              <a:t>đầu</a:t>
-            </a:r>
-            <a:r>
-              <a:rPr sz="1500" b="0" dirty="0">
-                <a:solidFill>
-                  <a:srgbClr val="1F2937"/>
-                </a:solidFill>
-              </a:rPr>
-              <a:t> </a:t>
-            </a:r>
-            <a:r>
-              <a:rPr sz="1500" b="0" dirty="0" err="1">
-                <a:solidFill>
-                  <a:srgbClr val="1F2937"/>
-                </a:solidFill>
-              </a:rPr>
-              <a:t>bài</a:t>
-            </a:r>
-            <a:r>
-              <a:rPr sz="1500" b="0" dirty="0">
-                <a:solidFill>
-                  <a:srgbClr val="1F2937"/>
-                </a:solidFill>
-              </a:rPr>
-              <a:t> </a:t>
-            </a:r>
-            <a:r>
-              <a:rPr sz="1500" b="0" dirty="0" err="1">
-                <a:solidFill>
-                  <a:srgbClr val="1F2937"/>
-                </a:solidFill>
-              </a:rPr>
-              <a:t>tiết</a:t>
-            </a:r>
-            <a:r>
-              <a:rPr sz="1500" b="0" dirty="0">
-                <a:solidFill>
-                  <a:srgbClr val="1F2937"/>
-                </a:solidFill>
-              </a:rPr>
-              <a:t> </a:t>
-            </a:r>
-            <a:r>
-              <a:rPr sz="1500" b="0" dirty="0" err="1">
-                <a:solidFill>
-                  <a:srgbClr val="1F2937"/>
-                </a:solidFill>
-              </a:rPr>
-              <a:t>học</a:t>
-            </a:r>
-            <a:endParaRPr sz="1500" b="0" dirty="0">
-              <a:solidFill>
-                <a:srgbClr val="1F2937"/>
-              </a:solidFill>
-            </a:endParaRPr>
+              <a:t>- Đồng bộ 2 chiều với sổ đầu bài tiết học</a:t>
+            </a:r>
           </a:p>
         </p:txBody>
       </p:sp>
@@ -6789,13 +4890,14 @@
           </a:bodyPr>
           <a:lstStyle/>
           <a:p>
+            <a:pPr/>
             <a:r>
               <a:rPr sz="1100" b="0">
                 <a:solidFill>
                   <a:srgbClr val="6B7280"/>
                 </a:solidFill>
               </a:rPr>
-              <a:t>Điểm danh hàng ngày - 6 thẻ tổng + chọn ngày</a:t>
+              <a:t>Điểm danh hàng ngày - 6 thẻ tổng + ghi chú vắng</a:t>
             </a:r>
           </a:p>
         </p:txBody>
@@ -6809,7 +4911,7 @@
 </file>
 
 <file path=ppt/slides/slide5.xml><?xml version="1.0" encoding="utf-8"?>
-<p:sld xmlns:a="http://schemas.openxmlformats.org/drawingml/2006/main" xmlns:r="http://schemas.openxmlformats.org/officeDocument/2006/relationships" xmlns:p="http://schemas.openxmlformats.org/presentationml/2006/main">
+<p:sld xmlns:a="http://schemas.openxmlformats.org/drawingml/2006/main" xmlns:p="http://schemas.openxmlformats.org/presentationml/2006/main" xmlns:r="http://schemas.openxmlformats.org/officeDocument/2006/relationships">
   <p:cSld>
     <p:spTree>
       <p:nvGrpSpPr>
@@ -6817,14 +4919,7 @@
         <p:cNvGrpSpPr/>
         <p:nvPr/>
       </p:nvGrpSpPr>
-      <p:grpSpPr>
-        <a:xfrm>
-          <a:off x="0" y="0"/>
-          <a:ext cx="0" cy="0"/>
-          <a:chOff x="0" y="0"/>
-          <a:chExt cx="0" cy="0"/>
-        </a:xfrm>
-      </p:grpSpPr>
+      <p:grpSpPr/>
       <p:sp>
         <p:nvSpPr>
           <p:cNvPr id="2" name="Rectangle 1"/>
@@ -6865,7 +4960,6 @@
           <a:lstStyle/>
           <a:p>
             <a:pPr algn="ctr"/>
-            <a:endParaRPr/>
           </a:p>
         </p:txBody>
       </p:sp>
@@ -6891,6 +4985,7 @@
           </a:bodyPr>
           <a:lstStyle/>
           <a:p>
+            <a:pPr/>
             <a:r>
               <a:rPr sz="2800" b="1">
                 <a:solidFill>
@@ -6924,6 +5019,7 @@
           </a:bodyPr>
           <a:lstStyle/>
           <a:p>
+            <a:pPr/>
             <a:r>
               <a:rPr sz="1500" b="0">
                 <a:solidFill>
@@ -6934,6 +5030,7 @@
             </a:r>
           </a:p>
           <a:p>
+            <a:pPr/>
             <a:r>
               <a:rPr sz="1500" b="0">
                 <a:solidFill>
@@ -6944,33 +5041,47 @@
             </a:r>
           </a:p>
           <a:p>
+            <a:pPr/>
             <a:r>
               <a:rPr sz="1500" b="0">
                 <a:solidFill>
                   <a:srgbClr val="1F2937"/>
                 </a:solidFill>
               </a:rPr>
+              <a:t>- GV chỉ ghi điểm lớp + môn mình được phân công (RLS kiểm tra ở DB)</a:t>
+            </a:r>
+          </a:p>
+          <a:p>
+            <a:pPr/>
+            <a:r>
+              <a:rPr sz="1500" b="0">
+                <a:solidFill>
+                  <a:srgbClr val="1F2937"/>
+                </a:solidFill>
+              </a:rPr>
+              <a:t>- Lưu điểm nguyên tử qua transaction - không mất dữ liệu khi lỗi giữa chừng</a:t>
+            </a:r>
+          </a:p>
+          <a:p>
+            <a:pPr/>
+            <a:r>
+              <a:rPr sz="1500" b="0">
+                <a:solidFill>
+                  <a:srgbClr val="1F2937"/>
+                </a:solidFill>
+              </a:rPr>
               <a:t>- ĐTBm tự tính đúng hệ số TT22, hiển thị HK1 / HK2 / cả năm</a:t>
             </a:r>
           </a:p>
           <a:p>
+            <a:pPr/>
             <a:r>
               <a:rPr sz="1500" b="0">
                 <a:solidFill>
                   <a:srgbClr val="1F2937"/>
                 </a:solidFill>
               </a:rPr>
-              <a:t>- Import/export Excel, tải template mẫu</a:t>
-            </a:r>
-          </a:p>
-          <a:p>
-            <a:r>
-              <a:rPr sz="1500" b="0">
-                <a:solidFill>
-                  <a:srgbClr val="1F2937"/>
-                </a:solidFill>
-              </a:rPr>
-              <a:t>- Môn đánh giá bằng nhận xét hiển thị Đạt / Chưa đạt</a:t>
+              <a:t>- Import/export Excel, tải template mẫu; môn nhận xét hiển thị Đạt / Chưa đạt</a:t>
             </a:r>
           </a:p>
         </p:txBody>
@@ -7026,6 +5137,7 @@
           </a:bodyPr>
           <a:lstStyle/>
           <a:p>
+            <a:pPr/>
             <a:r>
               <a:rPr sz="1100" b="0">
                 <a:solidFill>
@@ -7046,7 +5158,7 @@
 </file>
 
 <file path=ppt/slides/slide6.xml><?xml version="1.0" encoding="utf-8"?>
-<p:sld xmlns:a="http://schemas.openxmlformats.org/drawingml/2006/main" xmlns:r="http://schemas.openxmlformats.org/officeDocument/2006/relationships" xmlns:p="http://schemas.openxmlformats.org/presentationml/2006/main">
+<p:sld xmlns:a="http://schemas.openxmlformats.org/drawingml/2006/main" xmlns:p="http://schemas.openxmlformats.org/presentationml/2006/main" xmlns:r="http://schemas.openxmlformats.org/officeDocument/2006/relationships">
   <p:cSld>
     <p:spTree>
       <p:nvGrpSpPr>
@@ -7054,14 +5166,7 @@
         <p:cNvGrpSpPr/>
         <p:nvPr/>
       </p:nvGrpSpPr>
-      <p:grpSpPr>
-        <a:xfrm>
-          <a:off x="0" y="0"/>
-          <a:ext cx="0" cy="0"/>
-          <a:chOff x="0" y="0"/>
-          <a:chExt cx="0" cy="0"/>
-        </a:xfrm>
-      </p:grpSpPr>
+      <p:grpSpPr/>
       <p:sp>
         <p:nvSpPr>
           <p:cNvPr id="2" name="Rectangle 1"/>
@@ -7102,7 +5207,6 @@
           <a:lstStyle/>
           <a:p>
             <a:pPr algn="ctr"/>
-            <a:endParaRPr/>
           </a:p>
         </p:txBody>
       </p:sp>
@@ -7128,6 +5232,7 @@
           </a:bodyPr>
           <a:lstStyle/>
           <a:p>
+            <a:pPr/>
             <a:r>
               <a:rPr sz="2800" b="1">
                 <a:solidFill>
@@ -7161,6 +5266,7 @@
           </a:bodyPr>
           <a:lstStyle/>
           <a:p>
+            <a:pPr/>
             <a:r>
               <a:rPr sz="1500" b="0">
                 <a:solidFill>
@@ -7171,6 +5277,7 @@
             </a:r>
           </a:p>
           <a:p>
+            <a:pPr/>
             <a:r>
               <a:rPr sz="1500" b="0">
                 <a:solidFill>
@@ -7181,16 +5288,18 @@
             </a:r>
           </a:p>
           <a:p>
+            <a:pPr/>
             <a:r>
               <a:rPr sz="1500" b="0">
                 <a:solidFill>
                   <a:srgbClr val="1F2937"/>
                 </a:solidFill>
               </a:rPr>
-              <a:t>- Sổ đầu bài tách 3 trường: tên bài / nội dung / nhận xét GV</a:t>
-            </a:r>
-          </a:p>
-          <a:p>
+              <a:t>- Sổ đầu bài: chỉ GV được phân công tiết đó mới ghi - tiết người khác chỉ đọc</a:t>
+            </a:r>
+          </a:p>
+          <a:p>
+            <a:pPr/>
             <a:r>
               <a:rPr sz="1500" b="0">
                 <a:solidFill>
@@ -7201,6 +5310,7 @@
             </a:r>
           </a:p>
           <a:p>
+            <a:pPr/>
             <a:r>
               <a:rPr sz="1500" b="0">
                 <a:solidFill>
@@ -7211,6 +5321,7 @@
             </a:r>
           </a:p>
           <a:p>
+            <a:pPr/>
             <a:r>
               <a:rPr sz="1500" b="0">
                 <a:solidFill>
@@ -7273,6 +5384,7 @@
           </a:bodyPr>
           <a:lstStyle/>
           <a:p>
+            <a:pPr/>
             <a:r>
               <a:rPr sz="1100" b="0">
                 <a:solidFill>
@@ -7293,7 +5405,7 @@
 </file>
 
 <file path=ppt/slides/slide7.xml><?xml version="1.0" encoding="utf-8"?>
-<p:sld xmlns:a="http://schemas.openxmlformats.org/drawingml/2006/main" xmlns:r="http://schemas.openxmlformats.org/officeDocument/2006/relationships" xmlns:p="http://schemas.openxmlformats.org/presentationml/2006/main">
+<p:sld xmlns:a="http://schemas.openxmlformats.org/drawingml/2006/main" xmlns:p="http://schemas.openxmlformats.org/presentationml/2006/main" xmlns:r="http://schemas.openxmlformats.org/officeDocument/2006/relationships">
   <p:cSld>
     <p:spTree>
       <p:nvGrpSpPr>
@@ -7301,14 +5413,7 @@
         <p:cNvGrpSpPr/>
         <p:nvPr/>
       </p:nvGrpSpPr>
-      <p:grpSpPr>
-        <a:xfrm>
-          <a:off x="0" y="0"/>
-          <a:ext cx="0" cy="0"/>
-          <a:chOff x="0" y="0"/>
-          <a:chExt cx="0" cy="0"/>
-        </a:xfrm>
-      </p:grpSpPr>
+      <p:grpSpPr/>
       <p:sp>
         <p:nvSpPr>
           <p:cNvPr id="2" name="Rectangle 1"/>
@@ -7349,7 +5454,6 @@
           <a:lstStyle/>
           <a:p>
             <a:pPr algn="ctr"/>
-            <a:endParaRPr/>
           </a:p>
         </p:txBody>
       </p:sp>
@@ -7375,6 +5479,7 @@
           </a:bodyPr>
           <a:lstStyle/>
           <a:p>
+            <a:pPr/>
             <a:r>
               <a:rPr sz="2800" b="1">
                 <a:solidFill>
@@ -7408,6 +5513,7 @@
           </a:bodyPr>
           <a:lstStyle/>
           <a:p>
+            <a:pPr/>
             <a:r>
               <a:rPr sz="1500" b="0">
                 <a:solidFill>
@@ -7418,6 +5524,7 @@
             </a:r>
           </a:p>
           <a:p>
+            <a:pPr/>
             <a:r>
               <a:rPr sz="1500" b="0">
                 <a:solidFill>
@@ -7428,6 +5535,7 @@
             </a:r>
           </a:p>
           <a:p>
+            <a:pPr/>
             <a:r>
               <a:rPr sz="1500" b="0">
                 <a:solidFill>
@@ -7438,6 +5546,7 @@
             </a:r>
           </a:p>
           <a:p>
+            <a:pPr/>
             <a:r>
               <a:rPr sz="1500" b="0">
                 <a:solidFill>
@@ -7448,6 +5557,7 @@
             </a:r>
           </a:p>
           <a:p>
+            <a:pPr/>
             <a:r>
               <a:rPr sz="1500" b="0">
                 <a:solidFill>
@@ -7510,6 +5620,7 @@
           </a:bodyPr>
           <a:lstStyle/>
           <a:p>
+            <a:pPr/>
             <a:r>
               <a:rPr sz="1100" b="0">
                 <a:solidFill>
@@ -7530,7 +5641,7 @@
 </file>
 
 <file path=ppt/slides/slide8.xml><?xml version="1.0" encoding="utf-8"?>
-<p:sld xmlns:a="http://schemas.openxmlformats.org/drawingml/2006/main" xmlns:r="http://schemas.openxmlformats.org/officeDocument/2006/relationships" xmlns:p="http://schemas.openxmlformats.org/presentationml/2006/main">
+<p:sld xmlns:a="http://schemas.openxmlformats.org/drawingml/2006/main" xmlns:p="http://schemas.openxmlformats.org/presentationml/2006/main" xmlns:r="http://schemas.openxmlformats.org/officeDocument/2006/relationships">
   <p:cSld>
     <p:spTree>
       <p:nvGrpSpPr>
@@ -7538,14 +5649,7 @@
         <p:cNvGrpSpPr/>
         <p:nvPr/>
       </p:nvGrpSpPr>
-      <p:grpSpPr>
-        <a:xfrm>
-          <a:off x="0" y="0"/>
-          <a:ext cx="0" cy="0"/>
-          <a:chOff x="0" y="0"/>
-          <a:chExt cx="0" cy="0"/>
-        </a:xfrm>
-      </p:grpSpPr>
+      <p:grpSpPr/>
       <p:sp>
         <p:nvSpPr>
           <p:cNvPr id="2" name="Rectangle 1"/>
@@ -7586,7 +5690,6 @@
           <a:lstStyle/>
           <a:p>
             <a:pPr algn="ctr"/>
-            <a:endParaRPr/>
           </a:p>
         </p:txBody>
       </p:sp>
@@ -7612,6 +5715,7 @@
           </a:bodyPr>
           <a:lstStyle/>
           <a:p>
+            <a:pPr/>
             <a:r>
               <a:rPr sz="2800" b="1">
                 <a:solidFill>
@@ -7645,6 +5749,7 @@
           </a:bodyPr>
           <a:lstStyle/>
           <a:p>
+            <a:pPr/>
             <a:r>
               <a:rPr sz="1500" b="0">
                 <a:solidFill>
@@ -7655,6 +5760,7 @@
             </a:r>
           </a:p>
           <a:p>
+            <a:pPr/>
             <a:r>
               <a:rPr sz="1500" b="0">
                 <a:solidFill>
@@ -7665,6 +5771,7 @@
             </a:r>
           </a:p>
           <a:p>
+            <a:pPr/>
             <a:r>
               <a:rPr sz="1500" b="0">
                 <a:solidFill>
@@ -7675,6 +5782,7 @@
             </a:r>
           </a:p>
           <a:p>
+            <a:pPr/>
             <a:r>
               <a:rPr sz="1500" b="0">
                 <a:solidFill>
@@ -7685,6 +5793,7 @@
             </a:r>
           </a:p>
           <a:p>
+            <a:pPr/>
             <a:r>
               <a:rPr sz="1500" b="0">
                 <a:solidFill>
@@ -7747,6 +5856,7 @@
           </a:bodyPr>
           <a:lstStyle/>
           <a:p>
+            <a:pPr/>
             <a:r>
               <a:rPr sz="1100" b="0">
                 <a:solidFill>
@@ -7767,7 +5877,7 @@
 </file>
 
 <file path=ppt/slides/slide9.xml><?xml version="1.0" encoding="utf-8"?>
-<p:sld xmlns:a="http://schemas.openxmlformats.org/drawingml/2006/main" xmlns:r="http://schemas.openxmlformats.org/officeDocument/2006/relationships" xmlns:p="http://schemas.openxmlformats.org/presentationml/2006/main">
+<p:sld xmlns:a="http://schemas.openxmlformats.org/drawingml/2006/main" xmlns:p="http://schemas.openxmlformats.org/presentationml/2006/main" xmlns:r="http://schemas.openxmlformats.org/officeDocument/2006/relationships">
   <p:cSld>
     <p:spTree>
       <p:nvGrpSpPr>
@@ -7775,14 +5885,7 @@
         <p:cNvGrpSpPr/>
         <p:nvPr/>
       </p:nvGrpSpPr>
-      <p:grpSpPr>
-        <a:xfrm>
-          <a:off x="0" y="0"/>
-          <a:ext cx="0" cy="0"/>
-          <a:chOff x="0" y="0"/>
-          <a:chExt cx="0" cy="0"/>
-        </a:xfrm>
-      </p:grpSpPr>
+      <p:grpSpPr/>
       <p:sp>
         <p:nvSpPr>
           <p:cNvPr id="2" name="Rectangle 1"/>
@@ -7823,7 +5926,6 @@
           <a:lstStyle/>
           <a:p>
             <a:pPr algn="ctr"/>
-            <a:endParaRPr/>
           </a:p>
         </p:txBody>
       </p:sp>
@@ -7849,6 +5951,7 @@
           </a:bodyPr>
           <a:lstStyle/>
           <a:p>
+            <a:pPr/>
             <a:r>
               <a:rPr sz="2800" b="1">
                 <a:solidFill>
@@ -7882,6 +5985,7 @@
           </a:bodyPr>
           <a:lstStyle/>
           <a:p>
+            <a:pPr/>
             <a:r>
               <a:rPr sz="1500" b="0">
                 <a:solidFill>
@@ -7892,6 +5996,7 @@
             </a:r>
           </a:p>
           <a:p>
+            <a:pPr/>
             <a:r>
               <a:rPr sz="1500" b="0">
                 <a:solidFill>
@@ -7902,6 +6007,7 @@
             </a:r>
           </a:p>
           <a:p>
+            <a:pPr/>
             <a:r>
               <a:rPr sz="1500" b="0">
                 <a:solidFill>
@@ -7912,16 +6018,29 @@
             </a:r>
           </a:p>
           <a:p>
+            <a:pPr/>
             <a:r>
               <a:rPr sz="1500" b="0">
                 <a:solidFill>
                   <a:srgbClr val="1F2937"/>
                 </a:solidFill>
               </a:rPr>
-              <a:t>- Ký duyệt sổ chủ nhiệm, khóa sổ theo đợt</a:t>
-            </a:r>
-          </a:p>
-          <a:p>
+              <a:t>- Ký sổ chủ nhiệm: tạo đợt ký - duyệt/từ chối kèm lý do - ký hàng loạt; GVCN không tự ký</a:t>
+            </a:r>
+          </a:p>
+          <a:p>
+            <a:pPr/>
+            <a:r>
+              <a:rPr sz="1500" b="0">
+                <a:solidFill>
+                  <a:srgbClr val="1F2937"/>
+                </a:solidFill>
+              </a:rPr>
+              <a:t>- Chỉ BGH phân công GVCN &amp; lớp năm học</a:t>
+            </a:r>
+          </a:p>
+          <a:p>
+            <a:pPr/>
             <a:r>
               <a:rPr sz="1500" b="0">
                 <a:solidFill>
@@ -7984,6 +6103,7 @@
           </a:bodyPr>
           <a:lstStyle/>
           <a:p>
+            <a:pPr/>
             <a:r>
               <a:rPr sz="1100" b="0">
                 <a:solidFill>

--- a/docs/user-guide/SO-CHU-NHIEM-SO-GIOI-THIEU.pptx
+++ b/docs/user-guide/SO-CHU-NHIEM-SO-GIOI-THIEU.pptx
@@ -5,21 +5,21 @@
     <p:sldMasterId id="2147483648" r:id="rId1"/>
   </p:sldMasterIdLst>
   <p:sldIdLst>
-    <p:sldId id="256" r:id="rId7"/>
-    <p:sldId id="257" r:id="rId8"/>
-    <p:sldId id="258" r:id="rId9"/>
-    <p:sldId id="259" r:id="rId10"/>
-    <p:sldId id="260" r:id="rId11"/>
-    <p:sldId id="261" r:id="rId12"/>
-    <p:sldId id="262" r:id="rId13"/>
-    <p:sldId id="263" r:id="rId14"/>
-    <p:sldId id="264" r:id="rId15"/>
-    <p:sldId id="265" r:id="rId16"/>
-    <p:sldId id="266" r:id="rId17"/>
-    <p:sldId id="267" r:id="rId18"/>
-    <p:sldId id="268" r:id="rId19"/>
+    <p:sldId id="256" r:id="rId2"/>
+    <p:sldId id="257" r:id="rId3"/>
+    <p:sldId id="258" r:id="rId4"/>
+    <p:sldId id="259" r:id="rId5"/>
+    <p:sldId id="260" r:id="rId6"/>
+    <p:sldId id="261" r:id="rId7"/>
+    <p:sldId id="262" r:id="rId8"/>
+    <p:sldId id="263" r:id="rId9"/>
+    <p:sldId id="264" r:id="rId10"/>
+    <p:sldId id="265" r:id="rId11"/>
+    <p:sldId id="266" r:id="rId12"/>
+    <p:sldId id="267" r:id="rId13"/>
+    <p:sldId id="268" r:id="rId14"/>
   </p:sldIdLst>
-  <p:sldSz cx="12191695" cy="6858000" type="screen4x3"/>
+  <p:sldSz cx="12192000" cy="6858000"/>
   <p:notesSz cx="6858000" cy="9144000"/>
   <p:defaultTextStyle>
     <a:defPPr>
@@ -116,6 +116,22 @@
       </a:defRPr>
     </a:lvl9pPr>
   </p:defaultTextStyle>
+  <p:extLst>
+    <p:ext uri="{EFAFB233-063F-42B5-8137-9DF3F51BA10A}">
+      <p15:sldGuideLst xmlns:p15="http://schemas.microsoft.com/office/powerpoint/2012/main">
+        <p15:guide id="1" orient="horz" pos="2160">
+          <p15:clr>
+            <a:srgbClr val="A4A3A4"/>
+          </p15:clr>
+        </p15:guide>
+        <p15:guide id="2" pos="2880">
+          <p15:clr>
+            <a:srgbClr val="A4A3A4"/>
+          </p15:clr>
+        </p15:guide>
+      </p15:sldGuideLst>
+    </p:ext>
+  </p:extLst>
 </p:presentation>
 </file>
 
@@ -157,10 +173,9 @@
           <a:lstStyle/>
           <a:p>
             <a:r>
-              <a:rPr lang="en-US" smtClean="0"/>
+              <a:rPr lang="en-US"/>
               <a:t>Click to edit Master title style</a:t>
             </a:r>
-            <a:endParaRPr lang="en-US"/>
           </a:p>
         </p:txBody>
       </p:sp>
@@ -276,10 +291,9 @@
           </a:lstStyle>
           <a:p>
             <a:r>
-              <a:rPr lang="en-US" smtClean="0"/>
+              <a:rPr lang="en-US"/>
               <a:t>Click to edit Master subtitle style</a:t>
             </a:r>
-            <a:endParaRPr lang="en-US"/>
           </a:p>
         </p:txBody>
       </p:sp>
@@ -300,7 +314,7 @@
           <a:p>
             <a:fld id="{5BCAD085-E8A6-8845-BD4E-CB4CCA059FC4}" type="datetimeFigureOut">
               <a:rPr lang="en-US" smtClean="0"/>
-              <a:t>1/27/13</a:t>
+              <a:t>9/23/26</a:t>
             </a:fld>
             <a:endParaRPr lang="en-US"/>
           </a:p>
@@ -394,10 +408,9 @@
           <a:lstStyle/>
           <a:p>
             <a:r>
-              <a:rPr lang="en-US" smtClean="0"/>
+              <a:rPr lang="en-US"/>
               <a:t>Click to edit Master title style</a:t>
             </a:r>
-            <a:endParaRPr lang="en-US"/>
           </a:p>
         </p:txBody>
       </p:sp>
@@ -418,38 +431,37 @@
           <a:p>
             <a:pPr lvl="0"/>
             <a:r>
-              <a:rPr lang="en-US" smtClean="0"/>
+              <a:rPr lang="en-US"/>
               <a:t>Click to edit Master text styles</a:t>
             </a:r>
           </a:p>
           <a:p>
             <a:pPr lvl="1"/>
             <a:r>
-              <a:rPr lang="en-US" smtClean="0"/>
+              <a:rPr lang="en-US"/>
               <a:t>Second level</a:t>
             </a:r>
           </a:p>
           <a:p>
             <a:pPr lvl="2"/>
             <a:r>
-              <a:rPr lang="en-US" smtClean="0"/>
+              <a:rPr lang="en-US"/>
               <a:t>Third level</a:t>
             </a:r>
           </a:p>
           <a:p>
             <a:pPr lvl="3"/>
             <a:r>
-              <a:rPr lang="en-US" smtClean="0"/>
+              <a:rPr lang="en-US"/>
               <a:t>Fourth level</a:t>
             </a:r>
           </a:p>
           <a:p>
             <a:pPr lvl="4"/>
             <a:r>
-              <a:rPr lang="en-US" smtClean="0"/>
+              <a:rPr lang="en-US"/>
               <a:t>Fifth level</a:t>
             </a:r>
-            <a:endParaRPr lang="en-US"/>
           </a:p>
         </p:txBody>
       </p:sp>
@@ -470,7 +482,7 @@
           <a:p>
             <a:fld id="{5BCAD085-E8A6-8845-BD4E-CB4CCA059FC4}" type="datetimeFigureOut">
               <a:rPr lang="en-US" smtClean="0"/>
-              <a:t>1/27/13</a:t>
+              <a:t>9/23/26</a:t>
             </a:fld>
             <a:endParaRPr lang="en-US"/>
           </a:p>
@@ -569,10 +581,9 @@
           <a:lstStyle/>
           <a:p>
             <a:r>
-              <a:rPr lang="en-US" smtClean="0"/>
+              <a:rPr lang="en-US"/>
               <a:t>Click to edit Master title style</a:t>
             </a:r>
-            <a:endParaRPr lang="en-US"/>
           </a:p>
         </p:txBody>
       </p:sp>
@@ -598,38 +609,37 @@
           <a:p>
             <a:pPr lvl="0"/>
             <a:r>
-              <a:rPr lang="en-US" smtClean="0"/>
+              <a:rPr lang="en-US"/>
               <a:t>Click to edit Master text styles</a:t>
             </a:r>
           </a:p>
           <a:p>
             <a:pPr lvl="1"/>
             <a:r>
-              <a:rPr lang="en-US" smtClean="0"/>
+              <a:rPr lang="en-US"/>
               <a:t>Second level</a:t>
             </a:r>
           </a:p>
           <a:p>
             <a:pPr lvl="2"/>
             <a:r>
-              <a:rPr lang="en-US" smtClean="0"/>
+              <a:rPr lang="en-US"/>
               <a:t>Third level</a:t>
             </a:r>
           </a:p>
           <a:p>
             <a:pPr lvl="3"/>
             <a:r>
-              <a:rPr lang="en-US" smtClean="0"/>
+              <a:rPr lang="en-US"/>
               <a:t>Fourth level</a:t>
             </a:r>
           </a:p>
           <a:p>
             <a:pPr lvl="4"/>
             <a:r>
-              <a:rPr lang="en-US" smtClean="0"/>
+              <a:rPr lang="en-US"/>
               <a:t>Fifth level</a:t>
             </a:r>
-            <a:endParaRPr lang="en-US"/>
           </a:p>
         </p:txBody>
       </p:sp>
@@ -650,7 +660,7 @@
           <a:p>
             <a:fld id="{5BCAD085-E8A6-8845-BD4E-CB4CCA059FC4}" type="datetimeFigureOut">
               <a:rPr lang="en-US" smtClean="0"/>
-              <a:t>1/27/13</a:t>
+              <a:t>9/23/26</a:t>
             </a:fld>
             <a:endParaRPr lang="en-US"/>
           </a:p>
@@ -744,10 +754,9 @@
           <a:lstStyle/>
           <a:p>
             <a:r>
-              <a:rPr lang="en-US" smtClean="0"/>
+              <a:rPr lang="en-US"/>
               <a:t>Click to edit Master title style</a:t>
             </a:r>
-            <a:endParaRPr lang="en-US"/>
           </a:p>
         </p:txBody>
       </p:sp>
@@ -768,38 +777,37 @@
           <a:p>
             <a:pPr lvl="0"/>
             <a:r>
-              <a:rPr lang="en-US" smtClean="0"/>
+              <a:rPr lang="en-US"/>
               <a:t>Click to edit Master text styles</a:t>
             </a:r>
           </a:p>
           <a:p>
             <a:pPr lvl="1"/>
             <a:r>
-              <a:rPr lang="en-US" smtClean="0"/>
+              <a:rPr lang="en-US"/>
               <a:t>Second level</a:t>
             </a:r>
           </a:p>
           <a:p>
             <a:pPr lvl="2"/>
             <a:r>
-              <a:rPr lang="en-US" smtClean="0"/>
+              <a:rPr lang="en-US"/>
               <a:t>Third level</a:t>
             </a:r>
           </a:p>
           <a:p>
             <a:pPr lvl="3"/>
             <a:r>
-              <a:rPr lang="en-US" smtClean="0"/>
+              <a:rPr lang="en-US"/>
               <a:t>Fourth level</a:t>
             </a:r>
           </a:p>
           <a:p>
             <a:pPr lvl="4"/>
             <a:r>
-              <a:rPr lang="en-US" smtClean="0"/>
+              <a:rPr lang="en-US"/>
               <a:t>Fifth level</a:t>
             </a:r>
-            <a:endParaRPr lang="en-US"/>
           </a:p>
         </p:txBody>
       </p:sp>
@@ -820,7 +828,7 @@
           <a:p>
             <a:fld id="{5BCAD085-E8A6-8845-BD4E-CB4CCA059FC4}" type="datetimeFigureOut">
               <a:rPr lang="en-US" smtClean="0"/>
-              <a:t>1/27/13</a:t>
+              <a:t>9/23/26</a:t>
             </a:fld>
             <a:endParaRPr lang="en-US"/>
           </a:p>
@@ -923,10 +931,9 @@
           </a:lstStyle>
           <a:p>
             <a:r>
-              <a:rPr lang="en-US" smtClean="0"/>
+              <a:rPr lang="en-US"/>
               <a:t>Click to edit Master title style</a:t>
             </a:r>
-            <a:endParaRPr lang="en-US"/>
           </a:p>
         </p:txBody>
       </p:sp>
@@ -1043,7 +1050,7 @@
           <a:p>
             <a:pPr lvl="0"/>
             <a:r>
-              <a:rPr lang="en-US" smtClean="0"/>
+              <a:rPr lang="en-US"/>
               <a:t>Click to edit Master text styles</a:t>
             </a:r>
           </a:p>
@@ -1066,7 +1073,7 @@
           <a:p>
             <a:fld id="{5BCAD085-E8A6-8845-BD4E-CB4CCA059FC4}" type="datetimeFigureOut">
               <a:rPr lang="en-US" smtClean="0"/>
-              <a:t>1/27/13</a:t>
+              <a:t>9/23/26</a:t>
             </a:fld>
             <a:endParaRPr lang="en-US"/>
           </a:p>
@@ -1160,10 +1167,9 @@
           <a:lstStyle/>
           <a:p>
             <a:r>
-              <a:rPr lang="en-US" smtClean="0"/>
+              <a:rPr lang="en-US"/>
               <a:t>Click to edit Master title style</a:t>
             </a:r>
-            <a:endParaRPr lang="en-US"/>
           </a:p>
         </p:txBody>
       </p:sp>
@@ -1217,38 +1223,37 @@
           <a:p>
             <a:pPr lvl="0"/>
             <a:r>
-              <a:rPr lang="en-US" smtClean="0"/>
+              <a:rPr lang="en-US"/>
               <a:t>Click to edit Master text styles</a:t>
             </a:r>
           </a:p>
           <a:p>
             <a:pPr lvl="1"/>
             <a:r>
-              <a:rPr lang="en-US" smtClean="0"/>
+              <a:rPr lang="en-US"/>
               <a:t>Second level</a:t>
             </a:r>
           </a:p>
           <a:p>
             <a:pPr lvl="2"/>
             <a:r>
-              <a:rPr lang="en-US" smtClean="0"/>
+              <a:rPr lang="en-US"/>
               <a:t>Third level</a:t>
             </a:r>
           </a:p>
           <a:p>
             <a:pPr lvl="3"/>
             <a:r>
-              <a:rPr lang="en-US" smtClean="0"/>
+              <a:rPr lang="en-US"/>
               <a:t>Fourth level</a:t>
             </a:r>
           </a:p>
           <a:p>
             <a:pPr lvl="4"/>
             <a:r>
-              <a:rPr lang="en-US" smtClean="0"/>
+              <a:rPr lang="en-US"/>
               <a:t>Fifth level</a:t>
             </a:r>
-            <a:endParaRPr lang="en-US"/>
           </a:p>
         </p:txBody>
       </p:sp>
@@ -1302,38 +1307,37 @@
           <a:p>
             <a:pPr lvl="0"/>
             <a:r>
-              <a:rPr lang="en-US" smtClean="0"/>
+              <a:rPr lang="en-US"/>
               <a:t>Click to edit Master text styles</a:t>
             </a:r>
           </a:p>
           <a:p>
             <a:pPr lvl="1"/>
             <a:r>
-              <a:rPr lang="en-US" smtClean="0"/>
+              <a:rPr lang="en-US"/>
               <a:t>Second level</a:t>
             </a:r>
           </a:p>
           <a:p>
             <a:pPr lvl="2"/>
             <a:r>
-              <a:rPr lang="en-US" smtClean="0"/>
+              <a:rPr lang="en-US"/>
               <a:t>Third level</a:t>
             </a:r>
           </a:p>
           <a:p>
             <a:pPr lvl="3"/>
             <a:r>
-              <a:rPr lang="en-US" smtClean="0"/>
+              <a:rPr lang="en-US"/>
               <a:t>Fourth level</a:t>
             </a:r>
           </a:p>
           <a:p>
             <a:pPr lvl="4"/>
             <a:r>
-              <a:rPr lang="en-US" smtClean="0"/>
+              <a:rPr lang="en-US"/>
               <a:t>Fifth level</a:t>
             </a:r>
-            <a:endParaRPr lang="en-US"/>
           </a:p>
         </p:txBody>
       </p:sp>
@@ -1354,7 +1358,7 @@
           <a:p>
             <a:fld id="{5BCAD085-E8A6-8845-BD4E-CB4CCA059FC4}" type="datetimeFigureOut">
               <a:rPr lang="en-US" smtClean="0"/>
-              <a:t>1/27/13</a:t>
+              <a:t>9/23/26</a:t>
             </a:fld>
             <a:endParaRPr lang="en-US"/>
           </a:p>
@@ -1452,10 +1456,9 @@
           </a:lstStyle>
           <a:p>
             <a:r>
-              <a:rPr lang="en-US" smtClean="0"/>
+              <a:rPr lang="en-US"/>
               <a:t>Click to edit Master title style</a:t>
             </a:r>
-            <a:endParaRPr lang="en-US"/>
           </a:p>
         </p:txBody>
       </p:sp>
@@ -1518,7 +1521,7 @@
           <a:p>
             <a:pPr lvl="0"/>
             <a:r>
-              <a:rPr lang="en-US" smtClean="0"/>
+              <a:rPr lang="en-US"/>
               <a:t>Click to edit Master text styles</a:t>
             </a:r>
           </a:p>
@@ -1574,38 +1577,37 @@
           <a:p>
             <a:pPr lvl="0"/>
             <a:r>
-              <a:rPr lang="en-US" smtClean="0"/>
+              <a:rPr lang="en-US"/>
               <a:t>Click to edit Master text styles</a:t>
             </a:r>
           </a:p>
           <a:p>
             <a:pPr lvl="1"/>
             <a:r>
-              <a:rPr lang="en-US" smtClean="0"/>
+              <a:rPr lang="en-US"/>
               <a:t>Second level</a:t>
             </a:r>
           </a:p>
           <a:p>
             <a:pPr lvl="2"/>
             <a:r>
-              <a:rPr lang="en-US" smtClean="0"/>
+              <a:rPr lang="en-US"/>
               <a:t>Third level</a:t>
             </a:r>
           </a:p>
           <a:p>
             <a:pPr lvl="3"/>
             <a:r>
-              <a:rPr lang="en-US" smtClean="0"/>
+              <a:rPr lang="en-US"/>
               <a:t>Fourth level</a:t>
             </a:r>
           </a:p>
           <a:p>
             <a:pPr lvl="4"/>
             <a:r>
-              <a:rPr lang="en-US" smtClean="0"/>
+              <a:rPr lang="en-US"/>
               <a:t>Fifth level</a:t>
             </a:r>
-            <a:endParaRPr lang="en-US"/>
           </a:p>
         </p:txBody>
       </p:sp>
@@ -1668,7 +1670,7 @@
           <a:p>
             <a:pPr lvl="0"/>
             <a:r>
-              <a:rPr lang="en-US" smtClean="0"/>
+              <a:rPr lang="en-US"/>
               <a:t>Click to edit Master text styles</a:t>
             </a:r>
           </a:p>
@@ -1724,38 +1726,37 @@
           <a:p>
             <a:pPr lvl="0"/>
             <a:r>
-              <a:rPr lang="en-US" smtClean="0"/>
+              <a:rPr lang="en-US"/>
               <a:t>Click to edit Master text styles</a:t>
             </a:r>
           </a:p>
           <a:p>
             <a:pPr lvl="1"/>
             <a:r>
-              <a:rPr lang="en-US" smtClean="0"/>
+              <a:rPr lang="en-US"/>
               <a:t>Second level</a:t>
             </a:r>
           </a:p>
           <a:p>
             <a:pPr lvl="2"/>
             <a:r>
-              <a:rPr lang="en-US" smtClean="0"/>
+              <a:rPr lang="en-US"/>
               <a:t>Third level</a:t>
             </a:r>
           </a:p>
           <a:p>
             <a:pPr lvl="3"/>
             <a:r>
-              <a:rPr lang="en-US" smtClean="0"/>
+              <a:rPr lang="en-US"/>
               <a:t>Fourth level</a:t>
             </a:r>
           </a:p>
           <a:p>
             <a:pPr lvl="4"/>
             <a:r>
-              <a:rPr lang="en-US" smtClean="0"/>
+              <a:rPr lang="en-US"/>
               <a:t>Fifth level</a:t>
             </a:r>
-            <a:endParaRPr lang="en-US"/>
           </a:p>
         </p:txBody>
       </p:sp>
@@ -1776,7 +1777,7 @@
           <a:p>
             <a:fld id="{5BCAD085-E8A6-8845-BD4E-CB4CCA059FC4}" type="datetimeFigureOut">
               <a:rPr lang="en-US" smtClean="0"/>
-              <a:t>1/27/13</a:t>
+              <a:t>9/23/26</a:t>
             </a:fld>
             <a:endParaRPr lang="en-US"/>
           </a:p>
@@ -1870,10 +1871,9 @@
           <a:lstStyle/>
           <a:p>
             <a:r>
-              <a:rPr lang="en-US" smtClean="0"/>
+              <a:rPr lang="en-US"/>
               <a:t>Click to edit Master title style</a:t>
             </a:r>
-            <a:endParaRPr lang="en-US"/>
           </a:p>
         </p:txBody>
       </p:sp>
@@ -1894,7 +1894,7 @@
           <a:p>
             <a:fld id="{5BCAD085-E8A6-8845-BD4E-CB4CCA059FC4}" type="datetimeFigureOut">
               <a:rPr lang="en-US" smtClean="0"/>
-              <a:t>1/27/13</a:t>
+              <a:t>9/23/26</a:t>
             </a:fld>
             <a:endParaRPr lang="en-US"/>
           </a:p>
@@ -1989,7 +1989,7 @@
           <a:p>
             <a:fld id="{5BCAD085-E8A6-8845-BD4E-CB4CCA059FC4}" type="datetimeFigureOut">
               <a:rPr lang="en-US" smtClean="0"/>
-              <a:t>1/27/13</a:t>
+              <a:t>9/23/26</a:t>
             </a:fld>
             <a:endParaRPr lang="en-US"/>
           </a:p>
@@ -2092,10 +2092,9 @@
           </a:lstStyle>
           <a:p>
             <a:r>
-              <a:rPr lang="en-US" smtClean="0"/>
+              <a:rPr lang="en-US"/>
               <a:t>Click to edit Master title style</a:t>
             </a:r>
-            <a:endParaRPr lang="en-US"/>
           </a:p>
         </p:txBody>
       </p:sp>
@@ -2149,38 +2148,37 @@
           <a:p>
             <a:pPr lvl="0"/>
             <a:r>
-              <a:rPr lang="en-US" smtClean="0"/>
+              <a:rPr lang="en-US"/>
               <a:t>Click to edit Master text styles</a:t>
             </a:r>
           </a:p>
           <a:p>
             <a:pPr lvl="1"/>
             <a:r>
-              <a:rPr lang="en-US" smtClean="0"/>
+              <a:rPr lang="en-US"/>
               <a:t>Second level</a:t>
             </a:r>
           </a:p>
           <a:p>
             <a:pPr lvl="2"/>
             <a:r>
-              <a:rPr lang="en-US" smtClean="0"/>
+              <a:rPr lang="en-US"/>
               <a:t>Third level</a:t>
             </a:r>
           </a:p>
           <a:p>
             <a:pPr lvl="3"/>
             <a:r>
-              <a:rPr lang="en-US" smtClean="0"/>
+              <a:rPr lang="en-US"/>
               <a:t>Fourth level</a:t>
             </a:r>
           </a:p>
           <a:p>
             <a:pPr lvl="4"/>
             <a:r>
-              <a:rPr lang="en-US" smtClean="0"/>
+              <a:rPr lang="en-US"/>
               <a:t>Fifth level</a:t>
             </a:r>
-            <a:endParaRPr lang="en-US"/>
           </a:p>
         </p:txBody>
       </p:sp>
@@ -2243,7 +2241,7 @@
           <a:p>
             <a:pPr lvl="0"/>
             <a:r>
-              <a:rPr lang="en-US" smtClean="0"/>
+              <a:rPr lang="en-US"/>
               <a:t>Click to edit Master text styles</a:t>
             </a:r>
           </a:p>
@@ -2266,7 +2264,7 @@
           <a:p>
             <a:fld id="{5BCAD085-E8A6-8845-BD4E-CB4CCA059FC4}" type="datetimeFigureOut">
               <a:rPr lang="en-US" smtClean="0"/>
-              <a:t>1/27/13</a:t>
+              <a:t>9/23/26</a:t>
             </a:fld>
             <a:endParaRPr lang="en-US"/>
           </a:p>
@@ -2369,10 +2367,9 @@
           </a:lstStyle>
           <a:p>
             <a:r>
-              <a:rPr lang="en-US" smtClean="0"/>
+              <a:rPr lang="en-US"/>
               <a:t>Click to edit Master title style</a:t>
             </a:r>
-            <a:endParaRPr lang="en-US"/>
           </a:p>
         </p:txBody>
       </p:sp>
@@ -2496,7 +2493,7 @@
           <a:p>
             <a:pPr lvl="0"/>
             <a:r>
-              <a:rPr lang="en-US" smtClean="0"/>
+              <a:rPr lang="en-US"/>
               <a:t>Click to edit Master text styles</a:t>
             </a:r>
           </a:p>
@@ -2519,7 +2516,7 @@
           <a:p>
             <a:fld id="{5BCAD085-E8A6-8845-BD4E-CB4CCA059FC4}" type="datetimeFigureOut">
               <a:rPr lang="en-US" smtClean="0"/>
-              <a:t>1/27/13</a:t>
+              <a:t>9/23/26</a:t>
             </a:fld>
             <a:endParaRPr lang="en-US"/>
           </a:p>
@@ -2628,10 +2625,9 @@
           <a:lstStyle/>
           <a:p>
             <a:r>
-              <a:rPr lang="en-US" smtClean="0"/>
+              <a:rPr lang="en-US"/>
               <a:t>Click to edit Master title style</a:t>
             </a:r>
-            <a:endParaRPr lang="en-US"/>
           </a:p>
         </p:txBody>
       </p:sp>
@@ -2662,38 +2658,37 @@
           <a:p>
             <a:pPr lvl="0"/>
             <a:r>
-              <a:rPr lang="en-US" smtClean="0"/>
+              <a:rPr lang="en-US"/>
               <a:t>Click to edit Master text styles</a:t>
             </a:r>
           </a:p>
           <a:p>
             <a:pPr lvl="1"/>
             <a:r>
-              <a:rPr lang="en-US" smtClean="0"/>
+              <a:rPr lang="en-US"/>
               <a:t>Second level</a:t>
             </a:r>
           </a:p>
           <a:p>
             <a:pPr lvl="2"/>
             <a:r>
-              <a:rPr lang="en-US" smtClean="0"/>
+              <a:rPr lang="en-US"/>
               <a:t>Third level</a:t>
             </a:r>
           </a:p>
           <a:p>
             <a:pPr lvl="3"/>
             <a:r>
-              <a:rPr lang="en-US" smtClean="0"/>
+              <a:rPr lang="en-US"/>
               <a:t>Fourth level</a:t>
             </a:r>
           </a:p>
           <a:p>
             <a:pPr lvl="4"/>
             <a:r>
-              <a:rPr lang="en-US" smtClean="0"/>
+              <a:rPr lang="en-US"/>
               <a:t>Fifth level</a:t>
             </a:r>
-            <a:endParaRPr lang="en-US"/>
           </a:p>
         </p:txBody>
       </p:sp>
@@ -2732,7 +2727,7 @@
           <a:p>
             <a:fld id="{5BCAD085-E8A6-8845-BD4E-CB4CCA059FC4}" type="datetimeFigureOut">
               <a:rPr lang="en-US" smtClean="0"/>
-              <a:t>1/27/13</a:t>
+              <a:t>9/23/26</a:t>
             </a:fld>
             <a:endParaRPr lang="en-US"/>
           </a:p>
@@ -3091,7 +3086,7 @@
 </file>
 
 <file path=ppt/slides/slide1.xml><?xml version="1.0" encoding="utf-8"?>
-<p:sld xmlns:a="http://schemas.openxmlformats.org/drawingml/2006/main" xmlns:p="http://schemas.openxmlformats.org/presentationml/2006/main" xmlns:r="http://schemas.openxmlformats.org/officeDocument/2006/relationships">
+<p:sld xmlns:a="http://schemas.openxmlformats.org/drawingml/2006/main" xmlns:r="http://schemas.openxmlformats.org/officeDocument/2006/relationships" xmlns:p="http://schemas.openxmlformats.org/presentationml/2006/main">
   <p:cSld>
     <p:spTree>
       <p:nvGrpSpPr>
@@ -3099,7 +3094,14 @@
         <p:cNvGrpSpPr/>
         <p:nvPr/>
       </p:nvGrpSpPr>
-      <p:grpSpPr/>
+      <p:grpSpPr>
+        <a:xfrm>
+          <a:off x="0" y="0"/>
+          <a:ext cx="0" cy="0"/>
+          <a:chOff x="0" y="0"/>
+          <a:chExt cx="0" cy="0"/>
+        </a:xfrm>
+      </p:grpSpPr>
       <p:sp>
         <p:nvSpPr>
           <p:cNvPr id="2" name="Rectangle 1"/>
@@ -3140,6 +3142,7 @@
           <a:lstStyle/>
           <a:p>
             <a:pPr algn="ctr"/>
+            <a:endParaRPr/>
           </a:p>
         </p:txBody>
       </p:sp>
@@ -3165,7 +3168,6 @@
           </a:bodyPr>
           <a:lstStyle/>
           <a:p>
-            <a:pPr/>
             <a:r>
               <a:rPr sz="4400" b="1">
                 <a:solidFill>
@@ -3176,7 +3178,6 @@
             </a:r>
           </a:p>
           <a:p>
-            <a:pPr/>
             <a:r>
               <a:rPr sz="2000" b="0">
                 <a:solidFill>
@@ -3210,7 +3211,6 @@
           </a:bodyPr>
           <a:lstStyle/>
           <a:p>
-            <a:pPr/>
             <a:r>
               <a:rPr sz="1400" b="0">
                 <a:solidFill>
@@ -3231,7 +3231,7 @@
 </file>
 
 <file path=ppt/slides/slide10.xml><?xml version="1.0" encoding="utf-8"?>
-<p:sld xmlns:a="http://schemas.openxmlformats.org/drawingml/2006/main" xmlns:p="http://schemas.openxmlformats.org/presentationml/2006/main" xmlns:r="http://schemas.openxmlformats.org/officeDocument/2006/relationships">
+<p:sld xmlns:a="http://schemas.openxmlformats.org/drawingml/2006/main" xmlns:r="http://schemas.openxmlformats.org/officeDocument/2006/relationships" xmlns:p="http://schemas.openxmlformats.org/presentationml/2006/main">
   <p:cSld>
     <p:spTree>
       <p:nvGrpSpPr>
@@ -3239,7 +3239,14 @@
         <p:cNvGrpSpPr/>
         <p:nvPr/>
       </p:nvGrpSpPr>
-      <p:grpSpPr/>
+      <p:grpSpPr>
+        <a:xfrm>
+          <a:off x="0" y="0"/>
+          <a:ext cx="0" cy="0"/>
+          <a:chOff x="0" y="0"/>
+          <a:chExt cx="0" cy="0"/>
+        </a:xfrm>
+      </p:grpSpPr>
       <p:sp>
         <p:nvSpPr>
           <p:cNvPr id="2" name="Rectangle 1"/>
@@ -3280,6 +3287,7 @@
           <a:lstStyle/>
           <a:p>
             <a:pPr algn="ctr"/>
+            <a:endParaRPr/>
           </a:p>
         </p:txBody>
       </p:sp>
@@ -3305,7 +3313,6 @@
           </a:bodyPr>
           <a:lstStyle/>
           <a:p>
-            <a:pPr/>
             <a:r>
               <a:rPr sz="2800" b="1">
                 <a:solidFill>
@@ -3339,7 +3346,6 @@
           </a:bodyPr>
           <a:lstStyle/>
           <a:p>
-            <a:pPr/>
             <a:r>
               <a:rPr sz="1500" b="0">
                 <a:solidFill>
@@ -3350,7 +3356,6 @@
             </a:r>
           </a:p>
           <a:p>
-            <a:pPr/>
             <a:r>
               <a:rPr sz="1500" b="0">
                 <a:solidFill>
@@ -3361,7 +3366,6 @@
             </a:r>
           </a:p>
           <a:p>
-            <a:pPr/>
             <a:r>
               <a:rPr sz="1500" b="0">
                 <a:solidFill>
@@ -3372,7 +3376,6 @@
             </a:r>
           </a:p>
           <a:p>
-            <a:pPr/>
             <a:r>
               <a:rPr sz="1500" b="0">
                 <a:solidFill>
@@ -3383,7 +3386,6 @@
             </a:r>
           </a:p>
           <a:p>
-            <a:pPr/>
             <a:r>
               <a:rPr sz="1500" b="0">
                 <a:solidFill>
@@ -3394,7 +3396,6 @@
             </a:r>
           </a:p>
           <a:p>
-            <a:pPr/>
             <a:r>
               <a:rPr sz="1500" b="0">
                 <a:solidFill>
@@ -3457,7 +3458,6 @@
           </a:bodyPr>
           <a:lstStyle/>
           <a:p>
-            <a:pPr/>
             <a:r>
               <a:rPr sz="1100" b="0">
                 <a:solidFill>
@@ -3478,7 +3478,7 @@
 </file>
 
 <file path=ppt/slides/slide11.xml><?xml version="1.0" encoding="utf-8"?>
-<p:sld xmlns:a="http://schemas.openxmlformats.org/drawingml/2006/main" xmlns:p="http://schemas.openxmlformats.org/presentationml/2006/main" xmlns:r="http://schemas.openxmlformats.org/officeDocument/2006/relationships">
+<p:sld xmlns:a="http://schemas.openxmlformats.org/drawingml/2006/main" xmlns:r="http://schemas.openxmlformats.org/officeDocument/2006/relationships" xmlns:p="http://schemas.openxmlformats.org/presentationml/2006/main">
   <p:cSld>
     <p:spTree>
       <p:nvGrpSpPr>
@@ -3486,7 +3486,14 @@
         <p:cNvGrpSpPr/>
         <p:nvPr/>
       </p:nvGrpSpPr>
-      <p:grpSpPr/>
+      <p:grpSpPr>
+        <a:xfrm>
+          <a:off x="0" y="0"/>
+          <a:ext cx="0" cy="0"/>
+          <a:chOff x="0" y="0"/>
+          <a:chExt cx="0" cy="0"/>
+        </a:xfrm>
+      </p:grpSpPr>
       <p:sp>
         <p:nvSpPr>
           <p:cNvPr id="2" name="Rectangle 1"/>
@@ -3527,6 +3534,7 @@
           <a:lstStyle/>
           <a:p>
             <a:pPr algn="ctr"/>
+            <a:endParaRPr/>
           </a:p>
         </p:txBody>
       </p:sp>
@@ -3552,7 +3560,6 @@
           </a:bodyPr>
           <a:lstStyle/>
           <a:p>
-            <a:pPr/>
             <a:r>
               <a:rPr sz="2800" b="1">
                 <a:solidFill>
@@ -3573,7 +3580,7 @@
         <p:spPr>
           <a:xfrm>
             <a:off x="548640" y="1234440"/>
-            <a:ext cx="5120640" cy="5303520"/>
+            <a:ext cx="5120640" cy="784830"/>
           </a:xfrm>
           <a:prstGeom prst="rect">
             <a:avLst/>
@@ -3586,48 +3593,507 @@
           </a:bodyPr>
           <a:lstStyle/>
           <a:p>
-            <a:pPr/>
-            <a:r>
-              <a:rPr sz="1500" b="0">
-                <a:solidFill>
-                  <a:srgbClr val="1F2937"/>
-                </a:solidFill>
-              </a:rPr>
-              <a:t>- Tuyến 1: LLM cấu hình qua env - Gemini / OpenAI / Anthropic, đổi provider bằng AI_PROVIDER + AI_MODEL</a:t>
-            </a:r>
-          </a:p>
-          <a:p>
-            <a:pPr/>
-            <a:r>
-              <a:rPr sz="1500" b="0">
-                <a:solidFill>
-                  <a:srgbClr val="1F2937"/>
-                </a:solidFill>
-              </a:rPr>
-              <a:t>- Tuyến 2: Devin async - hết quota LLM thì tạo session xử lý, callback trả kết quả</a:t>
-            </a:r>
-          </a:p>
-          <a:p>
-            <a:pPr/>
-            <a:r>
-              <a:rPr sz="1500" b="0">
-                <a:solidFill>
-                  <a:srgbClr val="1F2937"/>
-                </a:solidFill>
-              </a:rPr>
-              <a:t>- Tuyến 3: rule-based fallback - luôn có câu trả lời hữu ích kể cả khi mọi backend chết</a:t>
-            </a:r>
-          </a:p>
-          <a:p>
-            <a:pPr/>
-            <a:r>
-              <a:rPr sz="1500" b="0">
-                <a:solidFill>
-                  <a:srgbClr val="1F2937"/>
-                </a:solidFill>
-              </a:rPr>
-              <a:t>- Ứng dụng: báo cáo hồ sơ lớp, nhận xét giáo án, gợi ý cảnh báo, trợ lý điều hành, phân tích sổ đầu bài, biên bản sinh hoạt, báo cáo Sở</a:t>
-            </a:r>
+            <a:r>
+              <a:rPr sz="1500" b="0" dirty="0">
+                <a:solidFill>
+                  <a:srgbClr val="1F2937"/>
+                </a:solidFill>
+              </a:rPr>
+              <a:t>- </a:t>
+            </a:r>
+            <a:r>
+              <a:rPr sz="1500" b="0" dirty="0" err="1">
+                <a:solidFill>
+                  <a:srgbClr val="1F2937"/>
+                </a:solidFill>
+              </a:rPr>
+              <a:t>Ứng</a:t>
+            </a:r>
+            <a:r>
+              <a:rPr sz="1500" b="0" dirty="0">
+                <a:solidFill>
+                  <a:srgbClr val="1F2937"/>
+                </a:solidFill>
+              </a:rPr>
+              <a:t> </a:t>
+            </a:r>
+            <a:r>
+              <a:rPr sz="1500" b="0" dirty="0" err="1">
+                <a:solidFill>
+                  <a:srgbClr val="1F2937"/>
+                </a:solidFill>
+              </a:rPr>
+              <a:t>dụng</a:t>
+            </a:r>
+            <a:r>
+              <a:rPr sz="1500" b="0" dirty="0">
+                <a:solidFill>
+                  <a:srgbClr val="1F2937"/>
+                </a:solidFill>
+              </a:rPr>
+              <a:t>: </a:t>
+            </a:r>
+            <a:r>
+              <a:rPr sz="1500" b="0" dirty="0" err="1">
+                <a:solidFill>
+                  <a:srgbClr val="1F2937"/>
+                </a:solidFill>
+              </a:rPr>
+              <a:t>báo</a:t>
+            </a:r>
+            <a:r>
+              <a:rPr sz="1500" b="0" dirty="0">
+                <a:solidFill>
+                  <a:srgbClr val="1F2937"/>
+                </a:solidFill>
+              </a:rPr>
+              <a:t> </a:t>
+            </a:r>
+            <a:r>
+              <a:rPr sz="1500" b="0" dirty="0" err="1">
+                <a:solidFill>
+                  <a:srgbClr val="1F2937"/>
+                </a:solidFill>
+              </a:rPr>
+              <a:t>cáo</a:t>
+            </a:r>
+            <a:r>
+              <a:rPr sz="1500" b="0" dirty="0">
+                <a:solidFill>
+                  <a:srgbClr val="1F2937"/>
+                </a:solidFill>
+              </a:rPr>
+              <a:t> </a:t>
+            </a:r>
+            <a:r>
+              <a:rPr sz="1500" b="0" dirty="0" err="1">
+                <a:solidFill>
+                  <a:srgbClr val="1F2937"/>
+                </a:solidFill>
+              </a:rPr>
+              <a:t>hồ</a:t>
+            </a:r>
+            <a:r>
+              <a:rPr sz="1500" b="0" dirty="0">
+                <a:solidFill>
+                  <a:srgbClr val="1F2937"/>
+                </a:solidFill>
+              </a:rPr>
+              <a:t> </a:t>
+            </a:r>
+            <a:r>
+              <a:rPr sz="1500" b="0" dirty="0" err="1">
+                <a:solidFill>
+                  <a:srgbClr val="1F2937"/>
+                </a:solidFill>
+              </a:rPr>
+              <a:t>sơ</a:t>
+            </a:r>
+            <a:r>
+              <a:rPr sz="1500" b="0" dirty="0">
+                <a:solidFill>
+                  <a:srgbClr val="1F2937"/>
+                </a:solidFill>
+              </a:rPr>
+              <a:t> </a:t>
+            </a:r>
+            <a:r>
+              <a:rPr sz="1500" b="0" dirty="0" err="1">
+                <a:solidFill>
+                  <a:srgbClr val="1F2937"/>
+                </a:solidFill>
+              </a:rPr>
+              <a:t>lớp</a:t>
+            </a:r>
+            <a:r>
+              <a:rPr sz="1500" b="0" dirty="0">
+                <a:solidFill>
+                  <a:srgbClr val="1F2937"/>
+                </a:solidFill>
+              </a:rPr>
+              <a:t>, </a:t>
+            </a:r>
+            <a:r>
+              <a:rPr sz="1500" b="0" dirty="0" err="1">
+                <a:solidFill>
+                  <a:srgbClr val="1F2937"/>
+                </a:solidFill>
+              </a:rPr>
+              <a:t>nhận</a:t>
+            </a:r>
+            <a:r>
+              <a:rPr sz="1500" b="0" dirty="0">
+                <a:solidFill>
+                  <a:srgbClr val="1F2937"/>
+                </a:solidFill>
+              </a:rPr>
+              <a:t> </a:t>
+            </a:r>
+            <a:r>
+              <a:rPr sz="1500" b="0" dirty="0" err="1">
+                <a:solidFill>
+                  <a:srgbClr val="1F2937"/>
+                </a:solidFill>
+              </a:rPr>
+              <a:t>xét</a:t>
+            </a:r>
+            <a:r>
+              <a:rPr sz="1500" b="0" dirty="0">
+                <a:solidFill>
+                  <a:srgbClr val="1F2937"/>
+                </a:solidFill>
+              </a:rPr>
+              <a:t> </a:t>
+            </a:r>
+            <a:r>
+              <a:rPr sz="1500" b="0" dirty="0" err="1">
+                <a:solidFill>
+                  <a:srgbClr val="1F2937"/>
+                </a:solidFill>
+              </a:rPr>
+              <a:t>giáo</a:t>
+            </a:r>
+            <a:r>
+              <a:rPr sz="1500" b="0" dirty="0">
+                <a:solidFill>
+                  <a:srgbClr val="1F2937"/>
+                </a:solidFill>
+              </a:rPr>
+              <a:t> </a:t>
+            </a:r>
+            <a:r>
+              <a:rPr sz="1500" b="0" dirty="0" err="1">
+                <a:solidFill>
+                  <a:srgbClr val="1F2937"/>
+                </a:solidFill>
+              </a:rPr>
+              <a:t>án</a:t>
+            </a:r>
+            <a:r>
+              <a:rPr sz="1500" b="0" dirty="0">
+                <a:solidFill>
+                  <a:srgbClr val="1F2937"/>
+                </a:solidFill>
+              </a:rPr>
+              <a:t>, </a:t>
+            </a:r>
+            <a:r>
+              <a:rPr sz="1500" b="0" dirty="0" err="1">
+                <a:solidFill>
+                  <a:srgbClr val="1F2937"/>
+                </a:solidFill>
+              </a:rPr>
+              <a:t>gợi</a:t>
+            </a:r>
+            <a:r>
+              <a:rPr sz="1500" b="0" dirty="0">
+                <a:solidFill>
+                  <a:srgbClr val="1F2937"/>
+                </a:solidFill>
+              </a:rPr>
+              <a:t> </a:t>
+            </a:r>
+            <a:r>
+              <a:rPr sz="1500" b="0" dirty="0" err="1">
+                <a:solidFill>
+                  <a:srgbClr val="1F2937"/>
+                </a:solidFill>
+              </a:rPr>
+              <a:t>ý</a:t>
+            </a:r>
+            <a:r>
+              <a:rPr sz="1500" b="0" dirty="0">
+                <a:solidFill>
+                  <a:srgbClr val="1F2937"/>
+                </a:solidFill>
+              </a:rPr>
+              <a:t> </a:t>
+            </a:r>
+            <a:r>
+              <a:rPr sz="1500" b="0" dirty="0" err="1">
+                <a:solidFill>
+                  <a:srgbClr val="1F2937"/>
+                </a:solidFill>
+              </a:rPr>
+              <a:t>cảnh</a:t>
+            </a:r>
+            <a:r>
+              <a:rPr sz="1500" b="0" dirty="0">
+                <a:solidFill>
+                  <a:srgbClr val="1F2937"/>
+                </a:solidFill>
+              </a:rPr>
+              <a:t> </a:t>
+            </a:r>
+            <a:r>
+              <a:rPr sz="1500" b="0" dirty="0" err="1">
+                <a:solidFill>
+                  <a:srgbClr val="1F2937"/>
+                </a:solidFill>
+              </a:rPr>
+              <a:t>báo</a:t>
+            </a:r>
+            <a:r>
+              <a:rPr sz="1500" b="0" dirty="0">
+                <a:solidFill>
+                  <a:srgbClr val="1F2937"/>
+                </a:solidFill>
+              </a:rPr>
+              <a:t>, </a:t>
+            </a:r>
+            <a:r>
+              <a:rPr sz="1500" b="0" dirty="0" err="1">
+                <a:solidFill>
+                  <a:srgbClr val="1F2937"/>
+                </a:solidFill>
+              </a:rPr>
+              <a:t>trợ</a:t>
+            </a:r>
+            <a:r>
+              <a:rPr sz="1500" b="0" dirty="0">
+                <a:solidFill>
+                  <a:srgbClr val="1F2937"/>
+                </a:solidFill>
+              </a:rPr>
+              <a:t> </a:t>
+            </a:r>
+            <a:r>
+              <a:rPr sz="1500" b="0" dirty="0" err="1">
+                <a:solidFill>
+                  <a:srgbClr val="1F2937"/>
+                </a:solidFill>
+              </a:rPr>
+              <a:t>lý</a:t>
+            </a:r>
+            <a:r>
+              <a:rPr sz="1500" b="0" dirty="0">
+                <a:solidFill>
+                  <a:srgbClr val="1F2937"/>
+                </a:solidFill>
+              </a:rPr>
+              <a:t> </a:t>
+            </a:r>
+            <a:r>
+              <a:rPr sz="1500" b="0" dirty="0" err="1">
+                <a:solidFill>
+                  <a:srgbClr val="1F2937"/>
+                </a:solidFill>
+              </a:rPr>
+              <a:t>điều</a:t>
+            </a:r>
+            <a:r>
+              <a:rPr sz="1500" b="0" dirty="0">
+                <a:solidFill>
+                  <a:srgbClr val="1F2937"/>
+                </a:solidFill>
+              </a:rPr>
+              <a:t> </a:t>
+            </a:r>
+            <a:r>
+              <a:rPr sz="1500" b="0" dirty="0" err="1">
+                <a:solidFill>
+                  <a:srgbClr val="1F2937"/>
+                </a:solidFill>
+              </a:rPr>
+              <a:t>hành</a:t>
+            </a:r>
+            <a:r>
+              <a:rPr sz="1500" b="0" dirty="0">
+                <a:solidFill>
+                  <a:srgbClr val="1F2937"/>
+                </a:solidFill>
+              </a:rPr>
+              <a:t>, </a:t>
+            </a:r>
+            <a:r>
+              <a:rPr sz="1500" b="0" dirty="0" err="1">
+                <a:solidFill>
+                  <a:srgbClr val="1F2937"/>
+                </a:solidFill>
+              </a:rPr>
+              <a:t>phân</a:t>
+            </a:r>
+            <a:r>
+              <a:rPr sz="1500" b="0" dirty="0">
+                <a:solidFill>
+                  <a:srgbClr val="1F2937"/>
+                </a:solidFill>
+              </a:rPr>
+              <a:t> </a:t>
+            </a:r>
+            <a:r>
+              <a:rPr sz="1500" b="0" dirty="0" err="1">
+                <a:solidFill>
+                  <a:srgbClr val="1F2937"/>
+                </a:solidFill>
+              </a:rPr>
+              <a:t>tích</a:t>
+            </a:r>
+            <a:r>
+              <a:rPr sz="1500" b="0" dirty="0">
+                <a:solidFill>
+                  <a:srgbClr val="1F2937"/>
+                </a:solidFill>
+              </a:rPr>
+              <a:t> </a:t>
+            </a:r>
+            <a:r>
+              <a:rPr sz="1500" b="0" dirty="0" err="1">
+                <a:solidFill>
+                  <a:srgbClr val="1F2937"/>
+                </a:solidFill>
+              </a:rPr>
+              <a:t>sổ</a:t>
+            </a:r>
+            <a:r>
+              <a:rPr sz="1500" b="0" dirty="0">
+                <a:solidFill>
+                  <a:srgbClr val="1F2937"/>
+                </a:solidFill>
+              </a:rPr>
+              <a:t> </a:t>
+            </a:r>
+            <a:r>
+              <a:rPr sz="1500" b="0" dirty="0" err="1">
+                <a:solidFill>
+                  <a:srgbClr val="1F2937"/>
+                </a:solidFill>
+              </a:rPr>
+              <a:t>đầu</a:t>
+            </a:r>
+            <a:r>
+              <a:rPr sz="1500" b="0" dirty="0">
+                <a:solidFill>
+                  <a:srgbClr val="1F2937"/>
+                </a:solidFill>
+              </a:rPr>
+              <a:t> </a:t>
+            </a:r>
+            <a:r>
+              <a:rPr sz="1500" b="0" dirty="0" err="1">
+                <a:solidFill>
+                  <a:srgbClr val="1F2937"/>
+                </a:solidFill>
+              </a:rPr>
+              <a:t>bài</a:t>
+            </a:r>
+            <a:r>
+              <a:rPr sz="1500" b="0" dirty="0">
+                <a:solidFill>
+                  <a:srgbClr val="1F2937"/>
+                </a:solidFill>
+              </a:rPr>
+              <a:t>, </a:t>
+            </a:r>
+            <a:r>
+              <a:rPr sz="1500" b="0" dirty="0" err="1">
+                <a:solidFill>
+                  <a:srgbClr val="1F2937"/>
+                </a:solidFill>
+              </a:rPr>
+              <a:t>biên</a:t>
+            </a:r>
+            <a:r>
+              <a:rPr sz="1500" b="0" dirty="0">
+                <a:solidFill>
+                  <a:srgbClr val="1F2937"/>
+                </a:solidFill>
+              </a:rPr>
+              <a:t> </a:t>
+            </a:r>
+            <a:r>
+              <a:rPr sz="1500" b="0" dirty="0" err="1">
+                <a:solidFill>
+                  <a:srgbClr val="1F2937"/>
+                </a:solidFill>
+              </a:rPr>
+              <a:t>bản</a:t>
+            </a:r>
+            <a:r>
+              <a:rPr sz="1500" b="0" dirty="0">
+                <a:solidFill>
+                  <a:srgbClr val="1F2937"/>
+                </a:solidFill>
+              </a:rPr>
+              <a:t> </a:t>
+            </a:r>
+            <a:r>
+              <a:rPr sz="1500" b="0" dirty="0" err="1">
+                <a:solidFill>
+                  <a:srgbClr val="1F2937"/>
+                </a:solidFill>
+              </a:rPr>
+              <a:t>sinh</a:t>
+            </a:r>
+            <a:r>
+              <a:rPr sz="1500" b="0" dirty="0">
+                <a:solidFill>
+                  <a:srgbClr val="1F2937"/>
+                </a:solidFill>
+              </a:rPr>
+              <a:t> </a:t>
+            </a:r>
+            <a:r>
+              <a:rPr sz="1500" b="0" dirty="0" err="1">
+                <a:solidFill>
+                  <a:srgbClr val="1F2937"/>
+                </a:solidFill>
+              </a:rPr>
+              <a:t>hoạt</a:t>
+            </a:r>
+            <a:r>
+              <a:rPr sz="1500" b="0" dirty="0">
+                <a:solidFill>
+                  <a:srgbClr val="1F2937"/>
+                </a:solidFill>
+              </a:rPr>
+              <a:t>, </a:t>
+            </a:r>
+            <a:r>
+              <a:rPr sz="1500" b="0" dirty="0" err="1">
+                <a:solidFill>
+                  <a:srgbClr val="1F2937"/>
+                </a:solidFill>
+              </a:rPr>
+              <a:t>báo</a:t>
+            </a:r>
+            <a:r>
+              <a:rPr sz="1500" b="0" dirty="0">
+                <a:solidFill>
+                  <a:srgbClr val="1F2937"/>
+                </a:solidFill>
+              </a:rPr>
+              <a:t> </a:t>
+            </a:r>
+            <a:r>
+              <a:rPr sz="1500" b="0" dirty="0" err="1">
+                <a:solidFill>
+                  <a:srgbClr val="1F2937"/>
+                </a:solidFill>
+              </a:rPr>
+              <a:t>cáo</a:t>
+            </a:r>
+            <a:r>
+              <a:rPr sz="1500" b="0" dirty="0">
+                <a:solidFill>
+                  <a:srgbClr val="1F2937"/>
+                </a:solidFill>
+              </a:rPr>
+              <a:t> </a:t>
+            </a:r>
+            <a:r>
+              <a:rPr sz="1500" b="0" dirty="0" err="1">
+                <a:solidFill>
+                  <a:srgbClr val="1F2937"/>
+                </a:solidFill>
+              </a:rPr>
+              <a:t>Sở</a:t>
+            </a:r>
+            <a:endParaRPr sz="1500" b="0" dirty="0">
+              <a:solidFill>
+                <a:srgbClr val="1F2937"/>
+              </a:solidFill>
+            </a:endParaRPr>
           </a:p>
         </p:txBody>
       </p:sp>
@@ -3682,7 +4148,6 @@
           </a:bodyPr>
           <a:lstStyle/>
           <a:p>
-            <a:pPr/>
             <a:r>
               <a:rPr sz="1100" b="0">
                 <a:solidFill>
@@ -3703,7 +4168,7 @@
 </file>
 
 <file path=ppt/slides/slide12.xml><?xml version="1.0" encoding="utf-8"?>
-<p:sld xmlns:a="http://schemas.openxmlformats.org/drawingml/2006/main" xmlns:p="http://schemas.openxmlformats.org/presentationml/2006/main" xmlns:r="http://schemas.openxmlformats.org/officeDocument/2006/relationships">
+<p:sld xmlns:a="http://schemas.openxmlformats.org/drawingml/2006/main" xmlns:r="http://schemas.openxmlformats.org/officeDocument/2006/relationships" xmlns:p="http://schemas.openxmlformats.org/presentationml/2006/main">
   <p:cSld>
     <p:spTree>
       <p:nvGrpSpPr>
@@ -3711,7 +4176,14 @@
         <p:cNvGrpSpPr/>
         <p:nvPr/>
       </p:nvGrpSpPr>
-      <p:grpSpPr/>
+      <p:grpSpPr>
+        <a:xfrm>
+          <a:off x="0" y="0"/>
+          <a:ext cx="0" cy="0"/>
+          <a:chOff x="0" y="0"/>
+          <a:chExt cx="0" cy="0"/>
+        </a:xfrm>
+      </p:grpSpPr>
       <p:sp>
         <p:nvSpPr>
           <p:cNvPr id="2" name="Rectangle 1"/>
@@ -3752,6 +4224,7 @@
           <a:lstStyle/>
           <a:p>
             <a:pPr algn="ctr"/>
+            <a:endParaRPr/>
           </a:p>
         </p:txBody>
       </p:sp>
@@ -3777,7 +4250,6 @@
           </a:bodyPr>
           <a:lstStyle/>
           <a:p>
-            <a:pPr/>
             <a:r>
               <a:rPr sz="2800" b="1">
                 <a:solidFill>
@@ -3811,7 +4283,6 @@
           </a:bodyPr>
           <a:lstStyle/>
           <a:p>
-            <a:pPr/>
             <a:r>
               <a:rPr sz="1500" b="0">
                 <a:solidFill>
@@ -3822,7 +4293,6 @@
             </a:r>
           </a:p>
           <a:p>
-            <a:pPr/>
             <a:r>
               <a:rPr sz="1500" b="0">
                 <a:solidFill>
@@ -3833,7 +4303,6 @@
             </a:r>
           </a:p>
           <a:p>
-            <a:pPr/>
             <a:r>
               <a:rPr sz="1500" b="0">
                 <a:solidFill>
@@ -3844,7 +4313,6 @@
             </a:r>
           </a:p>
           <a:p>
-            <a:pPr/>
             <a:r>
               <a:rPr sz="1500" b="0">
                 <a:solidFill>
@@ -3855,7 +4323,6 @@
             </a:r>
           </a:p>
           <a:p>
-            <a:pPr/>
             <a:r>
               <a:rPr sz="1500" b="0">
                 <a:solidFill>
@@ -3918,7 +4385,6 @@
           </a:bodyPr>
           <a:lstStyle/>
           <a:p>
-            <a:pPr/>
             <a:r>
               <a:rPr sz="1100" b="0">
                 <a:solidFill>
@@ -3939,7 +4405,7 @@
 </file>
 
 <file path=ppt/slides/slide13.xml><?xml version="1.0" encoding="utf-8"?>
-<p:sld xmlns:a="http://schemas.openxmlformats.org/drawingml/2006/main" xmlns:p="http://schemas.openxmlformats.org/presentationml/2006/main" xmlns:r="http://schemas.openxmlformats.org/officeDocument/2006/relationships">
+<p:sld xmlns:a="http://schemas.openxmlformats.org/drawingml/2006/main" xmlns:r="http://schemas.openxmlformats.org/officeDocument/2006/relationships" xmlns:p="http://schemas.openxmlformats.org/presentationml/2006/main">
   <p:cSld>
     <p:spTree>
       <p:nvGrpSpPr>
@@ -3947,7 +4413,14 @@
         <p:cNvGrpSpPr/>
         <p:nvPr/>
       </p:nvGrpSpPr>
-      <p:grpSpPr/>
+      <p:grpSpPr>
+        <a:xfrm>
+          <a:off x="0" y="0"/>
+          <a:ext cx="0" cy="0"/>
+          <a:chOff x="0" y="0"/>
+          <a:chExt cx="0" cy="0"/>
+        </a:xfrm>
+      </p:grpSpPr>
       <p:sp>
         <p:nvSpPr>
           <p:cNvPr id="2" name="Rectangle 1"/>
@@ -3988,6 +4461,7 @@
           <a:lstStyle/>
           <a:p>
             <a:pPr algn="ctr"/>
+            <a:endParaRPr/>
           </a:p>
         </p:txBody>
       </p:sp>
@@ -4013,7 +4487,6 @@
           </a:bodyPr>
           <a:lstStyle/>
           <a:p>
-            <a:pPr/>
             <a:r>
               <a:rPr sz="3600" b="1">
                 <a:solidFill>
@@ -4024,7 +4497,6 @@
             </a:r>
           </a:p>
           <a:p>
-            <a:pPr/>
             <a:r>
               <a:rPr sz="2000" b="0">
                 <a:solidFill>
@@ -4035,7 +4507,6 @@
             </a:r>
           </a:p>
           <a:p>
-            <a:pPr/>
             <a:r>
               <a:rPr sz="1600" b="0">
                 <a:solidFill>
@@ -4046,7 +4517,6 @@
             </a:r>
           </a:p>
           <a:p>
-            <a:pPr/>
             <a:r>
               <a:rPr sz="1400" b="0">
                 <a:solidFill>
@@ -4067,7 +4537,7 @@
 </file>
 
 <file path=ppt/slides/slide2.xml><?xml version="1.0" encoding="utf-8"?>
-<p:sld xmlns:a="http://schemas.openxmlformats.org/drawingml/2006/main" xmlns:p="http://schemas.openxmlformats.org/presentationml/2006/main" xmlns:r="http://schemas.openxmlformats.org/officeDocument/2006/relationships">
+<p:sld xmlns:a="http://schemas.openxmlformats.org/drawingml/2006/main" xmlns:r="http://schemas.openxmlformats.org/officeDocument/2006/relationships" xmlns:p="http://schemas.openxmlformats.org/presentationml/2006/main">
   <p:cSld>
     <p:spTree>
       <p:nvGrpSpPr>
@@ -4075,7 +4545,14 @@
         <p:cNvGrpSpPr/>
         <p:nvPr/>
       </p:nvGrpSpPr>
-      <p:grpSpPr/>
+      <p:grpSpPr>
+        <a:xfrm>
+          <a:off x="0" y="0"/>
+          <a:ext cx="0" cy="0"/>
+          <a:chOff x="0" y="0"/>
+          <a:chExt cx="0" cy="0"/>
+        </a:xfrm>
+      </p:grpSpPr>
       <p:sp>
         <p:nvSpPr>
           <p:cNvPr id="2" name="Rectangle 1"/>
@@ -4116,6 +4593,7 @@
           <a:lstStyle/>
           <a:p>
             <a:pPr algn="ctr"/>
+            <a:endParaRPr/>
           </a:p>
         </p:txBody>
       </p:sp>
@@ -4141,7 +4619,6 @@
           </a:bodyPr>
           <a:lstStyle/>
           <a:p>
-            <a:pPr/>
             <a:r>
               <a:rPr sz="2800" b="1">
                 <a:solidFill>
@@ -4175,7 +4652,6 @@
           </a:bodyPr>
           <a:lstStyle/>
           <a:p>
-            <a:pPr/>
             <a:r>
               <a:rPr sz="1500" b="0">
                 <a:solidFill>
@@ -4186,7 +4662,6 @@
             </a:r>
           </a:p>
           <a:p>
-            <a:pPr/>
             <a:r>
               <a:rPr sz="1500" b="0">
                 <a:solidFill>
@@ -4197,7 +4672,6 @@
             </a:r>
           </a:p>
           <a:p>
-            <a:pPr/>
             <a:r>
               <a:rPr sz="1500" b="0">
                 <a:solidFill>
@@ -4208,7 +4682,6 @@
             </a:r>
           </a:p>
           <a:p>
-            <a:pPr/>
             <a:r>
               <a:rPr sz="1500" b="0">
                 <a:solidFill>
@@ -4219,7 +4692,6 @@
             </a:r>
           </a:p>
           <a:p>
-            <a:pPr/>
             <a:r>
               <a:rPr sz="1500" b="0">
                 <a:solidFill>
@@ -4230,7 +4702,6 @@
             </a:r>
           </a:p>
           <a:p>
-            <a:pPr/>
             <a:r>
               <a:rPr sz="1500" b="0">
                 <a:solidFill>
@@ -4293,7 +4764,6 @@
           </a:bodyPr>
           <a:lstStyle/>
           <a:p>
-            <a:pPr/>
             <a:r>
               <a:rPr sz="1100" b="0">
                 <a:solidFill>
@@ -4314,7 +4784,7 @@
 </file>
 
 <file path=ppt/slides/slide3.xml><?xml version="1.0" encoding="utf-8"?>
-<p:sld xmlns:a="http://schemas.openxmlformats.org/drawingml/2006/main" xmlns:p="http://schemas.openxmlformats.org/presentationml/2006/main" xmlns:r="http://schemas.openxmlformats.org/officeDocument/2006/relationships">
+<p:sld xmlns:a="http://schemas.openxmlformats.org/drawingml/2006/main" xmlns:r="http://schemas.openxmlformats.org/officeDocument/2006/relationships" xmlns:p="http://schemas.openxmlformats.org/presentationml/2006/main">
   <p:cSld>
     <p:spTree>
       <p:nvGrpSpPr>
@@ -4322,7 +4792,14 @@
         <p:cNvGrpSpPr/>
         <p:nvPr/>
       </p:nvGrpSpPr>
-      <p:grpSpPr/>
+      <p:grpSpPr>
+        <a:xfrm>
+          <a:off x="0" y="0"/>
+          <a:ext cx="0" cy="0"/>
+          <a:chOff x="0" y="0"/>
+          <a:chExt cx="0" cy="0"/>
+        </a:xfrm>
+      </p:grpSpPr>
       <p:sp>
         <p:nvSpPr>
           <p:cNvPr id="2" name="TextBox 1"/>
@@ -4345,7 +4822,6 @@
           </a:bodyPr>
           <a:lstStyle/>
           <a:p>
-            <a:pPr/>
             <a:r>
               <a:rPr sz="2800" b="1">
                 <a:solidFill>
@@ -4376,10 +4852,34 @@
                 <a:tableStyleId>{5C22544A-7EE6-4342-B048-85BDC9FD1C3A}</a:tableStyleId>
               </a:tblPr>
               <a:tblGrid>
-                <a:gridCol w="2773603"/>
-                <a:gridCol w="2773603"/>
-                <a:gridCol w="2773603"/>
-                <a:gridCol w="2773606"/>
+                <a:gridCol w="2773603">
+                  <a:extLst>
+                    <a:ext uri="{9D8B030D-6E8A-4147-A177-3AD203B41FA5}">
+                      <a16:colId xmlns:a16="http://schemas.microsoft.com/office/drawing/2014/main" val="20000"/>
+                    </a:ext>
+                  </a:extLst>
+                </a:gridCol>
+                <a:gridCol w="2773603">
+                  <a:extLst>
+                    <a:ext uri="{9D8B030D-6E8A-4147-A177-3AD203B41FA5}">
+                      <a16:colId xmlns:a16="http://schemas.microsoft.com/office/drawing/2014/main" val="20001"/>
+                    </a:ext>
+                  </a:extLst>
+                </a:gridCol>
+                <a:gridCol w="2773603">
+                  <a:extLst>
+                    <a:ext uri="{9D8B030D-6E8A-4147-A177-3AD203B41FA5}">
+                      <a16:colId xmlns:a16="http://schemas.microsoft.com/office/drawing/2014/main" val="20002"/>
+                    </a:ext>
+                  </a:extLst>
+                </a:gridCol>
+                <a:gridCol w="2773606">
+                  <a:extLst>
+                    <a:ext uri="{9D8B030D-6E8A-4147-A177-3AD203B41FA5}">
+                      <a16:colId xmlns:a16="http://schemas.microsoft.com/office/drawing/2014/main" val="20003"/>
+                    </a:ext>
+                  </a:extLst>
+                </a:gridCol>
               </a:tblGrid>
               <a:tr h="950976">
                 <a:tc>
@@ -4434,6 +4934,11 @@
                   </a:txBody>
                   <a:tcPr/>
                 </a:tc>
+                <a:extLst>
+                  <a:ext uri="{0D108BD9-81ED-4DB2-BD59-A6C34878D82A}">
+                    <a16:rowId xmlns:a16="http://schemas.microsoft.com/office/drawing/2014/main" val="10000"/>
+                  </a:ext>
+                </a:extLst>
               </a:tr>
               <a:tr h="950976">
                 <a:tc>
@@ -4488,6 +4993,11 @@
                   </a:txBody>
                   <a:tcPr/>
                 </a:tc>
+                <a:extLst>
+                  <a:ext uri="{0D108BD9-81ED-4DB2-BD59-A6C34878D82A}">
+                    <a16:rowId xmlns:a16="http://schemas.microsoft.com/office/drawing/2014/main" val="10001"/>
+                  </a:ext>
+                </a:extLst>
               </a:tr>
               <a:tr h="950976">
                 <a:tc>
@@ -4542,6 +5052,11 @@
                   </a:txBody>
                   <a:tcPr/>
                 </a:tc>
+                <a:extLst>
+                  <a:ext uri="{0D108BD9-81ED-4DB2-BD59-A6C34878D82A}">
+                    <a16:rowId xmlns:a16="http://schemas.microsoft.com/office/drawing/2014/main" val="10002"/>
+                  </a:ext>
+                </a:extLst>
               </a:tr>
               <a:tr h="950976">
                 <a:tc>
@@ -4596,6 +5111,11 @@
                   </a:txBody>
                   <a:tcPr/>
                 </a:tc>
+                <a:extLst>
+                  <a:ext uri="{0D108BD9-81ED-4DB2-BD59-A6C34878D82A}">
+                    <a16:rowId xmlns:a16="http://schemas.microsoft.com/office/drawing/2014/main" val="10003"/>
+                  </a:ext>
+                </a:extLst>
               </a:tr>
               <a:tr h="950976">
                 <a:tc>
@@ -4650,6 +5170,11 @@
                   </a:txBody>
                   <a:tcPr/>
                 </a:tc>
+                <a:extLst>
+                  <a:ext uri="{0D108BD9-81ED-4DB2-BD59-A6C34878D82A}">
+                    <a16:rowId xmlns:a16="http://schemas.microsoft.com/office/drawing/2014/main" val="10004"/>
+                  </a:ext>
+                </a:extLst>
               </a:tr>
             </a:tbl>
           </a:graphicData>
@@ -4664,7 +5189,7 @@
 </file>
 
 <file path=ppt/slides/slide4.xml><?xml version="1.0" encoding="utf-8"?>
-<p:sld xmlns:a="http://schemas.openxmlformats.org/drawingml/2006/main" xmlns:p="http://schemas.openxmlformats.org/presentationml/2006/main" xmlns:r="http://schemas.openxmlformats.org/officeDocument/2006/relationships">
+<p:sld xmlns:a="http://schemas.openxmlformats.org/drawingml/2006/main" xmlns:r="http://schemas.openxmlformats.org/officeDocument/2006/relationships" xmlns:p="http://schemas.openxmlformats.org/presentationml/2006/main">
   <p:cSld>
     <p:spTree>
       <p:nvGrpSpPr>
@@ -4672,7 +5197,14 @@
         <p:cNvGrpSpPr/>
         <p:nvPr/>
       </p:nvGrpSpPr>
-      <p:grpSpPr/>
+      <p:grpSpPr>
+        <a:xfrm>
+          <a:off x="0" y="0"/>
+          <a:ext cx="0" cy="0"/>
+          <a:chOff x="0" y="0"/>
+          <a:chExt cx="0" cy="0"/>
+        </a:xfrm>
+      </p:grpSpPr>
       <p:sp>
         <p:nvSpPr>
           <p:cNvPr id="2" name="Rectangle 1"/>
@@ -4713,6 +5245,7 @@
           <a:lstStyle/>
           <a:p>
             <a:pPr algn="ctr"/>
+            <a:endParaRPr/>
           </a:p>
         </p:txBody>
       </p:sp>
@@ -4738,7 +5271,6 @@
           </a:bodyPr>
           <a:lstStyle/>
           <a:p>
-            <a:pPr/>
             <a:r>
               <a:rPr sz="2800" b="1">
                 <a:solidFill>
@@ -4772,7 +5304,6 @@
           </a:bodyPr>
           <a:lstStyle/>
           <a:p>
-            <a:pPr/>
             <a:r>
               <a:rPr sz="1500" b="0">
                 <a:solidFill>
@@ -4783,7 +5314,6 @@
             </a:r>
           </a:p>
           <a:p>
-            <a:pPr/>
             <a:r>
               <a:rPr sz="1500" b="0">
                 <a:solidFill>
@@ -4794,7 +5324,6 @@
             </a:r>
           </a:p>
           <a:p>
-            <a:pPr/>
             <a:r>
               <a:rPr sz="1500" b="0">
                 <a:solidFill>
@@ -4805,7 +5334,6 @@
             </a:r>
           </a:p>
           <a:p>
-            <a:pPr/>
             <a:r>
               <a:rPr sz="1500" b="0">
                 <a:solidFill>
@@ -4816,7 +5344,6 @@
             </a:r>
           </a:p>
           <a:p>
-            <a:pPr/>
             <a:r>
               <a:rPr sz="1500" b="0">
                 <a:solidFill>
@@ -4827,7 +5354,6 @@
             </a:r>
           </a:p>
           <a:p>
-            <a:pPr/>
             <a:r>
               <a:rPr sz="1500" b="0">
                 <a:solidFill>
@@ -4890,7 +5416,6 @@
           </a:bodyPr>
           <a:lstStyle/>
           <a:p>
-            <a:pPr/>
             <a:r>
               <a:rPr sz="1100" b="0">
                 <a:solidFill>
@@ -4911,7 +5436,7 @@
 </file>
 
 <file path=ppt/slides/slide5.xml><?xml version="1.0" encoding="utf-8"?>
-<p:sld xmlns:a="http://schemas.openxmlformats.org/drawingml/2006/main" xmlns:p="http://schemas.openxmlformats.org/presentationml/2006/main" xmlns:r="http://schemas.openxmlformats.org/officeDocument/2006/relationships">
+<p:sld xmlns:a="http://schemas.openxmlformats.org/drawingml/2006/main" xmlns:r="http://schemas.openxmlformats.org/officeDocument/2006/relationships" xmlns:p="http://schemas.openxmlformats.org/presentationml/2006/main">
   <p:cSld>
     <p:spTree>
       <p:nvGrpSpPr>
@@ -4919,7 +5444,14 @@
         <p:cNvGrpSpPr/>
         <p:nvPr/>
       </p:nvGrpSpPr>
-      <p:grpSpPr/>
+      <p:grpSpPr>
+        <a:xfrm>
+          <a:off x="0" y="0"/>
+          <a:ext cx="0" cy="0"/>
+          <a:chOff x="0" y="0"/>
+          <a:chExt cx="0" cy="0"/>
+        </a:xfrm>
+      </p:grpSpPr>
       <p:sp>
         <p:nvSpPr>
           <p:cNvPr id="2" name="Rectangle 1"/>
@@ -4960,6 +5492,7 @@
           <a:lstStyle/>
           <a:p>
             <a:pPr algn="ctr"/>
+            <a:endParaRPr/>
           </a:p>
         </p:txBody>
       </p:sp>
@@ -4985,7 +5518,6 @@
           </a:bodyPr>
           <a:lstStyle/>
           <a:p>
-            <a:pPr/>
             <a:r>
               <a:rPr sz="2800" b="1">
                 <a:solidFill>
@@ -5019,7 +5551,6 @@
           </a:bodyPr>
           <a:lstStyle/>
           <a:p>
-            <a:pPr/>
             <a:r>
               <a:rPr sz="1500" b="0">
                 <a:solidFill>
@@ -5030,7 +5561,6 @@
             </a:r>
           </a:p>
           <a:p>
-            <a:pPr/>
             <a:r>
               <a:rPr sz="1500" b="0">
                 <a:solidFill>
@@ -5041,7 +5571,6 @@
             </a:r>
           </a:p>
           <a:p>
-            <a:pPr/>
             <a:r>
               <a:rPr sz="1500" b="0">
                 <a:solidFill>
@@ -5052,7 +5581,6 @@
             </a:r>
           </a:p>
           <a:p>
-            <a:pPr/>
             <a:r>
               <a:rPr sz="1500" b="0">
                 <a:solidFill>
@@ -5063,7 +5591,6 @@
             </a:r>
           </a:p>
           <a:p>
-            <a:pPr/>
             <a:r>
               <a:rPr sz="1500" b="0">
                 <a:solidFill>
@@ -5074,7 +5601,6 @@
             </a:r>
           </a:p>
           <a:p>
-            <a:pPr/>
             <a:r>
               <a:rPr sz="1500" b="0">
                 <a:solidFill>
@@ -5137,7 +5663,6 @@
           </a:bodyPr>
           <a:lstStyle/>
           <a:p>
-            <a:pPr/>
             <a:r>
               <a:rPr sz="1100" b="0">
                 <a:solidFill>
@@ -5158,7 +5683,7 @@
 </file>
 
 <file path=ppt/slides/slide6.xml><?xml version="1.0" encoding="utf-8"?>
-<p:sld xmlns:a="http://schemas.openxmlformats.org/drawingml/2006/main" xmlns:p="http://schemas.openxmlformats.org/presentationml/2006/main" xmlns:r="http://schemas.openxmlformats.org/officeDocument/2006/relationships">
+<p:sld xmlns:a="http://schemas.openxmlformats.org/drawingml/2006/main" xmlns:r="http://schemas.openxmlformats.org/officeDocument/2006/relationships" xmlns:p="http://schemas.openxmlformats.org/presentationml/2006/main">
   <p:cSld>
     <p:spTree>
       <p:nvGrpSpPr>
@@ -5166,7 +5691,14 @@
         <p:cNvGrpSpPr/>
         <p:nvPr/>
       </p:nvGrpSpPr>
-      <p:grpSpPr/>
+      <p:grpSpPr>
+        <a:xfrm>
+          <a:off x="0" y="0"/>
+          <a:ext cx="0" cy="0"/>
+          <a:chOff x="0" y="0"/>
+          <a:chExt cx="0" cy="0"/>
+        </a:xfrm>
+      </p:grpSpPr>
       <p:sp>
         <p:nvSpPr>
           <p:cNvPr id="2" name="Rectangle 1"/>
@@ -5207,6 +5739,7 @@
           <a:lstStyle/>
           <a:p>
             <a:pPr algn="ctr"/>
+            <a:endParaRPr/>
           </a:p>
         </p:txBody>
       </p:sp>
@@ -5232,7 +5765,6 @@
           </a:bodyPr>
           <a:lstStyle/>
           <a:p>
-            <a:pPr/>
             <a:r>
               <a:rPr sz="2800" b="1">
                 <a:solidFill>
@@ -5266,7 +5798,6 @@
           </a:bodyPr>
           <a:lstStyle/>
           <a:p>
-            <a:pPr/>
             <a:r>
               <a:rPr sz="1500" b="0">
                 <a:solidFill>
@@ -5277,7 +5808,6 @@
             </a:r>
           </a:p>
           <a:p>
-            <a:pPr/>
             <a:r>
               <a:rPr sz="1500" b="0">
                 <a:solidFill>
@@ -5288,7 +5818,6 @@
             </a:r>
           </a:p>
           <a:p>
-            <a:pPr/>
             <a:r>
               <a:rPr sz="1500" b="0">
                 <a:solidFill>
@@ -5299,7 +5828,6 @@
             </a:r>
           </a:p>
           <a:p>
-            <a:pPr/>
             <a:r>
               <a:rPr sz="1500" b="0">
                 <a:solidFill>
@@ -5310,7 +5838,6 @@
             </a:r>
           </a:p>
           <a:p>
-            <a:pPr/>
             <a:r>
               <a:rPr sz="1500" b="0">
                 <a:solidFill>
@@ -5321,7 +5848,6 @@
             </a:r>
           </a:p>
           <a:p>
-            <a:pPr/>
             <a:r>
               <a:rPr sz="1500" b="0">
                 <a:solidFill>
@@ -5384,7 +5910,6 @@
           </a:bodyPr>
           <a:lstStyle/>
           <a:p>
-            <a:pPr/>
             <a:r>
               <a:rPr sz="1100" b="0">
                 <a:solidFill>
@@ -5405,7 +5930,7 @@
 </file>
 
 <file path=ppt/slides/slide7.xml><?xml version="1.0" encoding="utf-8"?>
-<p:sld xmlns:a="http://schemas.openxmlformats.org/drawingml/2006/main" xmlns:p="http://schemas.openxmlformats.org/presentationml/2006/main" xmlns:r="http://schemas.openxmlformats.org/officeDocument/2006/relationships">
+<p:sld xmlns:a="http://schemas.openxmlformats.org/drawingml/2006/main" xmlns:r="http://schemas.openxmlformats.org/officeDocument/2006/relationships" xmlns:p="http://schemas.openxmlformats.org/presentationml/2006/main">
   <p:cSld>
     <p:spTree>
       <p:nvGrpSpPr>
@@ -5413,7 +5938,14 @@
         <p:cNvGrpSpPr/>
         <p:nvPr/>
       </p:nvGrpSpPr>
-      <p:grpSpPr/>
+      <p:grpSpPr>
+        <a:xfrm>
+          <a:off x="0" y="0"/>
+          <a:ext cx="0" cy="0"/>
+          <a:chOff x="0" y="0"/>
+          <a:chExt cx="0" cy="0"/>
+        </a:xfrm>
+      </p:grpSpPr>
       <p:sp>
         <p:nvSpPr>
           <p:cNvPr id="2" name="Rectangle 1"/>
@@ -5454,6 +5986,7 @@
           <a:lstStyle/>
           <a:p>
             <a:pPr algn="ctr"/>
+            <a:endParaRPr/>
           </a:p>
         </p:txBody>
       </p:sp>
@@ -5479,7 +6012,6 @@
           </a:bodyPr>
           <a:lstStyle/>
           <a:p>
-            <a:pPr/>
             <a:r>
               <a:rPr sz="2800" b="1">
                 <a:solidFill>
@@ -5513,7 +6045,6 @@
           </a:bodyPr>
           <a:lstStyle/>
           <a:p>
-            <a:pPr/>
             <a:r>
               <a:rPr sz="1500" b="0">
                 <a:solidFill>
@@ -5524,7 +6055,6 @@
             </a:r>
           </a:p>
           <a:p>
-            <a:pPr/>
             <a:r>
               <a:rPr sz="1500" b="0">
                 <a:solidFill>
@@ -5535,7 +6065,6 @@
             </a:r>
           </a:p>
           <a:p>
-            <a:pPr/>
             <a:r>
               <a:rPr sz="1500" b="0">
                 <a:solidFill>
@@ -5546,7 +6075,6 @@
             </a:r>
           </a:p>
           <a:p>
-            <a:pPr/>
             <a:r>
               <a:rPr sz="1500" b="0">
                 <a:solidFill>
@@ -5557,7 +6085,6 @@
             </a:r>
           </a:p>
           <a:p>
-            <a:pPr/>
             <a:r>
               <a:rPr sz="1500" b="0">
                 <a:solidFill>
@@ -5620,7 +6147,6 @@
           </a:bodyPr>
           <a:lstStyle/>
           <a:p>
-            <a:pPr/>
             <a:r>
               <a:rPr sz="1100" b="0">
                 <a:solidFill>
@@ -5641,7 +6167,7 @@
 </file>
 
 <file path=ppt/slides/slide8.xml><?xml version="1.0" encoding="utf-8"?>
-<p:sld xmlns:a="http://schemas.openxmlformats.org/drawingml/2006/main" xmlns:p="http://schemas.openxmlformats.org/presentationml/2006/main" xmlns:r="http://schemas.openxmlformats.org/officeDocument/2006/relationships">
+<p:sld xmlns:a="http://schemas.openxmlformats.org/drawingml/2006/main" xmlns:r="http://schemas.openxmlformats.org/officeDocument/2006/relationships" xmlns:p="http://schemas.openxmlformats.org/presentationml/2006/main">
   <p:cSld>
     <p:spTree>
       <p:nvGrpSpPr>
@@ -5649,7 +6175,14 @@
         <p:cNvGrpSpPr/>
         <p:nvPr/>
       </p:nvGrpSpPr>
-      <p:grpSpPr/>
+      <p:grpSpPr>
+        <a:xfrm>
+          <a:off x="0" y="0"/>
+          <a:ext cx="0" cy="0"/>
+          <a:chOff x="0" y="0"/>
+          <a:chExt cx="0" cy="0"/>
+        </a:xfrm>
+      </p:grpSpPr>
       <p:sp>
         <p:nvSpPr>
           <p:cNvPr id="2" name="Rectangle 1"/>
@@ -5690,6 +6223,7 @@
           <a:lstStyle/>
           <a:p>
             <a:pPr algn="ctr"/>
+            <a:endParaRPr/>
           </a:p>
         </p:txBody>
       </p:sp>
@@ -5715,7 +6249,6 @@
           </a:bodyPr>
           <a:lstStyle/>
           <a:p>
-            <a:pPr/>
             <a:r>
               <a:rPr sz="2800" b="1">
                 <a:solidFill>
@@ -5749,7 +6282,6 @@
           </a:bodyPr>
           <a:lstStyle/>
           <a:p>
-            <a:pPr/>
             <a:r>
               <a:rPr sz="1500" b="0">
                 <a:solidFill>
@@ -5760,7 +6292,6 @@
             </a:r>
           </a:p>
           <a:p>
-            <a:pPr/>
             <a:r>
               <a:rPr sz="1500" b="0">
                 <a:solidFill>
@@ -5771,7 +6302,6 @@
             </a:r>
           </a:p>
           <a:p>
-            <a:pPr/>
             <a:r>
               <a:rPr sz="1500" b="0">
                 <a:solidFill>
@@ -5782,7 +6312,6 @@
             </a:r>
           </a:p>
           <a:p>
-            <a:pPr/>
             <a:r>
               <a:rPr sz="1500" b="0">
                 <a:solidFill>
@@ -5793,7 +6322,6 @@
             </a:r>
           </a:p>
           <a:p>
-            <a:pPr/>
             <a:r>
               <a:rPr sz="1500" b="0">
                 <a:solidFill>
@@ -5856,7 +6384,6 @@
           </a:bodyPr>
           <a:lstStyle/>
           <a:p>
-            <a:pPr/>
             <a:r>
               <a:rPr sz="1100" b="0">
                 <a:solidFill>
@@ -5877,7 +6404,7 @@
 </file>
 
 <file path=ppt/slides/slide9.xml><?xml version="1.0" encoding="utf-8"?>
-<p:sld xmlns:a="http://schemas.openxmlformats.org/drawingml/2006/main" xmlns:p="http://schemas.openxmlformats.org/presentationml/2006/main" xmlns:r="http://schemas.openxmlformats.org/officeDocument/2006/relationships">
+<p:sld xmlns:a="http://schemas.openxmlformats.org/drawingml/2006/main" xmlns:r="http://schemas.openxmlformats.org/officeDocument/2006/relationships" xmlns:p="http://schemas.openxmlformats.org/presentationml/2006/main">
   <p:cSld>
     <p:spTree>
       <p:nvGrpSpPr>
@@ -5885,7 +6412,14 @@
         <p:cNvGrpSpPr/>
         <p:nvPr/>
       </p:nvGrpSpPr>
-      <p:grpSpPr/>
+      <p:grpSpPr>
+        <a:xfrm>
+          <a:off x="0" y="0"/>
+          <a:ext cx="0" cy="0"/>
+          <a:chOff x="0" y="0"/>
+          <a:chExt cx="0" cy="0"/>
+        </a:xfrm>
+      </p:grpSpPr>
       <p:sp>
         <p:nvSpPr>
           <p:cNvPr id="2" name="Rectangle 1"/>
@@ -5926,6 +6460,7 @@
           <a:lstStyle/>
           <a:p>
             <a:pPr algn="ctr"/>
+            <a:endParaRPr/>
           </a:p>
         </p:txBody>
       </p:sp>
@@ -5951,7 +6486,6 @@
           </a:bodyPr>
           <a:lstStyle/>
           <a:p>
-            <a:pPr/>
             <a:r>
               <a:rPr sz="2800" b="1">
                 <a:solidFill>
@@ -5985,7 +6519,6 @@
           </a:bodyPr>
           <a:lstStyle/>
           <a:p>
-            <a:pPr/>
             <a:r>
               <a:rPr sz="1500" b="0">
                 <a:solidFill>
@@ -5996,7 +6529,6 @@
             </a:r>
           </a:p>
           <a:p>
-            <a:pPr/>
             <a:r>
               <a:rPr sz="1500" b="0">
                 <a:solidFill>
@@ -6007,7 +6539,6 @@
             </a:r>
           </a:p>
           <a:p>
-            <a:pPr/>
             <a:r>
               <a:rPr sz="1500" b="0">
                 <a:solidFill>
@@ -6018,7 +6549,6 @@
             </a:r>
           </a:p>
           <a:p>
-            <a:pPr/>
             <a:r>
               <a:rPr sz="1500" b="0">
                 <a:solidFill>
@@ -6029,7 +6559,6 @@
             </a:r>
           </a:p>
           <a:p>
-            <a:pPr/>
             <a:r>
               <a:rPr sz="1500" b="0">
                 <a:solidFill>
@@ -6040,7 +6569,6 @@
             </a:r>
           </a:p>
           <a:p>
-            <a:pPr/>
             <a:r>
               <a:rPr sz="1500" b="0">
                 <a:solidFill>
@@ -6103,7 +6631,6 @@
           </a:bodyPr>
           <a:lstStyle/>
           <a:p>
-            <a:pPr/>
             <a:r>
               <a:rPr sz="1100" b="0">
                 <a:solidFill>

--- a/docs/user-guide/SO-CHU-NHIEM-SO-GIOI-THIEU.pptx
+++ b/docs/user-guide/SO-CHU-NHIEM-SO-GIOI-THIEU.pptx
@@ -5,21 +5,21 @@
     <p:sldMasterId id="2147483648" r:id="rId1"/>
   </p:sldMasterIdLst>
   <p:sldIdLst>
-    <p:sldId id="256" r:id="rId2"/>
-    <p:sldId id="257" r:id="rId3"/>
-    <p:sldId id="258" r:id="rId4"/>
-    <p:sldId id="259" r:id="rId5"/>
-    <p:sldId id="260" r:id="rId6"/>
-    <p:sldId id="261" r:id="rId7"/>
-    <p:sldId id="262" r:id="rId8"/>
-    <p:sldId id="263" r:id="rId9"/>
-    <p:sldId id="264" r:id="rId10"/>
-    <p:sldId id="265" r:id="rId11"/>
-    <p:sldId id="266" r:id="rId12"/>
-    <p:sldId id="267" r:id="rId13"/>
-    <p:sldId id="268" r:id="rId14"/>
+    <p:sldId id="256" r:id="rId7"/>
+    <p:sldId id="257" r:id="rId8"/>
+    <p:sldId id="258" r:id="rId9"/>
+    <p:sldId id="259" r:id="rId10"/>
+    <p:sldId id="260" r:id="rId11"/>
+    <p:sldId id="261" r:id="rId12"/>
+    <p:sldId id="262" r:id="rId13"/>
+    <p:sldId id="263" r:id="rId14"/>
+    <p:sldId id="264" r:id="rId15"/>
+    <p:sldId id="265" r:id="rId16"/>
+    <p:sldId id="266" r:id="rId17"/>
+    <p:sldId id="267" r:id="rId18"/>
+    <p:sldId id="268" r:id="rId19"/>
   </p:sldIdLst>
-  <p:sldSz cx="12192000" cy="6858000"/>
+  <p:sldSz cx="12191695" cy="6858000" type="screen4x3"/>
   <p:notesSz cx="6858000" cy="9144000"/>
   <p:defaultTextStyle>
     <a:defPPr>
@@ -116,22 +116,6 @@
       </a:defRPr>
     </a:lvl9pPr>
   </p:defaultTextStyle>
-  <p:extLst>
-    <p:ext uri="{EFAFB233-063F-42B5-8137-9DF3F51BA10A}">
-      <p15:sldGuideLst xmlns:p15="http://schemas.microsoft.com/office/powerpoint/2012/main">
-        <p15:guide id="1" orient="horz" pos="2160">
-          <p15:clr>
-            <a:srgbClr val="A4A3A4"/>
-          </p15:clr>
-        </p15:guide>
-        <p15:guide id="2" pos="2880">
-          <p15:clr>
-            <a:srgbClr val="A4A3A4"/>
-          </p15:clr>
-        </p15:guide>
-      </p15:sldGuideLst>
-    </p:ext>
-  </p:extLst>
 </p:presentation>
 </file>
 
@@ -173,9 +157,10 @@
           <a:lstStyle/>
           <a:p>
             <a:r>
-              <a:rPr lang="en-US"/>
+              <a:rPr lang="en-US" smtClean="0"/>
               <a:t>Click to edit Master title style</a:t>
             </a:r>
+            <a:endParaRPr lang="en-US"/>
           </a:p>
         </p:txBody>
       </p:sp>
@@ -291,9 +276,10 @@
           </a:lstStyle>
           <a:p>
             <a:r>
-              <a:rPr lang="en-US"/>
+              <a:rPr lang="en-US" smtClean="0"/>
               <a:t>Click to edit Master subtitle style</a:t>
             </a:r>
+            <a:endParaRPr lang="en-US"/>
           </a:p>
         </p:txBody>
       </p:sp>
@@ -314,7 +300,7 @@
           <a:p>
             <a:fld id="{5BCAD085-E8A6-8845-BD4E-CB4CCA059FC4}" type="datetimeFigureOut">
               <a:rPr lang="en-US" smtClean="0"/>
-              <a:t>9/23/26</a:t>
+              <a:t>1/27/13</a:t>
             </a:fld>
             <a:endParaRPr lang="en-US"/>
           </a:p>
@@ -408,9 +394,10 @@
           <a:lstStyle/>
           <a:p>
             <a:r>
-              <a:rPr lang="en-US"/>
+              <a:rPr lang="en-US" smtClean="0"/>
               <a:t>Click to edit Master title style</a:t>
             </a:r>
+            <a:endParaRPr lang="en-US"/>
           </a:p>
         </p:txBody>
       </p:sp>
@@ -431,37 +418,38 @@
           <a:p>
             <a:pPr lvl="0"/>
             <a:r>
-              <a:rPr lang="en-US"/>
+              <a:rPr lang="en-US" smtClean="0"/>
               <a:t>Click to edit Master text styles</a:t>
             </a:r>
           </a:p>
           <a:p>
             <a:pPr lvl="1"/>
             <a:r>
-              <a:rPr lang="en-US"/>
+              <a:rPr lang="en-US" smtClean="0"/>
               <a:t>Second level</a:t>
             </a:r>
           </a:p>
           <a:p>
             <a:pPr lvl="2"/>
             <a:r>
-              <a:rPr lang="en-US"/>
+              <a:rPr lang="en-US" smtClean="0"/>
               <a:t>Third level</a:t>
             </a:r>
           </a:p>
           <a:p>
             <a:pPr lvl="3"/>
             <a:r>
-              <a:rPr lang="en-US"/>
+              <a:rPr lang="en-US" smtClean="0"/>
               <a:t>Fourth level</a:t>
             </a:r>
           </a:p>
           <a:p>
             <a:pPr lvl="4"/>
             <a:r>
-              <a:rPr lang="en-US"/>
+              <a:rPr lang="en-US" smtClean="0"/>
               <a:t>Fifth level</a:t>
             </a:r>
+            <a:endParaRPr lang="en-US"/>
           </a:p>
         </p:txBody>
       </p:sp>
@@ -482,7 +470,7 @@
           <a:p>
             <a:fld id="{5BCAD085-E8A6-8845-BD4E-CB4CCA059FC4}" type="datetimeFigureOut">
               <a:rPr lang="en-US" smtClean="0"/>
-              <a:t>9/23/26</a:t>
+              <a:t>1/27/13</a:t>
             </a:fld>
             <a:endParaRPr lang="en-US"/>
           </a:p>
@@ -581,9 +569,10 @@
           <a:lstStyle/>
           <a:p>
             <a:r>
-              <a:rPr lang="en-US"/>
+              <a:rPr lang="en-US" smtClean="0"/>
               <a:t>Click to edit Master title style</a:t>
             </a:r>
+            <a:endParaRPr lang="en-US"/>
           </a:p>
         </p:txBody>
       </p:sp>
@@ -609,37 +598,38 @@
           <a:p>
             <a:pPr lvl="0"/>
             <a:r>
-              <a:rPr lang="en-US"/>
+              <a:rPr lang="en-US" smtClean="0"/>
               <a:t>Click to edit Master text styles</a:t>
             </a:r>
           </a:p>
           <a:p>
             <a:pPr lvl="1"/>
             <a:r>
-              <a:rPr lang="en-US"/>
+              <a:rPr lang="en-US" smtClean="0"/>
               <a:t>Second level</a:t>
             </a:r>
           </a:p>
           <a:p>
             <a:pPr lvl="2"/>
             <a:r>
-              <a:rPr lang="en-US"/>
+              <a:rPr lang="en-US" smtClean="0"/>
               <a:t>Third level</a:t>
             </a:r>
           </a:p>
           <a:p>
             <a:pPr lvl="3"/>
             <a:r>
-              <a:rPr lang="en-US"/>
+              <a:rPr lang="en-US" smtClean="0"/>
               <a:t>Fourth level</a:t>
             </a:r>
           </a:p>
           <a:p>
             <a:pPr lvl="4"/>
             <a:r>
-              <a:rPr lang="en-US"/>
+              <a:rPr lang="en-US" smtClean="0"/>
               <a:t>Fifth level</a:t>
             </a:r>
+            <a:endParaRPr lang="en-US"/>
           </a:p>
         </p:txBody>
       </p:sp>
@@ -660,7 +650,7 @@
           <a:p>
             <a:fld id="{5BCAD085-E8A6-8845-BD4E-CB4CCA059FC4}" type="datetimeFigureOut">
               <a:rPr lang="en-US" smtClean="0"/>
-              <a:t>9/23/26</a:t>
+              <a:t>1/27/13</a:t>
             </a:fld>
             <a:endParaRPr lang="en-US"/>
           </a:p>
@@ -754,9 +744,10 @@
           <a:lstStyle/>
           <a:p>
             <a:r>
-              <a:rPr lang="en-US"/>
+              <a:rPr lang="en-US" smtClean="0"/>
               <a:t>Click to edit Master title style</a:t>
             </a:r>
+            <a:endParaRPr lang="en-US"/>
           </a:p>
         </p:txBody>
       </p:sp>
@@ -777,37 +768,38 @@
           <a:p>
             <a:pPr lvl="0"/>
             <a:r>
-              <a:rPr lang="en-US"/>
+              <a:rPr lang="en-US" smtClean="0"/>
               <a:t>Click to edit Master text styles</a:t>
             </a:r>
           </a:p>
           <a:p>
             <a:pPr lvl="1"/>
             <a:r>
-              <a:rPr lang="en-US"/>
+              <a:rPr lang="en-US" smtClean="0"/>
               <a:t>Second level</a:t>
             </a:r>
           </a:p>
           <a:p>
             <a:pPr lvl="2"/>
             <a:r>
-              <a:rPr lang="en-US"/>
+              <a:rPr lang="en-US" smtClean="0"/>
               <a:t>Third level</a:t>
             </a:r>
           </a:p>
           <a:p>
             <a:pPr lvl="3"/>
             <a:r>
-              <a:rPr lang="en-US"/>
+              <a:rPr lang="en-US" smtClean="0"/>
               <a:t>Fourth level</a:t>
             </a:r>
           </a:p>
           <a:p>
             <a:pPr lvl="4"/>
             <a:r>
-              <a:rPr lang="en-US"/>
+              <a:rPr lang="en-US" smtClean="0"/>
               <a:t>Fifth level</a:t>
             </a:r>
+            <a:endParaRPr lang="en-US"/>
           </a:p>
         </p:txBody>
       </p:sp>
@@ -828,7 +820,7 @@
           <a:p>
             <a:fld id="{5BCAD085-E8A6-8845-BD4E-CB4CCA059FC4}" type="datetimeFigureOut">
               <a:rPr lang="en-US" smtClean="0"/>
-              <a:t>9/23/26</a:t>
+              <a:t>1/27/13</a:t>
             </a:fld>
             <a:endParaRPr lang="en-US"/>
           </a:p>
@@ -931,9 +923,10 @@
           </a:lstStyle>
           <a:p>
             <a:r>
-              <a:rPr lang="en-US"/>
+              <a:rPr lang="en-US" smtClean="0"/>
               <a:t>Click to edit Master title style</a:t>
             </a:r>
+            <a:endParaRPr lang="en-US"/>
           </a:p>
         </p:txBody>
       </p:sp>
@@ -1050,7 +1043,7 @@
           <a:p>
             <a:pPr lvl="0"/>
             <a:r>
-              <a:rPr lang="en-US"/>
+              <a:rPr lang="en-US" smtClean="0"/>
               <a:t>Click to edit Master text styles</a:t>
             </a:r>
           </a:p>
@@ -1073,7 +1066,7 @@
           <a:p>
             <a:fld id="{5BCAD085-E8A6-8845-BD4E-CB4CCA059FC4}" type="datetimeFigureOut">
               <a:rPr lang="en-US" smtClean="0"/>
-              <a:t>9/23/26</a:t>
+              <a:t>1/27/13</a:t>
             </a:fld>
             <a:endParaRPr lang="en-US"/>
           </a:p>
@@ -1167,9 +1160,10 @@
           <a:lstStyle/>
           <a:p>
             <a:r>
-              <a:rPr lang="en-US"/>
+              <a:rPr lang="en-US" smtClean="0"/>
               <a:t>Click to edit Master title style</a:t>
             </a:r>
+            <a:endParaRPr lang="en-US"/>
           </a:p>
         </p:txBody>
       </p:sp>
@@ -1223,37 +1217,38 @@
           <a:p>
             <a:pPr lvl="0"/>
             <a:r>
-              <a:rPr lang="en-US"/>
+              <a:rPr lang="en-US" smtClean="0"/>
               <a:t>Click to edit Master text styles</a:t>
             </a:r>
           </a:p>
           <a:p>
             <a:pPr lvl="1"/>
             <a:r>
-              <a:rPr lang="en-US"/>
+              <a:rPr lang="en-US" smtClean="0"/>
               <a:t>Second level</a:t>
             </a:r>
           </a:p>
           <a:p>
             <a:pPr lvl="2"/>
             <a:r>
-              <a:rPr lang="en-US"/>
+              <a:rPr lang="en-US" smtClean="0"/>
               <a:t>Third level</a:t>
             </a:r>
           </a:p>
           <a:p>
             <a:pPr lvl="3"/>
             <a:r>
-              <a:rPr lang="en-US"/>
+              <a:rPr lang="en-US" smtClean="0"/>
               <a:t>Fourth level</a:t>
             </a:r>
           </a:p>
           <a:p>
             <a:pPr lvl="4"/>
             <a:r>
-              <a:rPr lang="en-US"/>
+              <a:rPr lang="en-US" smtClean="0"/>
               <a:t>Fifth level</a:t>
             </a:r>
+            <a:endParaRPr lang="en-US"/>
           </a:p>
         </p:txBody>
       </p:sp>
@@ -1307,37 +1302,38 @@
           <a:p>
             <a:pPr lvl="0"/>
             <a:r>
-              <a:rPr lang="en-US"/>
+              <a:rPr lang="en-US" smtClean="0"/>
               <a:t>Click to edit Master text styles</a:t>
             </a:r>
           </a:p>
           <a:p>
             <a:pPr lvl="1"/>
             <a:r>
-              <a:rPr lang="en-US"/>
+              <a:rPr lang="en-US" smtClean="0"/>
               <a:t>Second level</a:t>
             </a:r>
           </a:p>
           <a:p>
             <a:pPr lvl="2"/>
             <a:r>
-              <a:rPr lang="en-US"/>
+              <a:rPr lang="en-US" smtClean="0"/>
               <a:t>Third level</a:t>
             </a:r>
           </a:p>
           <a:p>
             <a:pPr lvl="3"/>
             <a:r>
-              <a:rPr lang="en-US"/>
+              <a:rPr lang="en-US" smtClean="0"/>
               <a:t>Fourth level</a:t>
             </a:r>
           </a:p>
           <a:p>
             <a:pPr lvl="4"/>
             <a:r>
-              <a:rPr lang="en-US"/>
+              <a:rPr lang="en-US" smtClean="0"/>
               <a:t>Fifth level</a:t>
             </a:r>
+            <a:endParaRPr lang="en-US"/>
           </a:p>
         </p:txBody>
       </p:sp>
@@ -1358,7 +1354,7 @@
           <a:p>
             <a:fld id="{5BCAD085-E8A6-8845-BD4E-CB4CCA059FC4}" type="datetimeFigureOut">
               <a:rPr lang="en-US" smtClean="0"/>
-              <a:t>9/23/26</a:t>
+              <a:t>1/27/13</a:t>
             </a:fld>
             <a:endParaRPr lang="en-US"/>
           </a:p>
@@ -1456,9 +1452,10 @@
           </a:lstStyle>
           <a:p>
             <a:r>
-              <a:rPr lang="en-US"/>
+              <a:rPr lang="en-US" smtClean="0"/>
               <a:t>Click to edit Master title style</a:t>
             </a:r>
+            <a:endParaRPr lang="en-US"/>
           </a:p>
         </p:txBody>
       </p:sp>
@@ -1521,7 +1518,7 @@
           <a:p>
             <a:pPr lvl="0"/>
             <a:r>
-              <a:rPr lang="en-US"/>
+              <a:rPr lang="en-US" smtClean="0"/>
               <a:t>Click to edit Master text styles</a:t>
             </a:r>
           </a:p>
@@ -1577,37 +1574,38 @@
           <a:p>
             <a:pPr lvl="0"/>
             <a:r>
-              <a:rPr lang="en-US"/>
+              <a:rPr lang="en-US" smtClean="0"/>
               <a:t>Click to edit Master text styles</a:t>
             </a:r>
           </a:p>
           <a:p>
             <a:pPr lvl="1"/>
             <a:r>
-              <a:rPr lang="en-US"/>
+              <a:rPr lang="en-US" smtClean="0"/>
               <a:t>Second level</a:t>
             </a:r>
           </a:p>
           <a:p>
             <a:pPr lvl="2"/>
             <a:r>
-              <a:rPr lang="en-US"/>
+              <a:rPr lang="en-US" smtClean="0"/>
               <a:t>Third level</a:t>
             </a:r>
           </a:p>
           <a:p>
             <a:pPr lvl="3"/>
             <a:r>
-              <a:rPr lang="en-US"/>
+              <a:rPr lang="en-US" smtClean="0"/>
               <a:t>Fourth level</a:t>
             </a:r>
           </a:p>
           <a:p>
             <a:pPr lvl="4"/>
             <a:r>
-              <a:rPr lang="en-US"/>
+              <a:rPr lang="en-US" smtClean="0"/>
               <a:t>Fifth level</a:t>
             </a:r>
+            <a:endParaRPr lang="en-US"/>
           </a:p>
         </p:txBody>
       </p:sp>
@@ -1670,7 +1668,7 @@
           <a:p>
             <a:pPr lvl="0"/>
             <a:r>
-              <a:rPr lang="en-US"/>
+              <a:rPr lang="en-US" smtClean="0"/>
               <a:t>Click to edit Master text styles</a:t>
             </a:r>
           </a:p>
@@ -1726,37 +1724,38 @@
           <a:p>
             <a:pPr lvl="0"/>
             <a:r>
-              <a:rPr lang="en-US"/>
+              <a:rPr lang="en-US" smtClean="0"/>
               <a:t>Click to edit Master text styles</a:t>
             </a:r>
           </a:p>
           <a:p>
             <a:pPr lvl="1"/>
             <a:r>
-              <a:rPr lang="en-US"/>
+              <a:rPr lang="en-US" smtClean="0"/>
               <a:t>Second level</a:t>
             </a:r>
           </a:p>
           <a:p>
             <a:pPr lvl="2"/>
             <a:r>
-              <a:rPr lang="en-US"/>
+              <a:rPr lang="en-US" smtClean="0"/>
               <a:t>Third level</a:t>
             </a:r>
           </a:p>
           <a:p>
             <a:pPr lvl="3"/>
             <a:r>
-              <a:rPr lang="en-US"/>
+              <a:rPr lang="en-US" smtClean="0"/>
               <a:t>Fourth level</a:t>
             </a:r>
           </a:p>
           <a:p>
             <a:pPr lvl="4"/>
             <a:r>
-              <a:rPr lang="en-US"/>
+              <a:rPr lang="en-US" smtClean="0"/>
               <a:t>Fifth level</a:t>
             </a:r>
+            <a:endParaRPr lang="en-US"/>
           </a:p>
         </p:txBody>
       </p:sp>
@@ -1777,7 +1776,7 @@
           <a:p>
             <a:fld id="{5BCAD085-E8A6-8845-BD4E-CB4CCA059FC4}" type="datetimeFigureOut">
               <a:rPr lang="en-US" smtClean="0"/>
-              <a:t>9/23/26</a:t>
+              <a:t>1/27/13</a:t>
             </a:fld>
             <a:endParaRPr lang="en-US"/>
           </a:p>
@@ -1871,9 +1870,10 @@
           <a:lstStyle/>
           <a:p>
             <a:r>
-              <a:rPr lang="en-US"/>
+              <a:rPr lang="en-US" smtClean="0"/>
               <a:t>Click to edit Master title style</a:t>
             </a:r>
+            <a:endParaRPr lang="en-US"/>
           </a:p>
         </p:txBody>
       </p:sp>
@@ -1894,7 +1894,7 @@
           <a:p>
             <a:fld id="{5BCAD085-E8A6-8845-BD4E-CB4CCA059FC4}" type="datetimeFigureOut">
               <a:rPr lang="en-US" smtClean="0"/>
-              <a:t>9/23/26</a:t>
+              <a:t>1/27/13</a:t>
             </a:fld>
             <a:endParaRPr lang="en-US"/>
           </a:p>
@@ -1989,7 +1989,7 @@
           <a:p>
             <a:fld id="{5BCAD085-E8A6-8845-BD4E-CB4CCA059FC4}" type="datetimeFigureOut">
               <a:rPr lang="en-US" smtClean="0"/>
-              <a:t>9/23/26</a:t>
+              <a:t>1/27/13</a:t>
             </a:fld>
             <a:endParaRPr lang="en-US"/>
           </a:p>
@@ -2092,9 +2092,10 @@
           </a:lstStyle>
           <a:p>
             <a:r>
-              <a:rPr lang="en-US"/>
+              <a:rPr lang="en-US" smtClean="0"/>
               <a:t>Click to edit Master title style</a:t>
             </a:r>
+            <a:endParaRPr lang="en-US"/>
           </a:p>
         </p:txBody>
       </p:sp>
@@ -2148,37 +2149,38 @@
           <a:p>
             <a:pPr lvl="0"/>
             <a:r>
-              <a:rPr lang="en-US"/>
+              <a:rPr lang="en-US" smtClean="0"/>
               <a:t>Click to edit Master text styles</a:t>
             </a:r>
           </a:p>
           <a:p>
             <a:pPr lvl="1"/>
             <a:r>
-              <a:rPr lang="en-US"/>
+              <a:rPr lang="en-US" smtClean="0"/>
               <a:t>Second level</a:t>
             </a:r>
           </a:p>
           <a:p>
             <a:pPr lvl="2"/>
             <a:r>
-              <a:rPr lang="en-US"/>
+              <a:rPr lang="en-US" smtClean="0"/>
               <a:t>Third level</a:t>
             </a:r>
           </a:p>
           <a:p>
             <a:pPr lvl="3"/>
             <a:r>
-              <a:rPr lang="en-US"/>
+              <a:rPr lang="en-US" smtClean="0"/>
               <a:t>Fourth level</a:t>
             </a:r>
           </a:p>
           <a:p>
             <a:pPr lvl="4"/>
             <a:r>
-              <a:rPr lang="en-US"/>
+              <a:rPr lang="en-US" smtClean="0"/>
               <a:t>Fifth level</a:t>
             </a:r>
+            <a:endParaRPr lang="en-US"/>
           </a:p>
         </p:txBody>
       </p:sp>
@@ -2241,7 +2243,7 @@
           <a:p>
             <a:pPr lvl="0"/>
             <a:r>
-              <a:rPr lang="en-US"/>
+              <a:rPr lang="en-US" smtClean="0"/>
               <a:t>Click to edit Master text styles</a:t>
             </a:r>
           </a:p>
@@ -2264,7 +2266,7 @@
           <a:p>
             <a:fld id="{5BCAD085-E8A6-8845-BD4E-CB4CCA059FC4}" type="datetimeFigureOut">
               <a:rPr lang="en-US" smtClean="0"/>
-              <a:t>9/23/26</a:t>
+              <a:t>1/27/13</a:t>
             </a:fld>
             <a:endParaRPr lang="en-US"/>
           </a:p>
@@ -2367,9 +2369,10 @@
           </a:lstStyle>
           <a:p>
             <a:r>
-              <a:rPr lang="en-US"/>
+              <a:rPr lang="en-US" smtClean="0"/>
               <a:t>Click to edit Master title style</a:t>
             </a:r>
+            <a:endParaRPr lang="en-US"/>
           </a:p>
         </p:txBody>
       </p:sp>
@@ -2493,7 +2496,7 @@
           <a:p>
             <a:pPr lvl="0"/>
             <a:r>
-              <a:rPr lang="en-US"/>
+              <a:rPr lang="en-US" smtClean="0"/>
               <a:t>Click to edit Master text styles</a:t>
             </a:r>
           </a:p>
@@ -2516,7 +2519,7 @@
           <a:p>
             <a:fld id="{5BCAD085-E8A6-8845-BD4E-CB4CCA059FC4}" type="datetimeFigureOut">
               <a:rPr lang="en-US" smtClean="0"/>
-              <a:t>9/23/26</a:t>
+              <a:t>1/27/13</a:t>
             </a:fld>
             <a:endParaRPr lang="en-US"/>
           </a:p>
@@ -2625,9 +2628,10 @@
           <a:lstStyle/>
           <a:p>
             <a:r>
-              <a:rPr lang="en-US"/>
+              <a:rPr lang="en-US" smtClean="0"/>
               <a:t>Click to edit Master title style</a:t>
             </a:r>
+            <a:endParaRPr lang="en-US"/>
           </a:p>
         </p:txBody>
       </p:sp>
@@ -2658,37 +2662,38 @@
           <a:p>
             <a:pPr lvl="0"/>
             <a:r>
-              <a:rPr lang="en-US"/>
+              <a:rPr lang="en-US" smtClean="0"/>
               <a:t>Click to edit Master text styles</a:t>
             </a:r>
           </a:p>
           <a:p>
             <a:pPr lvl="1"/>
             <a:r>
-              <a:rPr lang="en-US"/>
+              <a:rPr lang="en-US" smtClean="0"/>
               <a:t>Second level</a:t>
             </a:r>
           </a:p>
           <a:p>
             <a:pPr lvl="2"/>
             <a:r>
-              <a:rPr lang="en-US"/>
+              <a:rPr lang="en-US" smtClean="0"/>
               <a:t>Third level</a:t>
             </a:r>
           </a:p>
           <a:p>
             <a:pPr lvl="3"/>
             <a:r>
-              <a:rPr lang="en-US"/>
+              <a:rPr lang="en-US" smtClean="0"/>
               <a:t>Fourth level</a:t>
             </a:r>
           </a:p>
           <a:p>
             <a:pPr lvl="4"/>
             <a:r>
-              <a:rPr lang="en-US"/>
+              <a:rPr lang="en-US" smtClean="0"/>
               <a:t>Fifth level</a:t>
             </a:r>
+            <a:endParaRPr lang="en-US"/>
           </a:p>
         </p:txBody>
       </p:sp>
@@ -2727,7 +2732,7 @@
           <a:p>
             <a:fld id="{5BCAD085-E8A6-8845-BD4E-CB4CCA059FC4}" type="datetimeFigureOut">
               <a:rPr lang="en-US" smtClean="0"/>
-              <a:t>9/23/26</a:t>
+              <a:t>1/27/13</a:t>
             </a:fld>
             <a:endParaRPr lang="en-US"/>
           </a:p>
@@ -3086,7 +3091,7 @@
 </file>
 
 <file path=ppt/slides/slide1.xml><?xml version="1.0" encoding="utf-8"?>
-<p:sld xmlns:a="http://schemas.openxmlformats.org/drawingml/2006/main" xmlns:r="http://schemas.openxmlformats.org/officeDocument/2006/relationships" xmlns:p="http://schemas.openxmlformats.org/presentationml/2006/main">
+<p:sld xmlns:a="http://schemas.openxmlformats.org/drawingml/2006/main" xmlns:p="http://schemas.openxmlformats.org/presentationml/2006/main" xmlns:r="http://schemas.openxmlformats.org/officeDocument/2006/relationships">
   <p:cSld>
     <p:spTree>
       <p:nvGrpSpPr>
@@ -3094,14 +3099,7 @@
         <p:cNvGrpSpPr/>
         <p:nvPr/>
       </p:nvGrpSpPr>
-      <p:grpSpPr>
-        <a:xfrm>
-          <a:off x="0" y="0"/>
-          <a:ext cx="0" cy="0"/>
-          <a:chOff x="0" y="0"/>
-          <a:chExt cx="0" cy="0"/>
-        </a:xfrm>
-      </p:grpSpPr>
+      <p:grpSpPr/>
       <p:sp>
         <p:nvSpPr>
           <p:cNvPr id="2" name="Rectangle 1"/>
@@ -3142,7 +3140,6 @@
           <a:lstStyle/>
           <a:p>
             <a:pPr algn="ctr"/>
-            <a:endParaRPr/>
           </a:p>
         </p:txBody>
       </p:sp>
@@ -3168,6 +3165,7 @@
           </a:bodyPr>
           <a:lstStyle/>
           <a:p>
+            <a:pPr/>
             <a:r>
               <a:rPr sz="4400" b="1">
                 <a:solidFill>
@@ -3178,6 +3176,7 @@
             </a:r>
           </a:p>
           <a:p>
+            <a:pPr/>
             <a:r>
               <a:rPr sz="2000" b="0">
                 <a:solidFill>
@@ -3211,6 +3210,7 @@
           </a:bodyPr>
           <a:lstStyle/>
           <a:p>
+            <a:pPr/>
             <a:r>
               <a:rPr sz="1400" b="0">
                 <a:solidFill>
@@ -3231,7 +3231,7 @@
 </file>
 
 <file path=ppt/slides/slide10.xml><?xml version="1.0" encoding="utf-8"?>
-<p:sld xmlns:a="http://schemas.openxmlformats.org/drawingml/2006/main" xmlns:r="http://schemas.openxmlformats.org/officeDocument/2006/relationships" xmlns:p="http://schemas.openxmlformats.org/presentationml/2006/main">
+<p:sld xmlns:a="http://schemas.openxmlformats.org/drawingml/2006/main" xmlns:p="http://schemas.openxmlformats.org/presentationml/2006/main" xmlns:r="http://schemas.openxmlformats.org/officeDocument/2006/relationships">
   <p:cSld>
     <p:spTree>
       <p:nvGrpSpPr>
@@ -3239,14 +3239,7 @@
         <p:cNvGrpSpPr/>
         <p:nvPr/>
       </p:nvGrpSpPr>
-      <p:grpSpPr>
-        <a:xfrm>
-          <a:off x="0" y="0"/>
-          <a:ext cx="0" cy="0"/>
-          <a:chOff x="0" y="0"/>
-          <a:chExt cx="0" cy="0"/>
-        </a:xfrm>
-      </p:grpSpPr>
+      <p:grpSpPr/>
       <p:sp>
         <p:nvSpPr>
           <p:cNvPr id="2" name="Rectangle 1"/>
@@ -3287,7 +3280,6 @@
           <a:lstStyle/>
           <a:p>
             <a:pPr algn="ctr"/>
-            <a:endParaRPr/>
           </a:p>
         </p:txBody>
       </p:sp>
@@ -3313,6 +3305,7 @@
           </a:bodyPr>
           <a:lstStyle/>
           <a:p>
+            <a:pPr/>
             <a:r>
               <a:rPr sz="2800" b="1">
                 <a:solidFill>
@@ -3346,6 +3339,7 @@
           </a:bodyPr>
           <a:lstStyle/>
           <a:p>
+            <a:pPr/>
             <a:r>
               <a:rPr sz="1500" b="0">
                 <a:solidFill>
@@ -3356,6 +3350,7 @@
             </a:r>
           </a:p>
           <a:p>
+            <a:pPr/>
             <a:r>
               <a:rPr sz="1500" b="0">
                 <a:solidFill>
@@ -3366,6 +3361,7 @@
             </a:r>
           </a:p>
           <a:p>
+            <a:pPr/>
             <a:r>
               <a:rPr sz="1500" b="0">
                 <a:solidFill>
@@ -3376,6 +3372,7 @@
             </a:r>
           </a:p>
           <a:p>
+            <a:pPr/>
             <a:r>
               <a:rPr sz="1500" b="0">
                 <a:solidFill>
@@ -3386,6 +3383,7 @@
             </a:r>
           </a:p>
           <a:p>
+            <a:pPr/>
             <a:r>
               <a:rPr sz="1500" b="0">
                 <a:solidFill>
@@ -3396,6 +3394,7 @@
             </a:r>
           </a:p>
           <a:p>
+            <a:pPr/>
             <a:r>
               <a:rPr sz="1500" b="0">
                 <a:solidFill>
@@ -3458,6 +3457,7 @@
           </a:bodyPr>
           <a:lstStyle/>
           <a:p>
+            <a:pPr/>
             <a:r>
               <a:rPr sz="1100" b="0">
                 <a:solidFill>
@@ -3478,7 +3478,7 @@
 </file>
 
 <file path=ppt/slides/slide11.xml><?xml version="1.0" encoding="utf-8"?>
-<p:sld xmlns:a="http://schemas.openxmlformats.org/drawingml/2006/main" xmlns:r="http://schemas.openxmlformats.org/officeDocument/2006/relationships" xmlns:p="http://schemas.openxmlformats.org/presentationml/2006/main">
+<p:sld xmlns:a="http://schemas.openxmlformats.org/drawingml/2006/main" xmlns:p="http://schemas.openxmlformats.org/presentationml/2006/main" xmlns:r="http://schemas.openxmlformats.org/officeDocument/2006/relationships">
   <p:cSld>
     <p:spTree>
       <p:nvGrpSpPr>
@@ -3486,14 +3486,7 @@
         <p:cNvGrpSpPr/>
         <p:nvPr/>
       </p:nvGrpSpPr>
-      <p:grpSpPr>
-        <a:xfrm>
-          <a:off x="0" y="0"/>
-          <a:ext cx="0" cy="0"/>
-          <a:chOff x="0" y="0"/>
-          <a:chExt cx="0" cy="0"/>
-        </a:xfrm>
-      </p:grpSpPr>
+      <p:grpSpPr/>
       <p:sp>
         <p:nvSpPr>
           <p:cNvPr id="2" name="Rectangle 1"/>
@@ -3534,7 +3527,6 @@
           <a:lstStyle/>
           <a:p>
             <a:pPr algn="ctr"/>
-            <a:endParaRPr/>
           </a:p>
         </p:txBody>
       </p:sp>
@@ -3560,6 +3552,7 @@
           </a:bodyPr>
           <a:lstStyle/>
           <a:p>
+            <a:pPr/>
             <a:r>
               <a:rPr sz="2800" b="1">
                 <a:solidFill>
@@ -3580,7 +3573,7 @@
         <p:spPr>
           <a:xfrm>
             <a:off x="548640" y="1234440"/>
-            <a:ext cx="5120640" cy="784830"/>
+            <a:ext cx="5120640" cy="5303520"/>
           </a:xfrm>
           <a:prstGeom prst="rect">
             <a:avLst/>
@@ -3593,507 +3586,48 @@
           </a:bodyPr>
           <a:lstStyle/>
           <a:p>
-            <a:r>
-              <a:rPr sz="1500" b="0" dirty="0">
+            <a:pPr/>
+            <a:r>
+              <a:rPr sz="1500" b="0">
                 <a:solidFill>
                   <a:srgbClr val="1F2937"/>
                 </a:solidFill>
               </a:rPr>
-              <a:t>- </a:t>
-            </a:r>
-            <a:r>
-              <a:rPr sz="1500" b="0" dirty="0" err="1">
+              <a:t>- Tuyến 1: LLM cấu hình qua env - Gemini / OpenAI / Anthropic, đổi provider bằng AI_PROVIDER + AI_MODEL</a:t>
+            </a:r>
+          </a:p>
+          <a:p>
+            <a:pPr/>
+            <a:r>
+              <a:rPr sz="1500" b="0">
                 <a:solidFill>
                   <a:srgbClr val="1F2937"/>
                 </a:solidFill>
               </a:rPr>
-              <a:t>Ứng</a:t>
-            </a:r>
-            <a:r>
-              <a:rPr sz="1500" b="0" dirty="0">
+              <a:t>- Tuyến 2: Devin async - hết quota LLM thì tạo session xử lý, callback trả kết quả</a:t>
+            </a:r>
+          </a:p>
+          <a:p>
+            <a:pPr/>
+            <a:r>
+              <a:rPr sz="1500" b="0">
                 <a:solidFill>
                   <a:srgbClr val="1F2937"/>
                 </a:solidFill>
               </a:rPr>
-              <a:t> </a:t>
-            </a:r>
-            <a:r>
-              <a:rPr sz="1500" b="0" dirty="0" err="1">
+              <a:t>- Tuyến 3: rule-based fallback - luôn có câu trả lời hữu ích kể cả khi mọi backend chết</a:t>
+            </a:r>
+          </a:p>
+          <a:p>
+            <a:pPr/>
+            <a:r>
+              <a:rPr sz="1500" b="0">
                 <a:solidFill>
                   <a:srgbClr val="1F2937"/>
                 </a:solidFill>
               </a:rPr>
-              <a:t>dụng</a:t>
-            </a:r>
-            <a:r>
-              <a:rPr sz="1500" b="0" dirty="0">
-                <a:solidFill>
-                  <a:srgbClr val="1F2937"/>
-                </a:solidFill>
-              </a:rPr>
-              <a:t>: </a:t>
-            </a:r>
-            <a:r>
-              <a:rPr sz="1500" b="0" dirty="0" err="1">
-                <a:solidFill>
-                  <a:srgbClr val="1F2937"/>
-                </a:solidFill>
-              </a:rPr>
-              <a:t>báo</a:t>
-            </a:r>
-            <a:r>
-              <a:rPr sz="1500" b="0" dirty="0">
-                <a:solidFill>
-                  <a:srgbClr val="1F2937"/>
-                </a:solidFill>
-              </a:rPr>
-              <a:t> </a:t>
-            </a:r>
-            <a:r>
-              <a:rPr sz="1500" b="0" dirty="0" err="1">
-                <a:solidFill>
-                  <a:srgbClr val="1F2937"/>
-                </a:solidFill>
-              </a:rPr>
-              <a:t>cáo</a:t>
-            </a:r>
-            <a:r>
-              <a:rPr sz="1500" b="0" dirty="0">
-                <a:solidFill>
-                  <a:srgbClr val="1F2937"/>
-                </a:solidFill>
-              </a:rPr>
-              <a:t> </a:t>
-            </a:r>
-            <a:r>
-              <a:rPr sz="1500" b="0" dirty="0" err="1">
-                <a:solidFill>
-                  <a:srgbClr val="1F2937"/>
-                </a:solidFill>
-              </a:rPr>
-              <a:t>hồ</a:t>
-            </a:r>
-            <a:r>
-              <a:rPr sz="1500" b="0" dirty="0">
-                <a:solidFill>
-                  <a:srgbClr val="1F2937"/>
-                </a:solidFill>
-              </a:rPr>
-              <a:t> </a:t>
-            </a:r>
-            <a:r>
-              <a:rPr sz="1500" b="0" dirty="0" err="1">
-                <a:solidFill>
-                  <a:srgbClr val="1F2937"/>
-                </a:solidFill>
-              </a:rPr>
-              <a:t>sơ</a:t>
-            </a:r>
-            <a:r>
-              <a:rPr sz="1500" b="0" dirty="0">
-                <a:solidFill>
-                  <a:srgbClr val="1F2937"/>
-                </a:solidFill>
-              </a:rPr>
-              <a:t> </a:t>
-            </a:r>
-            <a:r>
-              <a:rPr sz="1500" b="0" dirty="0" err="1">
-                <a:solidFill>
-                  <a:srgbClr val="1F2937"/>
-                </a:solidFill>
-              </a:rPr>
-              <a:t>lớp</a:t>
-            </a:r>
-            <a:r>
-              <a:rPr sz="1500" b="0" dirty="0">
-                <a:solidFill>
-                  <a:srgbClr val="1F2937"/>
-                </a:solidFill>
-              </a:rPr>
-              <a:t>, </a:t>
-            </a:r>
-            <a:r>
-              <a:rPr sz="1500" b="0" dirty="0" err="1">
-                <a:solidFill>
-                  <a:srgbClr val="1F2937"/>
-                </a:solidFill>
-              </a:rPr>
-              <a:t>nhận</a:t>
-            </a:r>
-            <a:r>
-              <a:rPr sz="1500" b="0" dirty="0">
-                <a:solidFill>
-                  <a:srgbClr val="1F2937"/>
-                </a:solidFill>
-              </a:rPr>
-              <a:t> </a:t>
-            </a:r>
-            <a:r>
-              <a:rPr sz="1500" b="0" dirty="0" err="1">
-                <a:solidFill>
-                  <a:srgbClr val="1F2937"/>
-                </a:solidFill>
-              </a:rPr>
-              <a:t>xét</a:t>
-            </a:r>
-            <a:r>
-              <a:rPr sz="1500" b="0" dirty="0">
-                <a:solidFill>
-                  <a:srgbClr val="1F2937"/>
-                </a:solidFill>
-              </a:rPr>
-              <a:t> </a:t>
-            </a:r>
-            <a:r>
-              <a:rPr sz="1500" b="0" dirty="0" err="1">
-                <a:solidFill>
-                  <a:srgbClr val="1F2937"/>
-                </a:solidFill>
-              </a:rPr>
-              <a:t>giáo</a:t>
-            </a:r>
-            <a:r>
-              <a:rPr sz="1500" b="0" dirty="0">
-                <a:solidFill>
-                  <a:srgbClr val="1F2937"/>
-                </a:solidFill>
-              </a:rPr>
-              <a:t> </a:t>
-            </a:r>
-            <a:r>
-              <a:rPr sz="1500" b="0" dirty="0" err="1">
-                <a:solidFill>
-                  <a:srgbClr val="1F2937"/>
-                </a:solidFill>
-              </a:rPr>
-              <a:t>án</a:t>
-            </a:r>
-            <a:r>
-              <a:rPr sz="1500" b="0" dirty="0">
-                <a:solidFill>
-                  <a:srgbClr val="1F2937"/>
-                </a:solidFill>
-              </a:rPr>
-              <a:t>, </a:t>
-            </a:r>
-            <a:r>
-              <a:rPr sz="1500" b="0" dirty="0" err="1">
-                <a:solidFill>
-                  <a:srgbClr val="1F2937"/>
-                </a:solidFill>
-              </a:rPr>
-              <a:t>gợi</a:t>
-            </a:r>
-            <a:r>
-              <a:rPr sz="1500" b="0" dirty="0">
-                <a:solidFill>
-                  <a:srgbClr val="1F2937"/>
-                </a:solidFill>
-              </a:rPr>
-              <a:t> </a:t>
-            </a:r>
-            <a:r>
-              <a:rPr sz="1500" b="0" dirty="0" err="1">
-                <a:solidFill>
-                  <a:srgbClr val="1F2937"/>
-                </a:solidFill>
-              </a:rPr>
-              <a:t>ý</a:t>
-            </a:r>
-            <a:r>
-              <a:rPr sz="1500" b="0" dirty="0">
-                <a:solidFill>
-                  <a:srgbClr val="1F2937"/>
-                </a:solidFill>
-              </a:rPr>
-              <a:t> </a:t>
-            </a:r>
-            <a:r>
-              <a:rPr sz="1500" b="0" dirty="0" err="1">
-                <a:solidFill>
-                  <a:srgbClr val="1F2937"/>
-                </a:solidFill>
-              </a:rPr>
-              <a:t>cảnh</a:t>
-            </a:r>
-            <a:r>
-              <a:rPr sz="1500" b="0" dirty="0">
-                <a:solidFill>
-                  <a:srgbClr val="1F2937"/>
-                </a:solidFill>
-              </a:rPr>
-              <a:t> </a:t>
-            </a:r>
-            <a:r>
-              <a:rPr sz="1500" b="0" dirty="0" err="1">
-                <a:solidFill>
-                  <a:srgbClr val="1F2937"/>
-                </a:solidFill>
-              </a:rPr>
-              <a:t>báo</a:t>
-            </a:r>
-            <a:r>
-              <a:rPr sz="1500" b="0" dirty="0">
-                <a:solidFill>
-                  <a:srgbClr val="1F2937"/>
-                </a:solidFill>
-              </a:rPr>
-              <a:t>, </a:t>
-            </a:r>
-            <a:r>
-              <a:rPr sz="1500" b="0" dirty="0" err="1">
-                <a:solidFill>
-                  <a:srgbClr val="1F2937"/>
-                </a:solidFill>
-              </a:rPr>
-              <a:t>trợ</a:t>
-            </a:r>
-            <a:r>
-              <a:rPr sz="1500" b="0" dirty="0">
-                <a:solidFill>
-                  <a:srgbClr val="1F2937"/>
-                </a:solidFill>
-              </a:rPr>
-              <a:t> </a:t>
-            </a:r>
-            <a:r>
-              <a:rPr sz="1500" b="0" dirty="0" err="1">
-                <a:solidFill>
-                  <a:srgbClr val="1F2937"/>
-                </a:solidFill>
-              </a:rPr>
-              <a:t>lý</a:t>
-            </a:r>
-            <a:r>
-              <a:rPr sz="1500" b="0" dirty="0">
-                <a:solidFill>
-                  <a:srgbClr val="1F2937"/>
-                </a:solidFill>
-              </a:rPr>
-              <a:t> </a:t>
-            </a:r>
-            <a:r>
-              <a:rPr sz="1500" b="0" dirty="0" err="1">
-                <a:solidFill>
-                  <a:srgbClr val="1F2937"/>
-                </a:solidFill>
-              </a:rPr>
-              <a:t>điều</a:t>
-            </a:r>
-            <a:r>
-              <a:rPr sz="1500" b="0" dirty="0">
-                <a:solidFill>
-                  <a:srgbClr val="1F2937"/>
-                </a:solidFill>
-              </a:rPr>
-              <a:t> </a:t>
-            </a:r>
-            <a:r>
-              <a:rPr sz="1500" b="0" dirty="0" err="1">
-                <a:solidFill>
-                  <a:srgbClr val="1F2937"/>
-                </a:solidFill>
-              </a:rPr>
-              <a:t>hành</a:t>
-            </a:r>
-            <a:r>
-              <a:rPr sz="1500" b="0" dirty="0">
-                <a:solidFill>
-                  <a:srgbClr val="1F2937"/>
-                </a:solidFill>
-              </a:rPr>
-              <a:t>, </a:t>
-            </a:r>
-            <a:r>
-              <a:rPr sz="1500" b="0" dirty="0" err="1">
-                <a:solidFill>
-                  <a:srgbClr val="1F2937"/>
-                </a:solidFill>
-              </a:rPr>
-              <a:t>phân</a:t>
-            </a:r>
-            <a:r>
-              <a:rPr sz="1500" b="0" dirty="0">
-                <a:solidFill>
-                  <a:srgbClr val="1F2937"/>
-                </a:solidFill>
-              </a:rPr>
-              <a:t> </a:t>
-            </a:r>
-            <a:r>
-              <a:rPr sz="1500" b="0" dirty="0" err="1">
-                <a:solidFill>
-                  <a:srgbClr val="1F2937"/>
-                </a:solidFill>
-              </a:rPr>
-              <a:t>tích</a:t>
-            </a:r>
-            <a:r>
-              <a:rPr sz="1500" b="0" dirty="0">
-                <a:solidFill>
-                  <a:srgbClr val="1F2937"/>
-                </a:solidFill>
-              </a:rPr>
-              <a:t> </a:t>
-            </a:r>
-            <a:r>
-              <a:rPr sz="1500" b="0" dirty="0" err="1">
-                <a:solidFill>
-                  <a:srgbClr val="1F2937"/>
-                </a:solidFill>
-              </a:rPr>
-              <a:t>sổ</a:t>
-            </a:r>
-            <a:r>
-              <a:rPr sz="1500" b="0" dirty="0">
-                <a:solidFill>
-                  <a:srgbClr val="1F2937"/>
-                </a:solidFill>
-              </a:rPr>
-              <a:t> </a:t>
-            </a:r>
-            <a:r>
-              <a:rPr sz="1500" b="0" dirty="0" err="1">
-                <a:solidFill>
-                  <a:srgbClr val="1F2937"/>
-                </a:solidFill>
-              </a:rPr>
-              <a:t>đầu</a:t>
-            </a:r>
-            <a:r>
-              <a:rPr sz="1500" b="0" dirty="0">
-                <a:solidFill>
-                  <a:srgbClr val="1F2937"/>
-                </a:solidFill>
-              </a:rPr>
-              <a:t> </a:t>
-            </a:r>
-            <a:r>
-              <a:rPr sz="1500" b="0" dirty="0" err="1">
-                <a:solidFill>
-                  <a:srgbClr val="1F2937"/>
-                </a:solidFill>
-              </a:rPr>
-              <a:t>bài</a:t>
-            </a:r>
-            <a:r>
-              <a:rPr sz="1500" b="0" dirty="0">
-                <a:solidFill>
-                  <a:srgbClr val="1F2937"/>
-                </a:solidFill>
-              </a:rPr>
-              <a:t>, </a:t>
-            </a:r>
-            <a:r>
-              <a:rPr sz="1500" b="0" dirty="0" err="1">
-                <a:solidFill>
-                  <a:srgbClr val="1F2937"/>
-                </a:solidFill>
-              </a:rPr>
-              <a:t>biên</a:t>
-            </a:r>
-            <a:r>
-              <a:rPr sz="1500" b="0" dirty="0">
-                <a:solidFill>
-                  <a:srgbClr val="1F2937"/>
-                </a:solidFill>
-              </a:rPr>
-              <a:t> </a:t>
-            </a:r>
-            <a:r>
-              <a:rPr sz="1500" b="0" dirty="0" err="1">
-                <a:solidFill>
-                  <a:srgbClr val="1F2937"/>
-                </a:solidFill>
-              </a:rPr>
-              <a:t>bản</a:t>
-            </a:r>
-            <a:r>
-              <a:rPr sz="1500" b="0" dirty="0">
-                <a:solidFill>
-                  <a:srgbClr val="1F2937"/>
-                </a:solidFill>
-              </a:rPr>
-              <a:t> </a:t>
-            </a:r>
-            <a:r>
-              <a:rPr sz="1500" b="0" dirty="0" err="1">
-                <a:solidFill>
-                  <a:srgbClr val="1F2937"/>
-                </a:solidFill>
-              </a:rPr>
-              <a:t>sinh</a:t>
-            </a:r>
-            <a:r>
-              <a:rPr sz="1500" b="0" dirty="0">
-                <a:solidFill>
-                  <a:srgbClr val="1F2937"/>
-                </a:solidFill>
-              </a:rPr>
-              <a:t> </a:t>
-            </a:r>
-            <a:r>
-              <a:rPr sz="1500" b="0" dirty="0" err="1">
-                <a:solidFill>
-                  <a:srgbClr val="1F2937"/>
-                </a:solidFill>
-              </a:rPr>
-              <a:t>hoạt</a:t>
-            </a:r>
-            <a:r>
-              <a:rPr sz="1500" b="0" dirty="0">
-                <a:solidFill>
-                  <a:srgbClr val="1F2937"/>
-                </a:solidFill>
-              </a:rPr>
-              <a:t>, </a:t>
-            </a:r>
-            <a:r>
-              <a:rPr sz="1500" b="0" dirty="0" err="1">
-                <a:solidFill>
-                  <a:srgbClr val="1F2937"/>
-                </a:solidFill>
-              </a:rPr>
-              <a:t>báo</a:t>
-            </a:r>
-            <a:r>
-              <a:rPr sz="1500" b="0" dirty="0">
-                <a:solidFill>
-                  <a:srgbClr val="1F2937"/>
-                </a:solidFill>
-              </a:rPr>
-              <a:t> </a:t>
-            </a:r>
-            <a:r>
-              <a:rPr sz="1500" b="0" dirty="0" err="1">
-                <a:solidFill>
-                  <a:srgbClr val="1F2937"/>
-                </a:solidFill>
-              </a:rPr>
-              <a:t>cáo</a:t>
-            </a:r>
-            <a:r>
-              <a:rPr sz="1500" b="0" dirty="0">
-                <a:solidFill>
-                  <a:srgbClr val="1F2937"/>
-                </a:solidFill>
-              </a:rPr>
-              <a:t> </a:t>
-            </a:r>
-            <a:r>
-              <a:rPr sz="1500" b="0" dirty="0" err="1">
-                <a:solidFill>
-                  <a:srgbClr val="1F2937"/>
-                </a:solidFill>
-              </a:rPr>
-              <a:t>Sở</a:t>
-            </a:r>
-            <a:endParaRPr sz="1500" b="0" dirty="0">
-              <a:solidFill>
-                <a:srgbClr val="1F2937"/>
-              </a:solidFill>
-            </a:endParaRPr>
+              <a:t>- Ứng dụng: báo cáo hồ sơ lớp, nhận xét giáo án, gợi ý cảnh báo, trợ lý điều hành, phân tích sổ đầu bài, biên bản sinh hoạt, báo cáo Sở</a:t>
+            </a:r>
           </a:p>
         </p:txBody>
       </p:sp>
@@ -4148,6 +3682,7 @@
           </a:bodyPr>
           <a:lstStyle/>
           <a:p>
+            <a:pPr/>
             <a:r>
               <a:rPr sz="1100" b="0">
                 <a:solidFill>
@@ -4168,7 +3703,7 @@
 </file>
 
 <file path=ppt/slides/slide12.xml><?xml version="1.0" encoding="utf-8"?>
-<p:sld xmlns:a="http://schemas.openxmlformats.org/drawingml/2006/main" xmlns:r="http://schemas.openxmlformats.org/officeDocument/2006/relationships" xmlns:p="http://schemas.openxmlformats.org/presentationml/2006/main">
+<p:sld xmlns:a="http://schemas.openxmlformats.org/drawingml/2006/main" xmlns:p="http://schemas.openxmlformats.org/presentationml/2006/main" xmlns:r="http://schemas.openxmlformats.org/officeDocument/2006/relationships">
   <p:cSld>
     <p:spTree>
       <p:nvGrpSpPr>
@@ -4176,14 +3711,7 @@
         <p:cNvGrpSpPr/>
         <p:nvPr/>
       </p:nvGrpSpPr>
-      <p:grpSpPr>
-        <a:xfrm>
-          <a:off x="0" y="0"/>
-          <a:ext cx="0" cy="0"/>
-          <a:chOff x="0" y="0"/>
-          <a:chExt cx="0" cy="0"/>
-        </a:xfrm>
-      </p:grpSpPr>
+      <p:grpSpPr/>
       <p:sp>
         <p:nvSpPr>
           <p:cNvPr id="2" name="Rectangle 1"/>
@@ -4224,7 +3752,6 @@
           <a:lstStyle/>
           <a:p>
             <a:pPr algn="ctr"/>
-            <a:endParaRPr/>
           </a:p>
         </p:txBody>
       </p:sp>
@@ -4250,6 +3777,7 @@
           </a:bodyPr>
           <a:lstStyle/>
           <a:p>
+            <a:pPr/>
             <a:r>
               <a:rPr sz="2800" b="1">
                 <a:solidFill>
@@ -4283,6 +3811,7 @@
           </a:bodyPr>
           <a:lstStyle/>
           <a:p>
+            <a:pPr/>
             <a:r>
               <a:rPr sz="1500" b="0">
                 <a:solidFill>
@@ -4293,6 +3822,7 @@
             </a:r>
           </a:p>
           <a:p>
+            <a:pPr/>
             <a:r>
               <a:rPr sz="1500" b="0">
                 <a:solidFill>
@@ -4303,6 +3833,7 @@
             </a:r>
           </a:p>
           <a:p>
+            <a:pPr/>
             <a:r>
               <a:rPr sz="1500" b="0">
                 <a:solidFill>
@@ -4313,6 +3844,7 @@
             </a:r>
           </a:p>
           <a:p>
+            <a:pPr/>
             <a:r>
               <a:rPr sz="1500" b="0">
                 <a:solidFill>
@@ -4323,6 +3855,7 @@
             </a:r>
           </a:p>
           <a:p>
+            <a:pPr/>
             <a:r>
               <a:rPr sz="1500" b="0">
                 <a:solidFill>
@@ -4385,6 +3918,7 @@
           </a:bodyPr>
           <a:lstStyle/>
           <a:p>
+            <a:pPr/>
             <a:r>
               <a:rPr sz="1100" b="0">
                 <a:solidFill>
@@ -4405,7 +3939,7 @@
 </file>
 
 <file path=ppt/slides/slide13.xml><?xml version="1.0" encoding="utf-8"?>
-<p:sld xmlns:a="http://schemas.openxmlformats.org/drawingml/2006/main" xmlns:r="http://schemas.openxmlformats.org/officeDocument/2006/relationships" xmlns:p="http://schemas.openxmlformats.org/presentationml/2006/main">
+<p:sld xmlns:a="http://schemas.openxmlformats.org/drawingml/2006/main" xmlns:p="http://schemas.openxmlformats.org/presentationml/2006/main" xmlns:r="http://schemas.openxmlformats.org/officeDocument/2006/relationships">
   <p:cSld>
     <p:spTree>
       <p:nvGrpSpPr>
@@ -4413,14 +3947,7 @@
         <p:cNvGrpSpPr/>
         <p:nvPr/>
       </p:nvGrpSpPr>
-      <p:grpSpPr>
-        <a:xfrm>
-          <a:off x="0" y="0"/>
-          <a:ext cx="0" cy="0"/>
-          <a:chOff x="0" y="0"/>
-          <a:chExt cx="0" cy="0"/>
-        </a:xfrm>
-      </p:grpSpPr>
+      <p:grpSpPr/>
       <p:sp>
         <p:nvSpPr>
           <p:cNvPr id="2" name="Rectangle 1"/>
@@ -4461,7 +3988,6 @@
           <a:lstStyle/>
           <a:p>
             <a:pPr algn="ctr"/>
-            <a:endParaRPr/>
           </a:p>
         </p:txBody>
       </p:sp>
@@ -4487,6 +4013,7 @@
           </a:bodyPr>
           <a:lstStyle/>
           <a:p>
+            <a:pPr/>
             <a:r>
               <a:rPr sz="3600" b="1">
                 <a:solidFill>
@@ -4497,6 +4024,7 @@
             </a:r>
           </a:p>
           <a:p>
+            <a:pPr/>
             <a:r>
               <a:rPr sz="2000" b="0">
                 <a:solidFill>
@@ -4507,6 +4035,7 @@
             </a:r>
           </a:p>
           <a:p>
+            <a:pPr/>
             <a:r>
               <a:rPr sz="1600" b="0">
                 <a:solidFill>
@@ -4517,6 +4046,7 @@
             </a:r>
           </a:p>
           <a:p>
+            <a:pPr/>
             <a:r>
               <a:rPr sz="1400" b="0">
                 <a:solidFill>
@@ -4537,7 +4067,7 @@
 </file>
 
 <file path=ppt/slides/slide2.xml><?xml version="1.0" encoding="utf-8"?>
-<p:sld xmlns:a="http://schemas.openxmlformats.org/drawingml/2006/main" xmlns:r="http://schemas.openxmlformats.org/officeDocument/2006/relationships" xmlns:p="http://schemas.openxmlformats.org/presentationml/2006/main">
+<p:sld xmlns:a="http://schemas.openxmlformats.org/drawingml/2006/main" xmlns:p="http://schemas.openxmlformats.org/presentationml/2006/main" xmlns:r="http://schemas.openxmlformats.org/officeDocument/2006/relationships">
   <p:cSld>
     <p:spTree>
       <p:nvGrpSpPr>
@@ -4545,14 +4075,7 @@
         <p:cNvGrpSpPr/>
         <p:nvPr/>
       </p:nvGrpSpPr>
-      <p:grpSpPr>
-        <a:xfrm>
-          <a:off x="0" y="0"/>
-          <a:ext cx="0" cy="0"/>
-          <a:chOff x="0" y="0"/>
-          <a:chExt cx="0" cy="0"/>
-        </a:xfrm>
-      </p:grpSpPr>
+      <p:grpSpPr/>
       <p:sp>
         <p:nvSpPr>
           <p:cNvPr id="2" name="Rectangle 1"/>
@@ -4593,7 +4116,6 @@
           <a:lstStyle/>
           <a:p>
             <a:pPr algn="ctr"/>
-            <a:endParaRPr/>
           </a:p>
         </p:txBody>
       </p:sp>
@@ -4619,6 +4141,7 @@
           </a:bodyPr>
           <a:lstStyle/>
           <a:p>
+            <a:pPr/>
             <a:r>
               <a:rPr sz="2800" b="1">
                 <a:solidFill>
@@ -4652,6 +4175,7 @@
           </a:bodyPr>
           <a:lstStyle/>
           <a:p>
+            <a:pPr/>
             <a:r>
               <a:rPr sz="1500" b="0">
                 <a:solidFill>
@@ -4662,6 +4186,7 @@
             </a:r>
           </a:p>
           <a:p>
+            <a:pPr/>
             <a:r>
               <a:rPr sz="1500" b="0">
                 <a:solidFill>
@@ -4672,6 +4197,7 @@
             </a:r>
           </a:p>
           <a:p>
+            <a:pPr/>
             <a:r>
               <a:rPr sz="1500" b="0">
                 <a:solidFill>
@@ -4682,6 +4208,7 @@
             </a:r>
           </a:p>
           <a:p>
+            <a:pPr/>
             <a:r>
               <a:rPr sz="1500" b="0">
                 <a:solidFill>
@@ -4692,6 +4219,7 @@
             </a:r>
           </a:p>
           <a:p>
+            <a:pPr/>
             <a:r>
               <a:rPr sz="1500" b="0">
                 <a:solidFill>
@@ -4702,6 +4230,7 @@
             </a:r>
           </a:p>
           <a:p>
+            <a:pPr/>
             <a:r>
               <a:rPr sz="1500" b="0">
                 <a:solidFill>
@@ -4764,6 +4293,7 @@
           </a:bodyPr>
           <a:lstStyle/>
           <a:p>
+            <a:pPr/>
             <a:r>
               <a:rPr sz="1100" b="0">
                 <a:solidFill>
@@ -4784,7 +4314,7 @@
 </file>
 
 <file path=ppt/slides/slide3.xml><?xml version="1.0" encoding="utf-8"?>
-<p:sld xmlns:a="http://schemas.openxmlformats.org/drawingml/2006/main" xmlns:r="http://schemas.openxmlformats.org/officeDocument/2006/relationships" xmlns:p="http://schemas.openxmlformats.org/presentationml/2006/main">
+<p:sld xmlns:a="http://schemas.openxmlformats.org/drawingml/2006/main" xmlns:p="http://schemas.openxmlformats.org/presentationml/2006/main" xmlns:r="http://schemas.openxmlformats.org/officeDocument/2006/relationships">
   <p:cSld>
     <p:spTree>
       <p:nvGrpSpPr>
@@ -4792,14 +4322,7 @@
         <p:cNvGrpSpPr/>
         <p:nvPr/>
       </p:nvGrpSpPr>
-      <p:grpSpPr>
-        <a:xfrm>
-          <a:off x="0" y="0"/>
-          <a:ext cx="0" cy="0"/>
-          <a:chOff x="0" y="0"/>
-          <a:chExt cx="0" cy="0"/>
-        </a:xfrm>
-      </p:grpSpPr>
+      <p:grpSpPr/>
       <p:sp>
         <p:nvSpPr>
           <p:cNvPr id="2" name="TextBox 1"/>
@@ -4822,13 +4345,14 @@
           </a:bodyPr>
           <a:lstStyle/>
           <a:p>
+            <a:pPr/>
             <a:r>
               <a:rPr sz="2800" b="1">
                 <a:solidFill>
                   <a:srgbClr val="1D4ED8"/>
                 </a:solidFill>
               </a:rPr>
-              <a:t>11 vai trò - phạm vi dữ liệu</a:t>
+              <a:t>10 vai trò - phạm vi dữ liệu</a:t>
             </a:r>
           </a:p>
         </p:txBody>
@@ -4852,34 +4376,10 @@
                 <a:tableStyleId>{5C22544A-7EE6-4342-B048-85BDC9FD1C3A}</a:tableStyleId>
               </a:tblPr>
               <a:tblGrid>
-                <a:gridCol w="2773603">
-                  <a:extLst>
-                    <a:ext uri="{9D8B030D-6E8A-4147-A177-3AD203B41FA5}">
-                      <a16:colId xmlns:a16="http://schemas.microsoft.com/office/drawing/2014/main" val="20000"/>
-                    </a:ext>
-                  </a:extLst>
-                </a:gridCol>
-                <a:gridCol w="2773603">
-                  <a:extLst>
-                    <a:ext uri="{9D8B030D-6E8A-4147-A177-3AD203B41FA5}">
-                      <a16:colId xmlns:a16="http://schemas.microsoft.com/office/drawing/2014/main" val="20001"/>
-                    </a:ext>
-                  </a:extLst>
-                </a:gridCol>
-                <a:gridCol w="2773603">
-                  <a:extLst>
-                    <a:ext uri="{9D8B030D-6E8A-4147-A177-3AD203B41FA5}">
-                      <a16:colId xmlns:a16="http://schemas.microsoft.com/office/drawing/2014/main" val="20002"/>
-                    </a:ext>
-                  </a:extLst>
-                </a:gridCol>
-                <a:gridCol w="2773606">
-                  <a:extLst>
-                    <a:ext uri="{9D8B030D-6E8A-4147-A177-3AD203B41FA5}">
-                      <a16:colId xmlns:a16="http://schemas.microsoft.com/office/drawing/2014/main" val="20003"/>
-                    </a:ext>
-                  </a:extLst>
-                </a:gridCol>
+                <a:gridCol w="2773603"/>
+                <a:gridCol w="2773603"/>
+                <a:gridCol w="2773603"/>
+                <a:gridCol w="2773606"/>
               </a:tblGrid>
               <a:tr h="950976">
                 <a:tc>
@@ -4934,11 +4434,6 @@
                   </a:txBody>
                   <a:tcPr/>
                 </a:tc>
-                <a:extLst>
-                  <a:ext uri="{0D108BD9-81ED-4DB2-BD59-A6C34878D82A}">
-                    <a16:rowId xmlns:a16="http://schemas.microsoft.com/office/drawing/2014/main" val="10000"/>
-                  </a:ext>
-                </a:extLst>
               </a:tr>
               <a:tr h="950976">
                 <a:tc>
@@ -4993,11 +4488,6 @@
                   </a:txBody>
                   <a:tcPr/>
                 </a:tc>
-                <a:extLst>
-                  <a:ext uri="{0D108BD9-81ED-4DB2-BD59-A6C34878D82A}">
-                    <a16:rowId xmlns:a16="http://schemas.microsoft.com/office/drawing/2014/main" val="10001"/>
-                  </a:ext>
-                </a:extLst>
               </a:tr>
               <a:tr h="950976">
                 <a:tc>
@@ -5052,11 +4542,6 @@
                   </a:txBody>
                   <a:tcPr/>
                 </a:tc>
-                <a:extLst>
-                  <a:ext uri="{0D108BD9-81ED-4DB2-BD59-A6C34878D82A}">
-                    <a16:rowId xmlns:a16="http://schemas.microsoft.com/office/drawing/2014/main" val="10002"/>
-                  </a:ext>
-                </a:extLst>
               </a:tr>
               <a:tr h="950976">
                 <a:tc>
@@ -5092,7 +4577,7 @@
                     <a:p>
                       <a:r>
                         <a:rPr sz="1400"/>
-                        <a:t>Phòng GD/UBND</a:t>
+                        <a:t>UBND cấp xã</a:t>
                       </a:r>
                     </a:p>
                   </a:txBody>
@@ -5111,11 +4596,6 @@
                   </a:txBody>
                   <a:tcPr/>
                 </a:tc>
-                <a:extLst>
-                  <a:ext uri="{0D108BD9-81ED-4DB2-BD59-A6C34878D82A}">
-                    <a16:rowId xmlns:a16="http://schemas.microsoft.com/office/drawing/2014/main" val="10003"/>
-                  </a:ext>
-                </a:extLst>
               </a:tr>
               <a:tr h="950976">
                 <a:tc>
@@ -5170,11 +4650,6 @@
                   </a:txBody>
                   <a:tcPr/>
                 </a:tc>
-                <a:extLst>
-                  <a:ext uri="{0D108BD9-81ED-4DB2-BD59-A6C34878D82A}">
-                    <a16:rowId xmlns:a16="http://schemas.microsoft.com/office/drawing/2014/main" val="10004"/>
-                  </a:ext>
-                </a:extLst>
               </a:tr>
             </a:tbl>
           </a:graphicData>
@@ -5189,7 +4664,7 @@
 </file>
 
 <file path=ppt/slides/slide4.xml><?xml version="1.0" encoding="utf-8"?>
-<p:sld xmlns:a="http://schemas.openxmlformats.org/drawingml/2006/main" xmlns:r="http://schemas.openxmlformats.org/officeDocument/2006/relationships" xmlns:p="http://schemas.openxmlformats.org/presentationml/2006/main">
+<p:sld xmlns:a="http://schemas.openxmlformats.org/drawingml/2006/main" xmlns:p="http://schemas.openxmlformats.org/presentationml/2006/main" xmlns:r="http://schemas.openxmlformats.org/officeDocument/2006/relationships">
   <p:cSld>
     <p:spTree>
       <p:nvGrpSpPr>
@@ -5197,14 +4672,7 @@
         <p:cNvGrpSpPr/>
         <p:nvPr/>
       </p:nvGrpSpPr>
-      <p:grpSpPr>
-        <a:xfrm>
-          <a:off x="0" y="0"/>
-          <a:ext cx="0" cy="0"/>
-          <a:chOff x="0" y="0"/>
-          <a:chExt cx="0" cy="0"/>
-        </a:xfrm>
-      </p:grpSpPr>
+      <p:grpSpPr/>
       <p:sp>
         <p:nvSpPr>
           <p:cNvPr id="2" name="Rectangle 1"/>
@@ -5245,7 +4713,6 @@
           <a:lstStyle/>
           <a:p>
             <a:pPr algn="ctr"/>
-            <a:endParaRPr/>
           </a:p>
         </p:txBody>
       </p:sp>
@@ -5271,6 +4738,7 @@
           </a:bodyPr>
           <a:lstStyle/>
           <a:p>
+            <a:pPr/>
             <a:r>
               <a:rPr sz="2800" b="1">
                 <a:solidFill>
@@ -5304,6 +4772,7 @@
           </a:bodyPr>
           <a:lstStyle/>
           <a:p>
+            <a:pPr/>
             <a:r>
               <a:rPr sz="1500" b="0">
                 <a:solidFill>
@@ -5314,6 +4783,7 @@
             </a:r>
           </a:p>
           <a:p>
+            <a:pPr/>
             <a:r>
               <a:rPr sz="1500" b="0">
                 <a:solidFill>
@@ -5324,6 +4794,7 @@
             </a:r>
           </a:p>
           <a:p>
+            <a:pPr/>
             <a:r>
               <a:rPr sz="1500" b="0">
                 <a:solidFill>
@@ -5334,6 +4805,7 @@
             </a:r>
           </a:p>
           <a:p>
+            <a:pPr/>
             <a:r>
               <a:rPr sz="1500" b="0">
                 <a:solidFill>
@@ -5344,6 +4816,7 @@
             </a:r>
           </a:p>
           <a:p>
+            <a:pPr/>
             <a:r>
               <a:rPr sz="1500" b="0">
                 <a:solidFill>
@@ -5354,6 +4827,7 @@
             </a:r>
           </a:p>
           <a:p>
+            <a:pPr/>
             <a:r>
               <a:rPr sz="1500" b="0">
                 <a:solidFill>
@@ -5416,6 +4890,7 @@
           </a:bodyPr>
           <a:lstStyle/>
           <a:p>
+            <a:pPr/>
             <a:r>
               <a:rPr sz="1100" b="0">
                 <a:solidFill>
@@ -5436,7 +4911,7 @@
 </file>
 
 <file path=ppt/slides/slide5.xml><?xml version="1.0" encoding="utf-8"?>
-<p:sld xmlns:a="http://schemas.openxmlformats.org/drawingml/2006/main" xmlns:r="http://schemas.openxmlformats.org/officeDocument/2006/relationships" xmlns:p="http://schemas.openxmlformats.org/presentationml/2006/main">
+<p:sld xmlns:a="http://schemas.openxmlformats.org/drawingml/2006/main" xmlns:p="http://schemas.openxmlformats.org/presentationml/2006/main" xmlns:r="http://schemas.openxmlformats.org/officeDocument/2006/relationships">
   <p:cSld>
     <p:spTree>
       <p:nvGrpSpPr>
@@ -5444,14 +4919,7 @@
         <p:cNvGrpSpPr/>
         <p:nvPr/>
       </p:nvGrpSpPr>
-      <p:grpSpPr>
-        <a:xfrm>
-          <a:off x="0" y="0"/>
-          <a:ext cx="0" cy="0"/>
-          <a:chOff x="0" y="0"/>
-          <a:chExt cx="0" cy="0"/>
-        </a:xfrm>
-      </p:grpSpPr>
+      <p:grpSpPr/>
       <p:sp>
         <p:nvSpPr>
           <p:cNvPr id="2" name="Rectangle 1"/>
@@ -5492,7 +4960,6 @@
           <a:lstStyle/>
           <a:p>
             <a:pPr algn="ctr"/>
-            <a:endParaRPr/>
           </a:p>
         </p:txBody>
       </p:sp>
@@ -5518,6 +4985,7 @@
           </a:bodyPr>
           <a:lstStyle/>
           <a:p>
+            <a:pPr/>
             <a:r>
               <a:rPr sz="2800" b="1">
                 <a:solidFill>
@@ -5551,6 +5019,7 @@
           </a:bodyPr>
           <a:lstStyle/>
           <a:p>
+            <a:pPr/>
             <a:r>
               <a:rPr sz="1500" b="0">
                 <a:solidFill>
@@ -5561,6 +5030,7 @@
             </a:r>
           </a:p>
           <a:p>
+            <a:pPr/>
             <a:r>
               <a:rPr sz="1500" b="0">
                 <a:solidFill>
@@ -5571,6 +5041,7 @@
             </a:r>
           </a:p>
           <a:p>
+            <a:pPr/>
             <a:r>
               <a:rPr sz="1500" b="0">
                 <a:solidFill>
@@ -5581,6 +5052,7 @@
             </a:r>
           </a:p>
           <a:p>
+            <a:pPr/>
             <a:r>
               <a:rPr sz="1500" b="0">
                 <a:solidFill>
@@ -5591,6 +5063,7 @@
             </a:r>
           </a:p>
           <a:p>
+            <a:pPr/>
             <a:r>
               <a:rPr sz="1500" b="0">
                 <a:solidFill>
@@ -5601,6 +5074,7 @@
             </a:r>
           </a:p>
           <a:p>
+            <a:pPr/>
             <a:r>
               <a:rPr sz="1500" b="0">
                 <a:solidFill>
@@ -5663,6 +5137,7 @@
           </a:bodyPr>
           <a:lstStyle/>
           <a:p>
+            <a:pPr/>
             <a:r>
               <a:rPr sz="1100" b="0">
                 <a:solidFill>
@@ -5683,7 +5158,7 @@
 </file>
 
 <file path=ppt/slides/slide6.xml><?xml version="1.0" encoding="utf-8"?>
-<p:sld xmlns:a="http://schemas.openxmlformats.org/drawingml/2006/main" xmlns:r="http://schemas.openxmlformats.org/officeDocument/2006/relationships" xmlns:p="http://schemas.openxmlformats.org/presentationml/2006/main">
+<p:sld xmlns:a="http://schemas.openxmlformats.org/drawingml/2006/main" xmlns:p="http://schemas.openxmlformats.org/presentationml/2006/main" xmlns:r="http://schemas.openxmlformats.org/officeDocument/2006/relationships">
   <p:cSld>
     <p:spTree>
       <p:nvGrpSpPr>
@@ -5691,14 +5166,7 @@
         <p:cNvGrpSpPr/>
         <p:nvPr/>
       </p:nvGrpSpPr>
-      <p:grpSpPr>
-        <a:xfrm>
-          <a:off x="0" y="0"/>
-          <a:ext cx="0" cy="0"/>
-          <a:chOff x="0" y="0"/>
-          <a:chExt cx="0" cy="0"/>
-        </a:xfrm>
-      </p:grpSpPr>
+      <p:grpSpPr/>
       <p:sp>
         <p:nvSpPr>
           <p:cNvPr id="2" name="Rectangle 1"/>
@@ -5739,7 +5207,6 @@
           <a:lstStyle/>
           <a:p>
             <a:pPr algn="ctr"/>
-            <a:endParaRPr/>
           </a:p>
         </p:txBody>
       </p:sp>
@@ -5765,6 +5232,7 @@
           </a:bodyPr>
           <a:lstStyle/>
           <a:p>
+            <a:pPr/>
             <a:r>
               <a:rPr sz="2800" b="1">
                 <a:solidFill>
@@ -5798,6 +5266,7 @@
           </a:bodyPr>
           <a:lstStyle/>
           <a:p>
+            <a:pPr/>
             <a:r>
               <a:rPr sz="1500" b="0">
                 <a:solidFill>
@@ -5808,6 +5277,7 @@
             </a:r>
           </a:p>
           <a:p>
+            <a:pPr/>
             <a:r>
               <a:rPr sz="1500" b="0">
                 <a:solidFill>
@@ -5818,6 +5288,7 @@
             </a:r>
           </a:p>
           <a:p>
+            <a:pPr/>
             <a:r>
               <a:rPr sz="1500" b="0">
                 <a:solidFill>
@@ -5828,6 +5299,7 @@
             </a:r>
           </a:p>
           <a:p>
+            <a:pPr/>
             <a:r>
               <a:rPr sz="1500" b="0">
                 <a:solidFill>
@@ -5838,6 +5310,7 @@
             </a:r>
           </a:p>
           <a:p>
+            <a:pPr/>
             <a:r>
               <a:rPr sz="1500" b="0">
                 <a:solidFill>
@@ -5848,6 +5321,7 @@
             </a:r>
           </a:p>
           <a:p>
+            <a:pPr/>
             <a:r>
               <a:rPr sz="1500" b="0">
                 <a:solidFill>
@@ -5910,6 +5384,7 @@
           </a:bodyPr>
           <a:lstStyle/>
           <a:p>
+            <a:pPr/>
             <a:r>
               <a:rPr sz="1100" b="0">
                 <a:solidFill>
@@ -5930,7 +5405,7 @@
 </file>
 
 <file path=ppt/slides/slide7.xml><?xml version="1.0" encoding="utf-8"?>
-<p:sld xmlns:a="http://schemas.openxmlformats.org/drawingml/2006/main" xmlns:r="http://schemas.openxmlformats.org/officeDocument/2006/relationships" xmlns:p="http://schemas.openxmlformats.org/presentationml/2006/main">
+<p:sld xmlns:a="http://schemas.openxmlformats.org/drawingml/2006/main" xmlns:p="http://schemas.openxmlformats.org/presentationml/2006/main" xmlns:r="http://schemas.openxmlformats.org/officeDocument/2006/relationships">
   <p:cSld>
     <p:spTree>
       <p:nvGrpSpPr>
@@ -5938,14 +5413,7 @@
         <p:cNvGrpSpPr/>
         <p:nvPr/>
       </p:nvGrpSpPr>
-      <p:grpSpPr>
-        <a:xfrm>
-          <a:off x="0" y="0"/>
-          <a:ext cx="0" cy="0"/>
-          <a:chOff x="0" y="0"/>
-          <a:chExt cx="0" cy="0"/>
-        </a:xfrm>
-      </p:grpSpPr>
+      <p:grpSpPr/>
       <p:sp>
         <p:nvSpPr>
           <p:cNvPr id="2" name="Rectangle 1"/>
@@ -5986,7 +5454,6 @@
           <a:lstStyle/>
           <a:p>
             <a:pPr algn="ctr"/>
-            <a:endParaRPr/>
           </a:p>
         </p:txBody>
       </p:sp>
@@ -6012,6 +5479,7 @@
           </a:bodyPr>
           <a:lstStyle/>
           <a:p>
+            <a:pPr/>
             <a:r>
               <a:rPr sz="2800" b="1">
                 <a:solidFill>
@@ -6045,6 +5513,7 @@
           </a:bodyPr>
           <a:lstStyle/>
           <a:p>
+            <a:pPr/>
             <a:r>
               <a:rPr sz="1500" b="0">
                 <a:solidFill>
@@ -6055,6 +5524,7 @@
             </a:r>
           </a:p>
           <a:p>
+            <a:pPr/>
             <a:r>
               <a:rPr sz="1500" b="0">
                 <a:solidFill>
@@ -6065,6 +5535,7 @@
             </a:r>
           </a:p>
           <a:p>
+            <a:pPr/>
             <a:r>
               <a:rPr sz="1500" b="0">
                 <a:solidFill>
@@ -6075,6 +5546,7 @@
             </a:r>
           </a:p>
           <a:p>
+            <a:pPr/>
             <a:r>
               <a:rPr sz="1500" b="0">
                 <a:solidFill>
@@ -6085,6 +5557,7 @@
             </a:r>
           </a:p>
           <a:p>
+            <a:pPr/>
             <a:r>
               <a:rPr sz="1500" b="0">
                 <a:solidFill>
@@ -6147,6 +5620,7 @@
           </a:bodyPr>
           <a:lstStyle/>
           <a:p>
+            <a:pPr/>
             <a:r>
               <a:rPr sz="1100" b="0">
                 <a:solidFill>
@@ -6167,7 +5641,7 @@
 </file>
 
 <file path=ppt/slides/slide8.xml><?xml version="1.0" encoding="utf-8"?>
-<p:sld xmlns:a="http://schemas.openxmlformats.org/drawingml/2006/main" xmlns:r="http://schemas.openxmlformats.org/officeDocument/2006/relationships" xmlns:p="http://schemas.openxmlformats.org/presentationml/2006/main">
+<p:sld xmlns:a="http://schemas.openxmlformats.org/drawingml/2006/main" xmlns:p="http://schemas.openxmlformats.org/presentationml/2006/main" xmlns:r="http://schemas.openxmlformats.org/officeDocument/2006/relationships">
   <p:cSld>
     <p:spTree>
       <p:nvGrpSpPr>
@@ -6175,14 +5649,7 @@
         <p:cNvGrpSpPr/>
         <p:nvPr/>
       </p:nvGrpSpPr>
-      <p:grpSpPr>
-        <a:xfrm>
-          <a:off x="0" y="0"/>
-          <a:ext cx="0" cy="0"/>
-          <a:chOff x="0" y="0"/>
-          <a:chExt cx="0" cy="0"/>
-        </a:xfrm>
-      </p:grpSpPr>
+      <p:grpSpPr/>
       <p:sp>
         <p:nvSpPr>
           <p:cNvPr id="2" name="Rectangle 1"/>
@@ -6223,7 +5690,6 @@
           <a:lstStyle/>
           <a:p>
             <a:pPr algn="ctr"/>
-            <a:endParaRPr/>
           </a:p>
         </p:txBody>
       </p:sp>
@@ -6249,6 +5715,7 @@
           </a:bodyPr>
           <a:lstStyle/>
           <a:p>
+            <a:pPr/>
             <a:r>
               <a:rPr sz="2800" b="1">
                 <a:solidFill>
@@ -6282,6 +5749,7 @@
           </a:bodyPr>
           <a:lstStyle/>
           <a:p>
+            <a:pPr/>
             <a:r>
               <a:rPr sz="1500" b="0">
                 <a:solidFill>
@@ -6292,6 +5760,7 @@
             </a:r>
           </a:p>
           <a:p>
+            <a:pPr/>
             <a:r>
               <a:rPr sz="1500" b="0">
                 <a:solidFill>
@@ -6302,6 +5771,7 @@
             </a:r>
           </a:p>
           <a:p>
+            <a:pPr/>
             <a:r>
               <a:rPr sz="1500" b="0">
                 <a:solidFill>
@@ -6312,6 +5782,7 @@
             </a:r>
           </a:p>
           <a:p>
+            <a:pPr/>
             <a:r>
               <a:rPr sz="1500" b="0">
                 <a:solidFill>
@@ -6322,6 +5793,7 @@
             </a:r>
           </a:p>
           <a:p>
+            <a:pPr/>
             <a:r>
               <a:rPr sz="1500" b="0">
                 <a:solidFill>
@@ -6384,6 +5856,7 @@
           </a:bodyPr>
           <a:lstStyle/>
           <a:p>
+            <a:pPr/>
             <a:r>
               <a:rPr sz="1100" b="0">
                 <a:solidFill>
@@ -6404,7 +5877,7 @@
 </file>
 
 <file path=ppt/slides/slide9.xml><?xml version="1.0" encoding="utf-8"?>
-<p:sld xmlns:a="http://schemas.openxmlformats.org/drawingml/2006/main" xmlns:r="http://schemas.openxmlformats.org/officeDocument/2006/relationships" xmlns:p="http://schemas.openxmlformats.org/presentationml/2006/main">
+<p:sld xmlns:a="http://schemas.openxmlformats.org/drawingml/2006/main" xmlns:p="http://schemas.openxmlformats.org/presentationml/2006/main" xmlns:r="http://schemas.openxmlformats.org/officeDocument/2006/relationships">
   <p:cSld>
     <p:spTree>
       <p:nvGrpSpPr>
@@ -6412,14 +5885,7 @@
         <p:cNvGrpSpPr/>
         <p:nvPr/>
       </p:nvGrpSpPr>
-      <p:grpSpPr>
-        <a:xfrm>
-          <a:off x="0" y="0"/>
-          <a:ext cx="0" cy="0"/>
-          <a:chOff x="0" y="0"/>
-          <a:chExt cx="0" cy="0"/>
-        </a:xfrm>
-      </p:grpSpPr>
+      <p:grpSpPr/>
       <p:sp>
         <p:nvSpPr>
           <p:cNvPr id="2" name="Rectangle 1"/>
@@ -6460,7 +5926,6 @@
           <a:lstStyle/>
           <a:p>
             <a:pPr algn="ctr"/>
-            <a:endParaRPr/>
           </a:p>
         </p:txBody>
       </p:sp>
@@ -6486,6 +5951,7 @@
           </a:bodyPr>
           <a:lstStyle/>
           <a:p>
+            <a:pPr/>
             <a:r>
               <a:rPr sz="2800" b="1">
                 <a:solidFill>
@@ -6519,6 +5985,7 @@
           </a:bodyPr>
           <a:lstStyle/>
           <a:p>
+            <a:pPr/>
             <a:r>
               <a:rPr sz="1500" b="0">
                 <a:solidFill>
@@ -6529,6 +5996,7 @@
             </a:r>
           </a:p>
           <a:p>
+            <a:pPr/>
             <a:r>
               <a:rPr sz="1500" b="0">
                 <a:solidFill>
@@ -6539,6 +6007,7 @@
             </a:r>
           </a:p>
           <a:p>
+            <a:pPr/>
             <a:r>
               <a:rPr sz="1500" b="0">
                 <a:solidFill>
@@ -6549,6 +6018,7 @@
             </a:r>
           </a:p>
           <a:p>
+            <a:pPr/>
             <a:r>
               <a:rPr sz="1500" b="0">
                 <a:solidFill>
@@ -6559,6 +6029,7 @@
             </a:r>
           </a:p>
           <a:p>
+            <a:pPr/>
             <a:r>
               <a:rPr sz="1500" b="0">
                 <a:solidFill>
@@ -6569,6 +6040,7 @@
             </a:r>
           </a:p>
           <a:p>
+            <a:pPr/>
             <a:r>
               <a:rPr sz="1500" b="0">
                 <a:solidFill>
@@ -6631,6 +6103,7 @@
           </a:bodyPr>
           <a:lstStyle/>
           <a:p>
+            <a:pPr/>
             <a:r>
               <a:rPr sz="1100" b="0">
                 <a:solidFill>

--- a/docs/user-guide/SO-CHU-NHIEM-SO-GIOI-THIEU.pptx
+++ b/docs/user-guide/SO-CHU-NHIEM-SO-GIOI-THIEU.pptx
@@ -18,6 +18,8 @@
     <p:sldId id="266" r:id="rId17"/>
     <p:sldId id="267" r:id="rId18"/>
     <p:sldId id="268" r:id="rId19"/>
+    <p:sldId id="269" r:id="rId20"/>
+    <p:sldId id="270" r:id="rId21"/>
   </p:sldIdLst>
   <p:sldSz cx="12191695" cy="6858000" type="screen4x3"/>
   <p:notesSz cx="6858000" cy="9144000"/>
@@ -3217,7 +3219,7 @@
                   <a:srgbClr val="BFDBFE"/>
                 </a:solidFill>
               </a:rPr>
-              <a:t>https://so-chu-nhiem-so-theta.vercel.app - Demo: chọn vai trò, mật khẩu demo1234</a:t>
+              <a:t>https://sochunhiem.vieschool.com - Demo: *@demo.scn, mật khẩu demo1234</a:t>
             </a:r>
           </a:p>
         </p:txBody>
@@ -3312,7 +3314,7 @@
                   <a:srgbClr val="1D4ED8"/>
                 </a:solidFill>
               </a:rPr>
-              <a:t>Phụ huynh &amp; Học sinh</a:t>
+              <a:t>Rèn luyện - Tư vấn - An toàn</a:t>
             </a:r>
           </a:p>
         </p:txBody>
@@ -3346,7 +3348,7 @@
                   <a:srgbClr val="1F2937"/>
                 </a:solidFill>
               </a:rPr>
-              <a:t>- Phụ huynh nhiều con: bộ chọn con trên đầu portal, dữ liệu tách theo từng em</a:t>
+              <a:t>- Sổ rèn luyện: cộng/trừ điểm theo tiêu chí, nguồn từ sổ đầu bài / sự cố</a:t>
             </a:r>
           </a:p>
           <a:p>
@@ -3357,7 +3359,7 @@
                   <a:srgbClr val="1F2937"/>
                 </a:solidFill>
               </a:rPr>
-              <a:t>- Nhắn tin 2 chiều với GVCN: soạn mới + trả lời, thấy cả tin đã gửi</a:t>
+              <a:t>- Tư vấn học sinh: hồ sơ phiên tư vấn, phân loại, theo dõi tiến triển</a:t>
             </a:r>
           </a:p>
           <a:p>
@@ -3368,7 +3370,7 @@
                   <a:srgbClr val="1F2937"/>
                 </a:solidFill>
               </a:rPr>
-              <a:t>- Đặt lịch hẹn trực tuyến - GVCN xác nhận</a:t>
+              <a:t>- Sự cố an toàn: 6 loại, 4 mức độ, báo cáo lên BGH, audit đầy đủ</a:t>
             </a:r>
           </a:p>
           <a:p>
@@ -3379,7 +3381,7 @@
                   <a:srgbClr val="1F2937"/>
                 </a:solidFill>
               </a:rPr>
-              <a:t>- Đăng ký / báo vắng hoạt động giáo dục cho con</a:t>
+              <a:t>- Thi đua tuần: chấm tiêu chí xếp hạng lớp</a:t>
             </a:r>
           </a:p>
           <a:p>
@@ -3390,25 +3392,14 @@
                   <a:srgbClr val="1F2937"/>
                 </a:solidFill>
               </a:rPr>
-              <a:t>- Học sinh: TKB, điểm số, hạnh kiểu, thông báo</a:t>
-            </a:r>
-          </a:p>
-          <a:p>
-            <a:pPr/>
-            <a:r>
-              <a:rPr sz="1500" b="0">
-                <a:solidFill>
-                  <a:srgbClr val="1F2937"/>
-                </a:solidFill>
-              </a:rPr>
-              <a:t>- Mọi thao tác kiểm tra quyền sở hữu con ở server - không ghi được hồ sơ em khác</a:t>
+              <a:t>- AI đề xuất can thiệp theo hồ sơ</a:t>
             </a:r>
           </a:p>
         </p:txBody>
       </p:sp>
       <p:pic>
         <p:nvPicPr>
-          <p:cNvPr id="5" name="Picture 4" descr="30-parent-portal.png"/>
+          <p:cNvPr id="5" name="Picture 4" descr="15-safety.png"/>
           <p:cNvPicPr>
             <a:picLocks noChangeAspect="1"/>
           </p:cNvPicPr>
@@ -3464,7 +3455,7 @@
                   <a:srgbClr val="6B7280"/>
                 </a:solidFill>
               </a:rPr>
-              <a:t>Portal phụ huynh</a:t>
+              <a:t>Sổ sự cố an toàn</a:t>
             </a:r>
           </a:p>
         </p:txBody>
@@ -3559,7 +3550,7 @@
                   <a:srgbClr val="1D4ED8"/>
                 </a:solidFill>
               </a:rPr>
-              <a:t>AI hỗ trợ - 3 tuyến dự phòng</a:t>
+              <a:t>BGH - điều hành trường</a:t>
             </a:r>
           </a:p>
         </p:txBody>
@@ -3593,7 +3584,7 @@
                   <a:srgbClr val="1F2937"/>
                 </a:solidFill>
               </a:rPr>
-              <a:t>- Tuyến 1: LLM cấu hình qua env - Gemini / OpenAI / Anthropic, đổi provider bằng AI_PROVIDER + AI_MODEL</a:t>
+              <a:t>- Trung tâm phê duyệt: kế hoạch HĐ, giáo án, đánh giá - một nơi xử lý</a:t>
             </a:r>
           </a:p>
           <a:p>
@@ -3604,7 +3595,7 @@
                   <a:srgbClr val="1F2937"/>
                 </a:solidFill>
               </a:rPr>
-              <a:t>- Tuyến 2: Devin async - hết quota LLM thì tạo session xử lý, callback trả kết quả</a:t>
+              <a:t>- Radar cảnh báo sớm: lớp/HS rủi ro theo chuyên cần + điểm + sự cố</a:t>
             </a:r>
           </a:p>
           <a:p>
@@ -3615,7 +3606,7 @@
                   <a:srgbClr val="1F2937"/>
                 </a:solidFill>
               </a:rPr>
-              <a:t>- Tuyến 3: rule-based fallback - luôn có câu trả lời hữu ích kể cả khi mọi backend chết</a:t>
+              <a:t>- Soạn + import TKB toàn trường, xem theo lớp</a:t>
             </a:r>
           </a:p>
           <a:p>
@@ -3626,14 +3617,36 @@
                   <a:srgbClr val="1F2937"/>
                 </a:solidFill>
               </a:rPr>
-              <a:t>- Ứng dụng: báo cáo hồ sơ lớp, nhận xét giáo án, gợi ý cảnh báo, trợ lý điều hành, phân tích sổ đầu bài, biên bản sinh hoạt, báo cáo Sở</a:t>
+              <a:t>- Ký sổ chủ nhiệm: tạo đợt ký - duyệt/từ chối kèm lý do - ký hàng loạt; GVCN không tự ký</a:t>
+            </a:r>
+          </a:p>
+          <a:p>
+            <a:pPr/>
+            <a:r>
+              <a:rPr sz="1500" b="0">
+                <a:solidFill>
+                  <a:srgbClr val="1F2937"/>
+                </a:solidFill>
+              </a:rPr>
+              <a:t>- Chỉ BGH phân công GVCN &amp; lớp năm học</a:t>
+            </a:r>
+          </a:p>
+          <a:p>
+            <a:pPr/>
+            <a:r>
+              <a:rPr sz="1500" b="0">
+                <a:solidFill>
+                  <a:srgbClr val="1F2937"/>
+                </a:solidFill>
+              </a:rPr>
+              <a:t>- Trợ lý AI điều hành hỏi-đáp trên dữ liệu thật</a:t>
             </a:r>
           </a:p>
         </p:txBody>
       </p:sp>
       <p:pic>
         <p:nvPicPr>
-          <p:cNvPr id="5" name="Picture 4" descr="25-bgh-ai.png"/>
+          <p:cNvPr id="5" name="Picture 4" descr="23-bgh-radar.png"/>
           <p:cNvPicPr>
             <a:picLocks noChangeAspect="1"/>
           </p:cNvPicPr>
@@ -3689,7 +3702,7 @@
                   <a:srgbClr val="6B7280"/>
                 </a:solidFill>
               </a:rPr>
-              <a:t>Trợ lý AI điều hành của BGH</a:t>
+              <a:t>Radar cảnh báo sớm toàn trường</a:t>
             </a:r>
           </a:p>
         </p:txBody>
@@ -3784,7 +3797,7 @@
                   <a:srgbClr val="1D4ED8"/>
                 </a:solidFill>
               </a:rPr>
-              <a:t>Báo cáo &amp; bảo mật</a:t>
+              <a:t>Phụ huynh &amp; Học sinh</a:t>
             </a:r>
           </a:p>
         </p:txBody>
@@ -3818,7 +3831,7 @@
                   <a:srgbClr val="1F2937"/>
                 </a:solidFill>
               </a:rPr>
-              <a:t>- Xuất sổ chủ nhiệm, báo cáo Sở/Phòng (CSV/Excel), sổ cá nhân GV</a:t>
+              <a:t>- Phụ huynh nhiều con: bộ chọn con trên đầu portal, dữ liệu tách theo từng em</a:t>
             </a:r>
           </a:p>
           <a:p>
@@ -3829,7 +3842,7 @@
                   <a:srgbClr val="1F2937"/>
                 </a:solidFill>
               </a:rPr>
-              <a:t>- RBAC 3 tầng: UI - route guard - Postgres RLS theo vai trò + quan hệ (lớp CN, tiết dạy, con mình)</a:t>
+              <a:t>- Nhắn tin 2 chiều với GVCN: soạn mới + trả lời, thấy cả tin đã gửi</a:t>
             </a:r>
           </a:p>
           <a:p>
@@ -3840,7 +3853,7 @@
                   <a:srgbClr val="1F2937"/>
                 </a:solidFill>
               </a:rPr>
-              <a:t>- Audit log mọi hành động quan trọng, trang xem cho BGH</a:t>
+              <a:t>- Đặt lịch hẹn trực tuyến - GVCN xác nhận</a:t>
             </a:r>
           </a:p>
           <a:p>
@@ -3851,7 +3864,7 @@
                   <a:srgbClr val="1F2937"/>
                 </a:solidFill>
               </a:rPr>
-              <a:t>- Trang Thông báo chung cho mọi vai trò - chuông trên topbar, đánh dấu đã đọc, link nhảy tới màn hình liên quan</a:t>
+              <a:t>- Đăng ký / báo vắng hoạt động giáo dục cho con</a:t>
             </a:r>
           </a:p>
           <a:p>
@@ -3862,14 +3875,25 @@
                   <a:srgbClr val="1F2937"/>
                 </a:solidFill>
               </a:rPr>
-              <a:t>- Responsive mobile, sắp xếp tên theo quy tắc Việt Nam</a:t>
+              <a:t>- Học sinh: TKB, điểm số, hạnh kiểu, thông báo</a:t>
+            </a:r>
+          </a:p>
+          <a:p>
+            <a:pPr/>
+            <a:r>
+              <a:rPr sz="1500" b="0">
+                <a:solidFill>
+                  <a:srgbClr val="1F2937"/>
+                </a:solidFill>
+              </a:rPr>
+              <a:t>- Mọi thao tác kiểm tra quyền sở hữu con ở server - không ghi được hồ sơ em khác</a:t>
             </a:r>
           </a:p>
         </p:txBody>
       </p:sp>
       <p:pic>
         <p:nvPicPr>
-          <p:cNvPr id="5" name="Picture 4" descr="20-export.png"/>
+          <p:cNvPr id="5" name="Picture 4" descr="30-parent-portal.png"/>
           <p:cNvPicPr>
             <a:picLocks noChangeAspect="1"/>
           </p:cNvPicPr>
@@ -3925,7 +3949,7 @@
                   <a:srgbClr val="6B7280"/>
                 </a:solidFill>
               </a:rPr>
-              <a:t>Xuất sổ &amp; báo cáo</a:t>
+              <a:t>Portal phụ huynh</a:t>
             </a:r>
           </a:p>
         </p:txBody>
@@ -3957,13 +3981,13 @@
         <p:spPr>
           <a:xfrm>
             <a:off x="0" y="0"/>
-            <a:ext cx="12191695" cy="6858000"/>
+            <a:ext cx="12191695" cy="109728"/>
           </a:xfrm>
           <a:prstGeom prst="rect">
             <a:avLst/>
           </a:prstGeom>
           <a:solidFill>
-            <a:srgbClr val="1F2937"/>
+            <a:srgbClr val="1D4ED8"/>
           </a:solidFill>
           <a:ln>
             <a:noFill/>
@@ -3999,8 +4023,8 @@
         </p:nvSpPr>
         <p:spPr>
           <a:xfrm>
-            <a:off x="914400" y="2377440"/>
-            <a:ext cx="10362895" cy="2286000"/>
+            <a:off x="457200" y="274320"/>
+            <a:ext cx="11277295" cy="822960"/>
           </a:xfrm>
           <a:prstGeom prst="rect">
             <a:avLst/>
@@ -4015,6 +4039,467 @@
           <a:p>
             <a:pPr/>
             <a:r>
+              <a:rPr sz="2800" b="1">
+                <a:solidFill>
+                  <a:srgbClr val="1D4ED8"/>
+                </a:solidFill>
+              </a:rPr>
+              <a:t>AI hỗ trợ - 3 tuyến dự phòng</a:t>
+            </a:r>
+          </a:p>
+        </p:txBody>
+      </p:sp>
+      <p:sp>
+        <p:nvSpPr>
+          <p:cNvPr id="4" name="TextBox 3"/>
+          <p:cNvSpPr txBox="1"/>
+          <p:nvPr/>
+        </p:nvSpPr>
+        <p:spPr>
+          <a:xfrm>
+            <a:off x="548640" y="1234440"/>
+            <a:ext cx="5120640" cy="5303520"/>
+          </a:xfrm>
+          <a:prstGeom prst="rect">
+            <a:avLst/>
+          </a:prstGeom>
+          <a:noFill/>
+        </p:spPr>
+        <p:txBody>
+          <a:bodyPr wrap="square">
+            <a:spAutoFit/>
+          </a:bodyPr>
+          <a:lstStyle/>
+          <a:p>
+            <a:pPr/>
+            <a:r>
+              <a:rPr sz="1500" b="0">
+                <a:solidFill>
+                  <a:srgbClr val="1F2937"/>
+                </a:solidFill>
+              </a:rPr>
+              <a:t>- Tuyến 1: LLM cấu hình qua env - Gemini / OpenAI / Anthropic, đổi provider bằng AI_PROVIDER + AI_MODEL</a:t>
+            </a:r>
+          </a:p>
+          <a:p>
+            <a:pPr/>
+            <a:r>
+              <a:rPr sz="1500" b="0">
+                <a:solidFill>
+                  <a:srgbClr val="1F2937"/>
+                </a:solidFill>
+              </a:rPr>
+              <a:t>- Tuyến 2: Devin async - hết quota LLM thì tạo session xử lý, callback trả kết quả</a:t>
+            </a:r>
+          </a:p>
+          <a:p>
+            <a:pPr/>
+            <a:r>
+              <a:rPr sz="1500" b="0">
+                <a:solidFill>
+                  <a:srgbClr val="1F2937"/>
+                </a:solidFill>
+              </a:rPr>
+              <a:t>- Tuyến 3: rule-based fallback - luôn có câu trả lời hữu ích kể cả khi mọi backend chết</a:t>
+            </a:r>
+          </a:p>
+          <a:p>
+            <a:pPr/>
+            <a:r>
+              <a:rPr sz="1500" b="0">
+                <a:solidFill>
+                  <a:srgbClr val="1F2937"/>
+                </a:solidFill>
+              </a:rPr>
+              <a:t>- Ứng dụng: báo cáo hồ sơ lớp, nhận xét giáo án, gợi ý cảnh báo, trợ lý điều hành, phân tích sổ đầu bài, biên bản sinh hoạt, báo cáo Sở</a:t>
+            </a:r>
+          </a:p>
+        </p:txBody>
+      </p:sp>
+      <p:pic>
+        <p:nvPicPr>
+          <p:cNvPr id="5" name="Picture 4" descr="25-bgh-ai.png"/>
+          <p:cNvPicPr>
+            <a:picLocks noChangeAspect="1"/>
+          </p:cNvPicPr>
+          <p:nvPr/>
+        </p:nvPicPr>
+        <p:blipFill>
+          <a:blip r:embed="rId2"/>
+          <a:stretch>
+            <a:fillRect/>
+          </a:stretch>
+        </p:blipFill>
+        <p:spPr>
+          <a:xfrm>
+            <a:off x="5699455" y="1234440"/>
+            <a:ext cx="6035040" cy="3771900"/>
+          </a:xfrm>
+          <a:prstGeom prst="rect">
+            <a:avLst/>
+          </a:prstGeom>
+          <a:ln>
+            <a:solidFill>
+              <a:srgbClr val="D1D5DB"/>
+            </a:solidFill>
+          </a:ln>
+        </p:spPr>
+      </p:pic>
+      <p:sp>
+        <p:nvSpPr>
+          <p:cNvPr id="6" name="TextBox 5"/>
+          <p:cNvSpPr txBox="1"/>
+          <p:nvPr/>
+        </p:nvSpPr>
+        <p:spPr>
+          <a:xfrm>
+            <a:off x="5699455" y="5052060"/>
+            <a:ext cx="6035040" cy="365760"/>
+          </a:xfrm>
+          <a:prstGeom prst="rect">
+            <a:avLst/>
+          </a:prstGeom>
+          <a:noFill/>
+        </p:spPr>
+        <p:txBody>
+          <a:bodyPr wrap="square">
+            <a:spAutoFit/>
+          </a:bodyPr>
+          <a:lstStyle/>
+          <a:p>
+            <a:pPr/>
+            <a:r>
+              <a:rPr sz="1100" b="0">
+                <a:solidFill>
+                  <a:srgbClr val="6B7280"/>
+                </a:solidFill>
+              </a:rPr>
+              <a:t>Trợ lý AI điều hành của BGH</a:t>
+            </a:r>
+          </a:p>
+        </p:txBody>
+      </p:sp>
+    </p:spTree>
+  </p:cSld>
+  <p:clrMapOvr>
+    <a:masterClrMapping/>
+  </p:clrMapOvr>
+</p:sld>
+</file>
+
+<file path=ppt/slides/slide14.xml><?xml version="1.0" encoding="utf-8"?>
+<p:sld xmlns:a="http://schemas.openxmlformats.org/drawingml/2006/main" xmlns:p="http://schemas.openxmlformats.org/presentationml/2006/main" xmlns:r="http://schemas.openxmlformats.org/officeDocument/2006/relationships">
+  <p:cSld>
+    <p:spTree>
+      <p:nvGrpSpPr>
+        <p:cNvPr id="1" name=""/>
+        <p:cNvGrpSpPr/>
+        <p:nvPr/>
+      </p:nvGrpSpPr>
+      <p:grpSpPr/>
+      <p:sp>
+        <p:nvSpPr>
+          <p:cNvPr id="2" name="Rectangle 1"/>
+          <p:cNvSpPr/>
+          <p:nvPr/>
+        </p:nvSpPr>
+        <p:spPr>
+          <a:xfrm>
+            <a:off x="0" y="0"/>
+            <a:ext cx="12191695" cy="109728"/>
+          </a:xfrm>
+          <a:prstGeom prst="rect">
+            <a:avLst/>
+          </a:prstGeom>
+          <a:solidFill>
+            <a:srgbClr val="1D4ED8"/>
+          </a:solidFill>
+          <a:ln>
+            <a:noFill/>
+          </a:ln>
+        </p:spPr>
+        <p:style>
+          <a:lnRef idx="1">
+            <a:schemeClr val="accent1"/>
+          </a:lnRef>
+          <a:fillRef idx="3">
+            <a:schemeClr val="accent1"/>
+          </a:fillRef>
+          <a:effectRef idx="2">
+            <a:schemeClr val="accent1"/>
+          </a:effectRef>
+          <a:fontRef idx="minor">
+            <a:schemeClr val="lt1"/>
+          </a:fontRef>
+        </p:style>
+        <p:txBody>
+          <a:bodyPr rtlCol="0" anchor="ctr"/>
+          <a:lstStyle/>
+          <a:p>
+            <a:pPr algn="ctr"/>
+          </a:p>
+        </p:txBody>
+      </p:sp>
+      <p:sp>
+        <p:nvSpPr>
+          <p:cNvPr id="3" name="TextBox 2"/>
+          <p:cNvSpPr txBox="1"/>
+          <p:nvPr/>
+        </p:nvSpPr>
+        <p:spPr>
+          <a:xfrm>
+            <a:off x="457200" y="274320"/>
+            <a:ext cx="11277295" cy="822960"/>
+          </a:xfrm>
+          <a:prstGeom prst="rect">
+            <a:avLst/>
+          </a:prstGeom>
+          <a:noFill/>
+        </p:spPr>
+        <p:txBody>
+          <a:bodyPr wrap="square">
+            <a:spAutoFit/>
+          </a:bodyPr>
+          <a:lstStyle/>
+          <a:p>
+            <a:pPr/>
+            <a:r>
+              <a:rPr sz="2800" b="1">
+                <a:solidFill>
+                  <a:srgbClr val="1D4ED8"/>
+                </a:solidFill>
+              </a:rPr>
+              <a:t>Báo cáo &amp; bảo mật</a:t>
+            </a:r>
+          </a:p>
+        </p:txBody>
+      </p:sp>
+      <p:sp>
+        <p:nvSpPr>
+          <p:cNvPr id="4" name="TextBox 3"/>
+          <p:cNvSpPr txBox="1"/>
+          <p:nvPr/>
+        </p:nvSpPr>
+        <p:spPr>
+          <a:xfrm>
+            <a:off x="548640" y="1234440"/>
+            <a:ext cx="5120640" cy="5303520"/>
+          </a:xfrm>
+          <a:prstGeom prst="rect">
+            <a:avLst/>
+          </a:prstGeom>
+          <a:noFill/>
+        </p:spPr>
+        <p:txBody>
+          <a:bodyPr wrap="square">
+            <a:spAutoFit/>
+          </a:bodyPr>
+          <a:lstStyle/>
+          <a:p>
+            <a:pPr/>
+            <a:r>
+              <a:rPr sz="1500" b="0">
+                <a:solidFill>
+                  <a:srgbClr val="1F2937"/>
+                </a:solidFill>
+              </a:rPr>
+              <a:t>- Xuất sổ chủ nhiệm, báo cáo Sở/Phòng (CSV/Excel), sổ cá nhân GV</a:t>
+            </a:r>
+          </a:p>
+          <a:p>
+            <a:pPr/>
+            <a:r>
+              <a:rPr sz="1500" b="0">
+                <a:solidFill>
+                  <a:srgbClr val="1F2937"/>
+                </a:solidFill>
+              </a:rPr>
+              <a:t>- RBAC 3 tầng: UI - route guard - Postgres RLS theo vai trò + quan hệ (lớp CN, tiết dạy, con mình)</a:t>
+            </a:r>
+          </a:p>
+          <a:p>
+            <a:pPr/>
+            <a:r>
+              <a:rPr sz="1500" b="0">
+                <a:solidFill>
+                  <a:srgbClr val="1F2937"/>
+                </a:solidFill>
+              </a:rPr>
+              <a:t>- Audit log mọi hành động quan trọng, trang xem cho BGH</a:t>
+            </a:r>
+          </a:p>
+          <a:p>
+            <a:pPr/>
+            <a:r>
+              <a:rPr sz="1500" b="0">
+                <a:solidFill>
+                  <a:srgbClr val="1F2937"/>
+                </a:solidFill>
+              </a:rPr>
+              <a:t>- Trang Thông báo chung cho mọi vai trò - chuông trên topbar, đánh dấu đã đọc, link nhảy tới màn hình liên quan</a:t>
+            </a:r>
+          </a:p>
+          <a:p>
+            <a:pPr/>
+            <a:r>
+              <a:rPr sz="1500" b="0">
+                <a:solidFill>
+                  <a:srgbClr val="1F2937"/>
+                </a:solidFill>
+              </a:rPr>
+              <a:t>- Responsive mobile, sắp xếp tên theo quy tắc Việt Nam</a:t>
+            </a:r>
+          </a:p>
+        </p:txBody>
+      </p:sp>
+      <p:pic>
+        <p:nvPicPr>
+          <p:cNvPr id="5" name="Picture 4" descr="20-export.png"/>
+          <p:cNvPicPr>
+            <a:picLocks noChangeAspect="1"/>
+          </p:cNvPicPr>
+          <p:nvPr/>
+        </p:nvPicPr>
+        <p:blipFill>
+          <a:blip r:embed="rId2"/>
+          <a:stretch>
+            <a:fillRect/>
+          </a:stretch>
+        </p:blipFill>
+        <p:spPr>
+          <a:xfrm>
+            <a:off x="5699455" y="1234440"/>
+            <a:ext cx="6035040" cy="3771900"/>
+          </a:xfrm>
+          <a:prstGeom prst="rect">
+            <a:avLst/>
+          </a:prstGeom>
+          <a:ln>
+            <a:solidFill>
+              <a:srgbClr val="D1D5DB"/>
+            </a:solidFill>
+          </a:ln>
+        </p:spPr>
+      </p:pic>
+      <p:sp>
+        <p:nvSpPr>
+          <p:cNvPr id="6" name="TextBox 5"/>
+          <p:cNvSpPr txBox="1"/>
+          <p:nvPr/>
+        </p:nvSpPr>
+        <p:spPr>
+          <a:xfrm>
+            <a:off x="5699455" y="5052060"/>
+            <a:ext cx="6035040" cy="365760"/>
+          </a:xfrm>
+          <a:prstGeom prst="rect">
+            <a:avLst/>
+          </a:prstGeom>
+          <a:noFill/>
+        </p:spPr>
+        <p:txBody>
+          <a:bodyPr wrap="square">
+            <a:spAutoFit/>
+          </a:bodyPr>
+          <a:lstStyle/>
+          <a:p>
+            <a:pPr/>
+            <a:r>
+              <a:rPr sz="1100" b="0">
+                <a:solidFill>
+                  <a:srgbClr val="6B7280"/>
+                </a:solidFill>
+              </a:rPr>
+              <a:t>Xuất sổ &amp; báo cáo</a:t>
+            </a:r>
+          </a:p>
+        </p:txBody>
+      </p:sp>
+    </p:spTree>
+  </p:cSld>
+  <p:clrMapOvr>
+    <a:masterClrMapping/>
+  </p:clrMapOvr>
+</p:sld>
+</file>
+
+<file path=ppt/slides/slide15.xml><?xml version="1.0" encoding="utf-8"?>
+<p:sld xmlns:a="http://schemas.openxmlformats.org/drawingml/2006/main" xmlns:p="http://schemas.openxmlformats.org/presentationml/2006/main" xmlns:r="http://schemas.openxmlformats.org/officeDocument/2006/relationships">
+  <p:cSld>
+    <p:spTree>
+      <p:nvGrpSpPr>
+        <p:cNvPr id="1" name=""/>
+        <p:cNvGrpSpPr/>
+        <p:nvPr/>
+      </p:nvGrpSpPr>
+      <p:grpSpPr/>
+      <p:sp>
+        <p:nvSpPr>
+          <p:cNvPr id="2" name="Rectangle 1"/>
+          <p:cNvSpPr/>
+          <p:nvPr/>
+        </p:nvSpPr>
+        <p:spPr>
+          <a:xfrm>
+            <a:off x="0" y="0"/>
+            <a:ext cx="12191695" cy="6858000"/>
+          </a:xfrm>
+          <a:prstGeom prst="rect">
+            <a:avLst/>
+          </a:prstGeom>
+          <a:solidFill>
+            <a:srgbClr val="1F2937"/>
+          </a:solidFill>
+          <a:ln>
+            <a:noFill/>
+          </a:ln>
+        </p:spPr>
+        <p:style>
+          <a:lnRef idx="1">
+            <a:schemeClr val="accent1"/>
+          </a:lnRef>
+          <a:fillRef idx="3">
+            <a:schemeClr val="accent1"/>
+          </a:fillRef>
+          <a:effectRef idx="2">
+            <a:schemeClr val="accent1"/>
+          </a:effectRef>
+          <a:fontRef idx="minor">
+            <a:schemeClr val="lt1"/>
+          </a:fontRef>
+        </p:style>
+        <p:txBody>
+          <a:bodyPr rtlCol="0" anchor="ctr"/>
+          <a:lstStyle/>
+          <a:p>
+            <a:pPr algn="ctr"/>
+          </a:p>
+        </p:txBody>
+      </p:sp>
+      <p:sp>
+        <p:nvSpPr>
+          <p:cNvPr id="3" name="TextBox 2"/>
+          <p:cNvSpPr txBox="1"/>
+          <p:nvPr/>
+        </p:nvSpPr>
+        <p:spPr>
+          <a:xfrm>
+            <a:off x="914400" y="2377440"/>
+            <a:ext cx="10362895" cy="2286000"/>
+          </a:xfrm>
+          <a:prstGeom prst="rect">
+            <a:avLst/>
+          </a:prstGeom>
+          <a:noFill/>
+        </p:spPr>
+        <p:txBody>
+          <a:bodyPr wrap="square">
+            <a:spAutoFit/>
+          </a:bodyPr>
+          <a:lstStyle/>
+          <a:p>
+            <a:pPr/>
+            <a:r>
               <a:rPr sz="3600" b="1">
                 <a:solidFill>
                   <a:srgbClr val="FFFFFF"/>
@@ -4031,7 +4516,7 @@
                   <a:srgbClr val="93C5FD"/>
                 </a:solidFill>
               </a:rPr>
-              <a:t>https://so-chu-nhiem-so-theta.vercel.app</a:t>
+              <a:t>https://sochunhiem.vieschool.com</a:t>
             </a:r>
           </a:p>
           <a:p>
@@ -4042,7 +4527,7 @@
                   <a:srgbClr val="D1D5DB"/>
                 </a:solidFill>
               </a:rPr>
-              <a:t>Chọn vai trò demo tại màn hình đăng nhập - mật khẩu: demo1234</a:t>
+              <a:t>Tài khoản demo: bgh / pht / totruong / gvcn / gvbm / ketoan / phuhuynh / hocsinh / sogd / ubnd / admin @demo.scn - mật khẩu: demo1234</a:t>
             </a:r>
           </a:p>
           <a:p>
@@ -4193,6 +4678,28 @@
                   <a:srgbClr val="1F2937"/>
                 </a:solidFill>
               </a:rPr>
+              <a:t>- TVC360 Studio: soạn KHBD (CV 5512), ma trận đề, đề kiểm tra, ngân hàng câu hỏi chung của trường - xuất DOCX/PDF/PPTX</a:t>
+            </a:r>
+          </a:p>
+          <a:p>
+            <a:pPr/>
+            <a:r>
+              <a:rPr sz="1500" b="0">
+                <a:solidFill>
+                  <a:srgbClr val="1F2937"/>
+                </a:solidFill>
+              </a:rPr>
+              <a:t>- Vai trò kiêm nhiệm: GVCN kiêm dạy + tổ trưởng, quyền gộp nhất quán UI - action - RLS</a:t>
+            </a:r>
+          </a:p>
+          <a:p>
+            <a:pPr/>
+            <a:r>
+              <a:rPr sz="1500" b="0">
+                <a:solidFill>
+                  <a:srgbClr val="1F2937"/>
+                </a:solidFill>
+              </a:rPr>
               <a:t>- Một dữ liệu nghiệp vụ - đồng bộ nhiều màn hình (vắng tiết học tự cập nhật điểm danh ngày)</a:t>
             </a:r>
           </a:p>
@@ -4204,7 +4711,7 @@
                   <a:srgbClr val="1F2937"/>
                 </a:solidFill>
               </a:rPr>
-              <a:t>- Phân quyền theo vai trò ở cả UI, route và Row-Level-Security</a:t>
+              <a:t>- Hỗ trợ Tiểu học / THCS / THPT, nhiều cơ sở (phân hiệu); multi-tenant RLS theo trường</a:t>
             </a:r>
           </a:p>
           <a:p>
@@ -4215,18 +4722,7 @@
                   <a:srgbClr val="1F2937"/>
                 </a:solidFill>
               </a:rPr>
-              <a:t>- Hỗ trợ Tiểu học / THCS / THPT, nhiều cơ sở (phân hiệu)</a:t>
-            </a:r>
-          </a:p>
-          <a:p>
-            <a:pPr/>
-            <a:r>
-              <a:rPr sz="1500" b="0">
-                <a:solidFill>
-                  <a:srgbClr val="1F2937"/>
-                </a:solidFill>
-              </a:rPr>
-              <a:t>- AI 3 tuyến: LLM cấu hình được - Devin async - rule-based fallback</a:t>
+              <a:t>- AI 3 tuyến: LLM cấu hình được - engine async - rule-based fallback; sanitizer kiểm chứng nội dung</a:t>
             </a:r>
           </a:p>
           <a:p>
@@ -4644,7 +5140,7 @@
                     <a:p>
                       <a:r>
                         <a:rPr sz="1400"/>
-                        <a:t>TKB, điểm, hạnh kiểu của mình</a:t>
+                        <a:t>TKB, điểm, hạnh kiểm của mình</a:t>
                       </a:r>
                     </a:p>
                   </a:txBody>
@@ -4745,7 +5241,7 @@
                   <a:srgbClr val="1D4ED8"/>
                 </a:solidFill>
               </a:rPr>
-              <a:t>Chuyên cần - điểm danh số</a:t>
+              <a:t>Vai trò kiêm nhiệm - đúng thực tế trường Việt Nam</a:t>
             </a:r>
           </a:p>
         </p:txBody>
@@ -4779,7 +5275,7 @@
                   <a:srgbClr val="1F2937"/>
                 </a:solidFill>
               </a:rPr>
-              <a:t>- 4 trạng thái/em: Có mặt, Vắng CP, Vắng KP, Đi muộn + ghi chú lý do ngay trên dòng</a:t>
+              <a:t>- 1 vai trò chính + nhiều vai trò kiêm nhiệm: GVCN kiêm GVBM + tổ trưởng, PHT/Hiệu trưởng kiêm dạy</a:t>
             </a:r>
           </a:p>
           <a:p>
@@ -4790,7 +5286,7 @@
                   <a:srgbClr val="1F2937"/>
                 </a:solidFill>
               </a:rPr>
-              <a:t>- Chọn ngày bất kỳ để xem lại / sửa điểm danh ngày cũ</a:t>
+              <a:t>- Quyền = hợp mọi vai trò, tính nhất quán 3 tầng: menu gộp + topbar đủ nhãn, server action, 158 RLS policies (my_roles)</a:t>
             </a:r>
           </a:p>
           <a:p>
@@ -4801,7 +5297,7 @@
                   <a:srgbClr val="1F2937"/>
                 </a:solidFill>
               </a:rPr>
-              <a:t>- Sổ vắng-muộn và lịch sử theo khoảng ngày (from - to)</a:t>
+              <a:t>- BGH gán kiêm nhiệm tại /school/users - user tự sửa bị trigger DB chặn (chống leo quyền)</a:t>
             </a:r>
           </a:p>
           <a:p>
@@ -4812,7 +5308,7 @@
                   <a:srgbClr val="1F2937"/>
                 </a:solidFill>
               </a:rPr>
-              <a:t>- Ma trận HS x ngày phát hiện vắng liên tục</a:t>
+              <a:t>- Grant xung đột giữa vai trò kiêm: deny thắng; chỉ vai trò nhân sự được kiêm</a:t>
             </a:r>
           </a:p>
           <a:p>
@@ -4823,25 +5319,14 @@
                   <a:srgbClr val="1F2937"/>
                 </a:solidFill>
               </a:rPr>
-              <a:t>- Thông báo phụ huynh tự động (email + in-app)</a:t>
-            </a:r>
-          </a:p>
-          <a:p>
-            <a:pPr/>
-            <a:r>
-              <a:rPr sz="1500" b="0">
-                <a:solidFill>
-                  <a:srgbClr val="1F2937"/>
-                </a:solidFill>
-              </a:rPr>
-              <a:t>- Đồng bộ 2 chiều với sổ đầu bài tiết học</a:t>
+              <a:t>- Menu chỉ hiện chức năng được cấp - audit tự động bằng check-nav-access (158 links)</a:t>
             </a:r>
           </a:p>
         </p:txBody>
       </p:sp>
       <p:pic>
         <p:nvPicPr>
-          <p:cNvPr id="5" name="Picture 4" descr="03-attendance-daily.png"/>
+          <p:cNvPr id="5" name="Picture 4" descr="26-team-lesson-plans.png"/>
           <p:cNvPicPr>
             <a:picLocks noChangeAspect="1"/>
           </p:cNvPicPr>
@@ -4897,7 +5382,7 @@
                   <a:srgbClr val="6B7280"/>
                 </a:solidFill>
               </a:rPr>
-              <a:t>Điểm danh hàng ngày - 6 thẻ tổng + ghi chú vắng</a:t>
+              <a:t>GVCN kiêm tổ trưởng vào được queue duyệt giáo án</a:t>
             </a:r>
           </a:p>
         </p:txBody>
@@ -4992,7 +5477,7 @@
                   <a:srgbClr val="1D4ED8"/>
                 </a:solidFill>
               </a:rPr>
-              <a:t>Sổ điểm giáo viên - chuẩn TT22</a:t>
+              <a:t>Studio - công cụ số giáo viên (TVC360)</a:t>
             </a:r>
           </a:p>
         </p:txBody>
@@ -5026,7 +5511,7 @@
                   <a:srgbClr val="1F2937"/>
                 </a:solidFill>
               </a:rPr>
-              <a:t>- Cột điểm động: Miệng / 15 phút / 1 tiết (hệ số 1), Giữa kỳ (x2), Cuối kỳ (x3)</a:t>
+              <a:t>- 6 công cụ DC-01..06: KHBĐ khung CV 5512, ma trận đề, đề từ ngân hàng, bộ câu hỏi, phiếu học tập, bài trình chiếu</a:t>
             </a:r>
           </a:p>
           <a:p>
@@ -5037,7 +5522,7 @@
                   <a:srgbClr val="1F2937"/>
                 </a:solidFill>
               </a:rPr>
-              <a:t>- Thêm/xóa cột tự do - mỗi GV tự cấu trúc sổ điểm của mình</a:t>
+              <a:t>- Ngân hàng câu hỏi chung của trường gắn YCCĐ: import tay/Excel/ảnh-PDF, duyệt 2 lớp (tổ → BGH)</a:t>
             </a:r>
           </a:p>
           <a:p>
@@ -5048,7 +5533,7 @@
                   <a:srgbClr val="1F2937"/>
                 </a:solidFill>
               </a:rPr>
-              <a:t>- GV chỉ ghi điểm lớp + môn mình được phân công (RLS kiểm tra ở DB)</a:t>
+              <a:t>- Hình Toán vẽ SVG tham số (deterministic), LaTeX $...$ → Word Equation native khi xuất DOCX</a:t>
             </a:r>
           </a:p>
           <a:p>
@@ -5059,7 +5544,7 @@
                   <a:srgbClr val="1F2937"/>
                 </a:solidFill>
               </a:rPr>
-              <a:t>- Lưu điểm nguyên tử qua transaction - không mất dữ liệu khi lỗi giữa chừng</a:t>
+              <a:t>- AI sinh qua schema + YCCĐ gate + sanitizer; hết quota → fallback engine / rule-based</a:t>
             </a:r>
           </a:p>
           <a:p>
@@ -5070,25 +5555,14 @@
                   <a:srgbClr val="1F2937"/>
                 </a:solidFill>
               </a:rPr>
-              <a:t>- ĐTBm tự tính đúng hệ số TT22, hiển thị HK1 / HK2 / cả năm</a:t>
-            </a:r>
-          </a:p>
-          <a:p>
-            <a:pPr/>
-            <a:r>
-              <a:rPr sz="1500" b="0">
-                <a:solidFill>
-                  <a:srgbClr val="1F2937"/>
-                </a:solidFill>
-              </a:rPr>
-              <a:t>- Import/export Excel, tải template mẫu; môn nhận xét hiển thị Đạt / Chưa đạt</a:t>
+              <a:t>- Xuất DOCX/PDF/PPTX; đề kèm đáp án - hướng dẫn chấm - biên bản phản biện</a:t>
             </a:r>
           </a:p>
         </p:txBody>
       </p:sp>
       <p:pic>
         <p:nvPicPr>
-          <p:cNvPr id="5" name="Picture 4" descr="07-grades.png"/>
+          <p:cNvPr id="5" name="Picture 4" descr="17-exams.png"/>
           <p:cNvPicPr>
             <a:picLocks noChangeAspect="1"/>
           </p:cNvPicPr>
@@ -5144,7 +5618,7 @@
                   <a:srgbClr val="6B7280"/>
                 </a:solidFill>
               </a:rPr>
-              <a:t>Sổ điểm cột động theo Thông tư 22</a:t>
+              <a:t>Ngân hàng câu hỏi và sinh đề theo ma trận</a:t>
             </a:r>
           </a:p>
         </p:txBody>
@@ -5239,7 +5713,7 @@
                   <a:srgbClr val="1D4ED8"/>
                 </a:solidFill>
               </a:rPr>
-              <a:t>Thời khóa biểu &amp; Sổ đầu bài</a:t>
+              <a:t>Chuyên cần - điểm danh số</a:t>
             </a:r>
           </a:p>
         </p:txBody>
@@ -5273,7 +5747,7 @@
                   <a:srgbClr val="1F2937"/>
                 </a:solidFill>
               </a:rPr>
-              <a:t>- 2 chế độ: lịch cá nhân (mọi GV) + theo lớp (GVCN xem lớp CN, BGH toàn trường)</a:t>
+              <a:t>- 4 trạng thái/em: Có mặt, Vắng CP, Vắng KP, Đi muộn + ghi chú lý do ngay trên dòng</a:t>
             </a:r>
           </a:p>
           <a:p>
@@ -5284,7 +5758,7 @@
                   <a:srgbClr val="1F2937"/>
                 </a:solidFill>
               </a:rPr>
-              <a:t>- Ô tiết cá nhân: lớp - môn - phòng; slot xung đột hiển thị đủ và cảnh báo</a:t>
+              <a:t>- Chọn ngày bất kỳ để xem lại / sửa điểm danh ngày cũ</a:t>
             </a:r>
           </a:p>
           <a:p>
@@ -5295,7 +5769,7 @@
                   <a:srgbClr val="1F2937"/>
                 </a:solidFill>
               </a:rPr>
-              <a:t>- Sổ đầu bài: chỉ GV được phân công tiết đó mới ghi - tiết người khác chỉ đọc</a:t>
+              <a:t>- Sổ vắng-muộn và lịch sử theo khoảng ngày (from - to)</a:t>
             </a:r>
           </a:p>
           <a:p>
@@ -5306,7 +5780,7 @@
                   <a:srgbClr val="1F2937"/>
                 </a:solidFill>
               </a:rPr>
-              <a:t>- Điểm danh theo tiết đồng bộ sang chuyên cần ngày</a:t>
+              <a:t>- Ma trận HS x ngày phát hiện vắng liên tục</a:t>
             </a:r>
           </a:p>
           <a:p>
@@ -5317,7 +5791,7 @@
                   <a:srgbClr val="1F2937"/>
                 </a:solidFill>
               </a:rPr>
-              <a:t>- Cộng/trừ điểm rèn luyện ngay trong sổ đầu bài</a:t>
+              <a:t>- Thông báo phụ huynh tự động (email + in-app)</a:t>
             </a:r>
           </a:p>
           <a:p>
@@ -5328,14 +5802,14 @@
                   <a:srgbClr val="1F2937"/>
                 </a:solidFill>
               </a:rPr>
-              <a:t>- BGH import TKB hàng loạt từ Excel</a:t>
+              <a:t>- Đồng bộ 2 chiều với sổ đầu bài tiết học</a:t>
             </a:r>
           </a:p>
         </p:txBody>
       </p:sp>
       <p:pic>
         <p:nvPicPr>
-          <p:cNvPr id="5" name="Picture 4" descr="08-timetable-me.png"/>
+          <p:cNvPr id="5" name="Picture 4" descr="03-attendance-daily.png"/>
           <p:cNvPicPr>
             <a:picLocks noChangeAspect="1"/>
           </p:cNvPicPr>
@@ -5391,7 +5865,7 @@
                   <a:srgbClr val="6B7280"/>
                 </a:solidFill>
               </a:rPr>
-              <a:t>Lịch dạy cá nhân</a:t>
+              <a:t>Điểm danh hàng ngày - 6 thẻ tổng + ghi chú vắng</a:t>
             </a:r>
           </a:p>
         </p:txBody>
@@ -5486,7 +5960,7 @@
                   <a:srgbClr val="1D4ED8"/>
                 </a:solidFill>
               </a:rPr>
-              <a:t>Sơ đồ lớp &amp; hồ sơ học sinh</a:t>
+              <a:t>Sổ điểm giáo viên - chuẩn TT22</a:t>
             </a:r>
           </a:p>
         </p:txBody>
@@ -5520,7 +5994,7 @@
                   <a:srgbClr val="1F2937"/>
                 </a:solidFill>
               </a:rPr>
-              <a:t>- Sơ đồ chỗ ngồi kéo-thả, thêm/bớt hàng cột linh hoạt</a:t>
+              <a:t>- Cột điểm động: Miệng / 15 phút / 1 tiết (hệ số 1), Giữa kỳ (x2), Cuối kỳ (x3)</a:t>
             </a:r>
           </a:p>
           <a:p>
@@ -5531,7 +6005,7 @@
                   <a:srgbClr val="1F2937"/>
                 </a:solidFill>
               </a:rPr>
-              <a:t>- Import danh sách HS Excel (mã HS quốc gia, dân tộc, hoàn cảnh)</a:t>
+              <a:t>- Thêm/xóa cột tự do - mỗi GV tự cấu trúc sổ điểm của mình</a:t>
             </a:r>
           </a:p>
           <a:p>
@@ -5542,7 +6016,7 @@
                   <a:srgbClr val="1F2937"/>
                 </a:solidFill>
               </a:rPr>
-              <a:t>- Chia tổ, ban cán sự, liên kết phụ huynh ngay trên danh sách</a:t>
+              <a:t>- GV chỉ ghi điểm lớp + môn mình được phân công (RLS kiểm tra ở DB)</a:t>
             </a:r>
           </a:p>
           <a:p>
@@ -5553,7 +6027,7 @@
                   <a:srgbClr val="1F2937"/>
                 </a:solidFill>
               </a:rPr>
-              <a:t>- Hồ sơ từng em: định danh, gia đình, sức khỏe - audit mọi thay đổi</a:t>
+              <a:t>- Lưu điểm nguyên tử qua transaction - không mất dữ liệu khi lỗi giữa chừng</a:t>
             </a:r>
           </a:p>
           <a:p>
@@ -5564,14 +6038,25 @@
                   <a:srgbClr val="1F2937"/>
                 </a:solidFill>
               </a:rPr>
-              <a:t>- AI tổng hợp báo cáo hồ sơ lớp</a:t>
+              <a:t>- ĐTBm tự tính đúng hệ số TT22, hiển thị HK1 / HK2 / cả năm</a:t>
+            </a:r>
+          </a:p>
+          <a:p>
+            <a:pPr/>
+            <a:r>
+              <a:rPr sz="1500" b="0">
+                <a:solidFill>
+                  <a:srgbClr val="1F2937"/>
+                </a:solidFill>
+              </a:rPr>
+              <a:t>- Import/export Excel, tải template mẫu; môn nhận xét hiển thị Đạt / Chưa đạt</a:t>
             </a:r>
           </a:p>
         </p:txBody>
       </p:sp>
       <p:pic>
         <p:nvPicPr>
-          <p:cNvPr id="5" name="Picture 4" descr="11-seating.png"/>
+          <p:cNvPr id="5" name="Picture 4" descr="07-grades.png"/>
           <p:cNvPicPr>
             <a:picLocks noChangeAspect="1"/>
           </p:cNvPicPr>
@@ -5627,7 +6112,7 @@
                   <a:srgbClr val="6B7280"/>
                 </a:solidFill>
               </a:rPr>
-              <a:t>Sơ đồ chỗ ngồi - resize hàng/cột</a:t>
+              <a:t>Sổ điểm cột động theo Thông tư 22</a:t>
             </a:r>
           </a:p>
         </p:txBody>
@@ -5722,7 +6207,7 @@
                   <a:srgbClr val="1D4ED8"/>
                 </a:solidFill>
               </a:rPr>
-              <a:t>Rèn luyện - Tư vấn - An toàn</a:t>
+              <a:t>Thời khóa biểu &amp; Sổ đầu bài</a:t>
             </a:r>
           </a:p>
         </p:txBody>
@@ -5756,7 +6241,7 @@
                   <a:srgbClr val="1F2937"/>
                 </a:solidFill>
               </a:rPr>
-              <a:t>- Sổ rèn luyện: cộng/trừ điểm theo tiêu chí, nguồn từ sổ đầu bài / sự cố</a:t>
+              <a:t>- 2 chế độ: lịch cá nhân (mọi GV) + theo lớp (GVCN xem lớp CN, BGH toàn trường)</a:t>
             </a:r>
           </a:p>
           <a:p>
@@ -5767,7 +6252,7 @@
                   <a:srgbClr val="1F2937"/>
                 </a:solidFill>
               </a:rPr>
-              <a:t>- Tư vấn học sinh: hồ sơ phiên tư vấn, phân loại, theo dõi tiến triển</a:t>
+              <a:t>- Ô tiết cá nhân: lớp - môn - phòng; slot xung đột hiển thị đủ và cảnh báo</a:t>
             </a:r>
           </a:p>
           <a:p>
@@ -5778,7 +6263,7 @@
                   <a:srgbClr val="1F2937"/>
                 </a:solidFill>
               </a:rPr>
-              <a:t>- Sự cố an toàn: 6 loại, 4 mức độ, báo cáo lên BGH, audit đầy đủ</a:t>
+              <a:t>- Sổ đầu bài: chỉ GV được phân công tiết đó mới ghi - tiết người khác chỉ đọc</a:t>
             </a:r>
           </a:p>
           <a:p>
@@ -5789,7 +6274,7 @@
                   <a:srgbClr val="1F2937"/>
                 </a:solidFill>
               </a:rPr>
-              <a:t>- Thi đua tuần: chấm tiêu chí xếp hạng lớp</a:t>
+              <a:t>- Điểm danh theo tiết đồng bộ sang chuyên cần ngày</a:t>
             </a:r>
           </a:p>
           <a:p>
@@ -5800,14 +6285,25 @@
                   <a:srgbClr val="1F2937"/>
                 </a:solidFill>
               </a:rPr>
-              <a:t>- AI đề xuất can thiệp theo hồ sơ</a:t>
+              <a:t>- Cộng/trừ điểm rèn luyện ngay trong sổ đầu bài</a:t>
+            </a:r>
+          </a:p>
+          <a:p>
+            <a:pPr/>
+            <a:r>
+              <a:rPr sz="1500" b="0">
+                <a:solidFill>
+                  <a:srgbClr val="1F2937"/>
+                </a:solidFill>
+              </a:rPr>
+              <a:t>- BGH import TKB hàng loạt từ Excel</a:t>
             </a:r>
           </a:p>
         </p:txBody>
       </p:sp>
       <p:pic>
         <p:nvPicPr>
-          <p:cNvPr id="5" name="Picture 4" descr="15-safety.png"/>
+          <p:cNvPr id="5" name="Picture 4" descr="08-timetable-me.png"/>
           <p:cNvPicPr>
             <a:picLocks noChangeAspect="1"/>
           </p:cNvPicPr>
@@ -5863,7 +6359,7 @@
                   <a:srgbClr val="6B7280"/>
                 </a:solidFill>
               </a:rPr>
-              <a:t>Sổ sự cố an toàn</a:t>
+              <a:t>Lịch dạy cá nhân</a:t>
             </a:r>
           </a:p>
         </p:txBody>
@@ -5958,7 +6454,7 @@
                   <a:srgbClr val="1D4ED8"/>
                 </a:solidFill>
               </a:rPr>
-              <a:t>BGH - điều hành trường</a:t>
+              <a:t>Sơ đồ lớp &amp; hồ sơ học sinh</a:t>
             </a:r>
           </a:p>
         </p:txBody>
@@ -5992,7 +6488,7 @@
                   <a:srgbClr val="1F2937"/>
                 </a:solidFill>
               </a:rPr>
-              <a:t>- Trung tâm phê duyệt: kế hoạch HĐ, giáo án, đánh giá - một nơi xử lý</a:t>
+              <a:t>- Sơ đồ chỗ ngồi kéo-thả, thêm/bớt hàng cột linh hoạt</a:t>
             </a:r>
           </a:p>
           <a:p>
@@ -6003,7 +6499,7 @@
                   <a:srgbClr val="1F2937"/>
                 </a:solidFill>
               </a:rPr>
-              <a:t>- Radar cảnh báo sớm: lớp/HS rủi ro theo chuyên cần + điểm + sự cố</a:t>
+              <a:t>- Import danh sách HS Excel (mã HS quốc gia, dân tộc, hoàn cảnh)</a:t>
             </a:r>
           </a:p>
           <a:p>
@@ -6014,7 +6510,7 @@
                   <a:srgbClr val="1F2937"/>
                 </a:solidFill>
               </a:rPr>
-              <a:t>- Soạn + import TKB toàn trường, xem theo lớp</a:t>
+              <a:t>- Chia tổ, ban cán sự, liên kết phụ huynh ngay trên danh sách</a:t>
             </a:r>
           </a:p>
           <a:p>
@@ -6025,7 +6521,7 @@
                   <a:srgbClr val="1F2937"/>
                 </a:solidFill>
               </a:rPr>
-              <a:t>- Ký sổ chủ nhiệm: tạo đợt ký - duyệt/từ chối kèm lý do - ký hàng loạt; GVCN không tự ký</a:t>
+              <a:t>- Hồ sơ từng em: định danh, gia đình, sức khỏe - audit mọi thay đổi</a:t>
             </a:r>
           </a:p>
           <a:p>
@@ -6036,25 +6532,14 @@
                   <a:srgbClr val="1F2937"/>
                 </a:solidFill>
               </a:rPr>
-              <a:t>- Chỉ BGH phân công GVCN &amp; lớp năm học</a:t>
-            </a:r>
-          </a:p>
-          <a:p>
-            <a:pPr/>
-            <a:r>
-              <a:rPr sz="1500" b="0">
-                <a:solidFill>
-                  <a:srgbClr val="1F2937"/>
-                </a:solidFill>
-              </a:rPr>
-              <a:t>- Trợ lý AI điều hành hỏi-đáp trên dữ liệu thật</a:t>
+              <a:t>- AI tổng hợp báo cáo hồ sơ lớp</a:t>
             </a:r>
           </a:p>
         </p:txBody>
       </p:sp>
       <p:pic>
         <p:nvPicPr>
-          <p:cNvPr id="5" name="Picture 4" descr="23-bgh-radar.png"/>
+          <p:cNvPr id="5" name="Picture 4" descr="11-seating.png"/>
           <p:cNvPicPr>
             <a:picLocks noChangeAspect="1"/>
           </p:cNvPicPr>
@@ -6110,7 +6595,7 @@
                   <a:srgbClr val="6B7280"/>
                 </a:solidFill>
               </a:rPr>
-              <a:t>Radar cảnh báo sớm toàn trường</a:t>
+              <a:t>Sơ đồ chỗ ngồi - resize hàng/cột</a:t>
             </a:r>
           </a:p>
         </p:txBody>

--- a/docs/user-guide/SO-CHU-NHIEM-SO-GIOI-THIEU.pptx
+++ b/docs/user-guide/SO-CHU-NHIEM-SO-GIOI-THIEU.pptx
@@ -3219,7 +3219,7 @@
                   <a:srgbClr val="BFDBFE"/>
                 </a:solidFill>
               </a:rPr>
-              <a:t>https://sochunhiem.vieschool.com - Demo: *@demo.scn, mật khẩu demo1234</a:t>
+              <a:t>https://sochunhiem.vieschool.com - Demo: anhptl@nd.scn..., mật khẩu demo1234</a:t>
             </a:r>
           </a:p>
         </p:txBody>
@@ -4527,7 +4527,7 @@
                   <a:srgbClr val="D1D5DB"/>
                 </a:solidFill>
               </a:rPr>
-              <a:t>Tài khoản demo: bgh / pht / totruong / gvcn / gvbm / ketoan / phuhuynh / hocsinh / sogd / ubnd / admin @demo.scn - mật khẩu: demo1234</a:t>
+              <a:t>Tài khoản demo theo tên thật: hainv / duclm / hanhlth / anhptl / minhtv / trangpt / annv / baong @nd.scn; sovqt / daonvl / admin @demo.scn - mật khẩu: demo1234</a:t>
             </a:r>
           </a:p>
           <a:p>
